--- a/鼻整形_デザインカタログ.pptx
+++ b/鼻整形_デザインカタログ.pptx
@@ -6067,7 +6067,7 @@
                 <a:latin typeface="游ゴシック"/>
                 <a:ea typeface="游ゴシック"/>
               </a:rPr>
-              <a:t>費用（税込・総額）</a:t>
+              <a:t>通常料金（税込）</a:t>
             </a:r>
           </a:p>
         </p:txBody>
@@ -6215,7 +6215,7 @@
                 <a:latin typeface="游ゴシック"/>
                 <a:ea typeface="游ゴシック"/>
               </a:rPr>
-              <a:t>※お支払い例（60回）。金利・回数で変動</a:t>
+              <a:t>※60回の一例。部分／全額モニター・最新料金は院内・QRで</a:t>
             </a:r>
           </a:p>
         </p:txBody>
@@ -8545,7 +8545,7 @@
                 <a:latin typeface="游ゴシック"/>
                 <a:ea typeface="游ゴシック"/>
               </a:rPr>
-              <a:t>費用（税込・総額）</a:t>
+              <a:t>通常料金（税込）</a:t>
             </a:r>
           </a:p>
         </p:txBody>
@@ -8693,7 +8693,7 @@
                 <a:latin typeface="游ゴシック"/>
                 <a:ea typeface="游ゴシック"/>
               </a:rPr>
-              <a:t>※お支払い例（60回）。金利・回数で変動</a:t>
+              <a:t>※60回の一例。部分／全額モニター・最新料金は院内・QRで</a:t>
             </a:r>
           </a:p>
         </p:txBody>
@@ -10613,7 +10613,7 @@
                 <a:latin typeface="游ゴシック"/>
                 <a:ea typeface="游ゴシック"/>
               </a:rPr>
-              <a:t>費用（税込・総額）</a:t>
+              <a:t>通常料金（税込）</a:t>
             </a:r>
           </a:p>
         </p:txBody>
@@ -10761,7 +10761,7 @@
                 <a:latin typeface="游ゴシック"/>
                 <a:ea typeface="游ゴシック"/>
               </a:rPr>
-              <a:t>※お支払い例（60回）。金利・回数で変動</a:t>
+              <a:t>※60回の一例。部分／全額モニター・最新料金は院内・QRで</a:t>
             </a:r>
           </a:p>
         </p:txBody>
@@ -12681,7 +12681,7 @@
                 <a:latin typeface="游ゴシック"/>
                 <a:ea typeface="游ゴシック"/>
               </a:rPr>
-              <a:t>費用（税込・総額）</a:t>
+              <a:t>通常料金（税込）</a:t>
             </a:r>
           </a:p>
         </p:txBody>
@@ -12829,7 +12829,7 @@
                 <a:latin typeface="游ゴシック"/>
                 <a:ea typeface="游ゴシック"/>
               </a:rPr>
-              <a:t>※お支払い例（60回）。金利・回数で変動</a:t>
+              <a:t>※60回の一例。部分／全額モニター・最新料金は院内・QRで</a:t>
             </a:r>
           </a:p>
         </p:txBody>
@@ -16183,7 +16183,7 @@
                 <a:latin typeface="游ゴシック"/>
                 <a:ea typeface="游ゴシック"/>
               </a:rPr>
-              <a:t>費用（税込・総額）</a:t>
+              <a:t>通常料金（税込）</a:t>
             </a:r>
           </a:p>
         </p:txBody>
@@ -16331,7 +16331,7 @@
                 <a:latin typeface="游ゴシック"/>
                 <a:ea typeface="游ゴシック"/>
               </a:rPr>
-              <a:t>※お支払い例（60回）。金利・回数で変動</a:t>
+              <a:t>※60回の一例。部分／全額モニター・最新料金は院内・QRで</a:t>
             </a:r>
           </a:p>
         </p:txBody>
@@ -18661,7 +18661,7 @@
                 <a:latin typeface="游ゴシック"/>
                 <a:ea typeface="游ゴシック"/>
               </a:rPr>
-              <a:t>費用（税込・総額）</a:t>
+              <a:t>通常料金（税込）</a:t>
             </a:r>
           </a:p>
         </p:txBody>
@@ -18809,7 +18809,7 @@
                 <a:latin typeface="游ゴシック"/>
                 <a:ea typeface="游ゴシック"/>
               </a:rPr>
-              <a:t>※お支払い例（60回）。金利・回数で変動</a:t>
+              <a:t>※60回の一例。部分／全額モニター・最新料金は院内・QRで</a:t>
             </a:r>
           </a:p>
         </p:txBody>
@@ -20729,7 +20729,7 @@
                 <a:latin typeface="游ゴシック"/>
                 <a:ea typeface="游ゴシック"/>
               </a:rPr>
-              <a:t>費用（税込・総額）</a:t>
+              <a:t>通常料金（税込）</a:t>
             </a:r>
           </a:p>
         </p:txBody>
@@ -20877,7 +20877,7 @@
                 <a:latin typeface="游ゴシック"/>
                 <a:ea typeface="游ゴシック"/>
               </a:rPr>
-              <a:t>※お支払い例（60回）。金利・回数で変動</a:t>
+              <a:t>※60回の一例。部分／全額モニター・最新料金は院内・QRで</a:t>
             </a:r>
           </a:p>
         </p:txBody>
@@ -22797,7 +22797,7 @@
                 <a:latin typeface="游ゴシック"/>
                 <a:ea typeface="游ゴシック"/>
               </a:rPr>
-              <a:t>費用（税込・総額）</a:t>
+              <a:t>通常料金（税込）</a:t>
             </a:r>
           </a:p>
         </p:txBody>
@@ -22945,7 +22945,7 @@
                 <a:latin typeface="游ゴシック"/>
                 <a:ea typeface="游ゴシック"/>
               </a:rPr>
-              <a:t>※お支払い例（60回）。金利・回数で変動</a:t>
+              <a:t>※60回の一例。部分／全額モニター・最新料金は院内・QRで</a:t>
             </a:r>
           </a:p>
         </p:txBody>
@@ -25972,7 +25972,7 @@
                 <a:latin typeface="游ゴシック"/>
                 <a:ea typeface="游ゴシック"/>
               </a:rPr>
-              <a:t>⑦ 総額＋月々の目安　</a:t>
+              <a:t>⑦ 通常料金＋月々の目安　</a:t>
             </a:r>
           </a:p>
           <a:p>
@@ -25995,7 +25995,7 @@
                 <a:latin typeface="游ゴシック"/>
                 <a:ea typeface="游ゴシック"/>
               </a:rPr>
-              <a:t>税込総額と医療ローン例</a:t>
+              <a:t>税込・通常料金とローン例（モニター価格は別途案内）</a:t>
             </a:r>
           </a:p>
         </p:txBody>
@@ -29261,7 +29261,7 @@
                 <a:latin typeface="游明朝"/>
                 <a:ea typeface="游明朝"/>
               </a:rPr>
-              <a:t>料金・月々のお支払い目安</a:t>
+              <a:t>通常料金・月々のお支払い目安</a:t>
             </a:r>
           </a:p>
         </p:txBody>
@@ -29397,7 +29397,7 @@
                 <a:latin typeface="游ゴシック"/>
                 <a:ea typeface="游ゴシック"/>
               </a:rPr>
-              <a:t>代表的な術式の目安です。組み合わせ・状態により変動します。正式なお見積りはカウンセリングで提示します。</a:t>
+              <a:t>下記は「通常料金（定価）」の目安です。当院は主にモニター制度でのご案内が中心で、実際のご料金はカウンセリングで個別に提示します。</a:t>
             </a:r>
           </a:p>
         </p:txBody>
@@ -29464,7 +29464,7 @@
                           <a:latin typeface="游明朝"/>
                           <a:ea typeface="游明朝"/>
                         </a:rPr>
-                        <a:t>総額（税込）</a:t>
+                        <a:t>通常料金（税込）</a:t>
                       </a:r>
                     </a:p>
                   </a:txBody>
@@ -30103,8 +30103,8 @@
         </p:nvSpPr>
         <p:spPr>
           <a:xfrm>
-            <a:off x="566928" y="6400800"/>
-            <a:ext cx="6428994" cy="1371600"/>
+            <a:off x="566928" y="6263640"/>
+            <a:ext cx="6428994" cy="1600200"/>
           </a:xfrm>
           <a:prstGeom prst="roundRect">
             <a:avLst/>
@@ -30147,8 +30147,8 @@
         </p:nvSpPr>
         <p:spPr>
           <a:xfrm>
-            <a:off x="932688" y="6601968"/>
-            <a:ext cx="5697474" cy="274320"/>
+            <a:off x="932688" y="6464808"/>
+            <a:ext cx="4600194" cy="274320"/>
           </a:xfrm>
           <a:prstGeom prst="rect">
             <a:avLst/>
@@ -30173,14 +30173,14 @@
               </a:spcAft>
             </a:pPr>
             <a:r>
-              <a:rPr sz="1200" b="1">
+              <a:rPr sz="1250" b="1">
                 <a:solidFill>
                   <a:srgbClr val="8C7339"/>
                 </a:solidFill>
                 <a:latin typeface="游明朝"/>
                 <a:ea typeface="游明朝"/>
               </a:rPr>
-              <a:t>お支払いについて</a:t>
+              <a:t>モニター制度について</a:t>
             </a:r>
           </a:p>
         </p:txBody>
@@ -30193,8 +30193,8 @@
         </p:nvSpPr>
         <p:spPr>
           <a:xfrm>
-            <a:off x="932688" y="6949440"/>
-            <a:ext cx="5697474" cy="731520"/>
+            <a:off x="932688" y="6830568"/>
+            <a:ext cx="4508754" cy="960120"/>
           </a:xfrm>
           <a:prstGeom prst="rect">
             <a:avLst/>
@@ -30219,28 +30219,120 @@
               </a:spcAft>
             </a:pPr>
             <a:r>
-              <a:rPr sz="1050" b="0">
+              <a:rPr sz="1000" b="0">
                 <a:solidFill>
                   <a:srgbClr val="3A3326"/>
                 </a:solidFill>
                 <a:latin typeface="游ゴシック"/>
                 <a:ea typeface="游ゴシック"/>
               </a:rPr>
-              <a:t>現金・各種クレジットカード・医療ローン（分割）に対応。月々はローン60回払いの一例です。麻酔・薬・術後の診察を含む「総額」と、ご予算に合わせた月々のプランをカウンセリングでご提案します。</a:t>
-            </a:r>
-          </a:p>
-        </p:txBody>
-      </p:sp>
-      <p:sp>
-        <p:nvSpPr>
-          <p:cNvPr id="12" name="TextBox 11"/>
-          <p:cNvSpPr txBox="1"/>
-          <p:nvPr/>
-        </p:nvSpPr>
-        <p:spPr>
-          <a:xfrm>
-            <a:off x="566928" y="8001000"/>
-            <a:ext cx="6428994" cy="1371600"/>
+              <a:t>当院には【通常料金】のほか【部分モニター】【全額モニター】があります。術前・術後のお写真のご提供にご協力いただける方は、通常料金より割安にご案内できます。適用条件・実際のご料金は、カウンセリングで個別にご案内します（割引額は本資料には掲載していません）。</a:t>
+            </a:r>
+          </a:p>
+        </p:txBody>
+      </p:sp>
+      <p:sp>
+        <p:nvSpPr>
+          <p:cNvPr id="12" name="Rounded Rectangle 11"/>
+          <p:cNvSpPr/>
+          <p:nvPr/>
+        </p:nvSpPr>
+        <p:spPr>
+          <a:xfrm>
+            <a:off x="5670042" y="6583680"/>
+            <a:ext cx="960120" cy="960120"/>
+          </a:xfrm>
+          <a:prstGeom prst="roundRect">
+            <a:avLst/>
+          </a:prstGeom>
+          <a:solidFill>
+            <a:srgbClr val="FFFFFF"/>
+          </a:solidFill>
+          <a:ln w="12700">
+            <a:solidFill>
+              <a:srgbClr val="B0934E"/>
+            </a:solidFill>
+          </a:ln>
+          <a:effectLst/>
+        </p:spPr>
+        <p:style>
+          <a:lnRef idx="1">
+            <a:schemeClr val="accent1"/>
+          </a:lnRef>
+          <a:fillRef idx="3">
+            <a:schemeClr val="accent1"/>
+          </a:fillRef>
+          <a:effectRef idx="2">
+            <a:schemeClr val="accent1"/>
+          </a:effectRef>
+          <a:fontRef idx="minor">
+            <a:schemeClr val="lt1"/>
+          </a:fontRef>
+        </p:style>
+        <p:txBody>
+          <a:bodyPr rtlCol="0" anchor="ctr"/>
+          <a:lstStyle/>
+          <a:p>
+            <a:pPr algn="ctr"/>
+          </a:p>
+        </p:txBody>
+      </p:sp>
+      <p:sp>
+        <p:nvSpPr>
+          <p:cNvPr id="13" name="TextBox 12"/>
+          <p:cNvSpPr txBox="1"/>
+          <p:nvPr/>
+        </p:nvSpPr>
+        <p:spPr>
+          <a:xfrm>
+            <a:off x="5670042" y="6583680"/>
+            <a:ext cx="960120" cy="960120"/>
+          </a:xfrm>
+          <a:prstGeom prst="rect">
+            <a:avLst/>
+          </a:prstGeom>
+          <a:noFill/>
+        </p:spPr>
+        <p:txBody>
+          <a:bodyPr wrap="square" anchor="ctr" lIns="0" rIns="0" tIns="0" bIns="0">
+            <a:spAutoFit/>
+          </a:bodyPr>
+          <a:lstStyle/>
+          <a:p>
+            <a:pPr algn="ctr">
+              <a:lnSpc>
+                <a:spcPct val="112000"/>
+              </a:lnSpc>
+              <a:spcBef>
+                <a:spcPts val="0"/>
+              </a:spcBef>
+              <a:spcAft>
+                <a:spcPts val="200"/>
+              </a:spcAft>
+            </a:pPr>
+            <a:r>
+              <a:rPr sz="1000" b="0">
+                <a:solidFill>
+                  <a:srgbClr val="7A7060"/>
+                </a:solidFill>
+                <a:latin typeface="游ゴシック"/>
+                <a:ea typeface="游ゴシック"/>
+              </a:rPr>
+              <a:t>QR</a:t>
+            </a:r>
+          </a:p>
+        </p:txBody>
+      </p:sp>
+      <p:sp>
+        <p:nvSpPr>
+          <p:cNvPr id="14" name="TextBox 13"/>
+          <p:cNvSpPr txBox="1"/>
+          <p:nvPr/>
+        </p:nvSpPr>
+        <p:spPr>
+          <a:xfrm>
+            <a:off x="5578602" y="7562088"/>
+            <a:ext cx="1143000" cy="228600"/>
           </a:xfrm>
           <a:prstGeom prst="rect">
             <a:avLst/>
@@ -30253,35 +30345,82 @@
           </a:bodyPr>
           <a:lstStyle/>
           <a:p>
+            <a:pPr algn="ctr">
+              <a:lnSpc>
+                <a:spcPct val="112000"/>
+              </a:lnSpc>
+              <a:spcBef>
+                <a:spcPts val="0"/>
+              </a:spcBef>
+              <a:spcAft>
+                <a:spcPts val="200"/>
+              </a:spcAft>
+            </a:pPr>
+            <a:r>
+              <a:rPr sz="800" b="1">
+                <a:solidFill>
+                  <a:srgbClr val="8C7339"/>
+                </a:solidFill>
+                <a:latin typeface="游ゴシック"/>
+                <a:ea typeface="游ゴシック"/>
+              </a:rPr>
+              <a:t>最新料金はこちら</a:t>
+            </a:r>
+          </a:p>
+        </p:txBody>
+      </p:sp>
+      <p:sp>
+        <p:nvSpPr>
+          <p:cNvPr id="15" name="TextBox 14"/>
+          <p:cNvSpPr txBox="1"/>
+          <p:nvPr/>
+        </p:nvSpPr>
+        <p:spPr>
+          <a:xfrm>
+            <a:off x="566928" y="8046720"/>
+            <a:ext cx="6428994" cy="1463040"/>
+          </a:xfrm>
+          <a:prstGeom prst="rect">
+            <a:avLst/>
+          </a:prstGeom>
+          <a:noFill/>
+        </p:spPr>
+        <p:txBody>
+          <a:bodyPr wrap="square" anchor="t" lIns="0" rIns="0" tIns="0" bIns="0">
+            <a:spAutoFit/>
+          </a:bodyPr>
+          <a:lstStyle/>
+          <a:p>
             <a:pPr algn="l">
               <a:lnSpc>
-                <a:spcPct val="170000"/>
-              </a:lnSpc>
-              <a:spcBef>
-                <a:spcPts val="0"/>
-              </a:spcBef>
-              <a:spcAft>
-                <a:spcPts val="200"/>
-              </a:spcAft>
-            </a:pPr>
-            <a:r>
-              <a:rPr sz="950" b="0">
+                <a:spcPct val="160000"/>
+              </a:lnSpc>
+              <a:spcBef>
+                <a:spcPts val="0"/>
+              </a:spcBef>
+              <a:spcAft>
+                <a:spcPts val="200"/>
+              </a:spcAft>
+            </a:pPr>
+            <a:r>
+              <a:rPr sz="900" b="0">
                 <a:solidFill>
                   <a:srgbClr val="7A7060"/>
                 </a:solidFill>
                 <a:latin typeface="游ゴシック"/>
                 <a:ea typeface="游ゴシック"/>
               </a:rPr>
-              <a:t>※ 上記は手術料金の目安です。鼻整形は自由診療（保険適用外）です。
-※ 月々の金額は金利・支払回数により変動します。実際のお支払い例は店頭でご確認ください。
-※ 5周年キャンペーン等の最新情報は @zetith_hane / 院内にてご案内します。</a:t>
-            </a:r>
-          </a:p>
-        </p:txBody>
-      </p:sp>
-      <p:sp>
-        <p:nvSpPr>
-          <p:cNvPr id="13" name="TextBox 12"/>
+              <a:t>※ 上記は「通常料金」の目安です。鼻整形は自由診療（保険適用外）です。
+※ 月々は通常料金・60回払いの一例で、金利・支払回数により変動します（現金・各種クレジット・医療ローン対応）。
+※ モニター価格の具体的な割引額は、医療広告の観点から本資料には掲載していません。院内・カウンセリングでご案内します。
+※ 最新の料金・キャンペーンは @zetith_hane／院内・上記QRにてご確認ください。</a:t>
+            </a:r>
+          </a:p>
+        </p:txBody>
+      </p:sp>
+      <p:sp>
+        <p:nvSpPr>
+          <p:cNvPr id="16" name="TextBox 15"/>
           <p:cNvSpPr txBox="1"/>
           <p:nvPr/>
         </p:nvSpPr>
@@ -30320,14 +30459,14 @@
                 <a:latin typeface="游ゴシック"/>
                 <a:ea typeface="游ゴシック"/>
               </a:rPr>
-              <a:t>鼻整形 デザインカタログ｜料金・月々のお支払い目安</a:t>
-            </a:r>
-          </a:p>
-        </p:txBody>
-      </p:sp>
-      <p:sp>
-        <p:nvSpPr>
-          <p:cNvPr id="14" name="TextBox 13"/>
+              <a:t>鼻整形 デザインカタログ｜通常料金・月々のお支払い目安</a:t>
+            </a:r>
+          </a:p>
+        </p:txBody>
+      </p:sp>
+      <p:sp>
+        <p:nvSpPr>
+          <p:cNvPr id="17" name="TextBox 16"/>
           <p:cNvSpPr txBox="1"/>
           <p:nvPr/>
         </p:nvSpPr>
@@ -36696,7 +36835,7 @@
                 <a:latin typeface="游ゴシック"/>
                 <a:ea typeface="游ゴシック"/>
               </a:rPr>
-              <a:t>費用（税込・総額）</a:t>
+              <a:t>通常料金（税込）</a:t>
             </a:r>
           </a:p>
         </p:txBody>
@@ -36844,7 +36983,7 @@
                 <a:latin typeface="游ゴシック"/>
                 <a:ea typeface="游ゴシック"/>
               </a:rPr>
-              <a:t>※お支払い例（60回）。金利・回数で変動</a:t>
+              <a:t>※60回の一例。部分／全額モニター・最新料金は院内・QRで</a:t>
             </a:r>
           </a:p>
         </p:txBody>
@@ -39174,7 +39313,7 @@
                 <a:latin typeface="游ゴシック"/>
                 <a:ea typeface="游ゴシック"/>
               </a:rPr>
-              <a:t>費用（税込・総額）</a:t>
+              <a:t>通常料金（税込）</a:t>
             </a:r>
           </a:p>
         </p:txBody>
@@ -39322,7 +39461,7 @@
                 <a:latin typeface="游ゴシック"/>
                 <a:ea typeface="游ゴシック"/>
               </a:rPr>
-              <a:t>※お支払い例（60回）。金利・回数で変動</a:t>
+              <a:t>※60回の一例。部分／全額モニター・最新料金は院内・QRで</a:t>
             </a:r>
           </a:p>
         </p:txBody>
@@ -41652,7 +41791,7 @@
                 <a:latin typeface="游ゴシック"/>
                 <a:ea typeface="游ゴシック"/>
               </a:rPr>
-              <a:t>費用（税込・総額）</a:t>
+              <a:t>通常料金（税込）</a:t>
             </a:r>
           </a:p>
         </p:txBody>
@@ -41800,7 +41939,7 @@
                 <a:latin typeface="游ゴシック"/>
                 <a:ea typeface="游ゴシック"/>
               </a:rPr>
-              <a:t>※お支払い例（60回）。金利・回数で変動</a:t>
+              <a:t>※60回の一例。部分／全額モニター・最新料金は院内・QRで</a:t>
             </a:r>
           </a:p>
         </p:txBody>
@@ -43720,7 +43859,7 @@
                 <a:latin typeface="游ゴシック"/>
                 <a:ea typeface="游ゴシック"/>
               </a:rPr>
-              <a:t>費用（税込・総額）</a:t>
+              <a:t>通常料金（税込）</a:t>
             </a:r>
           </a:p>
         </p:txBody>
@@ -43868,7 +44007,7 @@
                 <a:latin typeface="游ゴシック"/>
                 <a:ea typeface="游ゴシック"/>
               </a:rPr>
-              <a:t>※お支払い例（60回）。金利・回数で変動</a:t>
+              <a:t>※60回の一例。部分／全額モニター・最新料金は院内・QRで</a:t>
             </a:r>
           </a:p>
         </p:txBody>

--- a/鼻整形_デザインカタログ.pptx
+++ b/鼻整形_デザインカタログ.pptx
@@ -6154,7 +6154,7 @@
                 <a:latin typeface="游ゴシック"/>
                 <a:ea typeface="游ゴシック"/>
               </a:rPr>
-              <a:t>※60回の一例。部分／全額モニター・最新料金は院内・QRで</a:t>
+              <a:t>※60回の一例。部分／全額モニター・最新料金は院内・カウンセリングで</a:t>
             </a:r>
           </a:p>
         </p:txBody>
@@ -7652,7 +7652,7 @@
                 <a:latin typeface="游ゴシック"/>
                 <a:ea typeface="游ゴシック"/>
               </a:rPr>
-              <a:t>※60回の一例。部分／全額モニター・最新料金は院内・QRで</a:t>
+              <a:t>※60回の一例。部分／全額モニター・最新料金は院内・カウンセリングで</a:t>
             </a:r>
           </a:p>
         </p:txBody>
@@ -9150,7 +9150,7 @@
                 <a:latin typeface="游ゴシック"/>
                 <a:ea typeface="游ゴシック"/>
               </a:rPr>
-              <a:t>※60回の一例。部分／全額モニター・最新料金は院内・QRで</a:t>
+              <a:t>※60回の一例。部分／全額モニター・最新料金は院内・カウンセリングで</a:t>
             </a:r>
           </a:p>
         </p:txBody>
@@ -10648,7 +10648,7 @@
                 <a:latin typeface="游ゴシック"/>
                 <a:ea typeface="游ゴシック"/>
               </a:rPr>
-              <a:t>※60回の一例。部分／全額モニター・最新料金は院内・QRで</a:t>
+              <a:t>※60回の一例。部分／全額モニター・最新料金は院内・カウンセリングで</a:t>
             </a:r>
           </a:p>
         </p:txBody>
@@ -13032,7 +13032,7 @@
                 <a:latin typeface="游ゴシック"/>
                 <a:ea typeface="游ゴシック"/>
               </a:rPr>
-              <a:t>※60回の一例。部分／全額モニター・最新料金は院内・QRで</a:t>
+              <a:t>※60回の一例。部分／全額モニター・最新料金は院内・カウンセリングで</a:t>
             </a:r>
           </a:p>
         </p:txBody>
@@ -14530,7 +14530,7 @@
                 <a:latin typeface="游ゴシック"/>
                 <a:ea typeface="游ゴシック"/>
               </a:rPr>
-              <a:t>※60回の一例。部分／全額モニター・最新料金は院内・QRで</a:t>
+              <a:t>※60回の一例。部分／全額モニター・最新料金は院内・カウンセリングで</a:t>
             </a:r>
           </a:p>
         </p:txBody>
@@ -16028,7 +16028,7 @@
                 <a:latin typeface="游ゴシック"/>
                 <a:ea typeface="游ゴシック"/>
               </a:rPr>
-              <a:t>※60回の一例。部分／全額モニター・最新料金は院内・QRで</a:t>
+              <a:t>※60回の一例。部分／全額モニター・最新料金は院内・カウンセリングで</a:t>
             </a:r>
           </a:p>
         </p:txBody>
@@ -19987,7 +19987,7 @@
                 <a:latin typeface="游ゴシック"/>
                 <a:ea typeface="游ゴシック"/>
               </a:rPr>
-              <a:t>※60回の一例。部分／全額モニター・最新料金は院内・QRで</a:t>
+              <a:t>※60回の一例。部分／全額モニター・最新料金は院内・カウンセリングで</a:t>
             </a:r>
           </a:p>
         </p:txBody>
@@ -21485,7 +21485,7 @@
                 <a:latin typeface="游ゴシック"/>
                 <a:ea typeface="游ゴシック"/>
               </a:rPr>
-              <a:t>※60回の一例。部分／全額モニター・最新料金は院内・QRで</a:t>
+              <a:t>※60回の一例。部分／全額モニター・最新料金は院内・カウンセリングで</a:t>
             </a:r>
           </a:p>
         </p:txBody>
@@ -22983,7 +22983,7 @@
                 <a:latin typeface="游ゴシック"/>
                 <a:ea typeface="游ゴシック"/>
               </a:rPr>
-              <a:t>※60回の一例。部分／全額モニター・最新料金は院内・QRで</a:t>
+              <a:t>※60回の一例。部分／全額モニター・最新料金は院内・カウンセリングで</a:t>
             </a:r>
           </a:p>
         </p:txBody>
@@ -25229,7 +25229,7 @@
                 <a:latin typeface="游ゴシック"/>
                 <a:ea typeface="游ゴシック"/>
               </a:rPr>
-              <a:t>※60回の一例。部分／全額モニター・最新料金は院内・QRで</a:t>
+              <a:t>※60回の一例。部分／全額モニター・最新料金は院内・カウンセリングで</a:t>
             </a:r>
           </a:p>
         </p:txBody>
@@ -26671,7 +26671,7 @@
                 <a:latin typeface="游ゴシック"/>
                 <a:ea typeface="游ゴシック"/>
               </a:rPr>
-              <a:t>※60回の一例。部分／全額モニター・最新料金は院内・QRで</a:t>
+              <a:t>※60回の一例。部分／全額モニター・最新料金は院内・カウンセリングで</a:t>
             </a:r>
           </a:p>
         </p:txBody>
@@ -32541,7 +32541,7 @@
         <p:spPr>
           <a:xfrm>
             <a:off x="932688" y="6601968"/>
-            <a:ext cx="4600194" cy="274320"/>
+            <a:ext cx="5697474" cy="274320"/>
           </a:xfrm>
           <a:prstGeom prst="rect">
             <a:avLst/>
@@ -32587,7 +32587,7 @@
         <p:spPr>
           <a:xfrm>
             <a:off x="932688" y="6967728"/>
-            <a:ext cx="4508754" cy="914400"/>
+            <a:ext cx="5697474" cy="914400"/>
           </a:xfrm>
           <a:prstGeom prst="rect">
             <a:avLst/>
@@ -32602,17 +32602,17 @@
           <a:p>
             <a:pPr algn="l">
               <a:lnSpc>
-                <a:spcPct val="150000"/>
-              </a:lnSpc>
-              <a:spcBef>
-                <a:spcPts val="0"/>
-              </a:spcBef>
-              <a:spcAft>
-                <a:spcPts val="200"/>
-              </a:spcAft>
-            </a:pPr>
-            <a:r>
-              <a:rPr sz="1000" b="0">
+                <a:spcPct val="155000"/>
+              </a:lnSpc>
+              <a:spcBef>
+                <a:spcPts val="0"/>
+              </a:spcBef>
+              <a:spcAft>
+                <a:spcPts val="200"/>
+              </a:spcAft>
+            </a:pPr>
+            <a:r>
+              <a:rPr sz="1050" b="0">
                 <a:solidFill>
                   <a:srgbClr val="3A3326"/>
                 </a:solidFill>
@@ -32626,145 +32626,7 @@
       </p:sp>
       <p:sp>
         <p:nvSpPr>
-          <p:cNvPr id="12" name="Rounded Rectangle 11"/>
-          <p:cNvSpPr/>
-          <p:nvPr/>
-        </p:nvSpPr>
-        <p:spPr>
-          <a:xfrm>
-            <a:off x="5670042" y="6720840"/>
-            <a:ext cx="960120" cy="960120"/>
-          </a:xfrm>
-          <a:prstGeom prst="roundRect">
-            <a:avLst/>
-          </a:prstGeom>
-          <a:solidFill>
-            <a:srgbClr val="FFFFFF"/>
-          </a:solidFill>
-          <a:ln w="12700">
-            <a:solidFill>
-              <a:srgbClr val="B0934E"/>
-            </a:solidFill>
-          </a:ln>
-          <a:effectLst/>
-        </p:spPr>
-        <p:style>
-          <a:lnRef idx="1">
-            <a:schemeClr val="accent1"/>
-          </a:lnRef>
-          <a:fillRef idx="3">
-            <a:schemeClr val="accent1"/>
-          </a:fillRef>
-          <a:effectRef idx="2">
-            <a:schemeClr val="accent1"/>
-          </a:effectRef>
-          <a:fontRef idx="minor">
-            <a:schemeClr val="lt1"/>
-          </a:fontRef>
-        </p:style>
-        <p:txBody>
-          <a:bodyPr rtlCol="0" anchor="ctr"/>
-          <a:lstStyle/>
-          <a:p>
-            <a:pPr algn="ctr"/>
-          </a:p>
-        </p:txBody>
-      </p:sp>
-      <p:sp>
-        <p:nvSpPr>
-          <p:cNvPr id="13" name="TextBox 12"/>
-          <p:cNvSpPr txBox="1"/>
-          <p:nvPr/>
-        </p:nvSpPr>
-        <p:spPr>
-          <a:xfrm>
-            <a:off x="5670042" y="6720840"/>
-            <a:ext cx="960120" cy="960120"/>
-          </a:xfrm>
-          <a:prstGeom prst="rect">
-            <a:avLst/>
-          </a:prstGeom>
-          <a:noFill/>
-        </p:spPr>
-        <p:txBody>
-          <a:bodyPr wrap="square" anchor="ctr" lIns="0" rIns="0" tIns="0" bIns="0">
-            <a:spAutoFit/>
-          </a:bodyPr>
-          <a:lstStyle/>
-          <a:p>
-            <a:pPr algn="ctr">
-              <a:lnSpc>
-                <a:spcPct val="112000"/>
-              </a:lnSpc>
-              <a:spcBef>
-                <a:spcPts val="0"/>
-              </a:spcBef>
-              <a:spcAft>
-                <a:spcPts val="200"/>
-              </a:spcAft>
-            </a:pPr>
-            <a:r>
-              <a:rPr sz="1000" b="0">
-                <a:solidFill>
-                  <a:srgbClr val="7A7060"/>
-                </a:solidFill>
-                <a:latin typeface="游ゴシック"/>
-                <a:ea typeface="游ゴシック"/>
-              </a:rPr>
-              <a:t>QR</a:t>
-            </a:r>
-          </a:p>
-        </p:txBody>
-      </p:sp>
-      <p:sp>
-        <p:nvSpPr>
-          <p:cNvPr id="14" name="TextBox 13"/>
-          <p:cNvSpPr txBox="1"/>
-          <p:nvPr/>
-        </p:nvSpPr>
-        <p:spPr>
-          <a:xfrm>
-            <a:off x="5578602" y="7699248"/>
-            <a:ext cx="1143000" cy="228600"/>
-          </a:xfrm>
-          <a:prstGeom prst="rect">
-            <a:avLst/>
-          </a:prstGeom>
-          <a:noFill/>
-        </p:spPr>
-        <p:txBody>
-          <a:bodyPr wrap="square" anchor="t" lIns="0" rIns="0" tIns="0" bIns="0">
-            <a:spAutoFit/>
-          </a:bodyPr>
-          <a:lstStyle/>
-          <a:p>
-            <a:pPr algn="ctr">
-              <a:lnSpc>
-                <a:spcPct val="112000"/>
-              </a:lnSpc>
-              <a:spcBef>
-                <a:spcPts val="0"/>
-              </a:spcBef>
-              <a:spcAft>
-                <a:spcPts val="200"/>
-              </a:spcAft>
-            </a:pPr>
-            <a:r>
-              <a:rPr sz="800" b="1">
-                <a:solidFill>
-                  <a:srgbClr val="8C7339"/>
-                </a:solidFill>
-                <a:latin typeface="游ゴシック"/>
-                <a:ea typeface="游ゴシック"/>
-              </a:rPr>
-              <a:t>最新料金はこちら</a:t>
-            </a:r>
-          </a:p>
-        </p:txBody>
-      </p:sp>
-      <p:sp>
-        <p:nvSpPr>
-          <p:cNvPr id="15" name="TextBox 14"/>
+          <p:cNvPr id="12" name="TextBox 11"/>
           <p:cNvSpPr txBox="1"/>
           <p:nvPr/>
         </p:nvSpPr>
@@ -32806,14 +32668,14 @@
               <a:t>※ 上記は「通常料金」の目安です。鼻整形は自由診療（保険適用外）です。
 ※ 月々は通常料金・60回払いの一例で、金利・支払回数により変動します（現金・各種クレジット・医療ローン対応）。
 ※ モニター価格の具体的な割引額は、医療広告の観点から本資料には掲載していません。院内・カウンセリングでご案内します。
-※ 最新の料金・キャンペーンは @zetith_hane／院内・上記QRにてご確認ください。</a:t>
-            </a:r>
-          </a:p>
-        </p:txBody>
-      </p:sp>
-      <p:sp>
-        <p:nvSpPr>
-          <p:cNvPr id="16" name="TextBox 15"/>
+※ 最新の料金・キャンペーンは @zetith_hane／院内・カウンセリングにてご確認ください。</a:t>
+            </a:r>
+          </a:p>
+        </p:txBody>
+      </p:sp>
+      <p:sp>
+        <p:nvSpPr>
+          <p:cNvPr id="13" name="TextBox 12"/>
           <p:cNvSpPr txBox="1"/>
           <p:nvPr/>
         </p:nvSpPr>
@@ -32859,7 +32721,7 @@
       </p:sp>
       <p:sp>
         <p:nvSpPr>
-          <p:cNvPr id="17" name="TextBox 16"/>
+          <p:cNvPr id="14" name="TextBox 13"/>
           <p:cNvSpPr txBox="1"/>
           <p:nvPr/>
         </p:nvSpPr>
@@ -40404,7 +40266,7 @@
                 <a:latin typeface="游ゴシック"/>
                 <a:ea typeface="游ゴシック"/>
               </a:rPr>
-              <a:t>※60回の一例。部分／全額モニター・最新料金は院内・QRで</a:t>
+              <a:t>※60回の一例。部分／全額モニター・最新料金は院内・カウンセリングで</a:t>
             </a:r>
           </a:p>
         </p:txBody>
@@ -41902,7 +41764,7 @@
                 <a:latin typeface="游ゴシック"/>
                 <a:ea typeface="游ゴシック"/>
               </a:rPr>
-              <a:t>※60回の一例。部分／全額モニター・最新料金は院内・QRで</a:t>
+              <a:t>※60回の一例。部分／全額モニター・最新料金は院内・カウンセリングで</a:t>
             </a:r>
           </a:p>
         </p:txBody>
@@ -43400,7 +43262,7 @@
                 <a:latin typeface="游ゴシック"/>
                 <a:ea typeface="游ゴシック"/>
               </a:rPr>
-              <a:t>※60回の一例。部分／全額モニター・最新料金は院内・QRで</a:t>
+              <a:t>※60回の一例。部分／全額モニター・最新料金は院内・カウンセリングで</a:t>
             </a:r>
           </a:p>
         </p:txBody>
@@ -44898,7 +44760,7 @@
                 <a:latin typeface="游ゴシック"/>
                 <a:ea typeface="游ゴシック"/>
               </a:rPr>
-              <a:t>※60回の一例。部分／全額モニター・最新料金は院内・QRで</a:t>
+              <a:t>※60回の一例。部分／全額モニター・最新料金は院内・カウンセリングで</a:t>
             </a:r>
           </a:p>
         </p:txBody>

--- a/鼻整形_デザインカタログ.pptx
+++ b/鼻整形_デザインカタログ.pptx
@@ -757,8 +757,38 @@
         </p:nvSpPr>
         <p:spPr>
           <a:xfrm>
-            <a:off x="2158365" y="2194560"/>
-            <a:ext cx="3246120" cy="3246120"/>
+            <a:off x="1038225" y="2240280"/>
+            <a:ext cx="2606040" cy="3200400"/>
+          </a:xfrm>
+          <a:prstGeom prst="roundRect">
+            <a:avLst>
+              <a:gd name="adj" fmla="val 5000"/>
+            </a:avLst>
+          </a:prstGeom>
+          <a:solidFill>
+            <a:srgbClr val="ECE4D4"/>
+          </a:solidFill>
+        </p:spPr>
+        <p:txBody>
+          <a:bodyPr/>
+          <a:lstStyle/>
+          <a:p/>
+        </p:txBody>
+      </p:sp>
+      <p:sp>
+        <p:nvSpPr>
+          <p:cNvPr id="202" name="写真枠 11"/>
+          <p:cNvSpPr>
+            <a:spLocks noGrp="1"/>
+          </p:cNvSpPr>
+          <p:nvPr>
+            <p:ph type="pic" idx="11"/>
+          </p:nvPr>
+        </p:nvSpPr>
+        <p:spPr>
+          <a:xfrm>
+            <a:off x="3918585" y="2240280"/>
+            <a:ext cx="2606040" cy="3200400"/>
           </a:xfrm>
           <a:prstGeom prst="roundRect">
             <a:avLst>
@@ -807,7 +837,7 @@
       </p:grpSpPr>
       <p:sp>
         <p:nvSpPr>
-          <p:cNvPr id="202" name="写真枠 10"/>
+          <p:cNvPr id="203" name="写真枠 10"/>
           <p:cNvSpPr>
             <a:spLocks noGrp="1"/>
           </p:cNvSpPr>
@@ -4919,7 +4949,7 @@
       <p:grpSpPr/>
       <p:sp>
         <p:nvSpPr>
-          <p:cNvPr id="11" name="Rounded Rectangle 10"/>
+          <p:cNvPr id="12" name="Rounded Rectangle 11"/>
           <p:cNvSpPr/>
           <p:nvPr/>
         </p:nvSpPr>
@@ -4977,7 +5007,19 @@
       </p:sp>
       <p:sp>
         <p:nvSpPr>
-          <p:cNvPr id="3" name="TextBox 2"/>
+          <p:cNvPr id="3" name="Picture Placeholder 2"/>
+          <p:cNvSpPr>
+            <a:spLocks noGrp="1"/>
+          </p:cNvSpPr>
+          <p:nvPr>
+            <p:ph type="pic" idx="11"/>
+          </p:nvPr>
+        </p:nvSpPr>
+        <p:spPr/>
+      </p:sp>
+      <p:sp>
+        <p:nvSpPr>
+          <p:cNvPr id="4" name="TextBox 3"/>
           <p:cNvSpPr txBox="1"/>
           <p:nvPr/>
         </p:nvSpPr>
@@ -5023,7 +5065,7 @@
       </p:sp>
       <p:sp>
         <p:nvSpPr>
-          <p:cNvPr id="4" name="TextBox 3"/>
+          <p:cNvPr id="5" name="TextBox 4"/>
           <p:cNvSpPr txBox="1"/>
           <p:nvPr/>
         </p:nvSpPr>
@@ -5069,7 +5111,7 @@
       </p:sp>
       <p:sp>
         <p:nvSpPr>
-          <p:cNvPr id="5" name="TextBox 4"/>
+          <p:cNvPr id="6" name="TextBox 5"/>
           <p:cNvSpPr txBox="1"/>
           <p:nvPr/>
         </p:nvSpPr>
@@ -5115,7 +5157,7 @@
       </p:sp>
       <p:sp>
         <p:nvSpPr>
-          <p:cNvPr id="6" name="Rounded Rectangle 5"/>
+          <p:cNvPr id="7" name="Rounded Rectangle 6"/>
           <p:cNvSpPr/>
           <p:nvPr/>
         </p:nvSpPr>
@@ -5159,7 +5201,7 @@
       </p:sp>
       <p:sp>
         <p:nvSpPr>
-          <p:cNvPr id="7" name="TextBox 6"/>
+          <p:cNvPr id="8" name="TextBox 7"/>
           <p:cNvSpPr txBox="1"/>
           <p:nvPr/>
         </p:nvSpPr>
@@ -5205,7 +5247,7 @@
       </p:sp>
       <p:sp>
         <p:nvSpPr>
-          <p:cNvPr id="8" name="Rounded Rectangle 7"/>
+          <p:cNvPr id="9" name="Rounded Rectangle 8"/>
           <p:cNvSpPr/>
           <p:nvPr/>
         </p:nvSpPr>
@@ -5249,7 +5291,7 @@
       </p:sp>
       <p:sp>
         <p:nvSpPr>
-          <p:cNvPr id="9" name="TextBox 8"/>
+          <p:cNvPr id="10" name="TextBox 9"/>
           <p:cNvSpPr txBox="1"/>
           <p:nvPr/>
         </p:nvSpPr>
@@ -5295,7 +5337,7 @@
       </p:sp>
       <p:sp>
         <p:nvSpPr>
-          <p:cNvPr id="10" name="TextBox 9"/>
+          <p:cNvPr id="11" name="TextBox 10"/>
           <p:cNvSpPr txBox="1"/>
           <p:nvPr/>
         </p:nvSpPr>
@@ -5341,14 +5383,14 @@
       </p:sp>
       <p:sp>
         <p:nvSpPr>
-          <p:cNvPr id="12" name="TextBox 11"/>
-          <p:cNvSpPr txBox="1"/>
-          <p:nvPr/>
-        </p:nvSpPr>
-        <p:spPr>
-          <a:xfrm>
-            <a:off x="566928" y="1847088"/>
-            <a:ext cx="6428994" cy="256032"/>
+          <p:cNvPr id="13" name="TextBox 12"/>
+          <p:cNvSpPr txBox="1"/>
+          <p:nvPr/>
+        </p:nvSpPr>
+        <p:spPr>
+          <a:xfrm>
+            <a:off x="1038225" y="1874519"/>
+            <a:ext cx="2606040" cy="274320"/>
           </a:xfrm>
           <a:prstGeom prst="rect">
             <a:avLst/>
@@ -5373,21 +5415,113 @@
               </a:spcAft>
             </a:pPr>
             <a:r>
-              <a:rPr sz="1100" b="1">
+              <a:rPr sz="1200" b="1">
                 <a:solidFill>
                   <a:srgbClr val="8C7339"/>
                 </a:solidFill>
                 <a:latin typeface="游明朝"/>
                 <a:ea typeface="游明朝"/>
               </a:rPr>
-              <a:t>Before  →  After</a:t>
-            </a:r>
-          </a:p>
-        </p:txBody>
-      </p:sp>
-      <p:sp>
-        <p:nvSpPr>
-          <p:cNvPr id="13" name="TextBox 12"/>
+              <a:t>Before</a:t>
+            </a:r>
+          </a:p>
+        </p:txBody>
+      </p:sp>
+      <p:sp>
+        <p:nvSpPr>
+          <p:cNvPr id="14" name="TextBox 13"/>
+          <p:cNvSpPr txBox="1"/>
+          <p:nvPr/>
+        </p:nvSpPr>
+        <p:spPr>
+          <a:xfrm>
+            <a:off x="3918585" y="1874519"/>
+            <a:ext cx="2606040" cy="274320"/>
+          </a:xfrm>
+          <a:prstGeom prst="rect">
+            <a:avLst/>
+          </a:prstGeom>
+          <a:noFill/>
+        </p:spPr>
+        <p:txBody>
+          <a:bodyPr wrap="square" anchor="t" lIns="0" rIns="0" tIns="0" bIns="0">
+            <a:spAutoFit/>
+          </a:bodyPr>
+          <a:lstStyle/>
+          <a:p>
+            <a:pPr algn="ctr">
+              <a:lnSpc>
+                <a:spcPct val="112000"/>
+              </a:lnSpc>
+              <a:spcBef>
+                <a:spcPts val="0"/>
+              </a:spcBef>
+              <a:spcAft>
+                <a:spcPts val="200"/>
+              </a:spcAft>
+            </a:pPr>
+            <a:r>
+              <a:rPr sz="1200" b="1">
+                <a:solidFill>
+                  <a:srgbClr val="8C7339"/>
+                </a:solidFill>
+                <a:latin typeface="游明朝"/>
+                <a:ea typeface="游明朝"/>
+              </a:rPr>
+              <a:t>After</a:t>
+            </a:r>
+          </a:p>
+        </p:txBody>
+      </p:sp>
+      <p:sp>
+        <p:nvSpPr>
+          <p:cNvPr id="15" name="TextBox 14"/>
+          <p:cNvSpPr txBox="1"/>
+          <p:nvPr/>
+        </p:nvSpPr>
+        <p:spPr>
+          <a:xfrm>
+            <a:off x="1038225" y="1874519"/>
+            <a:ext cx="5486400" cy="274320"/>
+          </a:xfrm>
+          <a:prstGeom prst="rect">
+            <a:avLst/>
+          </a:prstGeom>
+          <a:noFill/>
+        </p:spPr>
+        <p:txBody>
+          <a:bodyPr wrap="square" anchor="t" lIns="0" rIns="0" tIns="0" bIns="0">
+            <a:spAutoFit/>
+          </a:bodyPr>
+          <a:lstStyle/>
+          <a:p>
+            <a:pPr algn="ctr">
+              <a:lnSpc>
+                <a:spcPct val="112000"/>
+              </a:lnSpc>
+              <a:spcBef>
+                <a:spcPts val="0"/>
+              </a:spcBef>
+              <a:spcAft>
+                <a:spcPts val="200"/>
+              </a:spcAft>
+            </a:pPr>
+            <a:r>
+              <a:rPr sz="1200" b="1">
+                <a:solidFill>
+                  <a:srgbClr val="B0934E"/>
+                </a:solidFill>
+                <a:latin typeface="游明朝"/>
+                <a:ea typeface="游明朝"/>
+              </a:rPr>
+              <a:t>→</a:t>
+            </a:r>
+          </a:p>
+        </p:txBody>
+      </p:sp>
+      <p:sp>
+        <p:nvSpPr>
+          <p:cNvPr id="16" name="TextBox 15"/>
           <p:cNvSpPr txBox="1"/>
           <p:nvPr/>
         </p:nvSpPr>
@@ -5426,14 +5560,14 @@
                 <a:latin typeface="游ゴシック"/>
                 <a:ea typeface="游ゴシック"/>
               </a:rPr>
-              <a:t>▲ 枠をクリックして、Before/After を1枚にした画像を挿入（自動で枠いっぱいに配置されます）</a:t>
-            </a:r>
-          </a:p>
-        </p:txBody>
-      </p:sp>
-      <p:sp>
-        <p:nvSpPr>
-          <p:cNvPr id="14" name="Rounded Rectangle 13"/>
+              <a:t>▲ Before・After それぞれの枠をクリックして写真を挿入（自動で枠いっぱいに配置されます）</a:t>
+            </a:r>
+          </a:p>
+        </p:txBody>
+      </p:sp>
+      <p:sp>
+        <p:nvSpPr>
+          <p:cNvPr id="17" name="Rounded Rectangle 16"/>
           <p:cNvSpPr/>
           <p:nvPr/>
         </p:nvSpPr>
@@ -5477,7 +5611,7 @@
       </p:sp>
       <p:sp>
         <p:nvSpPr>
-          <p:cNvPr id="15" name="TextBox 14"/>
+          <p:cNvPr id="18" name="TextBox 17"/>
           <p:cNvSpPr txBox="1"/>
           <p:nvPr/>
         </p:nvSpPr>
@@ -5523,7 +5657,7 @@
       </p:sp>
       <p:sp>
         <p:nvSpPr>
-          <p:cNvPr id="16" name="TextBox 15"/>
+          <p:cNvPr id="19" name="TextBox 18"/>
           <p:cNvSpPr txBox="1"/>
           <p:nvPr/>
         </p:nvSpPr>
@@ -5569,7 +5703,7 @@
       </p:sp>
       <p:graphicFrame>
         <p:nvGraphicFramePr>
-          <p:cNvPr id="17" name="Table 16"/>
+          <p:cNvPr id="20" name="Table 19"/>
           <p:cNvGraphicFramePr>
             <a:graphicFrameLocks noGrp="1"/>
           </p:cNvGraphicFramePr>
@@ -5739,7 +5873,7 @@
       </p:graphicFrame>
       <p:sp>
         <p:nvSpPr>
-          <p:cNvPr id="18" name="Rounded Rectangle 17"/>
+          <p:cNvPr id="21" name="Rounded Rectangle 20"/>
           <p:cNvSpPr/>
           <p:nvPr/>
         </p:nvSpPr>
@@ -5785,7 +5919,7 @@
       </p:sp>
       <p:sp>
         <p:nvSpPr>
-          <p:cNvPr id="19" name="Rectangle 18"/>
+          <p:cNvPr id="22" name="Rectangle 21"/>
           <p:cNvSpPr/>
           <p:nvPr/>
         </p:nvSpPr>
@@ -5829,7 +5963,7 @@
       </p:sp>
       <p:sp>
         <p:nvSpPr>
-          <p:cNvPr id="20" name="TextBox 19"/>
+          <p:cNvPr id="23" name="TextBox 22"/>
           <p:cNvSpPr txBox="1"/>
           <p:nvPr/>
         </p:nvSpPr>
@@ -5875,7 +6009,7 @@
       </p:sp>
       <p:sp>
         <p:nvSpPr>
-          <p:cNvPr id="21" name="TextBox 20"/>
+          <p:cNvPr id="24" name="TextBox 23"/>
           <p:cNvSpPr txBox="1"/>
           <p:nvPr/>
         </p:nvSpPr>
@@ -5923,7 +6057,7 @@
       </p:sp>
       <p:sp>
         <p:nvSpPr>
-          <p:cNvPr id="22" name="Rounded Rectangle 21"/>
+          <p:cNvPr id="25" name="Rounded Rectangle 24"/>
           <p:cNvSpPr/>
           <p:nvPr/>
         </p:nvSpPr>
@@ -5967,7 +6101,7 @@
       </p:sp>
       <p:sp>
         <p:nvSpPr>
-          <p:cNvPr id="23" name="TextBox 22"/>
+          <p:cNvPr id="26" name="TextBox 25"/>
           <p:cNvSpPr txBox="1"/>
           <p:nvPr/>
         </p:nvSpPr>
@@ -6013,7 +6147,7 @@
       </p:sp>
       <p:sp>
         <p:nvSpPr>
-          <p:cNvPr id="24" name="TextBox 23"/>
+          <p:cNvPr id="27" name="TextBox 26"/>
           <p:cNvSpPr txBox="1"/>
           <p:nvPr/>
         </p:nvSpPr>
@@ -6059,7 +6193,7 @@
       </p:sp>
       <p:sp>
         <p:nvSpPr>
-          <p:cNvPr id="25" name="TextBox 24"/>
+          <p:cNvPr id="28" name="TextBox 27"/>
           <p:cNvSpPr txBox="1"/>
           <p:nvPr/>
         </p:nvSpPr>
@@ -6115,7 +6249,7 @@
       </p:sp>
       <p:sp>
         <p:nvSpPr>
-          <p:cNvPr id="26" name="TextBox 25"/>
+          <p:cNvPr id="29" name="TextBox 28"/>
           <p:cNvSpPr txBox="1"/>
           <p:nvPr/>
         </p:nvSpPr>
@@ -6161,7 +6295,7 @@
       </p:sp>
       <p:sp>
         <p:nvSpPr>
-          <p:cNvPr id="27" name="Rounded Rectangle 26"/>
+          <p:cNvPr id="30" name="Rounded Rectangle 29"/>
           <p:cNvSpPr/>
           <p:nvPr/>
         </p:nvSpPr>
@@ -6207,7 +6341,7 @@
       </p:sp>
       <p:sp>
         <p:nvSpPr>
-          <p:cNvPr id="28" name="TextBox 27"/>
+          <p:cNvPr id="31" name="TextBox 30"/>
           <p:cNvSpPr txBox="1"/>
           <p:nvPr/>
         </p:nvSpPr>
@@ -6253,7 +6387,7 @@
       </p:sp>
       <p:sp>
         <p:nvSpPr>
-          <p:cNvPr id="29" name="TextBox 28"/>
+          <p:cNvPr id="32" name="TextBox 31"/>
           <p:cNvSpPr txBox="1"/>
           <p:nvPr/>
         </p:nvSpPr>
@@ -6299,7 +6433,7 @@
       </p:sp>
       <p:sp>
         <p:nvSpPr>
-          <p:cNvPr id="30" name="TextBox 29"/>
+          <p:cNvPr id="33" name="TextBox 32"/>
           <p:cNvSpPr txBox="1"/>
           <p:nvPr/>
         </p:nvSpPr>
@@ -6345,7 +6479,7 @@
       </p:sp>
       <p:sp>
         <p:nvSpPr>
-          <p:cNvPr id="31" name="TextBox 30"/>
+          <p:cNvPr id="34" name="TextBox 33"/>
           <p:cNvSpPr txBox="1"/>
           <p:nvPr/>
         </p:nvSpPr>
@@ -6417,7 +6551,7 @@
       <p:grpSpPr/>
       <p:sp>
         <p:nvSpPr>
-          <p:cNvPr id="11" name="Rounded Rectangle 10"/>
+          <p:cNvPr id="12" name="Rounded Rectangle 11"/>
           <p:cNvSpPr/>
           <p:nvPr/>
         </p:nvSpPr>
@@ -6475,7 +6609,19 @@
       </p:sp>
       <p:sp>
         <p:nvSpPr>
-          <p:cNvPr id="3" name="TextBox 2"/>
+          <p:cNvPr id="3" name="Picture Placeholder 2"/>
+          <p:cNvSpPr>
+            <a:spLocks noGrp="1"/>
+          </p:cNvSpPr>
+          <p:nvPr>
+            <p:ph type="pic" idx="11"/>
+          </p:nvPr>
+        </p:nvSpPr>
+        <p:spPr/>
+      </p:sp>
+      <p:sp>
+        <p:nvSpPr>
+          <p:cNvPr id="4" name="TextBox 3"/>
           <p:cNvSpPr txBox="1"/>
           <p:nvPr/>
         </p:nvSpPr>
@@ -6521,7 +6667,7 @@
       </p:sp>
       <p:sp>
         <p:nvSpPr>
-          <p:cNvPr id="4" name="TextBox 3"/>
+          <p:cNvPr id="5" name="TextBox 4"/>
           <p:cNvSpPr txBox="1"/>
           <p:nvPr/>
         </p:nvSpPr>
@@ -6567,7 +6713,7 @@
       </p:sp>
       <p:sp>
         <p:nvSpPr>
-          <p:cNvPr id="5" name="TextBox 4"/>
+          <p:cNvPr id="6" name="TextBox 5"/>
           <p:cNvSpPr txBox="1"/>
           <p:nvPr/>
         </p:nvSpPr>
@@ -6613,7 +6759,7 @@
       </p:sp>
       <p:sp>
         <p:nvSpPr>
-          <p:cNvPr id="6" name="Rounded Rectangle 5"/>
+          <p:cNvPr id="7" name="Rounded Rectangle 6"/>
           <p:cNvSpPr/>
           <p:nvPr/>
         </p:nvSpPr>
@@ -6657,7 +6803,7 @@
       </p:sp>
       <p:sp>
         <p:nvSpPr>
-          <p:cNvPr id="7" name="TextBox 6"/>
+          <p:cNvPr id="8" name="TextBox 7"/>
           <p:cNvSpPr txBox="1"/>
           <p:nvPr/>
         </p:nvSpPr>
@@ -6703,7 +6849,7 @@
       </p:sp>
       <p:sp>
         <p:nvSpPr>
-          <p:cNvPr id="8" name="Rounded Rectangle 7"/>
+          <p:cNvPr id="9" name="Rounded Rectangle 8"/>
           <p:cNvSpPr/>
           <p:nvPr/>
         </p:nvSpPr>
@@ -6747,7 +6893,7 @@
       </p:sp>
       <p:sp>
         <p:nvSpPr>
-          <p:cNvPr id="9" name="TextBox 8"/>
+          <p:cNvPr id="10" name="TextBox 9"/>
           <p:cNvSpPr txBox="1"/>
           <p:nvPr/>
         </p:nvSpPr>
@@ -6793,7 +6939,7 @@
       </p:sp>
       <p:sp>
         <p:nvSpPr>
-          <p:cNvPr id="10" name="TextBox 9"/>
+          <p:cNvPr id="11" name="TextBox 10"/>
           <p:cNvSpPr txBox="1"/>
           <p:nvPr/>
         </p:nvSpPr>
@@ -6839,14 +6985,14 @@
       </p:sp>
       <p:sp>
         <p:nvSpPr>
-          <p:cNvPr id="12" name="TextBox 11"/>
-          <p:cNvSpPr txBox="1"/>
-          <p:nvPr/>
-        </p:nvSpPr>
-        <p:spPr>
-          <a:xfrm>
-            <a:off x="566928" y="1847088"/>
-            <a:ext cx="6428994" cy="256032"/>
+          <p:cNvPr id="13" name="TextBox 12"/>
+          <p:cNvSpPr txBox="1"/>
+          <p:nvPr/>
+        </p:nvSpPr>
+        <p:spPr>
+          <a:xfrm>
+            <a:off x="1038225" y="1874519"/>
+            <a:ext cx="2606040" cy="274320"/>
           </a:xfrm>
           <a:prstGeom prst="rect">
             <a:avLst/>
@@ -6871,21 +7017,113 @@
               </a:spcAft>
             </a:pPr>
             <a:r>
-              <a:rPr sz="1100" b="1">
+              <a:rPr sz="1200" b="1">
                 <a:solidFill>
                   <a:srgbClr val="8C7339"/>
                 </a:solidFill>
                 <a:latin typeface="游明朝"/>
                 <a:ea typeface="游明朝"/>
               </a:rPr>
-              <a:t>Before  →  After</a:t>
-            </a:r>
-          </a:p>
-        </p:txBody>
-      </p:sp>
-      <p:sp>
-        <p:nvSpPr>
-          <p:cNvPr id="13" name="TextBox 12"/>
+              <a:t>Before</a:t>
+            </a:r>
+          </a:p>
+        </p:txBody>
+      </p:sp>
+      <p:sp>
+        <p:nvSpPr>
+          <p:cNvPr id="14" name="TextBox 13"/>
+          <p:cNvSpPr txBox="1"/>
+          <p:nvPr/>
+        </p:nvSpPr>
+        <p:spPr>
+          <a:xfrm>
+            <a:off x="3918585" y="1874519"/>
+            <a:ext cx="2606040" cy="274320"/>
+          </a:xfrm>
+          <a:prstGeom prst="rect">
+            <a:avLst/>
+          </a:prstGeom>
+          <a:noFill/>
+        </p:spPr>
+        <p:txBody>
+          <a:bodyPr wrap="square" anchor="t" lIns="0" rIns="0" tIns="0" bIns="0">
+            <a:spAutoFit/>
+          </a:bodyPr>
+          <a:lstStyle/>
+          <a:p>
+            <a:pPr algn="ctr">
+              <a:lnSpc>
+                <a:spcPct val="112000"/>
+              </a:lnSpc>
+              <a:spcBef>
+                <a:spcPts val="0"/>
+              </a:spcBef>
+              <a:spcAft>
+                <a:spcPts val="200"/>
+              </a:spcAft>
+            </a:pPr>
+            <a:r>
+              <a:rPr sz="1200" b="1">
+                <a:solidFill>
+                  <a:srgbClr val="8C7339"/>
+                </a:solidFill>
+                <a:latin typeface="游明朝"/>
+                <a:ea typeface="游明朝"/>
+              </a:rPr>
+              <a:t>After</a:t>
+            </a:r>
+          </a:p>
+        </p:txBody>
+      </p:sp>
+      <p:sp>
+        <p:nvSpPr>
+          <p:cNvPr id="15" name="TextBox 14"/>
+          <p:cNvSpPr txBox="1"/>
+          <p:nvPr/>
+        </p:nvSpPr>
+        <p:spPr>
+          <a:xfrm>
+            <a:off x="1038225" y="1874519"/>
+            <a:ext cx="5486400" cy="274320"/>
+          </a:xfrm>
+          <a:prstGeom prst="rect">
+            <a:avLst/>
+          </a:prstGeom>
+          <a:noFill/>
+        </p:spPr>
+        <p:txBody>
+          <a:bodyPr wrap="square" anchor="t" lIns="0" rIns="0" tIns="0" bIns="0">
+            <a:spAutoFit/>
+          </a:bodyPr>
+          <a:lstStyle/>
+          <a:p>
+            <a:pPr algn="ctr">
+              <a:lnSpc>
+                <a:spcPct val="112000"/>
+              </a:lnSpc>
+              <a:spcBef>
+                <a:spcPts val="0"/>
+              </a:spcBef>
+              <a:spcAft>
+                <a:spcPts val="200"/>
+              </a:spcAft>
+            </a:pPr>
+            <a:r>
+              <a:rPr sz="1200" b="1">
+                <a:solidFill>
+                  <a:srgbClr val="B0934E"/>
+                </a:solidFill>
+                <a:latin typeface="游明朝"/>
+                <a:ea typeface="游明朝"/>
+              </a:rPr>
+              <a:t>→</a:t>
+            </a:r>
+          </a:p>
+        </p:txBody>
+      </p:sp>
+      <p:sp>
+        <p:nvSpPr>
+          <p:cNvPr id="16" name="TextBox 15"/>
           <p:cNvSpPr txBox="1"/>
           <p:nvPr/>
         </p:nvSpPr>
@@ -6924,14 +7162,14 @@
                 <a:latin typeface="游ゴシック"/>
                 <a:ea typeface="游ゴシック"/>
               </a:rPr>
-              <a:t>▲ 枠をクリックして、Before/After を1枚にした画像を挿入（自動で枠いっぱいに配置されます）</a:t>
-            </a:r>
-          </a:p>
-        </p:txBody>
-      </p:sp>
-      <p:sp>
-        <p:nvSpPr>
-          <p:cNvPr id="14" name="Rounded Rectangle 13"/>
+              <a:t>▲ Before・After それぞれの枠をクリックして写真を挿入（自動で枠いっぱいに配置されます）</a:t>
+            </a:r>
+          </a:p>
+        </p:txBody>
+      </p:sp>
+      <p:sp>
+        <p:nvSpPr>
+          <p:cNvPr id="17" name="Rounded Rectangle 16"/>
           <p:cNvSpPr/>
           <p:nvPr/>
         </p:nvSpPr>
@@ -6975,7 +7213,7 @@
       </p:sp>
       <p:sp>
         <p:nvSpPr>
-          <p:cNvPr id="15" name="TextBox 14"/>
+          <p:cNvPr id="18" name="TextBox 17"/>
           <p:cNvSpPr txBox="1"/>
           <p:nvPr/>
         </p:nvSpPr>
@@ -7021,7 +7259,7 @@
       </p:sp>
       <p:sp>
         <p:nvSpPr>
-          <p:cNvPr id="16" name="TextBox 15"/>
+          <p:cNvPr id="19" name="TextBox 18"/>
           <p:cNvSpPr txBox="1"/>
           <p:nvPr/>
         </p:nvSpPr>
@@ -7067,7 +7305,7 @@
       </p:sp>
       <p:graphicFrame>
         <p:nvGraphicFramePr>
-          <p:cNvPr id="17" name="Table 16"/>
+          <p:cNvPr id="20" name="Table 19"/>
           <p:cNvGraphicFramePr>
             <a:graphicFrameLocks noGrp="1"/>
           </p:cNvGraphicFramePr>
@@ -7237,7 +7475,7 @@
       </p:graphicFrame>
       <p:sp>
         <p:nvSpPr>
-          <p:cNvPr id="18" name="Rounded Rectangle 17"/>
+          <p:cNvPr id="21" name="Rounded Rectangle 20"/>
           <p:cNvSpPr/>
           <p:nvPr/>
         </p:nvSpPr>
@@ -7283,7 +7521,7 @@
       </p:sp>
       <p:sp>
         <p:nvSpPr>
-          <p:cNvPr id="19" name="Rectangle 18"/>
+          <p:cNvPr id="22" name="Rectangle 21"/>
           <p:cNvSpPr/>
           <p:nvPr/>
         </p:nvSpPr>
@@ -7327,7 +7565,7 @@
       </p:sp>
       <p:sp>
         <p:nvSpPr>
-          <p:cNvPr id="20" name="TextBox 19"/>
+          <p:cNvPr id="23" name="TextBox 22"/>
           <p:cNvSpPr txBox="1"/>
           <p:nvPr/>
         </p:nvSpPr>
@@ -7373,7 +7611,7 @@
       </p:sp>
       <p:sp>
         <p:nvSpPr>
-          <p:cNvPr id="21" name="TextBox 20"/>
+          <p:cNvPr id="24" name="TextBox 23"/>
           <p:cNvSpPr txBox="1"/>
           <p:nvPr/>
         </p:nvSpPr>
@@ -7421,7 +7659,7 @@
       </p:sp>
       <p:sp>
         <p:nvSpPr>
-          <p:cNvPr id="22" name="Rounded Rectangle 21"/>
+          <p:cNvPr id="25" name="Rounded Rectangle 24"/>
           <p:cNvSpPr/>
           <p:nvPr/>
         </p:nvSpPr>
@@ -7465,7 +7703,7 @@
       </p:sp>
       <p:sp>
         <p:nvSpPr>
-          <p:cNvPr id="23" name="TextBox 22"/>
+          <p:cNvPr id="26" name="TextBox 25"/>
           <p:cNvSpPr txBox="1"/>
           <p:nvPr/>
         </p:nvSpPr>
@@ -7511,7 +7749,7 @@
       </p:sp>
       <p:sp>
         <p:nvSpPr>
-          <p:cNvPr id="24" name="TextBox 23"/>
+          <p:cNvPr id="27" name="TextBox 26"/>
           <p:cNvSpPr txBox="1"/>
           <p:nvPr/>
         </p:nvSpPr>
@@ -7557,7 +7795,7 @@
       </p:sp>
       <p:sp>
         <p:nvSpPr>
-          <p:cNvPr id="25" name="TextBox 24"/>
+          <p:cNvPr id="28" name="TextBox 27"/>
           <p:cNvSpPr txBox="1"/>
           <p:nvPr/>
         </p:nvSpPr>
@@ -7613,7 +7851,7 @@
       </p:sp>
       <p:sp>
         <p:nvSpPr>
-          <p:cNvPr id="26" name="TextBox 25"/>
+          <p:cNvPr id="29" name="TextBox 28"/>
           <p:cNvSpPr txBox="1"/>
           <p:nvPr/>
         </p:nvSpPr>
@@ -7659,7 +7897,7 @@
       </p:sp>
       <p:sp>
         <p:nvSpPr>
-          <p:cNvPr id="27" name="Rounded Rectangle 26"/>
+          <p:cNvPr id="30" name="Rounded Rectangle 29"/>
           <p:cNvSpPr/>
           <p:nvPr/>
         </p:nvSpPr>
@@ -7705,7 +7943,7 @@
       </p:sp>
       <p:sp>
         <p:nvSpPr>
-          <p:cNvPr id="28" name="TextBox 27"/>
+          <p:cNvPr id="31" name="TextBox 30"/>
           <p:cNvSpPr txBox="1"/>
           <p:nvPr/>
         </p:nvSpPr>
@@ -7751,7 +7989,7 @@
       </p:sp>
       <p:sp>
         <p:nvSpPr>
-          <p:cNvPr id="29" name="TextBox 28"/>
+          <p:cNvPr id="32" name="TextBox 31"/>
           <p:cNvSpPr txBox="1"/>
           <p:nvPr/>
         </p:nvSpPr>
@@ -7797,7 +8035,7 @@
       </p:sp>
       <p:sp>
         <p:nvSpPr>
-          <p:cNvPr id="30" name="TextBox 29"/>
+          <p:cNvPr id="33" name="TextBox 32"/>
           <p:cNvSpPr txBox="1"/>
           <p:nvPr/>
         </p:nvSpPr>
@@ -7843,7 +8081,7 @@
       </p:sp>
       <p:sp>
         <p:nvSpPr>
-          <p:cNvPr id="31" name="TextBox 30"/>
+          <p:cNvPr id="34" name="TextBox 33"/>
           <p:cNvSpPr txBox="1"/>
           <p:nvPr/>
         </p:nvSpPr>
@@ -7915,7 +8153,7 @@
       <p:grpSpPr/>
       <p:sp>
         <p:nvSpPr>
-          <p:cNvPr id="11" name="Rounded Rectangle 10"/>
+          <p:cNvPr id="12" name="Rounded Rectangle 11"/>
           <p:cNvSpPr/>
           <p:nvPr/>
         </p:nvSpPr>
@@ -7973,7 +8211,19 @@
       </p:sp>
       <p:sp>
         <p:nvSpPr>
-          <p:cNvPr id="3" name="TextBox 2"/>
+          <p:cNvPr id="3" name="Picture Placeholder 2"/>
+          <p:cNvSpPr>
+            <a:spLocks noGrp="1"/>
+          </p:cNvSpPr>
+          <p:nvPr>
+            <p:ph type="pic" idx="11"/>
+          </p:nvPr>
+        </p:nvSpPr>
+        <p:spPr/>
+      </p:sp>
+      <p:sp>
+        <p:nvSpPr>
+          <p:cNvPr id="4" name="TextBox 3"/>
           <p:cNvSpPr txBox="1"/>
           <p:nvPr/>
         </p:nvSpPr>
@@ -8019,7 +8269,7 @@
       </p:sp>
       <p:sp>
         <p:nvSpPr>
-          <p:cNvPr id="4" name="TextBox 3"/>
+          <p:cNvPr id="5" name="TextBox 4"/>
           <p:cNvSpPr txBox="1"/>
           <p:nvPr/>
         </p:nvSpPr>
@@ -8065,7 +8315,7 @@
       </p:sp>
       <p:sp>
         <p:nvSpPr>
-          <p:cNvPr id="5" name="TextBox 4"/>
+          <p:cNvPr id="6" name="TextBox 5"/>
           <p:cNvSpPr txBox="1"/>
           <p:nvPr/>
         </p:nvSpPr>
@@ -8111,7 +8361,7 @@
       </p:sp>
       <p:sp>
         <p:nvSpPr>
-          <p:cNvPr id="6" name="Rounded Rectangle 5"/>
+          <p:cNvPr id="7" name="Rounded Rectangle 6"/>
           <p:cNvSpPr/>
           <p:nvPr/>
         </p:nvSpPr>
@@ -8155,7 +8405,7 @@
       </p:sp>
       <p:sp>
         <p:nvSpPr>
-          <p:cNvPr id="7" name="TextBox 6"/>
+          <p:cNvPr id="8" name="TextBox 7"/>
           <p:cNvSpPr txBox="1"/>
           <p:nvPr/>
         </p:nvSpPr>
@@ -8201,7 +8451,7 @@
       </p:sp>
       <p:sp>
         <p:nvSpPr>
-          <p:cNvPr id="8" name="Rounded Rectangle 7"/>
+          <p:cNvPr id="9" name="Rounded Rectangle 8"/>
           <p:cNvSpPr/>
           <p:nvPr/>
         </p:nvSpPr>
@@ -8245,7 +8495,7 @@
       </p:sp>
       <p:sp>
         <p:nvSpPr>
-          <p:cNvPr id="9" name="TextBox 8"/>
+          <p:cNvPr id="10" name="TextBox 9"/>
           <p:cNvSpPr txBox="1"/>
           <p:nvPr/>
         </p:nvSpPr>
@@ -8291,7 +8541,7 @@
       </p:sp>
       <p:sp>
         <p:nvSpPr>
-          <p:cNvPr id="10" name="TextBox 9"/>
+          <p:cNvPr id="11" name="TextBox 10"/>
           <p:cNvSpPr txBox="1"/>
           <p:nvPr/>
         </p:nvSpPr>
@@ -8337,14 +8587,14 @@
       </p:sp>
       <p:sp>
         <p:nvSpPr>
-          <p:cNvPr id="12" name="TextBox 11"/>
-          <p:cNvSpPr txBox="1"/>
-          <p:nvPr/>
-        </p:nvSpPr>
-        <p:spPr>
-          <a:xfrm>
-            <a:off x="566928" y="1847088"/>
-            <a:ext cx="6428994" cy="256032"/>
+          <p:cNvPr id="13" name="TextBox 12"/>
+          <p:cNvSpPr txBox="1"/>
+          <p:nvPr/>
+        </p:nvSpPr>
+        <p:spPr>
+          <a:xfrm>
+            <a:off x="1038225" y="1874519"/>
+            <a:ext cx="2606040" cy="274320"/>
           </a:xfrm>
           <a:prstGeom prst="rect">
             <a:avLst/>
@@ -8369,21 +8619,113 @@
               </a:spcAft>
             </a:pPr>
             <a:r>
-              <a:rPr sz="1100" b="1">
+              <a:rPr sz="1200" b="1">
                 <a:solidFill>
                   <a:srgbClr val="8C7339"/>
                 </a:solidFill>
                 <a:latin typeface="游明朝"/>
                 <a:ea typeface="游明朝"/>
               </a:rPr>
-              <a:t>Before  →  After</a:t>
-            </a:r>
-          </a:p>
-        </p:txBody>
-      </p:sp>
-      <p:sp>
-        <p:nvSpPr>
-          <p:cNvPr id="13" name="TextBox 12"/>
+              <a:t>Before</a:t>
+            </a:r>
+          </a:p>
+        </p:txBody>
+      </p:sp>
+      <p:sp>
+        <p:nvSpPr>
+          <p:cNvPr id="14" name="TextBox 13"/>
+          <p:cNvSpPr txBox="1"/>
+          <p:nvPr/>
+        </p:nvSpPr>
+        <p:spPr>
+          <a:xfrm>
+            <a:off x="3918585" y="1874519"/>
+            <a:ext cx="2606040" cy="274320"/>
+          </a:xfrm>
+          <a:prstGeom prst="rect">
+            <a:avLst/>
+          </a:prstGeom>
+          <a:noFill/>
+        </p:spPr>
+        <p:txBody>
+          <a:bodyPr wrap="square" anchor="t" lIns="0" rIns="0" tIns="0" bIns="0">
+            <a:spAutoFit/>
+          </a:bodyPr>
+          <a:lstStyle/>
+          <a:p>
+            <a:pPr algn="ctr">
+              <a:lnSpc>
+                <a:spcPct val="112000"/>
+              </a:lnSpc>
+              <a:spcBef>
+                <a:spcPts val="0"/>
+              </a:spcBef>
+              <a:spcAft>
+                <a:spcPts val="200"/>
+              </a:spcAft>
+            </a:pPr>
+            <a:r>
+              <a:rPr sz="1200" b="1">
+                <a:solidFill>
+                  <a:srgbClr val="8C7339"/>
+                </a:solidFill>
+                <a:latin typeface="游明朝"/>
+                <a:ea typeface="游明朝"/>
+              </a:rPr>
+              <a:t>After</a:t>
+            </a:r>
+          </a:p>
+        </p:txBody>
+      </p:sp>
+      <p:sp>
+        <p:nvSpPr>
+          <p:cNvPr id="15" name="TextBox 14"/>
+          <p:cNvSpPr txBox="1"/>
+          <p:nvPr/>
+        </p:nvSpPr>
+        <p:spPr>
+          <a:xfrm>
+            <a:off x="1038225" y="1874519"/>
+            <a:ext cx="5486400" cy="274320"/>
+          </a:xfrm>
+          <a:prstGeom prst="rect">
+            <a:avLst/>
+          </a:prstGeom>
+          <a:noFill/>
+        </p:spPr>
+        <p:txBody>
+          <a:bodyPr wrap="square" anchor="t" lIns="0" rIns="0" tIns="0" bIns="0">
+            <a:spAutoFit/>
+          </a:bodyPr>
+          <a:lstStyle/>
+          <a:p>
+            <a:pPr algn="ctr">
+              <a:lnSpc>
+                <a:spcPct val="112000"/>
+              </a:lnSpc>
+              <a:spcBef>
+                <a:spcPts val="0"/>
+              </a:spcBef>
+              <a:spcAft>
+                <a:spcPts val="200"/>
+              </a:spcAft>
+            </a:pPr>
+            <a:r>
+              <a:rPr sz="1200" b="1">
+                <a:solidFill>
+                  <a:srgbClr val="B0934E"/>
+                </a:solidFill>
+                <a:latin typeface="游明朝"/>
+                <a:ea typeface="游明朝"/>
+              </a:rPr>
+              <a:t>→</a:t>
+            </a:r>
+          </a:p>
+        </p:txBody>
+      </p:sp>
+      <p:sp>
+        <p:nvSpPr>
+          <p:cNvPr id="16" name="TextBox 15"/>
           <p:cNvSpPr txBox="1"/>
           <p:nvPr/>
         </p:nvSpPr>
@@ -8422,14 +8764,14 @@
                 <a:latin typeface="游ゴシック"/>
                 <a:ea typeface="游ゴシック"/>
               </a:rPr>
-              <a:t>▲ 枠をクリックして、Before/After を1枚にした画像を挿入（自動で枠いっぱいに配置されます）</a:t>
-            </a:r>
-          </a:p>
-        </p:txBody>
-      </p:sp>
-      <p:sp>
-        <p:nvSpPr>
-          <p:cNvPr id="14" name="Rounded Rectangle 13"/>
+              <a:t>▲ Before・After それぞれの枠をクリックして写真を挿入（自動で枠いっぱいに配置されます）</a:t>
+            </a:r>
+          </a:p>
+        </p:txBody>
+      </p:sp>
+      <p:sp>
+        <p:nvSpPr>
+          <p:cNvPr id="17" name="Rounded Rectangle 16"/>
           <p:cNvSpPr/>
           <p:nvPr/>
         </p:nvSpPr>
@@ -8473,7 +8815,7 @@
       </p:sp>
       <p:sp>
         <p:nvSpPr>
-          <p:cNvPr id="15" name="TextBox 14"/>
+          <p:cNvPr id="18" name="TextBox 17"/>
           <p:cNvSpPr txBox="1"/>
           <p:nvPr/>
         </p:nvSpPr>
@@ -8519,7 +8861,7 @@
       </p:sp>
       <p:sp>
         <p:nvSpPr>
-          <p:cNvPr id="16" name="TextBox 15"/>
+          <p:cNvPr id="19" name="TextBox 18"/>
           <p:cNvSpPr txBox="1"/>
           <p:nvPr/>
         </p:nvSpPr>
@@ -8565,7 +8907,7 @@
       </p:sp>
       <p:graphicFrame>
         <p:nvGraphicFramePr>
-          <p:cNvPr id="17" name="Table 16"/>
+          <p:cNvPr id="20" name="Table 19"/>
           <p:cNvGraphicFramePr>
             <a:graphicFrameLocks noGrp="1"/>
           </p:cNvGraphicFramePr>
@@ -8735,7 +9077,7 @@
       </p:graphicFrame>
       <p:sp>
         <p:nvSpPr>
-          <p:cNvPr id="18" name="Rounded Rectangle 17"/>
+          <p:cNvPr id="21" name="Rounded Rectangle 20"/>
           <p:cNvSpPr/>
           <p:nvPr/>
         </p:nvSpPr>
@@ -8781,7 +9123,7 @@
       </p:sp>
       <p:sp>
         <p:nvSpPr>
-          <p:cNvPr id="19" name="Rectangle 18"/>
+          <p:cNvPr id="22" name="Rectangle 21"/>
           <p:cNvSpPr/>
           <p:nvPr/>
         </p:nvSpPr>
@@ -8825,7 +9167,7 @@
       </p:sp>
       <p:sp>
         <p:nvSpPr>
-          <p:cNvPr id="20" name="TextBox 19"/>
+          <p:cNvPr id="23" name="TextBox 22"/>
           <p:cNvSpPr txBox="1"/>
           <p:nvPr/>
         </p:nvSpPr>
@@ -8871,7 +9213,7 @@
       </p:sp>
       <p:sp>
         <p:nvSpPr>
-          <p:cNvPr id="21" name="TextBox 20"/>
+          <p:cNvPr id="24" name="TextBox 23"/>
           <p:cNvSpPr txBox="1"/>
           <p:nvPr/>
         </p:nvSpPr>
@@ -8919,7 +9261,7 @@
       </p:sp>
       <p:sp>
         <p:nvSpPr>
-          <p:cNvPr id="22" name="Rounded Rectangle 21"/>
+          <p:cNvPr id="25" name="Rounded Rectangle 24"/>
           <p:cNvSpPr/>
           <p:nvPr/>
         </p:nvSpPr>
@@ -8963,7 +9305,7 @@
       </p:sp>
       <p:sp>
         <p:nvSpPr>
-          <p:cNvPr id="23" name="TextBox 22"/>
+          <p:cNvPr id="26" name="TextBox 25"/>
           <p:cNvSpPr txBox="1"/>
           <p:nvPr/>
         </p:nvSpPr>
@@ -9009,7 +9351,7 @@
       </p:sp>
       <p:sp>
         <p:nvSpPr>
-          <p:cNvPr id="24" name="TextBox 23"/>
+          <p:cNvPr id="27" name="TextBox 26"/>
           <p:cNvSpPr txBox="1"/>
           <p:nvPr/>
         </p:nvSpPr>
@@ -9055,7 +9397,7 @@
       </p:sp>
       <p:sp>
         <p:nvSpPr>
-          <p:cNvPr id="25" name="TextBox 24"/>
+          <p:cNvPr id="28" name="TextBox 27"/>
           <p:cNvSpPr txBox="1"/>
           <p:nvPr/>
         </p:nvSpPr>
@@ -9111,7 +9453,7 @@
       </p:sp>
       <p:sp>
         <p:nvSpPr>
-          <p:cNvPr id="26" name="TextBox 25"/>
+          <p:cNvPr id="29" name="TextBox 28"/>
           <p:cNvSpPr txBox="1"/>
           <p:nvPr/>
         </p:nvSpPr>
@@ -9157,7 +9499,7 @@
       </p:sp>
       <p:sp>
         <p:nvSpPr>
-          <p:cNvPr id="27" name="Rounded Rectangle 26"/>
+          <p:cNvPr id="30" name="Rounded Rectangle 29"/>
           <p:cNvSpPr/>
           <p:nvPr/>
         </p:nvSpPr>
@@ -9203,7 +9545,7 @@
       </p:sp>
       <p:sp>
         <p:nvSpPr>
-          <p:cNvPr id="28" name="TextBox 27"/>
+          <p:cNvPr id="31" name="TextBox 30"/>
           <p:cNvSpPr txBox="1"/>
           <p:nvPr/>
         </p:nvSpPr>
@@ -9249,7 +9591,7 @@
       </p:sp>
       <p:sp>
         <p:nvSpPr>
-          <p:cNvPr id="29" name="TextBox 28"/>
+          <p:cNvPr id="32" name="TextBox 31"/>
           <p:cNvSpPr txBox="1"/>
           <p:nvPr/>
         </p:nvSpPr>
@@ -9295,7 +9637,7 @@
       </p:sp>
       <p:sp>
         <p:nvSpPr>
-          <p:cNvPr id="30" name="TextBox 29"/>
+          <p:cNvPr id="33" name="TextBox 32"/>
           <p:cNvSpPr txBox="1"/>
           <p:nvPr/>
         </p:nvSpPr>
@@ -9341,7 +9683,7 @@
       </p:sp>
       <p:sp>
         <p:nvSpPr>
-          <p:cNvPr id="31" name="TextBox 30"/>
+          <p:cNvPr id="34" name="TextBox 33"/>
           <p:cNvSpPr txBox="1"/>
           <p:nvPr/>
         </p:nvSpPr>
@@ -9413,7 +9755,7 @@
       <p:grpSpPr/>
       <p:sp>
         <p:nvSpPr>
-          <p:cNvPr id="11" name="Rounded Rectangle 10"/>
+          <p:cNvPr id="12" name="Rounded Rectangle 11"/>
           <p:cNvSpPr/>
           <p:nvPr/>
         </p:nvSpPr>
@@ -9471,7 +9813,19 @@
       </p:sp>
       <p:sp>
         <p:nvSpPr>
-          <p:cNvPr id="3" name="TextBox 2"/>
+          <p:cNvPr id="3" name="Picture Placeholder 2"/>
+          <p:cNvSpPr>
+            <a:spLocks noGrp="1"/>
+          </p:cNvSpPr>
+          <p:nvPr>
+            <p:ph type="pic" idx="11"/>
+          </p:nvPr>
+        </p:nvSpPr>
+        <p:spPr/>
+      </p:sp>
+      <p:sp>
+        <p:nvSpPr>
+          <p:cNvPr id="4" name="TextBox 3"/>
           <p:cNvSpPr txBox="1"/>
           <p:nvPr/>
         </p:nvSpPr>
@@ -9517,7 +9871,7 @@
       </p:sp>
       <p:sp>
         <p:nvSpPr>
-          <p:cNvPr id="4" name="TextBox 3"/>
+          <p:cNvPr id="5" name="TextBox 4"/>
           <p:cNvSpPr txBox="1"/>
           <p:nvPr/>
         </p:nvSpPr>
@@ -9563,7 +9917,7 @@
       </p:sp>
       <p:sp>
         <p:nvSpPr>
-          <p:cNvPr id="5" name="TextBox 4"/>
+          <p:cNvPr id="6" name="TextBox 5"/>
           <p:cNvSpPr txBox="1"/>
           <p:nvPr/>
         </p:nvSpPr>
@@ -9609,7 +9963,7 @@
       </p:sp>
       <p:sp>
         <p:nvSpPr>
-          <p:cNvPr id="6" name="Rounded Rectangle 5"/>
+          <p:cNvPr id="7" name="Rounded Rectangle 6"/>
           <p:cNvSpPr/>
           <p:nvPr/>
         </p:nvSpPr>
@@ -9653,7 +10007,7 @@
       </p:sp>
       <p:sp>
         <p:nvSpPr>
-          <p:cNvPr id="7" name="TextBox 6"/>
+          <p:cNvPr id="8" name="TextBox 7"/>
           <p:cNvSpPr txBox="1"/>
           <p:nvPr/>
         </p:nvSpPr>
@@ -9699,7 +10053,7 @@
       </p:sp>
       <p:sp>
         <p:nvSpPr>
-          <p:cNvPr id="8" name="Rounded Rectangle 7"/>
+          <p:cNvPr id="9" name="Rounded Rectangle 8"/>
           <p:cNvSpPr/>
           <p:nvPr/>
         </p:nvSpPr>
@@ -9743,7 +10097,7 @@
       </p:sp>
       <p:sp>
         <p:nvSpPr>
-          <p:cNvPr id="9" name="TextBox 8"/>
+          <p:cNvPr id="10" name="TextBox 9"/>
           <p:cNvSpPr txBox="1"/>
           <p:nvPr/>
         </p:nvSpPr>
@@ -9789,7 +10143,7 @@
       </p:sp>
       <p:sp>
         <p:nvSpPr>
-          <p:cNvPr id="10" name="TextBox 9"/>
+          <p:cNvPr id="11" name="TextBox 10"/>
           <p:cNvSpPr txBox="1"/>
           <p:nvPr/>
         </p:nvSpPr>
@@ -9835,14 +10189,14 @@
       </p:sp>
       <p:sp>
         <p:nvSpPr>
-          <p:cNvPr id="12" name="TextBox 11"/>
-          <p:cNvSpPr txBox="1"/>
-          <p:nvPr/>
-        </p:nvSpPr>
-        <p:spPr>
-          <a:xfrm>
-            <a:off x="566928" y="1847088"/>
-            <a:ext cx="6428994" cy="256032"/>
+          <p:cNvPr id="13" name="TextBox 12"/>
+          <p:cNvSpPr txBox="1"/>
+          <p:nvPr/>
+        </p:nvSpPr>
+        <p:spPr>
+          <a:xfrm>
+            <a:off x="1038225" y="1874519"/>
+            <a:ext cx="2606040" cy="274320"/>
           </a:xfrm>
           <a:prstGeom prst="rect">
             <a:avLst/>
@@ -9867,21 +10221,113 @@
               </a:spcAft>
             </a:pPr>
             <a:r>
-              <a:rPr sz="1100" b="1">
+              <a:rPr sz="1200" b="1">
                 <a:solidFill>
                   <a:srgbClr val="8C7339"/>
                 </a:solidFill>
                 <a:latin typeface="游明朝"/>
                 <a:ea typeface="游明朝"/>
               </a:rPr>
-              <a:t>Before  →  After</a:t>
-            </a:r>
-          </a:p>
-        </p:txBody>
-      </p:sp>
-      <p:sp>
-        <p:nvSpPr>
-          <p:cNvPr id="13" name="TextBox 12"/>
+              <a:t>Before</a:t>
+            </a:r>
+          </a:p>
+        </p:txBody>
+      </p:sp>
+      <p:sp>
+        <p:nvSpPr>
+          <p:cNvPr id="14" name="TextBox 13"/>
+          <p:cNvSpPr txBox="1"/>
+          <p:nvPr/>
+        </p:nvSpPr>
+        <p:spPr>
+          <a:xfrm>
+            <a:off x="3918585" y="1874519"/>
+            <a:ext cx="2606040" cy="274320"/>
+          </a:xfrm>
+          <a:prstGeom prst="rect">
+            <a:avLst/>
+          </a:prstGeom>
+          <a:noFill/>
+        </p:spPr>
+        <p:txBody>
+          <a:bodyPr wrap="square" anchor="t" lIns="0" rIns="0" tIns="0" bIns="0">
+            <a:spAutoFit/>
+          </a:bodyPr>
+          <a:lstStyle/>
+          <a:p>
+            <a:pPr algn="ctr">
+              <a:lnSpc>
+                <a:spcPct val="112000"/>
+              </a:lnSpc>
+              <a:spcBef>
+                <a:spcPts val="0"/>
+              </a:spcBef>
+              <a:spcAft>
+                <a:spcPts val="200"/>
+              </a:spcAft>
+            </a:pPr>
+            <a:r>
+              <a:rPr sz="1200" b="1">
+                <a:solidFill>
+                  <a:srgbClr val="8C7339"/>
+                </a:solidFill>
+                <a:latin typeface="游明朝"/>
+                <a:ea typeface="游明朝"/>
+              </a:rPr>
+              <a:t>After</a:t>
+            </a:r>
+          </a:p>
+        </p:txBody>
+      </p:sp>
+      <p:sp>
+        <p:nvSpPr>
+          <p:cNvPr id="15" name="TextBox 14"/>
+          <p:cNvSpPr txBox="1"/>
+          <p:nvPr/>
+        </p:nvSpPr>
+        <p:spPr>
+          <a:xfrm>
+            <a:off x="1038225" y="1874519"/>
+            <a:ext cx="5486400" cy="274320"/>
+          </a:xfrm>
+          <a:prstGeom prst="rect">
+            <a:avLst/>
+          </a:prstGeom>
+          <a:noFill/>
+        </p:spPr>
+        <p:txBody>
+          <a:bodyPr wrap="square" anchor="t" lIns="0" rIns="0" tIns="0" bIns="0">
+            <a:spAutoFit/>
+          </a:bodyPr>
+          <a:lstStyle/>
+          <a:p>
+            <a:pPr algn="ctr">
+              <a:lnSpc>
+                <a:spcPct val="112000"/>
+              </a:lnSpc>
+              <a:spcBef>
+                <a:spcPts val="0"/>
+              </a:spcBef>
+              <a:spcAft>
+                <a:spcPts val="200"/>
+              </a:spcAft>
+            </a:pPr>
+            <a:r>
+              <a:rPr sz="1200" b="1">
+                <a:solidFill>
+                  <a:srgbClr val="B0934E"/>
+                </a:solidFill>
+                <a:latin typeface="游明朝"/>
+                <a:ea typeface="游明朝"/>
+              </a:rPr>
+              <a:t>→</a:t>
+            </a:r>
+          </a:p>
+        </p:txBody>
+      </p:sp>
+      <p:sp>
+        <p:nvSpPr>
+          <p:cNvPr id="16" name="TextBox 15"/>
           <p:cNvSpPr txBox="1"/>
           <p:nvPr/>
         </p:nvSpPr>
@@ -9920,14 +10366,14 @@
                 <a:latin typeface="游ゴシック"/>
                 <a:ea typeface="游ゴシック"/>
               </a:rPr>
-              <a:t>▲ 枠をクリックして、Before/After を1枚にした画像を挿入（自動で枠いっぱいに配置されます）</a:t>
-            </a:r>
-          </a:p>
-        </p:txBody>
-      </p:sp>
-      <p:sp>
-        <p:nvSpPr>
-          <p:cNvPr id="14" name="Rounded Rectangle 13"/>
+              <a:t>▲ Before・After それぞれの枠をクリックして写真を挿入（自動で枠いっぱいに配置されます）</a:t>
+            </a:r>
+          </a:p>
+        </p:txBody>
+      </p:sp>
+      <p:sp>
+        <p:nvSpPr>
+          <p:cNvPr id="17" name="Rounded Rectangle 16"/>
           <p:cNvSpPr/>
           <p:nvPr/>
         </p:nvSpPr>
@@ -9971,7 +10417,7 @@
       </p:sp>
       <p:sp>
         <p:nvSpPr>
-          <p:cNvPr id="15" name="TextBox 14"/>
+          <p:cNvPr id="18" name="TextBox 17"/>
           <p:cNvSpPr txBox="1"/>
           <p:nvPr/>
         </p:nvSpPr>
@@ -10017,7 +10463,7 @@
       </p:sp>
       <p:sp>
         <p:nvSpPr>
-          <p:cNvPr id="16" name="TextBox 15"/>
+          <p:cNvPr id="19" name="TextBox 18"/>
           <p:cNvSpPr txBox="1"/>
           <p:nvPr/>
         </p:nvSpPr>
@@ -10063,7 +10509,7 @@
       </p:sp>
       <p:graphicFrame>
         <p:nvGraphicFramePr>
-          <p:cNvPr id="17" name="Table 16"/>
+          <p:cNvPr id="20" name="Table 19"/>
           <p:cNvGraphicFramePr>
             <a:graphicFrameLocks noGrp="1"/>
           </p:cNvGraphicFramePr>
@@ -10233,7 +10679,7 @@
       </p:graphicFrame>
       <p:sp>
         <p:nvSpPr>
-          <p:cNvPr id="18" name="Rounded Rectangle 17"/>
+          <p:cNvPr id="21" name="Rounded Rectangle 20"/>
           <p:cNvSpPr/>
           <p:nvPr/>
         </p:nvSpPr>
@@ -10279,7 +10725,7 @@
       </p:sp>
       <p:sp>
         <p:nvSpPr>
-          <p:cNvPr id="19" name="Rectangle 18"/>
+          <p:cNvPr id="22" name="Rectangle 21"/>
           <p:cNvSpPr/>
           <p:nvPr/>
         </p:nvSpPr>
@@ -10323,7 +10769,7 @@
       </p:sp>
       <p:sp>
         <p:nvSpPr>
-          <p:cNvPr id="20" name="TextBox 19"/>
+          <p:cNvPr id="23" name="TextBox 22"/>
           <p:cNvSpPr txBox="1"/>
           <p:nvPr/>
         </p:nvSpPr>
@@ -10369,7 +10815,7 @@
       </p:sp>
       <p:sp>
         <p:nvSpPr>
-          <p:cNvPr id="21" name="TextBox 20"/>
+          <p:cNvPr id="24" name="TextBox 23"/>
           <p:cNvSpPr txBox="1"/>
           <p:nvPr/>
         </p:nvSpPr>
@@ -10417,7 +10863,7 @@
       </p:sp>
       <p:sp>
         <p:nvSpPr>
-          <p:cNvPr id="22" name="Rounded Rectangle 21"/>
+          <p:cNvPr id="25" name="Rounded Rectangle 24"/>
           <p:cNvSpPr/>
           <p:nvPr/>
         </p:nvSpPr>
@@ -10461,7 +10907,7 @@
       </p:sp>
       <p:sp>
         <p:nvSpPr>
-          <p:cNvPr id="23" name="TextBox 22"/>
+          <p:cNvPr id="26" name="TextBox 25"/>
           <p:cNvSpPr txBox="1"/>
           <p:nvPr/>
         </p:nvSpPr>
@@ -10507,7 +10953,7 @@
       </p:sp>
       <p:sp>
         <p:nvSpPr>
-          <p:cNvPr id="24" name="TextBox 23"/>
+          <p:cNvPr id="27" name="TextBox 26"/>
           <p:cNvSpPr txBox="1"/>
           <p:nvPr/>
         </p:nvSpPr>
@@ -10553,7 +10999,7 @@
       </p:sp>
       <p:sp>
         <p:nvSpPr>
-          <p:cNvPr id="25" name="TextBox 24"/>
+          <p:cNvPr id="28" name="TextBox 27"/>
           <p:cNvSpPr txBox="1"/>
           <p:nvPr/>
         </p:nvSpPr>
@@ -10609,7 +11055,7 @@
       </p:sp>
       <p:sp>
         <p:nvSpPr>
-          <p:cNvPr id="26" name="TextBox 25"/>
+          <p:cNvPr id="29" name="TextBox 28"/>
           <p:cNvSpPr txBox="1"/>
           <p:nvPr/>
         </p:nvSpPr>
@@ -10655,7 +11101,7 @@
       </p:sp>
       <p:sp>
         <p:nvSpPr>
-          <p:cNvPr id="27" name="Rounded Rectangle 26"/>
+          <p:cNvPr id="30" name="Rounded Rectangle 29"/>
           <p:cNvSpPr/>
           <p:nvPr/>
         </p:nvSpPr>
@@ -10701,7 +11147,7 @@
       </p:sp>
       <p:sp>
         <p:nvSpPr>
-          <p:cNvPr id="28" name="TextBox 27"/>
+          <p:cNvPr id="31" name="TextBox 30"/>
           <p:cNvSpPr txBox="1"/>
           <p:nvPr/>
         </p:nvSpPr>
@@ -10747,7 +11193,7 @@
       </p:sp>
       <p:sp>
         <p:nvSpPr>
-          <p:cNvPr id="29" name="TextBox 28"/>
+          <p:cNvPr id="32" name="TextBox 31"/>
           <p:cNvSpPr txBox="1"/>
           <p:nvPr/>
         </p:nvSpPr>
@@ -10793,7 +11239,7 @@
       </p:sp>
       <p:sp>
         <p:nvSpPr>
-          <p:cNvPr id="30" name="TextBox 29"/>
+          <p:cNvPr id="33" name="TextBox 32"/>
           <p:cNvSpPr txBox="1"/>
           <p:nvPr/>
         </p:nvSpPr>
@@ -10839,7 +11285,7 @@
       </p:sp>
       <p:sp>
         <p:nvSpPr>
-          <p:cNvPr id="31" name="TextBox 30"/>
+          <p:cNvPr id="34" name="TextBox 33"/>
           <p:cNvSpPr txBox="1"/>
           <p:nvPr/>
         </p:nvSpPr>
@@ -11797,7 +12243,7 @@
       <p:grpSpPr/>
       <p:sp>
         <p:nvSpPr>
-          <p:cNvPr id="11" name="Rounded Rectangle 10"/>
+          <p:cNvPr id="12" name="Rounded Rectangle 11"/>
           <p:cNvSpPr/>
           <p:nvPr/>
         </p:nvSpPr>
@@ -11855,7 +12301,19 @@
       </p:sp>
       <p:sp>
         <p:nvSpPr>
-          <p:cNvPr id="3" name="TextBox 2"/>
+          <p:cNvPr id="3" name="Picture Placeholder 2"/>
+          <p:cNvSpPr>
+            <a:spLocks noGrp="1"/>
+          </p:cNvSpPr>
+          <p:nvPr>
+            <p:ph type="pic" idx="11"/>
+          </p:nvPr>
+        </p:nvSpPr>
+        <p:spPr/>
+      </p:sp>
+      <p:sp>
+        <p:nvSpPr>
+          <p:cNvPr id="4" name="TextBox 3"/>
           <p:cNvSpPr txBox="1"/>
           <p:nvPr/>
         </p:nvSpPr>
@@ -11901,7 +12359,7 @@
       </p:sp>
       <p:sp>
         <p:nvSpPr>
-          <p:cNvPr id="4" name="TextBox 3"/>
+          <p:cNvPr id="5" name="TextBox 4"/>
           <p:cNvSpPr txBox="1"/>
           <p:nvPr/>
         </p:nvSpPr>
@@ -11947,7 +12405,7 @@
       </p:sp>
       <p:sp>
         <p:nvSpPr>
-          <p:cNvPr id="5" name="TextBox 4"/>
+          <p:cNvPr id="6" name="TextBox 5"/>
           <p:cNvSpPr txBox="1"/>
           <p:nvPr/>
         </p:nvSpPr>
@@ -11993,7 +12451,7 @@
       </p:sp>
       <p:sp>
         <p:nvSpPr>
-          <p:cNvPr id="6" name="Rounded Rectangle 5"/>
+          <p:cNvPr id="7" name="Rounded Rectangle 6"/>
           <p:cNvSpPr/>
           <p:nvPr/>
         </p:nvSpPr>
@@ -12037,7 +12495,7 @@
       </p:sp>
       <p:sp>
         <p:nvSpPr>
-          <p:cNvPr id="7" name="TextBox 6"/>
+          <p:cNvPr id="8" name="TextBox 7"/>
           <p:cNvSpPr txBox="1"/>
           <p:nvPr/>
         </p:nvSpPr>
@@ -12083,7 +12541,7 @@
       </p:sp>
       <p:sp>
         <p:nvSpPr>
-          <p:cNvPr id="8" name="Rounded Rectangle 7"/>
+          <p:cNvPr id="9" name="Rounded Rectangle 8"/>
           <p:cNvSpPr/>
           <p:nvPr/>
         </p:nvSpPr>
@@ -12127,7 +12585,7 @@
       </p:sp>
       <p:sp>
         <p:nvSpPr>
-          <p:cNvPr id="9" name="TextBox 8"/>
+          <p:cNvPr id="10" name="TextBox 9"/>
           <p:cNvSpPr txBox="1"/>
           <p:nvPr/>
         </p:nvSpPr>
@@ -12173,7 +12631,7 @@
       </p:sp>
       <p:sp>
         <p:nvSpPr>
-          <p:cNvPr id="10" name="TextBox 9"/>
+          <p:cNvPr id="11" name="TextBox 10"/>
           <p:cNvSpPr txBox="1"/>
           <p:nvPr/>
         </p:nvSpPr>
@@ -12219,14 +12677,14 @@
       </p:sp>
       <p:sp>
         <p:nvSpPr>
-          <p:cNvPr id="12" name="TextBox 11"/>
-          <p:cNvSpPr txBox="1"/>
-          <p:nvPr/>
-        </p:nvSpPr>
-        <p:spPr>
-          <a:xfrm>
-            <a:off x="566928" y="1847088"/>
-            <a:ext cx="6428994" cy="256032"/>
+          <p:cNvPr id="13" name="TextBox 12"/>
+          <p:cNvSpPr txBox="1"/>
+          <p:nvPr/>
+        </p:nvSpPr>
+        <p:spPr>
+          <a:xfrm>
+            <a:off x="1038225" y="1874519"/>
+            <a:ext cx="2606040" cy="274320"/>
           </a:xfrm>
           <a:prstGeom prst="rect">
             <a:avLst/>
@@ -12251,21 +12709,113 @@
               </a:spcAft>
             </a:pPr>
             <a:r>
-              <a:rPr sz="1100" b="1">
+              <a:rPr sz="1200" b="1">
                 <a:solidFill>
                   <a:srgbClr val="8C7339"/>
                 </a:solidFill>
                 <a:latin typeface="游明朝"/>
                 <a:ea typeface="游明朝"/>
               </a:rPr>
-              <a:t>Before  →  After</a:t>
-            </a:r>
-          </a:p>
-        </p:txBody>
-      </p:sp>
-      <p:sp>
-        <p:nvSpPr>
-          <p:cNvPr id="13" name="TextBox 12"/>
+              <a:t>Before</a:t>
+            </a:r>
+          </a:p>
+        </p:txBody>
+      </p:sp>
+      <p:sp>
+        <p:nvSpPr>
+          <p:cNvPr id="14" name="TextBox 13"/>
+          <p:cNvSpPr txBox="1"/>
+          <p:nvPr/>
+        </p:nvSpPr>
+        <p:spPr>
+          <a:xfrm>
+            <a:off x="3918585" y="1874519"/>
+            <a:ext cx="2606040" cy="274320"/>
+          </a:xfrm>
+          <a:prstGeom prst="rect">
+            <a:avLst/>
+          </a:prstGeom>
+          <a:noFill/>
+        </p:spPr>
+        <p:txBody>
+          <a:bodyPr wrap="square" anchor="t" lIns="0" rIns="0" tIns="0" bIns="0">
+            <a:spAutoFit/>
+          </a:bodyPr>
+          <a:lstStyle/>
+          <a:p>
+            <a:pPr algn="ctr">
+              <a:lnSpc>
+                <a:spcPct val="112000"/>
+              </a:lnSpc>
+              <a:spcBef>
+                <a:spcPts val="0"/>
+              </a:spcBef>
+              <a:spcAft>
+                <a:spcPts val="200"/>
+              </a:spcAft>
+            </a:pPr>
+            <a:r>
+              <a:rPr sz="1200" b="1">
+                <a:solidFill>
+                  <a:srgbClr val="8C7339"/>
+                </a:solidFill>
+                <a:latin typeface="游明朝"/>
+                <a:ea typeface="游明朝"/>
+              </a:rPr>
+              <a:t>After</a:t>
+            </a:r>
+          </a:p>
+        </p:txBody>
+      </p:sp>
+      <p:sp>
+        <p:nvSpPr>
+          <p:cNvPr id="15" name="TextBox 14"/>
+          <p:cNvSpPr txBox="1"/>
+          <p:nvPr/>
+        </p:nvSpPr>
+        <p:spPr>
+          <a:xfrm>
+            <a:off x="1038225" y="1874519"/>
+            <a:ext cx="5486400" cy="274320"/>
+          </a:xfrm>
+          <a:prstGeom prst="rect">
+            <a:avLst/>
+          </a:prstGeom>
+          <a:noFill/>
+        </p:spPr>
+        <p:txBody>
+          <a:bodyPr wrap="square" anchor="t" lIns="0" rIns="0" tIns="0" bIns="0">
+            <a:spAutoFit/>
+          </a:bodyPr>
+          <a:lstStyle/>
+          <a:p>
+            <a:pPr algn="ctr">
+              <a:lnSpc>
+                <a:spcPct val="112000"/>
+              </a:lnSpc>
+              <a:spcBef>
+                <a:spcPts val="0"/>
+              </a:spcBef>
+              <a:spcAft>
+                <a:spcPts val="200"/>
+              </a:spcAft>
+            </a:pPr>
+            <a:r>
+              <a:rPr sz="1200" b="1">
+                <a:solidFill>
+                  <a:srgbClr val="B0934E"/>
+                </a:solidFill>
+                <a:latin typeface="游明朝"/>
+                <a:ea typeface="游明朝"/>
+              </a:rPr>
+              <a:t>→</a:t>
+            </a:r>
+          </a:p>
+        </p:txBody>
+      </p:sp>
+      <p:sp>
+        <p:nvSpPr>
+          <p:cNvPr id="16" name="TextBox 15"/>
           <p:cNvSpPr txBox="1"/>
           <p:nvPr/>
         </p:nvSpPr>
@@ -12304,14 +12854,14 @@
                 <a:latin typeface="游ゴシック"/>
                 <a:ea typeface="游ゴシック"/>
               </a:rPr>
-              <a:t>▲ 枠をクリックして、Before/After を1枚にした画像を挿入（自動で枠いっぱいに配置されます）</a:t>
-            </a:r>
-          </a:p>
-        </p:txBody>
-      </p:sp>
-      <p:sp>
-        <p:nvSpPr>
-          <p:cNvPr id="14" name="Rounded Rectangle 13"/>
+              <a:t>▲ Before・After それぞれの枠をクリックして写真を挿入（自動で枠いっぱいに配置されます）</a:t>
+            </a:r>
+          </a:p>
+        </p:txBody>
+      </p:sp>
+      <p:sp>
+        <p:nvSpPr>
+          <p:cNvPr id="17" name="Rounded Rectangle 16"/>
           <p:cNvSpPr/>
           <p:nvPr/>
         </p:nvSpPr>
@@ -12355,7 +12905,7 @@
       </p:sp>
       <p:sp>
         <p:nvSpPr>
-          <p:cNvPr id="15" name="TextBox 14"/>
+          <p:cNvPr id="18" name="TextBox 17"/>
           <p:cNvSpPr txBox="1"/>
           <p:nvPr/>
         </p:nvSpPr>
@@ -12401,7 +12951,7 @@
       </p:sp>
       <p:sp>
         <p:nvSpPr>
-          <p:cNvPr id="16" name="TextBox 15"/>
+          <p:cNvPr id="19" name="TextBox 18"/>
           <p:cNvSpPr txBox="1"/>
           <p:nvPr/>
         </p:nvSpPr>
@@ -12447,7 +12997,7 @@
       </p:sp>
       <p:graphicFrame>
         <p:nvGraphicFramePr>
-          <p:cNvPr id="17" name="Table 16"/>
+          <p:cNvPr id="20" name="Table 19"/>
           <p:cNvGraphicFramePr>
             <a:graphicFrameLocks noGrp="1"/>
           </p:cNvGraphicFramePr>
@@ -12617,7 +13167,7 @@
       </p:graphicFrame>
       <p:sp>
         <p:nvSpPr>
-          <p:cNvPr id="18" name="Rounded Rectangle 17"/>
+          <p:cNvPr id="21" name="Rounded Rectangle 20"/>
           <p:cNvSpPr/>
           <p:nvPr/>
         </p:nvSpPr>
@@ -12663,7 +13213,7 @@
       </p:sp>
       <p:sp>
         <p:nvSpPr>
-          <p:cNvPr id="19" name="Rectangle 18"/>
+          <p:cNvPr id="22" name="Rectangle 21"/>
           <p:cNvSpPr/>
           <p:nvPr/>
         </p:nvSpPr>
@@ -12707,7 +13257,7 @@
       </p:sp>
       <p:sp>
         <p:nvSpPr>
-          <p:cNvPr id="20" name="TextBox 19"/>
+          <p:cNvPr id="23" name="TextBox 22"/>
           <p:cNvSpPr txBox="1"/>
           <p:nvPr/>
         </p:nvSpPr>
@@ -12753,7 +13303,7 @@
       </p:sp>
       <p:sp>
         <p:nvSpPr>
-          <p:cNvPr id="21" name="TextBox 20"/>
+          <p:cNvPr id="24" name="TextBox 23"/>
           <p:cNvSpPr txBox="1"/>
           <p:nvPr/>
         </p:nvSpPr>
@@ -12801,7 +13351,7 @@
       </p:sp>
       <p:sp>
         <p:nvSpPr>
-          <p:cNvPr id="22" name="Rounded Rectangle 21"/>
+          <p:cNvPr id="25" name="Rounded Rectangle 24"/>
           <p:cNvSpPr/>
           <p:nvPr/>
         </p:nvSpPr>
@@ -12845,7 +13395,7 @@
       </p:sp>
       <p:sp>
         <p:nvSpPr>
-          <p:cNvPr id="23" name="TextBox 22"/>
+          <p:cNvPr id="26" name="TextBox 25"/>
           <p:cNvSpPr txBox="1"/>
           <p:nvPr/>
         </p:nvSpPr>
@@ -12891,7 +13441,7 @@
       </p:sp>
       <p:sp>
         <p:nvSpPr>
-          <p:cNvPr id="24" name="TextBox 23"/>
+          <p:cNvPr id="27" name="TextBox 26"/>
           <p:cNvSpPr txBox="1"/>
           <p:nvPr/>
         </p:nvSpPr>
@@ -12937,7 +13487,7 @@
       </p:sp>
       <p:sp>
         <p:nvSpPr>
-          <p:cNvPr id="25" name="TextBox 24"/>
+          <p:cNvPr id="28" name="TextBox 27"/>
           <p:cNvSpPr txBox="1"/>
           <p:nvPr/>
         </p:nvSpPr>
@@ -12993,7 +13543,7 @@
       </p:sp>
       <p:sp>
         <p:nvSpPr>
-          <p:cNvPr id="26" name="TextBox 25"/>
+          <p:cNvPr id="29" name="TextBox 28"/>
           <p:cNvSpPr txBox="1"/>
           <p:nvPr/>
         </p:nvSpPr>
@@ -13039,7 +13589,7 @@
       </p:sp>
       <p:sp>
         <p:nvSpPr>
-          <p:cNvPr id="27" name="Rounded Rectangle 26"/>
+          <p:cNvPr id="30" name="Rounded Rectangle 29"/>
           <p:cNvSpPr/>
           <p:nvPr/>
         </p:nvSpPr>
@@ -13085,7 +13635,7 @@
       </p:sp>
       <p:sp>
         <p:nvSpPr>
-          <p:cNvPr id="28" name="TextBox 27"/>
+          <p:cNvPr id="31" name="TextBox 30"/>
           <p:cNvSpPr txBox="1"/>
           <p:nvPr/>
         </p:nvSpPr>
@@ -13131,7 +13681,7 @@
       </p:sp>
       <p:sp>
         <p:nvSpPr>
-          <p:cNvPr id="29" name="TextBox 28"/>
+          <p:cNvPr id="32" name="TextBox 31"/>
           <p:cNvSpPr txBox="1"/>
           <p:nvPr/>
         </p:nvSpPr>
@@ -13177,7 +13727,7 @@
       </p:sp>
       <p:sp>
         <p:nvSpPr>
-          <p:cNvPr id="30" name="TextBox 29"/>
+          <p:cNvPr id="33" name="TextBox 32"/>
           <p:cNvSpPr txBox="1"/>
           <p:nvPr/>
         </p:nvSpPr>
@@ -13223,7 +13773,7 @@
       </p:sp>
       <p:sp>
         <p:nvSpPr>
-          <p:cNvPr id="31" name="TextBox 30"/>
+          <p:cNvPr id="34" name="TextBox 33"/>
           <p:cNvSpPr txBox="1"/>
           <p:nvPr/>
         </p:nvSpPr>
@@ -13295,7 +13845,7 @@
       <p:grpSpPr/>
       <p:sp>
         <p:nvSpPr>
-          <p:cNvPr id="11" name="Rounded Rectangle 10"/>
+          <p:cNvPr id="12" name="Rounded Rectangle 11"/>
           <p:cNvSpPr/>
           <p:nvPr/>
         </p:nvSpPr>
@@ -13353,7 +13903,19 @@
       </p:sp>
       <p:sp>
         <p:nvSpPr>
-          <p:cNvPr id="3" name="TextBox 2"/>
+          <p:cNvPr id="3" name="Picture Placeholder 2"/>
+          <p:cNvSpPr>
+            <a:spLocks noGrp="1"/>
+          </p:cNvSpPr>
+          <p:nvPr>
+            <p:ph type="pic" idx="11"/>
+          </p:nvPr>
+        </p:nvSpPr>
+        <p:spPr/>
+      </p:sp>
+      <p:sp>
+        <p:nvSpPr>
+          <p:cNvPr id="4" name="TextBox 3"/>
           <p:cNvSpPr txBox="1"/>
           <p:nvPr/>
         </p:nvSpPr>
@@ -13399,7 +13961,7 @@
       </p:sp>
       <p:sp>
         <p:nvSpPr>
-          <p:cNvPr id="4" name="TextBox 3"/>
+          <p:cNvPr id="5" name="TextBox 4"/>
           <p:cNvSpPr txBox="1"/>
           <p:nvPr/>
         </p:nvSpPr>
@@ -13445,7 +14007,7 @@
       </p:sp>
       <p:sp>
         <p:nvSpPr>
-          <p:cNvPr id="5" name="TextBox 4"/>
+          <p:cNvPr id="6" name="TextBox 5"/>
           <p:cNvSpPr txBox="1"/>
           <p:nvPr/>
         </p:nvSpPr>
@@ -13491,7 +14053,7 @@
       </p:sp>
       <p:sp>
         <p:nvSpPr>
-          <p:cNvPr id="6" name="Rounded Rectangle 5"/>
+          <p:cNvPr id="7" name="Rounded Rectangle 6"/>
           <p:cNvSpPr/>
           <p:nvPr/>
         </p:nvSpPr>
@@ -13535,7 +14097,7 @@
       </p:sp>
       <p:sp>
         <p:nvSpPr>
-          <p:cNvPr id="7" name="TextBox 6"/>
+          <p:cNvPr id="8" name="TextBox 7"/>
           <p:cNvSpPr txBox="1"/>
           <p:nvPr/>
         </p:nvSpPr>
@@ -13581,7 +14143,7 @@
       </p:sp>
       <p:sp>
         <p:nvSpPr>
-          <p:cNvPr id="8" name="Rounded Rectangle 7"/>
+          <p:cNvPr id="9" name="Rounded Rectangle 8"/>
           <p:cNvSpPr/>
           <p:nvPr/>
         </p:nvSpPr>
@@ -13625,7 +14187,7 @@
       </p:sp>
       <p:sp>
         <p:nvSpPr>
-          <p:cNvPr id="9" name="TextBox 8"/>
+          <p:cNvPr id="10" name="TextBox 9"/>
           <p:cNvSpPr txBox="1"/>
           <p:nvPr/>
         </p:nvSpPr>
@@ -13671,7 +14233,7 @@
       </p:sp>
       <p:sp>
         <p:nvSpPr>
-          <p:cNvPr id="10" name="TextBox 9"/>
+          <p:cNvPr id="11" name="TextBox 10"/>
           <p:cNvSpPr txBox="1"/>
           <p:nvPr/>
         </p:nvSpPr>
@@ -13717,14 +14279,14 @@
       </p:sp>
       <p:sp>
         <p:nvSpPr>
-          <p:cNvPr id="12" name="TextBox 11"/>
-          <p:cNvSpPr txBox="1"/>
-          <p:nvPr/>
-        </p:nvSpPr>
-        <p:spPr>
-          <a:xfrm>
-            <a:off x="566928" y="1847088"/>
-            <a:ext cx="6428994" cy="256032"/>
+          <p:cNvPr id="13" name="TextBox 12"/>
+          <p:cNvSpPr txBox="1"/>
+          <p:nvPr/>
+        </p:nvSpPr>
+        <p:spPr>
+          <a:xfrm>
+            <a:off x="1038225" y="1874519"/>
+            <a:ext cx="2606040" cy="274320"/>
           </a:xfrm>
           <a:prstGeom prst="rect">
             <a:avLst/>
@@ -13749,21 +14311,113 @@
               </a:spcAft>
             </a:pPr>
             <a:r>
-              <a:rPr sz="1100" b="1">
+              <a:rPr sz="1200" b="1">
                 <a:solidFill>
                   <a:srgbClr val="8C7339"/>
                 </a:solidFill>
                 <a:latin typeface="游明朝"/>
                 <a:ea typeface="游明朝"/>
               </a:rPr>
-              <a:t>Before  →  After</a:t>
-            </a:r>
-          </a:p>
-        </p:txBody>
-      </p:sp>
-      <p:sp>
-        <p:nvSpPr>
-          <p:cNvPr id="13" name="TextBox 12"/>
+              <a:t>Before</a:t>
+            </a:r>
+          </a:p>
+        </p:txBody>
+      </p:sp>
+      <p:sp>
+        <p:nvSpPr>
+          <p:cNvPr id="14" name="TextBox 13"/>
+          <p:cNvSpPr txBox="1"/>
+          <p:nvPr/>
+        </p:nvSpPr>
+        <p:spPr>
+          <a:xfrm>
+            <a:off x="3918585" y="1874519"/>
+            <a:ext cx="2606040" cy="274320"/>
+          </a:xfrm>
+          <a:prstGeom prst="rect">
+            <a:avLst/>
+          </a:prstGeom>
+          <a:noFill/>
+        </p:spPr>
+        <p:txBody>
+          <a:bodyPr wrap="square" anchor="t" lIns="0" rIns="0" tIns="0" bIns="0">
+            <a:spAutoFit/>
+          </a:bodyPr>
+          <a:lstStyle/>
+          <a:p>
+            <a:pPr algn="ctr">
+              <a:lnSpc>
+                <a:spcPct val="112000"/>
+              </a:lnSpc>
+              <a:spcBef>
+                <a:spcPts val="0"/>
+              </a:spcBef>
+              <a:spcAft>
+                <a:spcPts val="200"/>
+              </a:spcAft>
+            </a:pPr>
+            <a:r>
+              <a:rPr sz="1200" b="1">
+                <a:solidFill>
+                  <a:srgbClr val="8C7339"/>
+                </a:solidFill>
+                <a:latin typeface="游明朝"/>
+                <a:ea typeface="游明朝"/>
+              </a:rPr>
+              <a:t>After</a:t>
+            </a:r>
+          </a:p>
+        </p:txBody>
+      </p:sp>
+      <p:sp>
+        <p:nvSpPr>
+          <p:cNvPr id="15" name="TextBox 14"/>
+          <p:cNvSpPr txBox="1"/>
+          <p:nvPr/>
+        </p:nvSpPr>
+        <p:spPr>
+          <a:xfrm>
+            <a:off x="1038225" y="1874519"/>
+            <a:ext cx="5486400" cy="274320"/>
+          </a:xfrm>
+          <a:prstGeom prst="rect">
+            <a:avLst/>
+          </a:prstGeom>
+          <a:noFill/>
+        </p:spPr>
+        <p:txBody>
+          <a:bodyPr wrap="square" anchor="t" lIns="0" rIns="0" tIns="0" bIns="0">
+            <a:spAutoFit/>
+          </a:bodyPr>
+          <a:lstStyle/>
+          <a:p>
+            <a:pPr algn="ctr">
+              <a:lnSpc>
+                <a:spcPct val="112000"/>
+              </a:lnSpc>
+              <a:spcBef>
+                <a:spcPts val="0"/>
+              </a:spcBef>
+              <a:spcAft>
+                <a:spcPts val="200"/>
+              </a:spcAft>
+            </a:pPr>
+            <a:r>
+              <a:rPr sz="1200" b="1">
+                <a:solidFill>
+                  <a:srgbClr val="B0934E"/>
+                </a:solidFill>
+                <a:latin typeface="游明朝"/>
+                <a:ea typeface="游明朝"/>
+              </a:rPr>
+              <a:t>→</a:t>
+            </a:r>
+          </a:p>
+        </p:txBody>
+      </p:sp>
+      <p:sp>
+        <p:nvSpPr>
+          <p:cNvPr id="16" name="TextBox 15"/>
           <p:cNvSpPr txBox="1"/>
           <p:nvPr/>
         </p:nvSpPr>
@@ -13802,14 +14456,14 @@
                 <a:latin typeface="游ゴシック"/>
                 <a:ea typeface="游ゴシック"/>
               </a:rPr>
-              <a:t>▲ 枠をクリックして、Before/After を1枚にした画像を挿入（自動で枠いっぱいに配置されます）</a:t>
-            </a:r>
-          </a:p>
-        </p:txBody>
-      </p:sp>
-      <p:sp>
-        <p:nvSpPr>
-          <p:cNvPr id="14" name="Rounded Rectangle 13"/>
+              <a:t>▲ Before・After それぞれの枠をクリックして写真を挿入（自動で枠いっぱいに配置されます）</a:t>
+            </a:r>
+          </a:p>
+        </p:txBody>
+      </p:sp>
+      <p:sp>
+        <p:nvSpPr>
+          <p:cNvPr id="17" name="Rounded Rectangle 16"/>
           <p:cNvSpPr/>
           <p:nvPr/>
         </p:nvSpPr>
@@ -13853,7 +14507,7 @@
       </p:sp>
       <p:sp>
         <p:nvSpPr>
-          <p:cNvPr id="15" name="TextBox 14"/>
+          <p:cNvPr id="18" name="TextBox 17"/>
           <p:cNvSpPr txBox="1"/>
           <p:nvPr/>
         </p:nvSpPr>
@@ -13899,7 +14553,7 @@
       </p:sp>
       <p:sp>
         <p:nvSpPr>
-          <p:cNvPr id="16" name="TextBox 15"/>
+          <p:cNvPr id="19" name="TextBox 18"/>
           <p:cNvSpPr txBox="1"/>
           <p:nvPr/>
         </p:nvSpPr>
@@ -13945,7 +14599,7 @@
       </p:sp>
       <p:graphicFrame>
         <p:nvGraphicFramePr>
-          <p:cNvPr id="17" name="Table 16"/>
+          <p:cNvPr id="20" name="Table 19"/>
           <p:cNvGraphicFramePr>
             <a:graphicFrameLocks noGrp="1"/>
           </p:cNvGraphicFramePr>
@@ -14115,7 +14769,7 @@
       </p:graphicFrame>
       <p:sp>
         <p:nvSpPr>
-          <p:cNvPr id="18" name="Rounded Rectangle 17"/>
+          <p:cNvPr id="21" name="Rounded Rectangle 20"/>
           <p:cNvSpPr/>
           <p:nvPr/>
         </p:nvSpPr>
@@ -14161,7 +14815,7 @@
       </p:sp>
       <p:sp>
         <p:nvSpPr>
-          <p:cNvPr id="19" name="Rectangle 18"/>
+          <p:cNvPr id="22" name="Rectangle 21"/>
           <p:cNvSpPr/>
           <p:nvPr/>
         </p:nvSpPr>
@@ -14205,7 +14859,7 @@
       </p:sp>
       <p:sp>
         <p:nvSpPr>
-          <p:cNvPr id="20" name="TextBox 19"/>
+          <p:cNvPr id="23" name="TextBox 22"/>
           <p:cNvSpPr txBox="1"/>
           <p:nvPr/>
         </p:nvSpPr>
@@ -14251,7 +14905,7 @@
       </p:sp>
       <p:sp>
         <p:nvSpPr>
-          <p:cNvPr id="21" name="TextBox 20"/>
+          <p:cNvPr id="24" name="TextBox 23"/>
           <p:cNvSpPr txBox="1"/>
           <p:nvPr/>
         </p:nvSpPr>
@@ -14299,7 +14953,7 @@
       </p:sp>
       <p:sp>
         <p:nvSpPr>
-          <p:cNvPr id="22" name="Rounded Rectangle 21"/>
+          <p:cNvPr id="25" name="Rounded Rectangle 24"/>
           <p:cNvSpPr/>
           <p:nvPr/>
         </p:nvSpPr>
@@ -14343,7 +14997,7 @@
       </p:sp>
       <p:sp>
         <p:nvSpPr>
-          <p:cNvPr id="23" name="TextBox 22"/>
+          <p:cNvPr id="26" name="TextBox 25"/>
           <p:cNvSpPr txBox="1"/>
           <p:nvPr/>
         </p:nvSpPr>
@@ -14389,7 +15043,7 @@
       </p:sp>
       <p:sp>
         <p:nvSpPr>
-          <p:cNvPr id="24" name="TextBox 23"/>
+          <p:cNvPr id="27" name="TextBox 26"/>
           <p:cNvSpPr txBox="1"/>
           <p:nvPr/>
         </p:nvSpPr>
@@ -14435,7 +15089,7 @@
       </p:sp>
       <p:sp>
         <p:nvSpPr>
-          <p:cNvPr id="25" name="TextBox 24"/>
+          <p:cNvPr id="28" name="TextBox 27"/>
           <p:cNvSpPr txBox="1"/>
           <p:nvPr/>
         </p:nvSpPr>
@@ -14491,7 +15145,7 @@
       </p:sp>
       <p:sp>
         <p:nvSpPr>
-          <p:cNvPr id="26" name="TextBox 25"/>
+          <p:cNvPr id="29" name="TextBox 28"/>
           <p:cNvSpPr txBox="1"/>
           <p:nvPr/>
         </p:nvSpPr>
@@ -14537,7 +15191,7 @@
       </p:sp>
       <p:sp>
         <p:nvSpPr>
-          <p:cNvPr id="27" name="Rounded Rectangle 26"/>
+          <p:cNvPr id="30" name="Rounded Rectangle 29"/>
           <p:cNvSpPr/>
           <p:nvPr/>
         </p:nvSpPr>
@@ -14583,7 +15237,7 @@
       </p:sp>
       <p:sp>
         <p:nvSpPr>
-          <p:cNvPr id="28" name="TextBox 27"/>
+          <p:cNvPr id="31" name="TextBox 30"/>
           <p:cNvSpPr txBox="1"/>
           <p:nvPr/>
         </p:nvSpPr>
@@ -14629,7 +15283,7 @@
       </p:sp>
       <p:sp>
         <p:nvSpPr>
-          <p:cNvPr id="29" name="TextBox 28"/>
+          <p:cNvPr id="32" name="TextBox 31"/>
           <p:cNvSpPr txBox="1"/>
           <p:nvPr/>
         </p:nvSpPr>
@@ -14675,7 +15329,7 @@
       </p:sp>
       <p:sp>
         <p:nvSpPr>
-          <p:cNvPr id="30" name="TextBox 29"/>
+          <p:cNvPr id="33" name="TextBox 32"/>
           <p:cNvSpPr txBox="1"/>
           <p:nvPr/>
         </p:nvSpPr>
@@ -14721,7 +15375,7 @@
       </p:sp>
       <p:sp>
         <p:nvSpPr>
-          <p:cNvPr id="31" name="TextBox 30"/>
+          <p:cNvPr id="34" name="TextBox 33"/>
           <p:cNvSpPr txBox="1"/>
           <p:nvPr/>
         </p:nvSpPr>
@@ -14793,7 +15447,7 @@
       <p:grpSpPr/>
       <p:sp>
         <p:nvSpPr>
-          <p:cNvPr id="11" name="Rounded Rectangle 10"/>
+          <p:cNvPr id="12" name="Rounded Rectangle 11"/>
           <p:cNvSpPr/>
           <p:nvPr/>
         </p:nvSpPr>
@@ -14851,7 +15505,19 @@
       </p:sp>
       <p:sp>
         <p:nvSpPr>
-          <p:cNvPr id="3" name="TextBox 2"/>
+          <p:cNvPr id="3" name="Picture Placeholder 2"/>
+          <p:cNvSpPr>
+            <a:spLocks noGrp="1"/>
+          </p:cNvSpPr>
+          <p:nvPr>
+            <p:ph type="pic" idx="11"/>
+          </p:nvPr>
+        </p:nvSpPr>
+        <p:spPr/>
+      </p:sp>
+      <p:sp>
+        <p:nvSpPr>
+          <p:cNvPr id="4" name="TextBox 3"/>
           <p:cNvSpPr txBox="1"/>
           <p:nvPr/>
         </p:nvSpPr>
@@ -14897,7 +15563,7 @@
       </p:sp>
       <p:sp>
         <p:nvSpPr>
-          <p:cNvPr id="4" name="TextBox 3"/>
+          <p:cNvPr id="5" name="TextBox 4"/>
           <p:cNvSpPr txBox="1"/>
           <p:nvPr/>
         </p:nvSpPr>
@@ -14943,7 +15609,7 @@
       </p:sp>
       <p:sp>
         <p:nvSpPr>
-          <p:cNvPr id="5" name="TextBox 4"/>
+          <p:cNvPr id="6" name="TextBox 5"/>
           <p:cNvSpPr txBox="1"/>
           <p:nvPr/>
         </p:nvSpPr>
@@ -14989,7 +15655,7 @@
       </p:sp>
       <p:sp>
         <p:nvSpPr>
-          <p:cNvPr id="6" name="Rounded Rectangle 5"/>
+          <p:cNvPr id="7" name="Rounded Rectangle 6"/>
           <p:cNvSpPr/>
           <p:nvPr/>
         </p:nvSpPr>
@@ -15033,7 +15699,7 @@
       </p:sp>
       <p:sp>
         <p:nvSpPr>
-          <p:cNvPr id="7" name="TextBox 6"/>
+          <p:cNvPr id="8" name="TextBox 7"/>
           <p:cNvSpPr txBox="1"/>
           <p:nvPr/>
         </p:nvSpPr>
@@ -15079,7 +15745,7 @@
       </p:sp>
       <p:sp>
         <p:nvSpPr>
-          <p:cNvPr id="8" name="Rounded Rectangle 7"/>
+          <p:cNvPr id="9" name="Rounded Rectangle 8"/>
           <p:cNvSpPr/>
           <p:nvPr/>
         </p:nvSpPr>
@@ -15123,7 +15789,7 @@
       </p:sp>
       <p:sp>
         <p:nvSpPr>
-          <p:cNvPr id="9" name="TextBox 8"/>
+          <p:cNvPr id="10" name="TextBox 9"/>
           <p:cNvSpPr txBox="1"/>
           <p:nvPr/>
         </p:nvSpPr>
@@ -15169,7 +15835,7 @@
       </p:sp>
       <p:sp>
         <p:nvSpPr>
-          <p:cNvPr id="10" name="TextBox 9"/>
+          <p:cNvPr id="11" name="TextBox 10"/>
           <p:cNvSpPr txBox="1"/>
           <p:nvPr/>
         </p:nvSpPr>
@@ -15215,14 +15881,14 @@
       </p:sp>
       <p:sp>
         <p:nvSpPr>
-          <p:cNvPr id="12" name="TextBox 11"/>
-          <p:cNvSpPr txBox="1"/>
-          <p:nvPr/>
-        </p:nvSpPr>
-        <p:spPr>
-          <a:xfrm>
-            <a:off x="566928" y="1847088"/>
-            <a:ext cx="6428994" cy="256032"/>
+          <p:cNvPr id="13" name="TextBox 12"/>
+          <p:cNvSpPr txBox="1"/>
+          <p:nvPr/>
+        </p:nvSpPr>
+        <p:spPr>
+          <a:xfrm>
+            <a:off x="1038225" y="1874519"/>
+            <a:ext cx="2606040" cy="274320"/>
           </a:xfrm>
           <a:prstGeom prst="rect">
             <a:avLst/>
@@ -15247,21 +15913,113 @@
               </a:spcAft>
             </a:pPr>
             <a:r>
-              <a:rPr sz="1100" b="1">
+              <a:rPr sz="1200" b="1">
                 <a:solidFill>
                   <a:srgbClr val="8C7339"/>
                 </a:solidFill>
                 <a:latin typeface="游明朝"/>
                 <a:ea typeface="游明朝"/>
               </a:rPr>
-              <a:t>Before  →  After</a:t>
-            </a:r>
-          </a:p>
-        </p:txBody>
-      </p:sp>
-      <p:sp>
-        <p:nvSpPr>
-          <p:cNvPr id="13" name="TextBox 12"/>
+              <a:t>Before</a:t>
+            </a:r>
+          </a:p>
+        </p:txBody>
+      </p:sp>
+      <p:sp>
+        <p:nvSpPr>
+          <p:cNvPr id="14" name="TextBox 13"/>
+          <p:cNvSpPr txBox="1"/>
+          <p:nvPr/>
+        </p:nvSpPr>
+        <p:spPr>
+          <a:xfrm>
+            <a:off x="3918585" y="1874519"/>
+            <a:ext cx="2606040" cy="274320"/>
+          </a:xfrm>
+          <a:prstGeom prst="rect">
+            <a:avLst/>
+          </a:prstGeom>
+          <a:noFill/>
+        </p:spPr>
+        <p:txBody>
+          <a:bodyPr wrap="square" anchor="t" lIns="0" rIns="0" tIns="0" bIns="0">
+            <a:spAutoFit/>
+          </a:bodyPr>
+          <a:lstStyle/>
+          <a:p>
+            <a:pPr algn="ctr">
+              <a:lnSpc>
+                <a:spcPct val="112000"/>
+              </a:lnSpc>
+              <a:spcBef>
+                <a:spcPts val="0"/>
+              </a:spcBef>
+              <a:spcAft>
+                <a:spcPts val="200"/>
+              </a:spcAft>
+            </a:pPr>
+            <a:r>
+              <a:rPr sz="1200" b="1">
+                <a:solidFill>
+                  <a:srgbClr val="8C7339"/>
+                </a:solidFill>
+                <a:latin typeface="游明朝"/>
+                <a:ea typeface="游明朝"/>
+              </a:rPr>
+              <a:t>After</a:t>
+            </a:r>
+          </a:p>
+        </p:txBody>
+      </p:sp>
+      <p:sp>
+        <p:nvSpPr>
+          <p:cNvPr id="15" name="TextBox 14"/>
+          <p:cNvSpPr txBox="1"/>
+          <p:nvPr/>
+        </p:nvSpPr>
+        <p:spPr>
+          <a:xfrm>
+            <a:off x="1038225" y="1874519"/>
+            <a:ext cx="5486400" cy="274320"/>
+          </a:xfrm>
+          <a:prstGeom prst="rect">
+            <a:avLst/>
+          </a:prstGeom>
+          <a:noFill/>
+        </p:spPr>
+        <p:txBody>
+          <a:bodyPr wrap="square" anchor="t" lIns="0" rIns="0" tIns="0" bIns="0">
+            <a:spAutoFit/>
+          </a:bodyPr>
+          <a:lstStyle/>
+          <a:p>
+            <a:pPr algn="ctr">
+              <a:lnSpc>
+                <a:spcPct val="112000"/>
+              </a:lnSpc>
+              <a:spcBef>
+                <a:spcPts val="0"/>
+              </a:spcBef>
+              <a:spcAft>
+                <a:spcPts val="200"/>
+              </a:spcAft>
+            </a:pPr>
+            <a:r>
+              <a:rPr sz="1200" b="1">
+                <a:solidFill>
+                  <a:srgbClr val="B0934E"/>
+                </a:solidFill>
+                <a:latin typeface="游明朝"/>
+                <a:ea typeface="游明朝"/>
+              </a:rPr>
+              <a:t>→</a:t>
+            </a:r>
+          </a:p>
+        </p:txBody>
+      </p:sp>
+      <p:sp>
+        <p:nvSpPr>
+          <p:cNvPr id="16" name="TextBox 15"/>
           <p:cNvSpPr txBox="1"/>
           <p:nvPr/>
         </p:nvSpPr>
@@ -15300,14 +16058,14 @@
                 <a:latin typeface="游ゴシック"/>
                 <a:ea typeface="游ゴシック"/>
               </a:rPr>
-              <a:t>▲ 枠をクリックして、Before/After を1枚にした画像を挿入（自動で枠いっぱいに配置されます）</a:t>
-            </a:r>
-          </a:p>
-        </p:txBody>
-      </p:sp>
-      <p:sp>
-        <p:nvSpPr>
-          <p:cNvPr id="14" name="Rounded Rectangle 13"/>
+              <a:t>▲ Before・After それぞれの枠をクリックして写真を挿入（自動で枠いっぱいに配置されます）</a:t>
+            </a:r>
+          </a:p>
+        </p:txBody>
+      </p:sp>
+      <p:sp>
+        <p:nvSpPr>
+          <p:cNvPr id="17" name="Rounded Rectangle 16"/>
           <p:cNvSpPr/>
           <p:nvPr/>
         </p:nvSpPr>
@@ -15351,7 +16109,7 @@
       </p:sp>
       <p:sp>
         <p:nvSpPr>
-          <p:cNvPr id="15" name="TextBox 14"/>
+          <p:cNvPr id="18" name="TextBox 17"/>
           <p:cNvSpPr txBox="1"/>
           <p:nvPr/>
         </p:nvSpPr>
@@ -15397,7 +16155,7 @@
       </p:sp>
       <p:sp>
         <p:nvSpPr>
-          <p:cNvPr id="16" name="TextBox 15"/>
+          <p:cNvPr id="19" name="TextBox 18"/>
           <p:cNvSpPr txBox="1"/>
           <p:nvPr/>
         </p:nvSpPr>
@@ -15443,7 +16201,7 @@
       </p:sp>
       <p:graphicFrame>
         <p:nvGraphicFramePr>
-          <p:cNvPr id="17" name="Table 16"/>
+          <p:cNvPr id="20" name="Table 19"/>
           <p:cNvGraphicFramePr>
             <a:graphicFrameLocks noGrp="1"/>
           </p:cNvGraphicFramePr>
@@ -15613,7 +16371,7 @@
       </p:graphicFrame>
       <p:sp>
         <p:nvSpPr>
-          <p:cNvPr id="18" name="Rounded Rectangle 17"/>
+          <p:cNvPr id="21" name="Rounded Rectangle 20"/>
           <p:cNvSpPr/>
           <p:nvPr/>
         </p:nvSpPr>
@@ -15659,7 +16417,7 @@
       </p:sp>
       <p:sp>
         <p:nvSpPr>
-          <p:cNvPr id="19" name="Rectangle 18"/>
+          <p:cNvPr id="22" name="Rectangle 21"/>
           <p:cNvSpPr/>
           <p:nvPr/>
         </p:nvSpPr>
@@ -15703,7 +16461,7 @@
       </p:sp>
       <p:sp>
         <p:nvSpPr>
-          <p:cNvPr id="20" name="TextBox 19"/>
+          <p:cNvPr id="23" name="TextBox 22"/>
           <p:cNvSpPr txBox="1"/>
           <p:nvPr/>
         </p:nvSpPr>
@@ -15749,7 +16507,7 @@
       </p:sp>
       <p:sp>
         <p:nvSpPr>
-          <p:cNvPr id="21" name="TextBox 20"/>
+          <p:cNvPr id="24" name="TextBox 23"/>
           <p:cNvSpPr txBox="1"/>
           <p:nvPr/>
         </p:nvSpPr>
@@ -15797,7 +16555,7 @@
       </p:sp>
       <p:sp>
         <p:nvSpPr>
-          <p:cNvPr id="22" name="Rounded Rectangle 21"/>
+          <p:cNvPr id="25" name="Rounded Rectangle 24"/>
           <p:cNvSpPr/>
           <p:nvPr/>
         </p:nvSpPr>
@@ -15841,7 +16599,7 @@
       </p:sp>
       <p:sp>
         <p:nvSpPr>
-          <p:cNvPr id="23" name="TextBox 22"/>
+          <p:cNvPr id="26" name="TextBox 25"/>
           <p:cNvSpPr txBox="1"/>
           <p:nvPr/>
         </p:nvSpPr>
@@ -15887,7 +16645,7 @@
       </p:sp>
       <p:sp>
         <p:nvSpPr>
-          <p:cNvPr id="24" name="TextBox 23"/>
+          <p:cNvPr id="27" name="TextBox 26"/>
           <p:cNvSpPr txBox="1"/>
           <p:nvPr/>
         </p:nvSpPr>
@@ -15933,7 +16691,7 @@
       </p:sp>
       <p:sp>
         <p:nvSpPr>
-          <p:cNvPr id="25" name="TextBox 24"/>
+          <p:cNvPr id="28" name="TextBox 27"/>
           <p:cNvSpPr txBox="1"/>
           <p:nvPr/>
         </p:nvSpPr>
@@ -15989,7 +16747,7 @@
       </p:sp>
       <p:sp>
         <p:nvSpPr>
-          <p:cNvPr id="26" name="TextBox 25"/>
+          <p:cNvPr id="29" name="TextBox 28"/>
           <p:cNvSpPr txBox="1"/>
           <p:nvPr/>
         </p:nvSpPr>
@@ -16035,7 +16793,7 @@
       </p:sp>
       <p:sp>
         <p:nvSpPr>
-          <p:cNvPr id="27" name="Rounded Rectangle 26"/>
+          <p:cNvPr id="30" name="Rounded Rectangle 29"/>
           <p:cNvSpPr/>
           <p:nvPr/>
         </p:nvSpPr>
@@ -16081,7 +16839,7 @@
       </p:sp>
       <p:sp>
         <p:nvSpPr>
-          <p:cNvPr id="28" name="TextBox 27"/>
+          <p:cNvPr id="31" name="TextBox 30"/>
           <p:cNvSpPr txBox="1"/>
           <p:nvPr/>
         </p:nvSpPr>
@@ -16127,7 +16885,7 @@
       </p:sp>
       <p:sp>
         <p:nvSpPr>
-          <p:cNvPr id="29" name="TextBox 28"/>
+          <p:cNvPr id="32" name="TextBox 31"/>
           <p:cNvSpPr txBox="1"/>
           <p:nvPr/>
         </p:nvSpPr>
@@ -16173,7 +16931,7 @@
       </p:sp>
       <p:sp>
         <p:nvSpPr>
-          <p:cNvPr id="30" name="TextBox 29"/>
+          <p:cNvPr id="33" name="TextBox 32"/>
           <p:cNvSpPr txBox="1"/>
           <p:nvPr/>
         </p:nvSpPr>
@@ -16219,7 +16977,7 @@
       </p:sp>
       <p:sp>
         <p:nvSpPr>
-          <p:cNvPr id="31" name="TextBox 30"/>
+          <p:cNvPr id="34" name="TextBox 33"/>
           <p:cNvSpPr txBox="1"/>
           <p:nvPr/>
         </p:nvSpPr>
@@ -18752,7 +19510,7 @@
       <p:grpSpPr/>
       <p:sp>
         <p:nvSpPr>
-          <p:cNvPr id="11" name="Rounded Rectangle 10"/>
+          <p:cNvPr id="12" name="Rounded Rectangle 11"/>
           <p:cNvSpPr/>
           <p:nvPr/>
         </p:nvSpPr>
@@ -18810,7 +19568,19 @@
       </p:sp>
       <p:sp>
         <p:nvSpPr>
-          <p:cNvPr id="3" name="TextBox 2"/>
+          <p:cNvPr id="3" name="Picture Placeholder 2"/>
+          <p:cNvSpPr>
+            <a:spLocks noGrp="1"/>
+          </p:cNvSpPr>
+          <p:nvPr>
+            <p:ph type="pic" idx="11"/>
+          </p:nvPr>
+        </p:nvSpPr>
+        <p:spPr/>
+      </p:sp>
+      <p:sp>
+        <p:nvSpPr>
+          <p:cNvPr id="4" name="TextBox 3"/>
           <p:cNvSpPr txBox="1"/>
           <p:nvPr/>
         </p:nvSpPr>
@@ -18856,7 +19626,7 @@
       </p:sp>
       <p:sp>
         <p:nvSpPr>
-          <p:cNvPr id="4" name="TextBox 3"/>
+          <p:cNvPr id="5" name="TextBox 4"/>
           <p:cNvSpPr txBox="1"/>
           <p:nvPr/>
         </p:nvSpPr>
@@ -18902,7 +19672,7 @@
       </p:sp>
       <p:sp>
         <p:nvSpPr>
-          <p:cNvPr id="5" name="TextBox 4"/>
+          <p:cNvPr id="6" name="TextBox 5"/>
           <p:cNvSpPr txBox="1"/>
           <p:nvPr/>
         </p:nvSpPr>
@@ -18948,7 +19718,7 @@
       </p:sp>
       <p:sp>
         <p:nvSpPr>
-          <p:cNvPr id="6" name="Rounded Rectangle 5"/>
+          <p:cNvPr id="7" name="Rounded Rectangle 6"/>
           <p:cNvSpPr/>
           <p:nvPr/>
         </p:nvSpPr>
@@ -18992,7 +19762,7 @@
       </p:sp>
       <p:sp>
         <p:nvSpPr>
-          <p:cNvPr id="7" name="TextBox 6"/>
+          <p:cNvPr id="8" name="TextBox 7"/>
           <p:cNvSpPr txBox="1"/>
           <p:nvPr/>
         </p:nvSpPr>
@@ -19038,7 +19808,7 @@
       </p:sp>
       <p:sp>
         <p:nvSpPr>
-          <p:cNvPr id="8" name="Rounded Rectangle 7"/>
+          <p:cNvPr id="9" name="Rounded Rectangle 8"/>
           <p:cNvSpPr/>
           <p:nvPr/>
         </p:nvSpPr>
@@ -19082,7 +19852,7 @@
       </p:sp>
       <p:sp>
         <p:nvSpPr>
-          <p:cNvPr id="9" name="TextBox 8"/>
+          <p:cNvPr id="10" name="TextBox 9"/>
           <p:cNvSpPr txBox="1"/>
           <p:nvPr/>
         </p:nvSpPr>
@@ -19128,7 +19898,7 @@
       </p:sp>
       <p:sp>
         <p:nvSpPr>
-          <p:cNvPr id="10" name="TextBox 9"/>
+          <p:cNvPr id="11" name="TextBox 10"/>
           <p:cNvSpPr txBox="1"/>
           <p:nvPr/>
         </p:nvSpPr>
@@ -19174,14 +19944,14 @@
       </p:sp>
       <p:sp>
         <p:nvSpPr>
-          <p:cNvPr id="12" name="TextBox 11"/>
-          <p:cNvSpPr txBox="1"/>
-          <p:nvPr/>
-        </p:nvSpPr>
-        <p:spPr>
-          <a:xfrm>
-            <a:off x="566928" y="1847088"/>
-            <a:ext cx="6428994" cy="256032"/>
+          <p:cNvPr id="13" name="TextBox 12"/>
+          <p:cNvSpPr txBox="1"/>
+          <p:nvPr/>
+        </p:nvSpPr>
+        <p:spPr>
+          <a:xfrm>
+            <a:off x="1038225" y="1874519"/>
+            <a:ext cx="2606040" cy="274320"/>
           </a:xfrm>
           <a:prstGeom prst="rect">
             <a:avLst/>
@@ -19206,21 +19976,113 @@
               </a:spcAft>
             </a:pPr>
             <a:r>
-              <a:rPr sz="1100" b="1">
+              <a:rPr sz="1200" b="1">
                 <a:solidFill>
                   <a:srgbClr val="8C7339"/>
                 </a:solidFill>
                 <a:latin typeface="游明朝"/>
                 <a:ea typeface="游明朝"/>
               </a:rPr>
-              <a:t>Before  →  After</a:t>
-            </a:r>
-          </a:p>
-        </p:txBody>
-      </p:sp>
-      <p:sp>
-        <p:nvSpPr>
-          <p:cNvPr id="13" name="TextBox 12"/>
+              <a:t>Before</a:t>
+            </a:r>
+          </a:p>
+        </p:txBody>
+      </p:sp>
+      <p:sp>
+        <p:nvSpPr>
+          <p:cNvPr id="14" name="TextBox 13"/>
+          <p:cNvSpPr txBox="1"/>
+          <p:nvPr/>
+        </p:nvSpPr>
+        <p:spPr>
+          <a:xfrm>
+            <a:off x="3918585" y="1874519"/>
+            <a:ext cx="2606040" cy="274320"/>
+          </a:xfrm>
+          <a:prstGeom prst="rect">
+            <a:avLst/>
+          </a:prstGeom>
+          <a:noFill/>
+        </p:spPr>
+        <p:txBody>
+          <a:bodyPr wrap="square" anchor="t" lIns="0" rIns="0" tIns="0" bIns="0">
+            <a:spAutoFit/>
+          </a:bodyPr>
+          <a:lstStyle/>
+          <a:p>
+            <a:pPr algn="ctr">
+              <a:lnSpc>
+                <a:spcPct val="112000"/>
+              </a:lnSpc>
+              <a:spcBef>
+                <a:spcPts val="0"/>
+              </a:spcBef>
+              <a:spcAft>
+                <a:spcPts val="200"/>
+              </a:spcAft>
+            </a:pPr>
+            <a:r>
+              <a:rPr sz="1200" b="1">
+                <a:solidFill>
+                  <a:srgbClr val="8C7339"/>
+                </a:solidFill>
+                <a:latin typeface="游明朝"/>
+                <a:ea typeface="游明朝"/>
+              </a:rPr>
+              <a:t>After</a:t>
+            </a:r>
+          </a:p>
+        </p:txBody>
+      </p:sp>
+      <p:sp>
+        <p:nvSpPr>
+          <p:cNvPr id="15" name="TextBox 14"/>
+          <p:cNvSpPr txBox="1"/>
+          <p:nvPr/>
+        </p:nvSpPr>
+        <p:spPr>
+          <a:xfrm>
+            <a:off x="1038225" y="1874519"/>
+            <a:ext cx="5486400" cy="274320"/>
+          </a:xfrm>
+          <a:prstGeom prst="rect">
+            <a:avLst/>
+          </a:prstGeom>
+          <a:noFill/>
+        </p:spPr>
+        <p:txBody>
+          <a:bodyPr wrap="square" anchor="t" lIns="0" rIns="0" tIns="0" bIns="0">
+            <a:spAutoFit/>
+          </a:bodyPr>
+          <a:lstStyle/>
+          <a:p>
+            <a:pPr algn="ctr">
+              <a:lnSpc>
+                <a:spcPct val="112000"/>
+              </a:lnSpc>
+              <a:spcBef>
+                <a:spcPts val="0"/>
+              </a:spcBef>
+              <a:spcAft>
+                <a:spcPts val="200"/>
+              </a:spcAft>
+            </a:pPr>
+            <a:r>
+              <a:rPr sz="1200" b="1">
+                <a:solidFill>
+                  <a:srgbClr val="B0934E"/>
+                </a:solidFill>
+                <a:latin typeface="游明朝"/>
+                <a:ea typeface="游明朝"/>
+              </a:rPr>
+              <a:t>→</a:t>
+            </a:r>
+          </a:p>
+        </p:txBody>
+      </p:sp>
+      <p:sp>
+        <p:nvSpPr>
+          <p:cNvPr id="16" name="TextBox 15"/>
           <p:cNvSpPr txBox="1"/>
           <p:nvPr/>
         </p:nvSpPr>
@@ -19259,14 +20121,14 @@
                 <a:latin typeface="游ゴシック"/>
                 <a:ea typeface="游ゴシック"/>
               </a:rPr>
-              <a:t>▲ 枠をクリックして、Before/After を1枚にした画像を挿入（自動で枠いっぱいに配置されます）</a:t>
-            </a:r>
-          </a:p>
-        </p:txBody>
-      </p:sp>
-      <p:sp>
-        <p:nvSpPr>
-          <p:cNvPr id="14" name="Rounded Rectangle 13"/>
+              <a:t>▲ Before・After それぞれの枠をクリックして写真を挿入（自動で枠いっぱいに配置されます）</a:t>
+            </a:r>
+          </a:p>
+        </p:txBody>
+      </p:sp>
+      <p:sp>
+        <p:nvSpPr>
+          <p:cNvPr id="17" name="Rounded Rectangle 16"/>
           <p:cNvSpPr/>
           <p:nvPr/>
         </p:nvSpPr>
@@ -19310,7 +20172,7 @@
       </p:sp>
       <p:sp>
         <p:nvSpPr>
-          <p:cNvPr id="15" name="TextBox 14"/>
+          <p:cNvPr id="18" name="TextBox 17"/>
           <p:cNvSpPr txBox="1"/>
           <p:nvPr/>
         </p:nvSpPr>
@@ -19356,7 +20218,7 @@
       </p:sp>
       <p:sp>
         <p:nvSpPr>
-          <p:cNvPr id="16" name="TextBox 15"/>
+          <p:cNvPr id="19" name="TextBox 18"/>
           <p:cNvSpPr txBox="1"/>
           <p:nvPr/>
         </p:nvSpPr>
@@ -19402,7 +20264,7 @@
       </p:sp>
       <p:graphicFrame>
         <p:nvGraphicFramePr>
-          <p:cNvPr id="17" name="Table 16"/>
+          <p:cNvPr id="20" name="Table 19"/>
           <p:cNvGraphicFramePr>
             <a:graphicFrameLocks noGrp="1"/>
           </p:cNvGraphicFramePr>
@@ -19572,7 +20434,7 @@
       </p:graphicFrame>
       <p:sp>
         <p:nvSpPr>
-          <p:cNvPr id="18" name="Rounded Rectangle 17"/>
+          <p:cNvPr id="21" name="Rounded Rectangle 20"/>
           <p:cNvSpPr/>
           <p:nvPr/>
         </p:nvSpPr>
@@ -19618,7 +20480,7 @@
       </p:sp>
       <p:sp>
         <p:nvSpPr>
-          <p:cNvPr id="19" name="Rectangle 18"/>
+          <p:cNvPr id="22" name="Rectangle 21"/>
           <p:cNvSpPr/>
           <p:nvPr/>
         </p:nvSpPr>
@@ -19662,7 +20524,7 @@
       </p:sp>
       <p:sp>
         <p:nvSpPr>
-          <p:cNvPr id="20" name="TextBox 19"/>
+          <p:cNvPr id="23" name="TextBox 22"/>
           <p:cNvSpPr txBox="1"/>
           <p:nvPr/>
         </p:nvSpPr>
@@ -19708,7 +20570,7 @@
       </p:sp>
       <p:sp>
         <p:nvSpPr>
-          <p:cNvPr id="21" name="TextBox 20"/>
+          <p:cNvPr id="24" name="TextBox 23"/>
           <p:cNvSpPr txBox="1"/>
           <p:nvPr/>
         </p:nvSpPr>
@@ -19756,7 +20618,7 @@
       </p:sp>
       <p:sp>
         <p:nvSpPr>
-          <p:cNvPr id="22" name="Rounded Rectangle 21"/>
+          <p:cNvPr id="25" name="Rounded Rectangle 24"/>
           <p:cNvSpPr/>
           <p:nvPr/>
         </p:nvSpPr>
@@ -19800,7 +20662,7 @@
       </p:sp>
       <p:sp>
         <p:nvSpPr>
-          <p:cNvPr id="23" name="TextBox 22"/>
+          <p:cNvPr id="26" name="TextBox 25"/>
           <p:cNvSpPr txBox="1"/>
           <p:nvPr/>
         </p:nvSpPr>
@@ -19846,7 +20708,7 @@
       </p:sp>
       <p:sp>
         <p:nvSpPr>
-          <p:cNvPr id="24" name="TextBox 23"/>
+          <p:cNvPr id="27" name="TextBox 26"/>
           <p:cNvSpPr txBox="1"/>
           <p:nvPr/>
         </p:nvSpPr>
@@ -19892,7 +20754,7 @@
       </p:sp>
       <p:sp>
         <p:nvSpPr>
-          <p:cNvPr id="25" name="TextBox 24"/>
+          <p:cNvPr id="28" name="TextBox 27"/>
           <p:cNvSpPr txBox="1"/>
           <p:nvPr/>
         </p:nvSpPr>
@@ -19948,7 +20810,7 @@
       </p:sp>
       <p:sp>
         <p:nvSpPr>
-          <p:cNvPr id="26" name="TextBox 25"/>
+          <p:cNvPr id="29" name="TextBox 28"/>
           <p:cNvSpPr txBox="1"/>
           <p:nvPr/>
         </p:nvSpPr>
@@ -19994,7 +20856,7 @@
       </p:sp>
       <p:sp>
         <p:nvSpPr>
-          <p:cNvPr id="27" name="Rounded Rectangle 26"/>
+          <p:cNvPr id="30" name="Rounded Rectangle 29"/>
           <p:cNvSpPr/>
           <p:nvPr/>
         </p:nvSpPr>
@@ -20040,7 +20902,7 @@
       </p:sp>
       <p:sp>
         <p:nvSpPr>
-          <p:cNvPr id="28" name="TextBox 27"/>
+          <p:cNvPr id="31" name="TextBox 30"/>
           <p:cNvSpPr txBox="1"/>
           <p:nvPr/>
         </p:nvSpPr>
@@ -20086,7 +20948,7 @@
       </p:sp>
       <p:sp>
         <p:nvSpPr>
-          <p:cNvPr id="29" name="TextBox 28"/>
+          <p:cNvPr id="32" name="TextBox 31"/>
           <p:cNvSpPr txBox="1"/>
           <p:nvPr/>
         </p:nvSpPr>
@@ -20132,7 +20994,7 @@
       </p:sp>
       <p:sp>
         <p:nvSpPr>
-          <p:cNvPr id="30" name="TextBox 29"/>
+          <p:cNvPr id="33" name="TextBox 32"/>
           <p:cNvSpPr txBox="1"/>
           <p:nvPr/>
         </p:nvSpPr>
@@ -20178,7 +21040,7 @@
       </p:sp>
       <p:sp>
         <p:nvSpPr>
-          <p:cNvPr id="31" name="TextBox 30"/>
+          <p:cNvPr id="34" name="TextBox 33"/>
           <p:cNvSpPr txBox="1"/>
           <p:nvPr/>
         </p:nvSpPr>
@@ -20250,7 +21112,7 @@
       <p:grpSpPr/>
       <p:sp>
         <p:nvSpPr>
-          <p:cNvPr id="11" name="Rounded Rectangle 10"/>
+          <p:cNvPr id="12" name="Rounded Rectangle 11"/>
           <p:cNvSpPr/>
           <p:nvPr/>
         </p:nvSpPr>
@@ -20308,7 +21170,19 @@
       </p:sp>
       <p:sp>
         <p:nvSpPr>
-          <p:cNvPr id="3" name="TextBox 2"/>
+          <p:cNvPr id="3" name="Picture Placeholder 2"/>
+          <p:cNvSpPr>
+            <a:spLocks noGrp="1"/>
+          </p:cNvSpPr>
+          <p:nvPr>
+            <p:ph type="pic" idx="11"/>
+          </p:nvPr>
+        </p:nvSpPr>
+        <p:spPr/>
+      </p:sp>
+      <p:sp>
+        <p:nvSpPr>
+          <p:cNvPr id="4" name="TextBox 3"/>
           <p:cNvSpPr txBox="1"/>
           <p:nvPr/>
         </p:nvSpPr>
@@ -20354,7 +21228,7 @@
       </p:sp>
       <p:sp>
         <p:nvSpPr>
-          <p:cNvPr id="4" name="TextBox 3"/>
+          <p:cNvPr id="5" name="TextBox 4"/>
           <p:cNvSpPr txBox="1"/>
           <p:nvPr/>
         </p:nvSpPr>
@@ -20400,7 +21274,7 @@
       </p:sp>
       <p:sp>
         <p:nvSpPr>
-          <p:cNvPr id="5" name="TextBox 4"/>
+          <p:cNvPr id="6" name="TextBox 5"/>
           <p:cNvSpPr txBox="1"/>
           <p:nvPr/>
         </p:nvSpPr>
@@ -20446,7 +21320,7 @@
       </p:sp>
       <p:sp>
         <p:nvSpPr>
-          <p:cNvPr id="6" name="Rounded Rectangle 5"/>
+          <p:cNvPr id="7" name="Rounded Rectangle 6"/>
           <p:cNvSpPr/>
           <p:nvPr/>
         </p:nvSpPr>
@@ -20490,7 +21364,7 @@
       </p:sp>
       <p:sp>
         <p:nvSpPr>
-          <p:cNvPr id="7" name="TextBox 6"/>
+          <p:cNvPr id="8" name="TextBox 7"/>
           <p:cNvSpPr txBox="1"/>
           <p:nvPr/>
         </p:nvSpPr>
@@ -20536,7 +21410,7 @@
       </p:sp>
       <p:sp>
         <p:nvSpPr>
-          <p:cNvPr id="8" name="Rounded Rectangle 7"/>
+          <p:cNvPr id="9" name="Rounded Rectangle 8"/>
           <p:cNvSpPr/>
           <p:nvPr/>
         </p:nvSpPr>
@@ -20580,7 +21454,7 @@
       </p:sp>
       <p:sp>
         <p:nvSpPr>
-          <p:cNvPr id="9" name="TextBox 8"/>
+          <p:cNvPr id="10" name="TextBox 9"/>
           <p:cNvSpPr txBox="1"/>
           <p:nvPr/>
         </p:nvSpPr>
@@ -20626,7 +21500,7 @@
       </p:sp>
       <p:sp>
         <p:nvSpPr>
-          <p:cNvPr id="10" name="TextBox 9"/>
+          <p:cNvPr id="11" name="TextBox 10"/>
           <p:cNvSpPr txBox="1"/>
           <p:nvPr/>
         </p:nvSpPr>
@@ -20672,14 +21546,14 @@
       </p:sp>
       <p:sp>
         <p:nvSpPr>
-          <p:cNvPr id="12" name="TextBox 11"/>
-          <p:cNvSpPr txBox="1"/>
-          <p:nvPr/>
-        </p:nvSpPr>
-        <p:spPr>
-          <a:xfrm>
-            <a:off x="566928" y="1847088"/>
-            <a:ext cx="6428994" cy="256032"/>
+          <p:cNvPr id="13" name="TextBox 12"/>
+          <p:cNvSpPr txBox="1"/>
+          <p:nvPr/>
+        </p:nvSpPr>
+        <p:spPr>
+          <a:xfrm>
+            <a:off x="1038225" y="1874519"/>
+            <a:ext cx="2606040" cy="274320"/>
           </a:xfrm>
           <a:prstGeom prst="rect">
             <a:avLst/>
@@ -20704,21 +21578,113 @@
               </a:spcAft>
             </a:pPr>
             <a:r>
-              <a:rPr sz="1100" b="1">
+              <a:rPr sz="1200" b="1">
                 <a:solidFill>
                   <a:srgbClr val="8C7339"/>
                 </a:solidFill>
                 <a:latin typeface="游明朝"/>
                 <a:ea typeface="游明朝"/>
               </a:rPr>
-              <a:t>Before  →  After</a:t>
-            </a:r>
-          </a:p>
-        </p:txBody>
-      </p:sp>
-      <p:sp>
-        <p:nvSpPr>
-          <p:cNvPr id="13" name="TextBox 12"/>
+              <a:t>Before</a:t>
+            </a:r>
+          </a:p>
+        </p:txBody>
+      </p:sp>
+      <p:sp>
+        <p:nvSpPr>
+          <p:cNvPr id="14" name="TextBox 13"/>
+          <p:cNvSpPr txBox="1"/>
+          <p:nvPr/>
+        </p:nvSpPr>
+        <p:spPr>
+          <a:xfrm>
+            <a:off x="3918585" y="1874519"/>
+            <a:ext cx="2606040" cy="274320"/>
+          </a:xfrm>
+          <a:prstGeom prst="rect">
+            <a:avLst/>
+          </a:prstGeom>
+          <a:noFill/>
+        </p:spPr>
+        <p:txBody>
+          <a:bodyPr wrap="square" anchor="t" lIns="0" rIns="0" tIns="0" bIns="0">
+            <a:spAutoFit/>
+          </a:bodyPr>
+          <a:lstStyle/>
+          <a:p>
+            <a:pPr algn="ctr">
+              <a:lnSpc>
+                <a:spcPct val="112000"/>
+              </a:lnSpc>
+              <a:spcBef>
+                <a:spcPts val="0"/>
+              </a:spcBef>
+              <a:spcAft>
+                <a:spcPts val="200"/>
+              </a:spcAft>
+            </a:pPr>
+            <a:r>
+              <a:rPr sz="1200" b="1">
+                <a:solidFill>
+                  <a:srgbClr val="8C7339"/>
+                </a:solidFill>
+                <a:latin typeface="游明朝"/>
+                <a:ea typeface="游明朝"/>
+              </a:rPr>
+              <a:t>After</a:t>
+            </a:r>
+          </a:p>
+        </p:txBody>
+      </p:sp>
+      <p:sp>
+        <p:nvSpPr>
+          <p:cNvPr id="15" name="TextBox 14"/>
+          <p:cNvSpPr txBox="1"/>
+          <p:nvPr/>
+        </p:nvSpPr>
+        <p:spPr>
+          <a:xfrm>
+            <a:off x="1038225" y="1874519"/>
+            <a:ext cx="5486400" cy="274320"/>
+          </a:xfrm>
+          <a:prstGeom prst="rect">
+            <a:avLst/>
+          </a:prstGeom>
+          <a:noFill/>
+        </p:spPr>
+        <p:txBody>
+          <a:bodyPr wrap="square" anchor="t" lIns="0" rIns="0" tIns="0" bIns="0">
+            <a:spAutoFit/>
+          </a:bodyPr>
+          <a:lstStyle/>
+          <a:p>
+            <a:pPr algn="ctr">
+              <a:lnSpc>
+                <a:spcPct val="112000"/>
+              </a:lnSpc>
+              <a:spcBef>
+                <a:spcPts val="0"/>
+              </a:spcBef>
+              <a:spcAft>
+                <a:spcPts val="200"/>
+              </a:spcAft>
+            </a:pPr>
+            <a:r>
+              <a:rPr sz="1200" b="1">
+                <a:solidFill>
+                  <a:srgbClr val="B0934E"/>
+                </a:solidFill>
+                <a:latin typeface="游明朝"/>
+                <a:ea typeface="游明朝"/>
+              </a:rPr>
+              <a:t>→</a:t>
+            </a:r>
+          </a:p>
+        </p:txBody>
+      </p:sp>
+      <p:sp>
+        <p:nvSpPr>
+          <p:cNvPr id="16" name="TextBox 15"/>
           <p:cNvSpPr txBox="1"/>
           <p:nvPr/>
         </p:nvSpPr>
@@ -20757,14 +21723,14 @@
                 <a:latin typeface="游ゴシック"/>
                 <a:ea typeface="游ゴシック"/>
               </a:rPr>
-              <a:t>▲ 枠をクリックして、Before/After を1枚にした画像を挿入（自動で枠いっぱいに配置されます）</a:t>
-            </a:r>
-          </a:p>
-        </p:txBody>
-      </p:sp>
-      <p:sp>
-        <p:nvSpPr>
-          <p:cNvPr id="14" name="Rounded Rectangle 13"/>
+              <a:t>▲ Before・After それぞれの枠をクリックして写真を挿入（自動で枠いっぱいに配置されます）</a:t>
+            </a:r>
+          </a:p>
+        </p:txBody>
+      </p:sp>
+      <p:sp>
+        <p:nvSpPr>
+          <p:cNvPr id="17" name="Rounded Rectangle 16"/>
           <p:cNvSpPr/>
           <p:nvPr/>
         </p:nvSpPr>
@@ -20808,7 +21774,7 @@
       </p:sp>
       <p:sp>
         <p:nvSpPr>
-          <p:cNvPr id="15" name="TextBox 14"/>
+          <p:cNvPr id="18" name="TextBox 17"/>
           <p:cNvSpPr txBox="1"/>
           <p:nvPr/>
         </p:nvSpPr>
@@ -20854,7 +21820,7 @@
       </p:sp>
       <p:sp>
         <p:nvSpPr>
-          <p:cNvPr id="16" name="TextBox 15"/>
+          <p:cNvPr id="19" name="TextBox 18"/>
           <p:cNvSpPr txBox="1"/>
           <p:nvPr/>
         </p:nvSpPr>
@@ -20900,7 +21866,7 @@
       </p:sp>
       <p:graphicFrame>
         <p:nvGraphicFramePr>
-          <p:cNvPr id="17" name="Table 16"/>
+          <p:cNvPr id="20" name="Table 19"/>
           <p:cNvGraphicFramePr>
             <a:graphicFrameLocks noGrp="1"/>
           </p:cNvGraphicFramePr>
@@ -21070,7 +22036,7 @@
       </p:graphicFrame>
       <p:sp>
         <p:nvSpPr>
-          <p:cNvPr id="18" name="Rounded Rectangle 17"/>
+          <p:cNvPr id="21" name="Rounded Rectangle 20"/>
           <p:cNvSpPr/>
           <p:nvPr/>
         </p:nvSpPr>
@@ -21116,7 +22082,7 @@
       </p:sp>
       <p:sp>
         <p:nvSpPr>
-          <p:cNvPr id="19" name="Rectangle 18"/>
+          <p:cNvPr id="22" name="Rectangle 21"/>
           <p:cNvSpPr/>
           <p:nvPr/>
         </p:nvSpPr>
@@ -21160,7 +22126,7 @@
       </p:sp>
       <p:sp>
         <p:nvSpPr>
-          <p:cNvPr id="20" name="TextBox 19"/>
+          <p:cNvPr id="23" name="TextBox 22"/>
           <p:cNvSpPr txBox="1"/>
           <p:nvPr/>
         </p:nvSpPr>
@@ -21206,7 +22172,7 @@
       </p:sp>
       <p:sp>
         <p:nvSpPr>
-          <p:cNvPr id="21" name="TextBox 20"/>
+          <p:cNvPr id="24" name="TextBox 23"/>
           <p:cNvSpPr txBox="1"/>
           <p:nvPr/>
         </p:nvSpPr>
@@ -21254,7 +22220,7 @@
       </p:sp>
       <p:sp>
         <p:nvSpPr>
-          <p:cNvPr id="22" name="Rounded Rectangle 21"/>
+          <p:cNvPr id="25" name="Rounded Rectangle 24"/>
           <p:cNvSpPr/>
           <p:nvPr/>
         </p:nvSpPr>
@@ -21298,7 +22264,7 @@
       </p:sp>
       <p:sp>
         <p:nvSpPr>
-          <p:cNvPr id="23" name="TextBox 22"/>
+          <p:cNvPr id="26" name="TextBox 25"/>
           <p:cNvSpPr txBox="1"/>
           <p:nvPr/>
         </p:nvSpPr>
@@ -21344,7 +22310,7 @@
       </p:sp>
       <p:sp>
         <p:nvSpPr>
-          <p:cNvPr id="24" name="TextBox 23"/>
+          <p:cNvPr id="27" name="TextBox 26"/>
           <p:cNvSpPr txBox="1"/>
           <p:nvPr/>
         </p:nvSpPr>
@@ -21390,7 +22356,7 @@
       </p:sp>
       <p:sp>
         <p:nvSpPr>
-          <p:cNvPr id="25" name="TextBox 24"/>
+          <p:cNvPr id="28" name="TextBox 27"/>
           <p:cNvSpPr txBox="1"/>
           <p:nvPr/>
         </p:nvSpPr>
@@ -21446,7 +22412,7 @@
       </p:sp>
       <p:sp>
         <p:nvSpPr>
-          <p:cNvPr id="26" name="TextBox 25"/>
+          <p:cNvPr id="29" name="TextBox 28"/>
           <p:cNvSpPr txBox="1"/>
           <p:nvPr/>
         </p:nvSpPr>
@@ -21492,7 +22458,7 @@
       </p:sp>
       <p:sp>
         <p:nvSpPr>
-          <p:cNvPr id="27" name="Rounded Rectangle 26"/>
+          <p:cNvPr id="30" name="Rounded Rectangle 29"/>
           <p:cNvSpPr/>
           <p:nvPr/>
         </p:nvSpPr>
@@ -21538,7 +22504,7 @@
       </p:sp>
       <p:sp>
         <p:nvSpPr>
-          <p:cNvPr id="28" name="TextBox 27"/>
+          <p:cNvPr id="31" name="TextBox 30"/>
           <p:cNvSpPr txBox="1"/>
           <p:nvPr/>
         </p:nvSpPr>
@@ -21584,7 +22550,7 @@
       </p:sp>
       <p:sp>
         <p:nvSpPr>
-          <p:cNvPr id="29" name="TextBox 28"/>
+          <p:cNvPr id="32" name="TextBox 31"/>
           <p:cNvSpPr txBox="1"/>
           <p:nvPr/>
         </p:nvSpPr>
@@ -21630,7 +22596,7 @@
       </p:sp>
       <p:sp>
         <p:nvSpPr>
-          <p:cNvPr id="30" name="TextBox 29"/>
+          <p:cNvPr id="33" name="TextBox 32"/>
           <p:cNvSpPr txBox="1"/>
           <p:nvPr/>
         </p:nvSpPr>
@@ -21676,7 +22642,7 @@
       </p:sp>
       <p:sp>
         <p:nvSpPr>
-          <p:cNvPr id="31" name="TextBox 30"/>
+          <p:cNvPr id="34" name="TextBox 33"/>
           <p:cNvSpPr txBox="1"/>
           <p:nvPr/>
         </p:nvSpPr>
@@ -21748,7 +22714,7 @@
       <p:grpSpPr/>
       <p:sp>
         <p:nvSpPr>
-          <p:cNvPr id="11" name="Rounded Rectangle 10"/>
+          <p:cNvPr id="12" name="Rounded Rectangle 11"/>
           <p:cNvSpPr/>
           <p:nvPr/>
         </p:nvSpPr>
@@ -21806,7 +22772,19 @@
       </p:sp>
       <p:sp>
         <p:nvSpPr>
-          <p:cNvPr id="3" name="TextBox 2"/>
+          <p:cNvPr id="3" name="Picture Placeholder 2"/>
+          <p:cNvSpPr>
+            <a:spLocks noGrp="1"/>
+          </p:cNvSpPr>
+          <p:nvPr>
+            <p:ph type="pic" idx="11"/>
+          </p:nvPr>
+        </p:nvSpPr>
+        <p:spPr/>
+      </p:sp>
+      <p:sp>
+        <p:nvSpPr>
+          <p:cNvPr id="4" name="TextBox 3"/>
           <p:cNvSpPr txBox="1"/>
           <p:nvPr/>
         </p:nvSpPr>
@@ -21852,7 +22830,7 @@
       </p:sp>
       <p:sp>
         <p:nvSpPr>
-          <p:cNvPr id="4" name="TextBox 3"/>
+          <p:cNvPr id="5" name="TextBox 4"/>
           <p:cNvSpPr txBox="1"/>
           <p:nvPr/>
         </p:nvSpPr>
@@ -21898,7 +22876,7 @@
       </p:sp>
       <p:sp>
         <p:nvSpPr>
-          <p:cNvPr id="5" name="TextBox 4"/>
+          <p:cNvPr id="6" name="TextBox 5"/>
           <p:cNvSpPr txBox="1"/>
           <p:nvPr/>
         </p:nvSpPr>
@@ -21944,7 +22922,7 @@
       </p:sp>
       <p:sp>
         <p:nvSpPr>
-          <p:cNvPr id="6" name="Rounded Rectangle 5"/>
+          <p:cNvPr id="7" name="Rounded Rectangle 6"/>
           <p:cNvSpPr/>
           <p:nvPr/>
         </p:nvSpPr>
@@ -21988,7 +22966,7 @@
       </p:sp>
       <p:sp>
         <p:nvSpPr>
-          <p:cNvPr id="7" name="TextBox 6"/>
+          <p:cNvPr id="8" name="TextBox 7"/>
           <p:cNvSpPr txBox="1"/>
           <p:nvPr/>
         </p:nvSpPr>
@@ -22034,7 +23012,7 @@
       </p:sp>
       <p:sp>
         <p:nvSpPr>
-          <p:cNvPr id="8" name="Rounded Rectangle 7"/>
+          <p:cNvPr id="9" name="Rounded Rectangle 8"/>
           <p:cNvSpPr/>
           <p:nvPr/>
         </p:nvSpPr>
@@ -22078,7 +23056,7 @@
       </p:sp>
       <p:sp>
         <p:nvSpPr>
-          <p:cNvPr id="9" name="TextBox 8"/>
+          <p:cNvPr id="10" name="TextBox 9"/>
           <p:cNvSpPr txBox="1"/>
           <p:nvPr/>
         </p:nvSpPr>
@@ -22124,7 +23102,7 @@
       </p:sp>
       <p:sp>
         <p:nvSpPr>
-          <p:cNvPr id="10" name="TextBox 9"/>
+          <p:cNvPr id="11" name="TextBox 10"/>
           <p:cNvSpPr txBox="1"/>
           <p:nvPr/>
         </p:nvSpPr>
@@ -22170,14 +23148,14 @@
       </p:sp>
       <p:sp>
         <p:nvSpPr>
-          <p:cNvPr id="12" name="TextBox 11"/>
-          <p:cNvSpPr txBox="1"/>
-          <p:nvPr/>
-        </p:nvSpPr>
-        <p:spPr>
-          <a:xfrm>
-            <a:off x="566928" y="1847088"/>
-            <a:ext cx="6428994" cy="256032"/>
+          <p:cNvPr id="13" name="TextBox 12"/>
+          <p:cNvSpPr txBox="1"/>
+          <p:nvPr/>
+        </p:nvSpPr>
+        <p:spPr>
+          <a:xfrm>
+            <a:off x="1038225" y="1874519"/>
+            <a:ext cx="2606040" cy="274320"/>
           </a:xfrm>
           <a:prstGeom prst="rect">
             <a:avLst/>
@@ -22202,21 +23180,113 @@
               </a:spcAft>
             </a:pPr>
             <a:r>
-              <a:rPr sz="1100" b="1">
+              <a:rPr sz="1200" b="1">
                 <a:solidFill>
                   <a:srgbClr val="8C7339"/>
                 </a:solidFill>
                 <a:latin typeface="游明朝"/>
                 <a:ea typeface="游明朝"/>
               </a:rPr>
-              <a:t>Before  →  After</a:t>
-            </a:r>
-          </a:p>
-        </p:txBody>
-      </p:sp>
-      <p:sp>
-        <p:nvSpPr>
-          <p:cNvPr id="13" name="TextBox 12"/>
+              <a:t>Before</a:t>
+            </a:r>
+          </a:p>
+        </p:txBody>
+      </p:sp>
+      <p:sp>
+        <p:nvSpPr>
+          <p:cNvPr id="14" name="TextBox 13"/>
+          <p:cNvSpPr txBox="1"/>
+          <p:nvPr/>
+        </p:nvSpPr>
+        <p:spPr>
+          <a:xfrm>
+            <a:off x="3918585" y="1874519"/>
+            <a:ext cx="2606040" cy="274320"/>
+          </a:xfrm>
+          <a:prstGeom prst="rect">
+            <a:avLst/>
+          </a:prstGeom>
+          <a:noFill/>
+        </p:spPr>
+        <p:txBody>
+          <a:bodyPr wrap="square" anchor="t" lIns="0" rIns="0" tIns="0" bIns="0">
+            <a:spAutoFit/>
+          </a:bodyPr>
+          <a:lstStyle/>
+          <a:p>
+            <a:pPr algn="ctr">
+              <a:lnSpc>
+                <a:spcPct val="112000"/>
+              </a:lnSpc>
+              <a:spcBef>
+                <a:spcPts val="0"/>
+              </a:spcBef>
+              <a:spcAft>
+                <a:spcPts val="200"/>
+              </a:spcAft>
+            </a:pPr>
+            <a:r>
+              <a:rPr sz="1200" b="1">
+                <a:solidFill>
+                  <a:srgbClr val="8C7339"/>
+                </a:solidFill>
+                <a:latin typeface="游明朝"/>
+                <a:ea typeface="游明朝"/>
+              </a:rPr>
+              <a:t>After</a:t>
+            </a:r>
+          </a:p>
+        </p:txBody>
+      </p:sp>
+      <p:sp>
+        <p:nvSpPr>
+          <p:cNvPr id="15" name="TextBox 14"/>
+          <p:cNvSpPr txBox="1"/>
+          <p:nvPr/>
+        </p:nvSpPr>
+        <p:spPr>
+          <a:xfrm>
+            <a:off x="1038225" y="1874519"/>
+            <a:ext cx="5486400" cy="274320"/>
+          </a:xfrm>
+          <a:prstGeom prst="rect">
+            <a:avLst/>
+          </a:prstGeom>
+          <a:noFill/>
+        </p:spPr>
+        <p:txBody>
+          <a:bodyPr wrap="square" anchor="t" lIns="0" rIns="0" tIns="0" bIns="0">
+            <a:spAutoFit/>
+          </a:bodyPr>
+          <a:lstStyle/>
+          <a:p>
+            <a:pPr algn="ctr">
+              <a:lnSpc>
+                <a:spcPct val="112000"/>
+              </a:lnSpc>
+              <a:spcBef>
+                <a:spcPts val="0"/>
+              </a:spcBef>
+              <a:spcAft>
+                <a:spcPts val="200"/>
+              </a:spcAft>
+            </a:pPr>
+            <a:r>
+              <a:rPr sz="1200" b="1">
+                <a:solidFill>
+                  <a:srgbClr val="B0934E"/>
+                </a:solidFill>
+                <a:latin typeface="游明朝"/>
+                <a:ea typeface="游明朝"/>
+              </a:rPr>
+              <a:t>→</a:t>
+            </a:r>
+          </a:p>
+        </p:txBody>
+      </p:sp>
+      <p:sp>
+        <p:nvSpPr>
+          <p:cNvPr id="16" name="TextBox 15"/>
           <p:cNvSpPr txBox="1"/>
           <p:nvPr/>
         </p:nvSpPr>
@@ -22255,14 +23325,14 @@
                 <a:latin typeface="游ゴシック"/>
                 <a:ea typeface="游ゴシック"/>
               </a:rPr>
-              <a:t>▲ 枠をクリックして、Before/After を1枚にした画像を挿入（自動で枠いっぱいに配置されます）</a:t>
-            </a:r>
-          </a:p>
-        </p:txBody>
-      </p:sp>
-      <p:sp>
-        <p:nvSpPr>
-          <p:cNvPr id="14" name="Rounded Rectangle 13"/>
+              <a:t>▲ Before・After それぞれの枠をクリックして写真を挿入（自動で枠いっぱいに配置されます）</a:t>
+            </a:r>
+          </a:p>
+        </p:txBody>
+      </p:sp>
+      <p:sp>
+        <p:nvSpPr>
+          <p:cNvPr id="17" name="Rounded Rectangle 16"/>
           <p:cNvSpPr/>
           <p:nvPr/>
         </p:nvSpPr>
@@ -22306,7 +23376,7 @@
       </p:sp>
       <p:sp>
         <p:nvSpPr>
-          <p:cNvPr id="15" name="TextBox 14"/>
+          <p:cNvPr id="18" name="TextBox 17"/>
           <p:cNvSpPr txBox="1"/>
           <p:nvPr/>
         </p:nvSpPr>
@@ -22352,7 +23422,7 @@
       </p:sp>
       <p:sp>
         <p:nvSpPr>
-          <p:cNvPr id="16" name="TextBox 15"/>
+          <p:cNvPr id="19" name="TextBox 18"/>
           <p:cNvSpPr txBox="1"/>
           <p:nvPr/>
         </p:nvSpPr>
@@ -22398,7 +23468,7 @@
       </p:sp>
       <p:graphicFrame>
         <p:nvGraphicFramePr>
-          <p:cNvPr id="17" name="Table 16"/>
+          <p:cNvPr id="20" name="Table 19"/>
           <p:cNvGraphicFramePr>
             <a:graphicFrameLocks noGrp="1"/>
           </p:cNvGraphicFramePr>
@@ -22568,7 +23638,7 @@
       </p:graphicFrame>
       <p:sp>
         <p:nvSpPr>
-          <p:cNvPr id="18" name="Rounded Rectangle 17"/>
+          <p:cNvPr id="21" name="Rounded Rectangle 20"/>
           <p:cNvSpPr/>
           <p:nvPr/>
         </p:nvSpPr>
@@ -22614,7 +23684,7 @@
       </p:sp>
       <p:sp>
         <p:nvSpPr>
-          <p:cNvPr id="19" name="Rectangle 18"/>
+          <p:cNvPr id="22" name="Rectangle 21"/>
           <p:cNvSpPr/>
           <p:nvPr/>
         </p:nvSpPr>
@@ -22658,7 +23728,7 @@
       </p:sp>
       <p:sp>
         <p:nvSpPr>
-          <p:cNvPr id="20" name="TextBox 19"/>
+          <p:cNvPr id="23" name="TextBox 22"/>
           <p:cNvSpPr txBox="1"/>
           <p:nvPr/>
         </p:nvSpPr>
@@ -22704,7 +23774,7 @@
       </p:sp>
       <p:sp>
         <p:nvSpPr>
-          <p:cNvPr id="21" name="TextBox 20"/>
+          <p:cNvPr id="24" name="TextBox 23"/>
           <p:cNvSpPr txBox="1"/>
           <p:nvPr/>
         </p:nvSpPr>
@@ -22752,7 +23822,7 @@
       </p:sp>
       <p:sp>
         <p:nvSpPr>
-          <p:cNvPr id="22" name="Rounded Rectangle 21"/>
+          <p:cNvPr id="25" name="Rounded Rectangle 24"/>
           <p:cNvSpPr/>
           <p:nvPr/>
         </p:nvSpPr>
@@ -22796,7 +23866,7 @@
       </p:sp>
       <p:sp>
         <p:nvSpPr>
-          <p:cNvPr id="23" name="TextBox 22"/>
+          <p:cNvPr id="26" name="TextBox 25"/>
           <p:cNvSpPr txBox="1"/>
           <p:nvPr/>
         </p:nvSpPr>
@@ -22842,7 +23912,7 @@
       </p:sp>
       <p:sp>
         <p:nvSpPr>
-          <p:cNvPr id="24" name="TextBox 23"/>
+          <p:cNvPr id="27" name="TextBox 26"/>
           <p:cNvSpPr txBox="1"/>
           <p:nvPr/>
         </p:nvSpPr>
@@ -22888,7 +23958,7 @@
       </p:sp>
       <p:sp>
         <p:nvSpPr>
-          <p:cNvPr id="25" name="TextBox 24"/>
+          <p:cNvPr id="28" name="TextBox 27"/>
           <p:cNvSpPr txBox="1"/>
           <p:nvPr/>
         </p:nvSpPr>
@@ -22944,7 +24014,7 @@
       </p:sp>
       <p:sp>
         <p:nvSpPr>
-          <p:cNvPr id="26" name="TextBox 25"/>
+          <p:cNvPr id="29" name="TextBox 28"/>
           <p:cNvSpPr txBox="1"/>
           <p:nvPr/>
         </p:nvSpPr>
@@ -22990,7 +24060,7 @@
       </p:sp>
       <p:sp>
         <p:nvSpPr>
-          <p:cNvPr id="27" name="Rounded Rectangle 26"/>
+          <p:cNvPr id="30" name="Rounded Rectangle 29"/>
           <p:cNvSpPr/>
           <p:nvPr/>
         </p:nvSpPr>
@@ -23036,7 +24106,7 @@
       </p:sp>
       <p:sp>
         <p:nvSpPr>
-          <p:cNvPr id="28" name="TextBox 27"/>
+          <p:cNvPr id="31" name="TextBox 30"/>
           <p:cNvSpPr txBox="1"/>
           <p:nvPr/>
         </p:nvSpPr>
@@ -23082,7 +24152,7 @@
       </p:sp>
       <p:sp>
         <p:nvSpPr>
-          <p:cNvPr id="29" name="TextBox 28"/>
+          <p:cNvPr id="32" name="TextBox 31"/>
           <p:cNvSpPr txBox="1"/>
           <p:nvPr/>
         </p:nvSpPr>
@@ -23128,7 +24198,7 @@
       </p:sp>
       <p:sp>
         <p:nvSpPr>
-          <p:cNvPr id="30" name="TextBox 29"/>
+          <p:cNvPr id="33" name="TextBox 32"/>
           <p:cNvSpPr txBox="1"/>
           <p:nvPr/>
         </p:nvSpPr>
@@ -23174,7 +24244,7 @@
       </p:sp>
       <p:sp>
         <p:nvSpPr>
-          <p:cNvPr id="31" name="TextBox 30"/>
+          <p:cNvPr id="34" name="TextBox 33"/>
           <p:cNvSpPr txBox="1"/>
           <p:nvPr/>
         </p:nvSpPr>
@@ -23994,7 +25064,7 @@
       <p:grpSpPr/>
       <p:sp>
         <p:nvSpPr>
-          <p:cNvPr id="11" name="Rounded Rectangle 10"/>
+          <p:cNvPr id="12" name="Rounded Rectangle 11"/>
           <p:cNvSpPr/>
           <p:nvPr/>
         </p:nvSpPr>
@@ -24052,7 +25122,19 @@
       </p:sp>
       <p:sp>
         <p:nvSpPr>
-          <p:cNvPr id="3" name="TextBox 2"/>
+          <p:cNvPr id="3" name="Picture Placeholder 2"/>
+          <p:cNvSpPr>
+            <a:spLocks noGrp="1"/>
+          </p:cNvSpPr>
+          <p:nvPr>
+            <p:ph type="pic" idx="11"/>
+          </p:nvPr>
+        </p:nvSpPr>
+        <p:spPr/>
+      </p:sp>
+      <p:sp>
+        <p:nvSpPr>
+          <p:cNvPr id="4" name="TextBox 3"/>
           <p:cNvSpPr txBox="1"/>
           <p:nvPr/>
         </p:nvSpPr>
@@ -24098,7 +25180,7 @@
       </p:sp>
       <p:sp>
         <p:nvSpPr>
-          <p:cNvPr id="4" name="TextBox 3"/>
+          <p:cNvPr id="5" name="TextBox 4"/>
           <p:cNvSpPr txBox="1"/>
           <p:nvPr/>
         </p:nvSpPr>
@@ -24144,7 +25226,7 @@
       </p:sp>
       <p:sp>
         <p:nvSpPr>
-          <p:cNvPr id="5" name="TextBox 4"/>
+          <p:cNvPr id="6" name="TextBox 5"/>
           <p:cNvSpPr txBox="1"/>
           <p:nvPr/>
         </p:nvSpPr>
@@ -24190,7 +25272,7 @@
       </p:sp>
       <p:sp>
         <p:nvSpPr>
-          <p:cNvPr id="6" name="Rounded Rectangle 5"/>
+          <p:cNvPr id="7" name="Rounded Rectangle 6"/>
           <p:cNvSpPr/>
           <p:nvPr/>
         </p:nvSpPr>
@@ -24234,7 +25316,7 @@
       </p:sp>
       <p:sp>
         <p:nvSpPr>
-          <p:cNvPr id="7" name="TextBox 6"/>
+          <p:cNvPr id="8" name="TextBox 7"/>
           <p:cNvSpPr txBox="1"/>
           <p:nvPr/>
         </p:nvSpPr>
@@ -24280,7 +25362,7 @@
       </p:sp>
       <p:sp>
         <p:nvSpPr>
-          <p:cNvPr id="8" name="Rounded Rectangle 7"/>
+          <p:cNvPr id="9" name="Rounded Rectangle 8"/>
           <p:cNvSpPr/>
           <p:nvPr/>
         </p:nvSpPr>
@@ -24324,7 +25406,7 @@
       </p:sp>
       <p:sp>
         <p:nvSpPr>
-          <p:cNvPr id="9" name="TextBox 8"/>
+          <p:cNvPr id="10" name="TextBox 9"/>
           <p:cNvSpPr txBox="1"/>
           <p:nvPr/>
         </p:nvSpPr>
@@ -24370,7 +25452,7 @@
       </p:sp>
       <p:sp>
         <p:nvSpPr>
-          <p:cNvPr id="10" name="TextBox 9"/>
+          <p:cNvPr id="11" name="TextBox 10"/>
           <p:cNvSpPr txBox="1"/>
           <p:nvPr/>
         </p:nvSpPr>
@@ -24416,14 +25498,14 @@
       </p:sp>
       <p:sp>
         <p:nvSpPr>
-          <p:cNvPr id="12" name="TextBox 11"/>
-          <p:cNvSpPr txBox="1"/>
-          <p:nvPr/>
-        </p:nvSpPr>
-        <p:spPr>
-          <a:xfrm>
-            <a:off x="566928" y="1847088"/>
-            <a:ext cx="6428994" cy="256032"/>
+          <p:cNvPr id="13" name="TextBox 12"/>
+          <p:cNvSpPr txBox="1"/>
+          <p:nvPr/>
+        </p:nvSpPr>
+        <p:spPr>
+          <a:xfrm>
+            <a:off x="1038225" y="1874519"/>
+            <a:ext cx="2606040" cy="274320"/>
           </a:xfrm>
           <a:prstGeom prst="rect">
             <a:avLst/>
@@ -24448,21 +25530,113 @@
               </a:spcAft>
             </a:pPr>
             <a:r>
-              <a:rPr sz="1100" b="1">
+              <a:rPr sz="1200" b="1">
                 <a:solidFill>
                   <a:srgbClr val="8C7339"/>
                 </a:solidFill>
                 <a:latin typeface="游明朝"/>
                 <a:ea typeface="游明朝"/>
               </a:rPr>
-              <a:t>Before  →  After</a:t>
-            </a:r>
-          </a:p>
-        </p:txBody>
-      </p:sp>
-      <p:sp>
-        <p:nvSpPr>
-          <p:cNvPr id="13" name="TextBox 12"/>
+              <a:t>Before</a:t>
+            </a:r>
+          </a:p>
+        </p:txBody>
+      </p:sp>
+      <p:sp>
+        <p:nvSpPr>
+          <p:cNvPr id="14" name="TextBox 13"/>
+          <p:cNvSpPr txBox="1"/>
+          <p:nvPr/>
+        </p:nvSpPr>
+        <p:spPr>
+          <a:xfrm>
+            <a:off x="3918585" y="1874519"/>
+            <a:ext cx="2606040" cy="274320"/>
+          </a:xfrm>
+          <a:prstGeom prst="rect">
+            <a:avLst/>
+          </a:prstGeom>
+          <a:noFill/>
+        </p:spPr>
+        <p:txBody>
+          <a:bodyPr wrap="square" anchor="t" lIns="0" rIns="0" tIns="0" bIns="0">
+            <a:spAutoFit/>
+          </a:bodyPr>
+          <a:lstStyle/>
+          <a:p>
+            <a:pPr algn="ctr">
+              <a:lnSpc>
+                <a:spcPct val="112000"/>
+              </a:lnSpc>
+              <a:spcBef>
+                <a:spcPts val="0"/>
+              </a:spcBef>
+              <a:spcAft>
+                <a:spcPts val="200"/>
+              </a:spcAft>
+            </a:pPr>
+            <a:r>
+              <a:rPr sz="1200" b="1">
+                <a:solidFill>
+                  <a:srgbClr val="8C7339"/>
+                </a:solidFill>
+                <a:latin typeface="游明朝"/>
+                <a:ea typeface="游明朝"/>
+              </a:rPr>
+              <a:t>After</a:t>
+            </a:r>
+          </a:p>
+        </p:txBody>
+      </p:sp>
+      <p:sp>
+        <p:nvSpPr>
+          <p:cNvPr id="15" name="TextBox 14"/>
+          <p:cNvSpPr txBox="1"/>
+          <p:nvPr/>
+        </p:nvSpPr>
+        <p:spPr>
+          <a:xfrm>
+            <a:off x="1038225" y="1874519"/>
+            <a:ext cx="5486400" cy="274320"/>
+          </a:xfrm>
+          <a:prstGeom prst="rect">
+            <a:avLst/>
+          </a:prstGeom>
+          <a:noFill/>
+        </p:spPr>
+        <p:txBody>
+          <a:bodyPr wrap="square" anchor="t" lIns="0" rIns="0" tIns="0" bIns="0">
+            <a:spAutoFit/>
+          </a:bodyPr>
+          <a:lstStyle/>
+          <a:p>
+            <a:pPr algn="ctr">
+              <a:lnSpc>
+                <a:spcPct val="112000"/>
+              </a:lnSpc>
+              <a:spcBef>
+                <a:spcPts val="0"/>
+              </a:spcBef>
+              <a:spcAft>
+                <a:spcPts val="200"/>
+              </a:spcAft>
+            </a:pPr>
+            <a:r>
+              <a:rPr sz="1200" b="1">
+                <a:solidFill>
+                  <a:srgbClr val="B0934E"/>
+                </a:solidFill>
+                <a:latin typeface="游明朝"/>
+                <a:ea typeface="游明朝"/>
+              </a:rPr>
+              <a:t>→</a:t>
+            </a:r>
+          </a:p>
+        </p:txBody>
+      </p:sp>
+      <p:sp>
+        <p:nvSpPr>
+          <p:cNvPr id="16" name="TextBox 15"/>
           <p:cNvSpPr txBox="1"/>
           <p:nvPr/>
         </p:nvSpPr>
@@ -24501,14 +25675,14 @@
                 <a:latin typeface="游ゴシック"/>
                 <a:ea typeface="游ゴシック"/>
               </a:rPr>
-              <a:t>▲ 枠をクリックして、Before/After を1枚にした画像を挿入（自動で枠いっぱいに配置されます）</a:t>
-            </a:r>
-          </a:p>
-        </p:txBody>
-      </p:sp>
-      <p:sp>
-        <p:nvSpPr>
-          <p:cNvPr id="14" name="Rounded Rectangle 13"/>
+              <a:t>▲ Before・After それぞれの枠をクリックして写真を挿入（自動で枠いっぱいに配置されます）</a:t>
+            </a:r>
+          </a:p>
+        </p:txBody>
+      </p:sp>
+      <p:sp>
+        <p:nvSpPr>
+          <p:cNvPr id="17" name="Rounded Rectangle 16"/>
           <p:cNvSpPr/>
           <p:nvPr/>
         </p:nvSpPr>
@@ -24552,7 +25726,7 @@
       </p:sp>
       <p:sp>
         <p:nvSpPr>
-          <p:cNvPr id="15" name="TextBox 14"/>
+          <p:cNvPr id="18" name="TextBox 17"/>
           <p:cNvSpPr txBox="1"/>
           <p:nvPr/>
         </p:nvSpPr>
@@ -24598,7 +25772,7 @@
       </p:sp>
       <p:sp>
         <p:nvSpPr>
-          <p:cNvPr id="16" name="TextBox 15"/>
+          <p:cNvPr id="19" name="TextBox 18"/>
           <p:cNvSpPr txBox="1"/>
           <p:nvPr/>
         </p:nvSpPr>
@@ -24644,7 +25818,7 @@
       </p:sp>
       <p:graphicFrame>
         <p:nvGraphicFramePr>
-          <p:cNvPr id="17" name="Table 16"/>
+          <p:cNvPr id="20" name="Table 19"/>
           <p:cNvGraphicFramePr>
             <a:graphicFrameLocks noGrp="1"/>
           </p:cNvGraphicFramePr>
@@ -24814,7 +25988,7 @@
       </p:graphicFrame>
       <p:sp>
         <p:nvSpPr>
-          <p:cNvPr id="18" name="Rounded Rectangle 17"/>
+          <p:cNvPr id="21" name="Rounded Rectangle 20"/>
           <p:cNvSpPr/>
           <p:nvPr/>
         </p:nvSpPr>
@@ -24860,7 +26034,7 @@
       </p:sp>
       <p:sp>
         <p:nvSpPr>
-          <p:cNvPr id="19" name="Rectangle 18"/>
+          <p:cNvPr id="22" name="Rectangle 21"/>
           <p:cNvSpPr/>
           <p:nvPr/>
         </p:nvSpPr>
@@ -24904,7 +26078,7 @@
       </p:sp>
       <p:sp>
         <p:nvSpPr>
-          <p:cNvPr id="20" name="TextBox 19"/>
+          <p:cNvPr id="23" name="TextBox 22"/>
           <p:cNvSpPr txBox="1"/>
           <p:nvPr/>
         </p:nvSpPr>
@@ -24950,7 +26124,7 @@
       </p:sp>
       <p:sp>
         <p:nvSpPr>
-          <p:cNvPr id="21" name="TextBox 20"/>
+          <p:cNvPr id="24" name="TextBox 23"/>
           <p:cNvSpPr txBox="1"/>
           <p:nvPr/>
         </p:nvSpPr>
@@ -24998,7 +26172,7 @@
       </p:sp>
       <p:sp>
         <p:nvSpPr>
-          <p:cNvPr id="22" name="Rounded Rectangle 21"/>
+          <p:cNvPr id="25" name="Rounded Rectangle 24"/>
           <p:cNvSpPr/>
           <p:nvPr/>
         </p:nvSpPr>
@@ -25042,7 +26216,7 @@
       </p:sp>
       <p:sp>
         <p:nvSpPr>
-          <p:cNvPr id="23" name="TextBox 22"/>
+          <p:cNvPr id="26" name="TextBox 25"/>
           <p:cNvSpPr txBox="1"/>
           <p:nvPr/>
         </p:nvSpPr>
@@ -25088,7 +26262,7 @@
       </p:sp>
       <p:sp>
         <p:nvSpPr>
-          <p:cNvPr id="24" name="TextBox 23"/>
+          <p:cNvPr id="27" name="TextBox 26"/>
           <p:cNvSpPr txBox="1"/>
           <p:nvPr/>
         </p:nvSpPr>
@@ -25134,7 +26308,7 @@
       </p:sp>
       <p:sp>
         <p:nvSpPr>
-          <p:cNvPr id="25" name="TextBox 24"/>
+          <p:cNvPr id="28" name="TextBox 27"/>
           <p:cNvSpPr txBox="1"/>
           <p:nvPr/>
         </p:nvSpPr>
@@ -25190,7 +26364,7 @@
       </p:sp>
       <p:sp>
         <p:nvSpPr>
-          <p:cNvPr id="26" name="TextBox 25"/>
+          <p:cNvPr id="29" name="TextBox 28"/>
           <p:cNvSpPr txBox="1"/>
           <p:nvPr/>
         </p:nvSpPr>
@@ -25236,7 +26410,7 @@
       </p:sp>
       <p:sp>
         <p:nvSpPr>
-          <p:cNvPr id="27" name="Rounded Rectangle 26"/>
+          <p:cNvPr id="30" name="Rounded Rectangle 29"/>
           <p:cNvSpPr/>
           <p:nvPr/>
         </p:nvSpPr>
@@ -25282,7 +26456,7 @@
       </p:sp>
       <p:sp>
         <p:nvSpPr>
-          <p:cNvPr id="28" name="TextBox 27"/>
+          <p:cNvPr id="31" name="TextBox 30"/>
           <p:cNvSpPr txBox="1"/>
           <p:nvPr/>
         </p:nvSpPr>
@@ -25328,7 +26502,7 @@
       </p:sp>
       <p:sp>
         <p:nvSpPr>
-          <p:cNvPr id="29" name="TextBox 28"/>
+          <p:cNvPr id="32" name="TextBox 31"/>
           <p:cNvSpPr txBox="1"/>
           <p:nvPr/>
         </p:nvSpPr>
@@ -25374,7 +26548,7 @@
       </p:sp>
       <p:sp>
         <p:nvSpPr>
-          <p:cNvPr id="30" name="TextBox 29"/>
+          <p:cNvPr id="33" name="TextBox 32"/>
           <p:cNvSpPr txBox="1"/>
           <p:nvPr/>
         </p:nvSpPr>
@@ -25420,7 +26594,7 @@
       </p:sp>
       <p:sp>
         <p:nvSpPr>
-          <p:cNvPr id="31" name="TextBox 30"/>
+          <p:cNvPr id="34" name="TextBox 33"/>
           <p:cNvSpPr txBox="1"/>
           <p:nvPr/>
         </p:nvSpPr>
@@ -25492,7 +26666,7 @@
       <p:grpSpPr/>
       <p:sp>
         <p:nvSpPr>
-          <p:cNvPr id="11" name="Rounded Rectangle 10"/>
+          <p:cNvPr id="12" name="Rounded Rectangle 11"/>
           <p:cNvSpPr/>
           <p:nvPr/>
         </p:nvSpPr>
@@ -25550,7 +26724,19 @@
       </p:sp>
       <p:sp>
         <p:nvSpPr>
-          <p:cNvPr id="3" name="TextBox 2"/>
+          <p:cNvPr id="3" name="Picture Placeholder 2"/>
+          <p:cNvSpPr>
+            <a:spLocks noGrp="1"/>
+          </p:cNvSpPr>
+          <p:nvPr>
+            <p:ph type="pic" idx="11"/>
+          </p:nvPr>
+        </p:nvSpPr>
+        <p:spPr/>
+      </p:sp>
+      <p:sp>
+        <p:nvSpPr>
+          <p:cNvPr id="4" name="TextBox 3"/>
           <p:cNvSpPr txBox="1"/>
           <p:nvPr/>
         </p:nvSpPr>
@@ -25596,7 +26782,7 @@
       </p:sp>
       <p:sp>
         <p:nvSpPr>
-          <p:cNvPr id="4" name="TextBox 3"/>
+          <p:cNvPr id="5" name="TextBox 4"/>
           <p:cNvSpPr txBox="1"/>
           <p:nvPr/>
         </p:nvSpPr>
@@ -25642,7 +26828,7 @@
       </p:sp>
       <p:sp>
         <p:nvSpPr>
-          <p:cNvPr id="5" name="TextBox 4"/>
+          <p:cNvPr id="6" name="TextBox 5"/>
           <p:cNvSpPr txBox="1"/>
           <p:nvPr/>
         </p:nvSpPr>
@@ -25688,7 +26874,7 @@
       </p:sp>
       <p:sp>
         <p:nvSpPr>
-          <p:cNvPr id="6" name="Rounded Rectangle 5"/>
+          <p:cNvPr id="7" name="Rounded Rectangle 6"/>
           <p:cNvSpPr/>
           <p:nvPr/>
         </p:nvSpPr>
@@ -25732,7 +26918,7 @@
       </p:sp>
       <p:sp>
         <p:nvSpPr>
-          <p:cNvPr id="7" name="TextBox 6"/>
+          <p:cNvPr id="8" name="TextBox 7"/>
           <p:cNvSpPr txBox="1"/>
           <p:nvPr/>
         </p:nvSpPr>
@@ -25778,7 +26964,7 @@
       </p:sp>
       <p:sp>
         <p:nvSpPr>
-          <p:cNvPr id="8" name="Rounded Rectangle 7"/>
+          <p:cNvPr id="9" name="Rounded Rectangle 8"/>
           <p:cNvSpPr/>
           <p:nvPr/>
         </p:nvSpPr>
@@ -25822,7 +27008,7 @@
       </p:sp>
       <p:sp>
         <p:nvSpPr>
-          <p:cNvPr id="9" name="TextBox 8"/>
+          <p:cNvPr id="10" name="TextBox 9"/>
           <p:cNvSpPr txBox="1"/>
           <p:nvPr/>
         </p:nvSpPr>
@@ -25868,7 +27054,7 @@
       </p:sp>
       <p:sp>
         <p:nvSpPr>
-          <p:cNvPr id="10" name="TextBox 9"/>
+          <p:cNvPr id="11" name="TextBox 10"/>
           <p:cNvSpPr txBox="1"/>
           <p:nvPr/>
         </p:nvSpPr>
@@ -25914,14 +27100,14 @@
       </p:sp>
       <p:sp>
         <p:nvSpPr>
-          <p:cNvPr id="12" name="TextBox 11"/>
-          <p:cNvSpPr txBox="1"/>
-          <p:nvPr/>
-        </p:nvSpPr>
-        <p:spPr>
-          <a:xfrm>
-            <a:off x="566928" y="1847088"/>
-            <a:ext cx="6428994" cy="256032"/>
+          <p:cNvPr id="13" name="TextBox 12"/>
+          <p:cNvSpPr txBox="1"/>
+          <p:nvPr/>
+        </p:nvSpPr>
+        <p:spPr>
+          <a:xfrm>
+            <a:off x="1038225" y="1874519"/>
+            <a:ext cx="2606040" cy="274320"/>
           </a:xfrm>
           <a:prstGeom prst="rect">
             <a:avLst/>
@@ -25946,21 +27132,113 @@
               </a:spcAft>
             </a:pPr>
             <a:r>
-              <a:rPr sz="1100" b="1">
+              <a:rPr sz="1200" b="1">
                 <a:solidFill>
                   <a:srgbClr val="8C7339"/>
                 </a:solidFill>
                 <a:latin typeface="游明朝"/>
                 <a:ea typeface="游明朝"/>
               </a:rPr>
-              <a:t>Before  →  After</a:t>
-            </a:r>
-          </a:p>
-        </p:txBody>
-      </p:sp>
-      <p:sp>
-        <p:nvSpPr>
-          <p:cNvPr id="13" name="TextBox 12"/>
+              <a:t>Before</a:t>
+            </a:r>
+          </a:p>
+        </p:txBody>
+      </p:sp>
+      <p:sp>
+        <p:nvSpPr>
+          <p:cNvPr id="14" name="TextBox 13"/>
+          <p:cNvSpPr txBox="1"/>
+          <p:nvPr/>
+        </p:nvSpPr>
+        <p:spPr>
+          <a:xfrm>
+            <a:off x="3918585" y="1874519"/>
+            <a:ext cx="2606040" cy="274320"/>
+          </a:xfrm>
+          <a:prstGeom prst="rect">
+            <a:avLst/>
+          </a:prstGeom>
+          <a:noFill/>
+        </p:spPr>
+        <p:txBody>
+          <a:bodyPr wrap="square" anchor="t" lIns="0" rIns="0" tIns="0" bIns="0">
+            <a:spAutoFit/>
+          </a:bodyPr>
+          <a:lstStyle/>
+          <a:p>
+            <a:pPr algn="ctr">
+              <a:lnSpc>
+                <a:spcPct val="112000"/>
+              </a:lnSpc>
+              <a:spcBef>
+                <a:spcPts val="0"/>
+              </a:spcBef>
+              <a:spcAft>
+                <a:spcPts val="200"/>
+              </a:spcAft>
+            </a:pPr>
+            <a:r>
+              <a:rPr sz="1200" b="1">
+                <a:solidFill>
+                  <a:srgbClr val="8C7339"/>
+                </a:solidFill>
+                <a:latin typeface="游明朝"/>
+                <a:ea typeface="游明朝"/>
+              </a:rPr>
+              <a:t>After</a:t>
+            </a:r>
+          </a:p>
+        </p:txBody>
+      </p:sp>
+      <p:sp>
+        <p:nvSpPr>
+          <p:cNvPr id="15" name="TextBox 14"/>
+          <p:cNvSpPr txBox="1"/>
+          <p:nvPr/>
+        </p:nvSpPr>
+        <p:spPr>
+          <a:xfrm>
+            <a:off x="1038225" y="1874519"/>
+            <a:ext cx="5486400" cy="274320"/>
+          </a:xfrm>
+          <a:prstGeom prst="rect">
+            <a:avLst/>
+          </a:prstGeom>
+          <a:noFill/>
+        </p:spPr>
+        <p:txBody>
+          <a:bodyPr wrap="square" anchor="t" lIns="0" rIns="0" tIns="0" bIns="0">
+            <a:spAutoFit/>
+          </a:bodyPr>
+          <a:lstStyle/>
+          <a:p>
+            <a:pPr algn="ctr">
+              <a:lnSpc>
+                <a:spcPct val="112000"/>
+              </a:lnSpc>
+              <a:spcBef>
+                <a:spcPts val="0"/>
+              </a:spcBef>
+              <a:spcAft>
+                <a:spcPts val="200"/>
+              </a:spcAft>
+            </a:pPr>
+            <a:r>
+              <a:rPr sz="1200" b="1">
+                <a:solidFill>
+                  <a:srgbClr val="B0934E"/>
+                </a:solidFill>
+                <a:latin typeface="游明朝"/>
+                <a:ea typeface="游明朝"/>
+              </a:rPr>
+              <a:t>→</a:t>
+            </a:r>
+          </a:p>
+        </p:txBody>
+      </p:sp>
+      <p:sp>
+        <p:nvSpPr>
+          <p:cNvPr id="16" name="TextBox 15"/>
           <p:cNvSpPr txBox="1"/>
           <p:nvPr/>
         </p:nvSpPr>
@@ -25999,14 +27277,14 @@
                 <a:latin typeface="游ゴシック"/>
                 <a:ea typeface="游ゴシック"/>
               </a:rPr>
-              <a:t>▲ 枠をクリックして、Before/After を1枚にした画像を挿入（自動で枠いっぱいに配置されます）</a:t>
-            </a:r>
-          </a:p>
-        </p:txBody>
-      </p:sp>
-      <p:sp>
-        <p:nvSpPr>
-          <p:cNvPr id="14" name="Rounded Rectangle 13"/>
+              <a:t>▲ Before・After それぞれの枠をクリックして写真を挿入（自動で枠いっぱいに配置されます）</a:t>
+            </a:r>
+          </a:p>
+        </p:txBody>
+      </p:sp>
+      <p:sp>
+        <p:nvSpPr>
+          <p:cNvPr id="17" name="Rounded Rectangle 16"/>
           <p:cNvSpPr/>
           <p:nvPr/>
         </p:nvSpPr>
@@ -26050,7 +27328,7 @@
       </p:sp>
       <p:sp>
         <p:nvSpPr>
-          <p:cNvPr id="15" name="TextBox 14"/>
+          <p:cNvPr id="18" name="TextBox 17"/>
           <p:cNvSpPr txBox="1"/>
           <p:nvPr/>
         </p:nvSpPr>
@@ -26096,7 +27374,7 @@
       </p:sp>
       <p:sp>
         <p:nvSpPr>
-          <p:cNvPr id="16" name="TextBox 15"/>
+          <p:cNvPr id="19" name="TextBox 18"/>
           <p:cNvSpPr txBox="1"/>
           <p:nvPr/>
         </p:nvSpPr>
@@ -26142,7 +27420,7 @@
       </p:sp>
       <p:graphicFrame>
         <p:nvGraphicFramePr>
-          <p:cNvPr id="17" name="Table 16"/>
+          <p:cNvPr id="20" name="Table 19"/>
           <p:cNvGraphicFramePr>
             <a:graphicFrameLocks noGrp="1"/>
           </p:cNvGraphicFramePr>
@@ -26312,7 +27590,7 @@
       </p:graphicFrame>
       <p:sp>
         <p:nvSpPr>
-          <p:cNvPr id="18" name="Rounded Rectangle 17"/>
+          <p:cNvPr id="21" name="Rounded Rectangle 20"/>
           <p:cNvSpPr/>
           <p:nvPr/>
         </p:nvSpPr>
@@ -26358,7 +27636,7 @@
       </p:sp>
       <p:sp>
         <p:nvSpPr>
-          <p:cNvPr id="19" name="Rectangle 18"/>
+          <p:cNvPr id="22" name="Rectangle 21"/>
           <p:cNvSpPr/>
           <p:nvPr/>
         </p:nvSpPr>
@@ -26402,7 +27680,7 @@
       </p:sp>
       <p:sp>
         <p:nvSpPr>
-          <p:cNvPr id="20" name="TextBox 19"/>
+          <p:cNvPr id="23" name="TextBox 22"/>
           <p:cNvSpPr txBox="1"/>
           <p:nvPr/>
         </p:nvSpPr>
@@ -26448,7 +27726,7 @@
       </p:sp>
       <p:sp>
         <p:nvSpPr>
-          <p:cNvPr id="21" name="TextBox 20"/>
+          <p:cNvPr id="24" name="TextBox 23"/>
           <p:cNvSpPr txBox="1"/>
           <p:nvPr/>
         </p:nvSpPr>
@@ -26496,7 +27774,7 @@
       </p:sp>
       <p:sp>
         <p:nvSpPr>
-          <p:cNvPr id="22" name="Rounded Rectangle 21"/>
+          <p:cNvPr id="25" name="Rounded Rectangle 24"/>
           <p:cNvSpPr/>
           <p:nvPr/>
         </p:nvSpPr>
@@ -26540,7 +27818,7 @@
       </p:sp>
       <p:sp>
         <p:nvSpPr>
-          <p:cNvPr id="23" name="TextBox 22"/>
+          <p:cNvPr id="26" name="TextBox 25"/>
           <p:cNvSpPr txBox="1"/>
           <p:nvPr/>
         </p:nvSpPr>
@@ -26586,7 +27864,7 @@
       </p:sp>
       <p:sp>
         <p:nvSpPr>
-          <p:cNvPr id="24" name="TextBox 23"/>
+          <p:cNvPr id="27" name="TextBox 26"/>
           <p:cNvSpPr txBox="1"/>
           <p:nvPr/>
         </p:nvSpPr>
@@ -26632,7 +27910,7 @@
       </p:sp>
       <p:sp>
         <p:nvSpPr>
-          <p:cNvPr id="25" name="TextBox 24"/>
+          <p:cNvPr id="28" name="TextBox 27"/>
           <p:cNvSpPr txBox="1"/>
           <p:nvPr/>
         </p:nvSpPr>
@@ -26678,7 +27956,7 @@
       </p:sp>
       <p:sp>
         <p:nvSpPr>
-          <p:cNvPr id="26" name="Rounded Rectangle 25"/>
+          <p:cNvPr id="29" name="Rounded Rectangle 28"/>
           <p:cNvSpPr/>
           <p:nvPr/>
         </p:nvSpPr>
@@ -26724,7 +28002,7 @@
       </p:sp>
       <p:sp>
         <p:nvSpPr>
-          <p:cNvPr id="27" name="TextBox 26"/>
+          <p:cNvPr id="30" name="TextBox 29"/>
           <p:cNvSpPr txBox="1"/>
           <p:nvPr/>
         </p:nvSpPr>
@@ -26770,7 +28048,7 @@
       </p:sp>
       <p:sp>
         <p:nvSpPr>
-          <p:cNvPr id="28" name="TextBox 27"/>
+          <p:cNvPr id="31" name="TextBox 30"/>
           <p:cNvSpPr txBox="1"/>
           <p:nvPr/>
         </p:nvSpPr>
@@ -26816,7 +28094,7 @@
       </p:sp>
       <p:sp>
         <p:nvSpPr>
-          <p:cNvPr id="29" name="TextBox 28"/>
+          <p:cNvPr id="32" name="TextBox 31"/>
           <p:cNvSpPr txBox="1"/>
           <p:nvPr/>
         </p:nvSpPr>
@@ -26862,7 +28140,7 @@
       </p:sp>
       <p:sp>
         <p:nvSpPr>
-          <p:cNvPr id="30" name="TextBox 29"/>
+          <p:cNvPr id="33" name="TextBox 32"/>
           <p:cNvSpPr txBox="1"/>
           <p:nvPr/>
         </p:nvSpPr>
@@ -39031,7 +40309,7 @@
       <p:grpSpPr/>
       <p:sp>
         <p:nvSpPr>
-          <p:cNvPr id="11" name="Rounded Rectangle 10"/>
+          <p:cNvPr id="12" name="Rounded Rectangle 11"/>
           <p:cNvSpPr/>
           <p:nvPr/>
         </p:nvSpPr>
@@ -39089,7 +40367,19 @@
       </p:sp>
       <p:sp>
         <p:nvSpPr>
-          <p:cNvPr id="3" name="TextBox 2"/>
+          <p:cNvPr id="3" name="Picture Placeholder 2"/>
+          <p:cNvSpPr>
+            <a:spLocks noGrp="1"/>
+          </p:cNvSpPr>
+          <p:nvPr>
+            <p:ph type="pic" idx="11"/>
+          </p:nvPr>
+        </p:nvSpPr>
+        <p:spPr/>
+      </p:sp>
+      <p:sp>
+        <p:nvSpPr>
+          <p:cNvPr id="4" name="TextBox 3"/>
           <p:cNvSpPr txBox="1"/>
           <p:nvPr/>
         </p:nvSpPr>
@@ -39135,7 +40425,7 @@
       </p:sp>
       <p:sp>
         <p:nvSpPr>
-          <p:cNvPr id="4" name="TextBox 3"/>
+          <p:cNvPr id="5" name="TextBox 4"/>
           <p:cNvSpPr txBox="1"/>
           <p:nvPr/>
         </p:nvSpPr>
@@ -39181,7 +40471,7 @@
       </p:sp>
       <p:sp>
         <p:nvSpPr>
-          <p:cNvPr id="5" name="TextBox 4"/>
+          <p:cNvPr id="6" name="TextBox 5"/>
           <p:cNvSpPr txBox="1"/>
           <p:nvPr/>
         </p:nvSpPr>
@@ -39227,7 +40517,7 @@
       </p:sp>
       <p:sp>
         <p:nvSpPr>
-          <p:cNvPr id="6" name="Rounded Rectangle 5"/>
+          <p:cNvPr id="7" name="Rounded Rectangle 6"/>
           <p:cNvSpPr/>
           <p:nvPr/>
         </p:nvSpPr>
@@ -39271,7 +40561,7 @@
       </p:sp>
       <p:sp>
         <p:nvSpPr>
-          <p:cNvPr id="7" name="TextBox 6"/>
+          <p:cNvPr id="8" name="TextBox 7"/>
           <p:cNvSpPr txBox="1"/>
           <p:nvPr/>
         </p:nvSpPr>
@@ -39317,7 +40607,7 @@
       </p:sp>
       <p:sp>
         <p:nvSpPr>
-          <p:cNvPr id="8" name="Rounded Rectangle 7"/>
+          <p:cNvPr id="9" name="Rounded Rectangle 8"/>
           <p:cNvSpPr/>
           <p:nvPr/>
         </p:nvSpPr>
@@ -39361,7 +40651,7 @@
       </p:sp>
       <p:sp>
         <p:nvSpPr>
-          <p:cNvPr id="9" name="TextBox 8"/>
+          <p:cNvPr id="10" name="TextBox 9"/>
           <p:cNvSpPr txBox="1"/>
           <p:nvPr/>
         </p:nvSpPr>
@@ -39407,7 +40697,7 @@
       </p:sp>
       <p:sp>
         <p:nvSpPr>
-          <p:cNvPr id="10" name="TextBox 9"/>
+          <p:cNvPr id="11" name="TextBox 10"/>
           <p:cNvSpPr txBox="1"/>
           <p:nvPr/>
         </p:nvSpPr>
@@ -39453,14 +40743,14 @@
       </p:sp>
       <p:sp>
         <p:nvSpPr>
-          <p:cNvPr id="12" name="TextBox 11"/>
-          <p:cNvSpPr txBox="1"/>
-          <p:nvPr/>
-        </p:nvSpPr>
-        <p:spPr>
-          <a:xfrm>
-            <a:off x="566928" y="1847088"/>
-            <a:ext cx="6428994" cy="256032"/>
+          <p:cNvPr id="13" name="TextBox 12"/>
+          <p:cNvSpPr txBox="1"/>
+          <p:nvPr/>
+        </p:nvSpPr>
+        <p:spPr>
+          <a:xfrm>
+            <a:off x="1038225" y="1874519"/>
+            <a:ext cx="2606040" cy="274320"/>
           </a:xfrm>
           <a:prstGeom prst="rect">
             <a:avLst/>
@@ -39485,21 +40775,113 @@
               </a:spcAft>
             </a:pPr>
             <a:r>
-              <a:rPr sz="1100" b="1">
+              <a:rPr sz="1200" b="1">
                 <a:solidFill>
                   <a:srgbClr val="8C7339"/>
                 </a:solidFill>
                 <a:latin typeface="游明朝"/>
                 <a:ea typeface="游明朝"/>
               </a:rPr>
-              <a:t>Before  →  After</a:t>
-            </a:r>
-          </a:p>
-        </p:txBody>
-      </p:sp>
-      <p:sp>
-        <p:nvSpPr>
-          <p:cNvPr id="13" name="TextBox 12"/>
+              <a:t>Before</a:t>
+            </a:r>
+          </a:p>
+        </p:txBody>
+      </p:sp>
+      <p:sp>
+        <p:nvSpPr>
+          <p:cNvPr id="14" name="TextBox 13"/>
+          <p:cNvSpPr txBox="1"/>
+          <p:nvPr/>
+        </p:nvSpPr>
+        <p:spPr>
+          <a:xfrm>
+            <a:off x="3918585" y="1874519"/>
+            <a:ext cx="2606040" cy="274320"/>
+          </a:xfrm>
+          <a:prstGeom prst="rect">
+            <a:avLst/>
+          </a:prstGeom>
+          <a:noFill/>
+        </p:spPr>
+        <p:txBody>
+          <a:bodyPr wrap="square" anchor="t" lIns="0" rIns="0" tIns="0" bIns="0">
+            <a:spAutoFit/>
+          </a:bodyPr>
+          <a:lstStyle/>
+          <a:p>
+            <a:pPr algn="ctr">
+              <a:lnSpc>
+                <a:spcPct val="112000"/>
+              </a:lnSpc>
+              <a:spcBef>
+                <a:spcPts val="0"/>
+              </a:spcBef>
+              <a:spcAft>
+                <a:spcPts val="200"/>
+              </a:spcAft>
+            </a:pPr>
+            <a:r>
+              <a:rPr sz="1200" b="1">
+                <a:solidFill>
+                  <a:srgbClr val="8C7339"/>
+                </a:solidFill>
+                <a:latin typeface="游明朝"/>
+                <a:ea typeface="游明朝"/>
+              </a:rPr>
+              <a:t>After</a:t>
+            </a:r>
+          </a:p>
+        </p:txBody>
+      </p:sp>
+      <p:sp>
+        <p:nvSpPr>
+          <p:cNvPr id="15" name="TextBox 14"/>
+          <p:cNvSpPr txBox="1"/>
+          <p:nvPr/>
+        </p:nvSpPr>
+        <p:spPr>
+          <a:xfrm>
+            <a:off x="1038225" y="1874519"/>
+            <a:ext cx="5486400" cy="274320"/>
+          </a:xfrm>
+          <a:prstGeom prst="rect">
+            <a:avLst/>
+          </a:prstGeom>
+          <a:noFill/>
+        </p:spPr>
+        <p:txBody>
+          <a:bodyPr wrap="square" anchor="t" lIns="0" rIns="0" tIns="0" bIns="0">
+            <a:spAutoFit/>
+          </a:bodyPr>
+          <a:lstStyle/>
+          <a:p>
+            <a:pPr algn="ctr">
+              <a:lnSpc>
+                <a:spcPct val="112000"/>
+              </a:lnSpc>
+              <a:spcBef>
+                <a:spcPts val="0"/>
+              </a:spcBef>
+              <a:spcAft>
+                <a:spcPts val="200"/>
+              </a:spcAft>
+            </a:pPr>
+            <a:r>
+              <a:rPr sz="1200" b="1">
+                <a:solidFill>
+                  <a:srgbClr val="B0934E"/>
+                </a:solidFill>
+                <a:latin typeface="游明朝"/>
+                <a:ea typeface="游明朝"/>
+              </a:rPr>
+              <a:t>→</a:t>
+            </a:r>
+          </a:p>
+        </p:txBody>
+      </p:sp>
+      <p:sp>
+        <p:nvSpPr>
+          <p:cNvPr id="16" name="TextBox 15"/>
           <p:cNvSpPr txBox="1"/>
           <p:nvPr/>
         </p:nvSpPr>
@@ -39538,14 +40920,14 @@
                 <a:latin typeface="游ゴシック"/>
                 <a:ea typeface="游ゴシック"/>
               </a:rPr>
-              <a:t>▲ 枠をクリックして、Before/After を1枚にした画像を挿入（自動で枠いっぱいに配置されます）</a:t>
-            </a:r>
-          </a:p>
-        </p:txBody>
-      </p:sp>
-      <p:sp>
-        <p:nvSpPr>
-          <p:cNvPr id="14" name="Rounded Rectangle 13"/>
+              <a:t>▲ Before・After それぞれの枠をクリックして写真を挿入（自動で枠いっぱいに配置されます）</a:t>
+            </a:r>
+          </a:p>
+        </p:txBody>
+      </p:sp>
+      <p:sp>
+        <p:nvSpPr>
+          <p:cNvPr id="17" name="Rounded Rectangle 16"/>
           <p:cNvSpPr/>
           <p:nvPr/>
         </p:nvSpPr>
@@ -39589,7 +40971,7 @@
       </p:sp>
       <p:sp>
         <p:nvSpPr>
-          <p:cNvPr id="15" name="TextBox 14"/>
+          <p:cNvPr id="18" name="TextBox 17"/>
           <p:cNvSpPr txBox="1"/>
           <p:nvPr/>
         </p:nvSpPr>
@@ -39635,7 +41017,7 @@
       </p:sp>
       <p:sp>
         <p:nvSpPr>
-          <p:cNvPr id="16" name="TextBox 15"/>
+          <p:cNvPr id="19" name="TextBox 18"/>
           <p:cNvSpPr txBox="1"/>
           <p:nvPr/>
         </p:nvSpPr>
@@ -39681,7 +41063,7 @@
       </p:sp>
       <p:graphicFrame>
         <p:nvGraphicFramePr>
-          <p:cNvPr id="17" name="Table 16"/>
+          <p:cNvPr id="20" name="Table 19"/>
           <p:cNvGraphicFramePr>
             <a:graphicFrameLocks noGrp="1"/>
           </p:cNvGraphicFramePr>
@@ -39851,7 +41233,7 @@
       </p:graphicFrame>
       <p:sp>
         <p:nvSpPr>
-          <p:cNvPr id="18" name="Rounded Rectangle 17"/>
+          <p:cNvPr id="21" name="Rounded Rectangle 20"/>
           <p:cNvSpPr/>
           <p:nvPr/>
         </p:nvSpPr>
@@ -39897,7 +41279,7 @@
       </p:sp>
       <p:sp>
         <p:nvSpPr>
-          <p:cNvPr id="19" name="Rectangle 18"/>
+          <p:cNvPr id="22" name="Rectangle 21"/>
           <p:cNvSpPr/>
           <p:nvPr/>
         </p:nvSpPr>
@@ -39941,7 +41323,7 @@
       </p:sp>
       <p:sp>
         <p:nvSpPr>
-          <p:cNvPr id="20" name="TextBox 19"/>
+          <p:cNvPr id="23" name="TextBox 22"/>
           <p:cNvSpPr txBox="1"/>
           <p:nvPr/>
         </p:nvSpPr>
@@ -39987,7 +41369,7 @@
       </p:sp>
       <p:sp>
         <p:nvSpPr>
-          <p:cNvPr id="21" name="TextBox 20"/>
+          <p:cNvPr id="24" name="TextBox 23"/>
           <p:cNvSpPr txBox="1"/>
           <p:nvPr/>
         </p:nvSpPr>
@@ -40035,7 +41417,7 @@
       </p:sp>
       <p:sp>
         <p:nvSpPr>
-          <p:cNvPr id="22" name="Rounded Rectangle 21"/>
+          <p:cNvPr id="25" name="Rounded Rectangle 24"/>
           <p:cNvSpPr/>
           <p:nvPr/>
         </p:nvSpPr>
@@ -40079,7 +41461,7 @@
       </p:sp>
       <p:sp>
         <p:nvSpPr>
-          <p:cNvPr id="23" name="TextBox 22"/>
+          <p:cNvPr id="26" name="TextBox 25"/>
           <p:cNvSpPr txBox="1"/>
           <p:nvPr/>
         </p:nvSpPr>
@@ -40125,7 +41507,7 @@
       </p:sp>
       <p:sp>
         <p:nvSpPr>
-          <p:cNvPr id="24" name="TextBox 23"/>
+          <p:cNvPr id="27" name="TextBox 26"/>
           <p:cNvSpPr txBox="1"/>
           <p:nvPr/>
         </p:nvSpPr>
@@ -40171,7 +41553,7 @@
       </p:sp>
       <p:sp>
         <p:nvSpPr>
-          <p:cNvPr id="25" name="TextBox 24"/>
+          <p:cNvPr id="28" name="TextBox 27"/>
           <p:cNvSpPr txBox="1"/>
           <p:nvPr/>
         </p:nvSpPr>
@@ -40227,7 +41609,7 @@
       </p:sp>
       <p:sp>
         <p:nvSpPr>
-          <p:cNvPr id="26" name="TextBox 25"/>
+          <p:cNvPr id="29" name="TextBox 28"/>
           <p:cNvSpPr txBox="1"/>
           <p:nvPr/>
         </p:nvSpPr>
@@ -40273,7 +41655,7 @@
       </p:sp>
       <p:sp>
         <p:nvSpPr>
-          <p:cNvPr id="27" name="Rounded Rectangle 26"/>
+          <p:cNvPr id="30" name="Rounded Rectangle 29"/>
           <p:cNvSpPr/>
           <p:nvPr/>
         </p:nvSpPr>
@@ -40319,7 +41701,7 @@
       </p:sp>
       <p:sp>
         <p:nvSpPr>
-          <p:cNvPr id="28" name="TextBox 27"/>
+          <p:cNvPr id="31" name="TextBox 30"/>
           <p:cNvSpPr txBox="1"/>
           <p:nvPr/>
         </p:nvSpPr>
@@ -40365,7 +41747,7 @@
       </p:sp>
       <p:sp>
         <p:nvSpPr>
-          <p:cNvPr id="29" name="TextBox 28"/>
+          <p:cNvPr id="32" name="TextBox 31"/>
           <p:cNvSpPr txBox="1"/>
           <p:nvPr/>
         </p:nvSpPr>
@@ -40411,7 +41793,7 @@
       </p:sp>
       <p:sp>
         <p:nvSpPr>
-          <p:cNvPr id="30" name="TextBox 29"/>
+          <p:cNvPr id="33" name="TextBox 32"/>
           <p:cNvSpPr txBox="1"/>
           <p:nvPr/>
         </p:nvSpPr>
@@ -40457,7 +41839,7 @@
       </p:sp>
       <p:sp>
         <p:nvSpPr>
-          <p:cNvPr id="31" name="TextBox 30"/>
+          <p:cNvPr id="34" name="TextBox 33"/>
           <p:cNvSpPr txBox="1"/>
           <p:nvPr/>
         </p:nvSpPr>
@@ -40529,7 +41911,7 @@
       <p:grpSpPr/>
       <p:sp>
         <p:nvSpPr>
-          <p:cNvPr id="11" name="Rounded Rectangle 10"/>
+          <p:cNvPr id="12" name="Rounded Rectangle 11"/>
           <p:cNvSpPr/>
           <p:nvPr/>
         </p:nvSpPr>
@@ -40587,7 +41969,19 @@
       </p:sp>
       <p:sp>
         <p:nvSpPr>
-          <p:cNvPr id="3" name="TextBox 2"/>
+          <p:cNvPr id="3" name="Picture Placeholder 2"/>
+          <p:cNvSpPr>
+            <a:spLocks noGrp="1"/>
+          </p:cNvSpPr>
+          <p:nvPr>
+            <p:ph type="pic" idx="11"/>
+          </p:nvPr>
+        </p:nvSpPr>
+        <p:spPr/>
+      </p:sp>
+      <p:sp>
+        <p:nvSpPr>
+          <p:cNvPr id="4" name="TextBox 3"/>
           <p:cNvSpPr txBox="1"/>
           <p:nvPr/>
         </p:nvSpPr>
@@ -40633,7 +42027,7 @@
       </p:sp>
       <p:sp>
         <p:nvSpPr>
-          <p:cNvPr id="4" name="TextBox 3"/>
+          <p:cNvPr id="5" name="TextBox 4"/>
           <p:cNvSpPr txBox="1"/>
           <p:nvPr/>
         </p:nvSpPr>
@@ -40679,7 +42073,7 @@
       </p:sp>
       <p:sp>
         <p:nvSpPr>
-          <p:cNvPr id="5" name="TextBox 4"/>
+          <p:cNvPr id="6" name="TextBox 5"/>
           <p:cNvSpPr txBox="1"/>
           <p:nvPr/>
         </p:nvSpPr>
@@ -40725,7 +42119,7 @@
       </p:sp>
       <p:sp>
         <p:nvSpPr>
-          <p:cNvPr id="6" name="Rounded Rectangle 5"/>
+          <p:cNvPr id="7" name="Rounded Rectangle 6"/>
           <p:cNvSpPr/>
           <p:nvPr/>
         </p:nvSpPr>
@@ -40769,7 +42163,7 @@
       </p:sp>
       <p:sp>
         <p:nvSpPr>
-          <p:cNvPr id="7" name="TextBox 6"/>
+          <p:cNvPr id="8" name="TextBox 7"/>
           <p:cNvSpPr txBox="1"/>
           <p:nvPr/>
         </p:nvSpPr>
@@ -40815,7 +42209,7 @@
       </p:sp>
       <p:sp>
         <p:nvSpPr>
-          <p:cNvPr id="8" name="Rounded Rectangle 7"/>
+          <p:cNvPr id="9" name="Rounded Rectangle 8"/>
           <p:cNvSpPr/>
           <p:nvPr/>
         </p:nvSpPr>
@@ -40859,7 +42253,7 @@
       </p:sp>
       <p:sp>
         <p:nvSpPr>
-          <p:cNvPr id="9" name="TextBox 8"/>
+          <p:cNvPr id="10" name="TextBox 9"/>
           <p:cNvSpPr txBox="1"/>
           <p:nvPr/>
         </p:nvSpPr>
@@ -40905,7 +42299,7 @@
       </p:sp>
       <p:sp>
         <p:nvSpPr>
-          <p:cNvPr id="10" name="TextBox 9"/>
+          <p:cNvPr id="11" name="TextBox 10"/>
           <p:cNvSpPr txBox="1"/>
           <p:nvPr/>
         </p:nvSpPr>
@@ -40951,14 +42345,14 @@
       </p:sp>
       <p:sp>
         <p:nvSpPr>
-          <p:cNvPr id="12" name="TextBox 11"/>
-          <p:cNvSpPr txBox="1"/>
-          <p:nvPr/>
-        </p:nvSpPr>
-        <p:spPr>
-          <a:xfrm>
-            <a:off x="566928" y="1847088"/>
-            <a:ext cx="6428994" cy="256032"/>
+          <p:cNvPr id="13" name="TextBox 12"/>
+          <p:cNvSpPr txBox="1"/>
+          <p:nvPr/>
+        </p:nvSpPr>
+        <p:spPr>
+          <a:xfrm>
+            <a:off x="1038225" y="1874519"/>
+            <a:ext cx="2606040" cy="274320"/>
           </a:xfrm>
           <a:prstGeom prst="rect">
             <a:avLst/>
@@ -40983,21 +42377,113 @@
               </a:spcAft>
             </a:pPr>
             <a:r>
-              <a:rPr sz="1100" b="1">
+              <a:rPr sz="1200" b="1">
                 <a:solidFill>
                   <a:srgbClr val="8C7339"/>
                 </a:solidFill>
                 <a:latin typeface="游明朝"/>
                 <a:ea typeface="游明朝"/>
               </a:rPr>
-              <a:t>Before  →  After</a:t>
-            </a:r>
-          </a:p>
-        </p:txBody>
-      </p:sp>
-      <p:sp>
-        <p:nvSpPr>
-          <p:cNvPr id="13" name="TextBox 12"/>
+              <a:t>Before</a:t>
+            </a:r>
+          </a:p>
+        </p:txBody>
+      </p:sp>
+      <p:sp>
+        <p:nvSpPr>
+          <p:cNvPr id="14" name="TextBox 13"/>
+          <p:cNvSpPr txBox="1"/>
+          <p:nvPr/>
+        </p:nvSpPr>
+        <p:spPr>
+          <a:xfrm>
+            <a:off x="3918585" y="1874519"/>
+            <a:ext cx="2606040" cy="274320"/>
+          </a:xfrm>
+          <a:prstGeom prst="rect">
+            <a:avLst/>
+          </a:prstGeom>
+          <a:noFill/>
+        </p:spPr>
+        <p:txBody>
+          <a:bodyPr wrap="square" anchor="t" lIns="0" rIns="0" tIns="0" bIns="0">
+            <a:spAutoFit/>
+          </a:bodyPr>
+          <a:lstStyle/>
+          <a:p>
+            <a:pPr algn="ctr">
+              <a:lnSpc>
+                <a:spcPct val="112000"/>
+              </a:lnSpc>
+              <a:spcBef>
+                <a:spcPts val="0"/>
+              </a:spcBef>
+              <a:spcAft>
+                <a:spcPts val="200"/>
+              </a:spcAft>
+            </a:pPr>
+            <a:r>
+              <a:rPr sz="1200" b="1">
+                <a:solidFill>
+                  <a:srgbClr val="8C7339"/>
+                </a:solidFill>
+                <a:latin typeface="游明朝"/>
+                <a:ea typeface="游明朝"/>
+              </a:rPr>
+              <a:t>After</a:t>
+            </a:r>
+          </a:p>
+        </p:txBody>
+      </p:sp>
+      <p:sp>
+        <p:nvSpPr>
+          <p:cNvPr id="15" name="TextBox 14"/>
+          <p:cNvSpPr txBox="1"/>
+          <p:nvPr/>
+        </p:nvSpPr>
+        <p:spPr>
+          <a:xfrm>
+            <a:off x="1038225" y="1874519"/>
+            <a:ext cx="5486400" cy="274320"/>
+          </a:xfrm>
+          <a:prstGeom prst="rect">
+            <a:avLst/>
+          </a:prstGeom>
+          <a:noFill/>
+        </p:spPr>
+        <p:txBody>
+          <a:bodyPr wrap="square" anchor="t" lIns="0" rIns="0" tIns="0" bIns="0">
+            <a:spAutoFit/>
+          </a:bodyPr>
+          <a:lstStyle/>
+          <a:p>
+            <a:pPr algn="ctr">
+              <a:lnSpc>
+                <a:spcPct val="112000"/>
+              </a:lnSpc>
+              <a:spcBef>
+                <a:spcPts val="0"/>
+              </a:spcBef>
+              <a:spcAft>
+                <a:spcPts val="200"/>
+              </a:spcAft>
+            </a:pPr>
+            <a:r>
+              <a:rPr sz="1200" b="1">
+                <a:solidFill>
+                  <a:srgbClr val="B0934E"/>
+                </a:solidFill>
+                <a:latin typeface="游明朝"/>
+                <a:ea typeface="游明朝"/>
+              </a:rPr>
+              <a:t>→</a:t>
+            </a:r>
+          </a:p>
+        </p:txBody>
+      </p:sp>
+      <p:sp>
+        <p:nvSpPr>
+          <p:cNvPr id="16" name="TextBox 15"/>
           <p:cNvSpPr txBox="1"/>
           <p:nvPr/>
         </p:nvSpPr>
@@ -41036,14 +42522,14 @@
                 <a:latin typeface="游ゴシック"/>
                 <a:ea typeface="游ゴシック"/>
               </a:rPr>
-              <a:t>▲ 枠をクリックして、Before/After を1枚にした画像を挿入（自動で枠いっぱいに配置されます）</a:t>
-            </a:r>
-          </a:p>
-        </p:txBody>
-      </p:sp>
-      <p:sp>
-        <p:nvSpPr>
-          <p:cNvPr id="14" name="Rounded Rectangle 13"/>
+              <a:t>▲ Before・After それぞれの枠をクリックして写真を挿入（自動で枠いっぱいに配置されます）</a:t>
+            </a:r>
+          </a:p>
+        </p:txBody>
+      </p:sp>
+      <p:sp>
+        <p:nvSpPr>
+          <p:cNvPr id="17" name="Rounded Rectangle 16"/>
           <p:cNvSpPr/>
           <p:nvPr/>
         </p:nvSpPr>
@@ -41087,7 +42573,7 @@
       </p:sp>
       <p:sp>
         <p:nvSpPr>
-          <p:cNvPr id="15" name="TextBox 14"/>
+          <p:cNvPr id="18" name="TextBox 17"/>
           <p:cNvSpPr txBox="1"/>
           <p:nvPr/>
         </p:nvSpPr>
@@ -41133,7 +42619,7 @@
       </p:sp>
       <p:sp>
         <p:nvSpPr>
-          <p:cNvPr id="16" name="TextBox 15"/>
+          <p:cNvPr id="19" name="TextBox 18"/>
           <p:cNvSpPr txBox="1"/>
           <p:nvPr/>
         </p:nvSpPr>
@@ -41179,7 +42665,7 @@
       </p:sp>
       <p:graphicFrame>
         <p:nvGraphicFramePr>
-          <p:cNvPr id="17" name="Table 16"/>
+          <p:cNvPr id="20" name="Table 19"/>
           <p:cNvGraphicFramePr>
             <a:graphicFrameLocks noGrp="1"/>
           </p:cNvGraphicFramePr>
@@ -41349,7 +42835,7 @@
       </p:graphicFrame>
       <p:sp>
         <p:nvSpPr>
-          <p:cNvPr id="18" name="Rounded Rectangle 17"/>
+          <p:cNvPr id="21" name="Rounded Rectangle 20"/>
           <p:cNvSpPr/>
           <p:nvPr/>
         </p:nvSpPr>
@@ -41395,7 +42881,7 @@
       </p:sp>
       <p:sp>
         <p:nvSpPr>
-          <p:cNvPr id="19" name="Rectangle 18"/>
+          <p:cNvPr id="22" name="Rectangle 21"/>
           <p:cNvSpPr/>
           <p:nvPr/>
         </p:nvSpPr>
@@ -41439,7 +42925,7 @@
       </p:sp>
       <p:sp>
         <p:nvSpPr>
-          <p:cNvPr id="20" name="TextBox 19"/>
+          <p:cNvPr id="23" name="TextBox 22"/>
           <p:cNvSpPr txBox="1"/>
           <p:nvPr/>
         </p:nvSpPr>
@@ -41485,7 +42971,7 @@
       </p:sp>
       <p:sp>
         <p:nvSpPr>
-          <p:cNvPr id="21" name="TextBox 20"/>
+          <p:cNvPr id="24" name="TextBox 23"/>
           <p:cNvSpPr txBox="1"/>
           <p:nvPr/>
         </p:nvSpPr>
@@ -41533,7 +43019,7 @@
       </p:sp>
       <p:sp>
         <p:nvSpPr>
-          <p:cNvPr id="22" name="Rounded Rectangle 21"/>
+          <p:cNvPr id="25" name="Rounded Rectangle 24"/>
           <p:cNvSpPr/>
           <p:nvPr/>
         </p:nvSpPr>
@@ -41577,7 +43063,7 @@
       </p:sp>
       <p:sp>
         <p:nvSpPr>
-          <p:cNvPr id="23" name="TextBox 22"/>
+          <p:cNvPr id="26" name="TextBox 25"/>
           <p:cNvSpPr txBox="1"/>
           <p:nvPr/>
         </p:nvSpPr>
@@ -41623,7 +43109,7 @@
       </p:sp>
       <p:sp>
         <p:nvSpPr>
-          <p:cNvPr id="24" name="TextBox 23"/>
+          <p:cNvPr id="27" name="TextBox 26"/>
           <p:cNvSpPr txBox="1"/>
           <p:nvPr/>
         </p:nvSpPr>
@@ -41669,7 +43155,7 @@
       </p:sp>
       <p:sp>
         <p:nvSpPr>
-          <p:cNvPr id="25" name="TextBox 24"/>
+          <p:cNvPr id="28" name="TextBox 27"/>
           <p:cNvSpPr txBox="1"/>
           <p:nvPr/>
         </p:nvSpPr>
@@ -41725,7 +43211,7 @@
       </p:sp>
       <p:sp>
         <p:nvSpPr>
-          <p:cNvPr id="26" name="TextBox 25"/>
+          <p:cNvPr id="29" name="TextBox 28"/>
           <p:cNvSpPr txBox="1"/>
           <p:nvPr/>
         </p:nvSpPr>
@@ -41771,7 +43257,7 @@
       </p:sp>
       <p:sp>
         <p:nvSpPr>
-          <p:cNvPr id="27" name="Rounded Rectangle 26"/>
+          <p:cNvPr id="30" name="Rounded Rectangle 29"/>
           <p:cNvSpPr/>
           <p:nvPr/>
         </p:nvSpPr>
@@ -41817,7 +43303,7 @@
       </p:sp>
       <p:sp>
         <p:nvSpPr>
-          <p:cNvPr id="28" name="TextBox 27"/>
+          <p:cNvPr id="31" name="TextBox 30"/>
           <p:cNvSpPr txBox="1"/>
           <p:nvPr/>
         </p:nvSpPr>
@@ -41863,7 +43349,7 @@
       </p:sp>
       <p:sp>
         <p:nvSpPr>
-          <p:cNvPr id="29" name="TextBox 28"/>
+          <p:cNvPr id="32" name="TextBox 31"/>
           <p:cNvSpPr txBox="1"/>
           <p:nvPr/>
         </p:nvSpPr>
@@ -41909,7 +43395,7 @@
       </p:sp>
       <p:sp>
         <p:nvSpPr>
-          <p:cNvPr id="30" name="TextBox 29"/>
+          <p:cNvPr id="33" name="TextBox 32"/>
           <p:cNvSpPr txBox="1"/>
           <p:nvPr/>
         </p:nvSpPr>
@@ -41955,7 +43441,7 @@
       </p:sp>
       <p:sp>
         <p:nvSpPr>
-          <p:cNvPr id="31" name="TextBox 30"/>
+          <p:cNvPr id="34" name="TextBox 33"/>
           <p:cNvSpPr txBox="1"/>
           <p:nvPr/>
         </p:nvSpPr>
@@ -42027,7 +43513,7 @@
       <p:grpSpPr/>
       <p:sp>
         <p:nvSpPr>
-          <p:cNvPr id="11" name="Rounded Rectangle 10"/>
+          <p:cNvPr id="12" name="Rounded Rectangle 11"/>
           <p:cNvSpPr/>
           <p:nvPr/>
         </p:nvSpPr>
@@ -42085,7 +43571,19 @@
       </p:sp>
       <p:sp>
         <p:nvSpPr>
-          <p:cNvPr id="3" name="TextBox 2"/>
+          <p:cNvPr id="3" name="Picture Placeholder 2"/>
+          <p:cNvSpPr>
+            <a:spLocks noGrp="1"/>
+          </p:cNvSpPr>
+          <p:nvPr>
+            <p:ph type="pic" idx="11"/>
+          </p:nvPr>
+        </p:nvSpPr>
+        <p:spPr/>
+      </p:sp>
+      <p:sp>
+        <p:nvSpPr>
+          <p:cNvPr id="4" name="TextBox 3"/>
           <p:cNvSpPr txBox="1"/>
           <p:nvPr/>
         </p:nvSpPr>
@@ -42131,7 +43629,7 @@
       </p:sp>
       <p:sp>
         <p:nvSpPr>
-          <p:cNvPr id="4" name="TextBox 3"/>
+          <p:cNvPr id="5" name="TextBox 4"/>
           <p:cNvSpPr txBox="1"/>
           <p:nvPr/>
         </p:nvSpPr>
@@ -42177,7 +43675,7 @@
       </p:sp>
       <p:sp>
         <p:nvSpPr>
-          <p:cNvPr id="5" name="TextBox 4"/>
+          <p:cNvPr id="6" name="TextBox 5"/>
           <p:cNvSpPr txBox="1"/>
           <p:nvPr/>
         </p:nvSpPr>
@@ -42223,7 +43721,7 @@
       </p:sp>
       <p:sp>
         <p:nvSpPr>
-          <p:cNvPr id="6" name="Rounded Rectangle 5"/>
+          <p:cNvPr id="7" name="Rounded Rectangle 6"/>
           <p:cNvSpPr/>
           <p:nvPr/>
         </p:nvSpPr>
@@ -42267,7 +43765,7 @@
       </p:sp>
       <p:sp>
         <p:nvSpPr>
-          <p:cNvPr id="7" name="TextBox 6"/>
+          <p:cNvPr id="8" name="TextBox 7"/>
           <p:cNvSpPr txBox="1"/>
           <p:nvPr/>
         </p:nvSpPr>
@@ -42313,7 +43811,7 @@
       </p:sp>
       <p:sp>
         <p:nvSpPr>
-          <p:cNvPr id="8" name="Rounded Rectangle 7"/>
+          <p:cNvPr id="9" name="Rounded Rectangle 8"/>
           <p:cNvSpPr/>
           <p:nvPr/>
         </p:nvSpPr>
@@ -42357,7 +43855,7 @@
       </p:sp>
       <p:sp>
         <p:nvSpPr>
-          <p:cNvPr id="9" name="TextBox 8"/>
+          <p:cNvPr id="10" name="TextBox 9"/>
           <p:cNvSpPr txBox="1"/>
           <p:nvPr/>
         </p:nvSpPr>
@@ -42403,7 +43901,7 @@
       </p:sp>
       <p:sp>
         <p:nvSpPr>
-          <p:cNvPr id="10" name="TextBox 9"/>
+          <p:cNvPr id="11" name="TextBox 10"/>
           <p:cNvSpPr txBox="1"/>
           <p:nvPr/>
         </p:nvSpPr>
@@ -42449,14 +43947,14 @@
       </p:sp>
       <p:sp>
         <p:nvSpPr>
-          <p:cNvPr id="12" name="TextBox 11"/>
-          <p:cNvSpPr txBox="1"/>
-          <p:nvPr/>
-        </p:nvSpPr>
-        <p:spPr>
-          <a:xfrm>
-            <a:off x="566928" y="1847088"/>
-            <a:ext cx="6428994" cy="256032"/>
+          <p:cNvPr id="13" name="TextBox 12"/>
+          <p:cNvSpPr txBox="1"/>
+          <p:nvPr/>
+        </p:nvSpPr>
+        <p:spPr>
+          <a:xfrm>
+            <a:off x="1038225" y="1874519"/>
+            <a:ext cx="2606040" cy="274320"/>
           </a:xfrm>
           <a:prstGeom prst="rect">
             <a:avLst/>
@@ -42481,21 +43979,113 @@
               </a:spcAft>
             </a:pPr>
             <a:r>
-              <a:rPr sz="1100" b="1">
+              <a:rPr sz="1200" b="1">
                 <a:solidFill>
                   <a:srgbClr val="8C7339"/>
                 </a:solidFill>
                 <a:latin typeface="游明朝"/>
                 <a:ea typeface="游明朝"/>
               </a:rPr>
-              <a:t>Before  →  After</a:t>
-            </a:r>
-          </a:p>
-        </p:txBody>
-      </p:sp>
-      <p:sp>
-        <p:nvSpPr>
-          <p:cNvPr id="13" name="TextBox 12"/>
+              <a:t>Before</a:t>
+            </a:r>
+          </a:p>
+        </p:txBody>
+      </p:sp>
+      <p:sp>
+        <p:nvSpPr>
+          <p:cNvPr id="14" name="TextBox 13"/>
+          <p:cNvSpPr txBox="1"/>
+          <p:nvPr/>
+        </p:nvSpPr>
+        <p:spPr>
+          <a:xfrm>
+            <a:off x="3918585" y="1874519"/>
+            <a:ext cx="2606040" cy="274320"/>
+          </a:xfrm>
+          <a:prstGeom prst="rect">
+            <a:avLst/>
+          </a:prstGeom>
+          <a:noFill/>
+        </p:spPr>
+        <p:txBody>
+          <a:bodyPr wrap="square" anchor="t" lIns="0" rIns="0" tIns="0" bIns="0">
+            <a:spAutoFit/>
+          </a:bodyPr>
+          <a:lstStyle/>
+          <a:p>
+            <a:pPr algn="ctr">
+              <a:lnSpc>
+                <a:spcPct val="112000"/>
+              </a:lnSpc>
+              <a:spcBef>
+                <a:spcPts val="0"/>
+              </a:spcBef>
+              <a:spcAft>
+                <a:spcPts val="200"/>
+              </a:spcAft>
+            </a:pPr>
+            <a:r>
+              <a:rPr sz="1200" b="1">
+                <a:solidFill>
+                  <a:srgbClr val="8C7339"/>
+                </a:solidFill>
+                <a:latin typeface="游明朝"/>
+                <a:ea typeface="游明朝"/>
+              </a:rPr>
+              <a:t>After</a:t>
+            </a:r>
+          </a:p>
+        </p:txBody>
+      </p:sp>
+      <p:sp>
+        <p:nvSpPr>
+          <p:cNvPr id="15" name="TextBox 14"/>
+          <p:cNvSpPr txBox="1"/>
+          <p:nvPr/>
+        </p:nvSpPr>
+        <p:spPr>
+          <a:xfrm>
+            <a:off x="1038225" y="1874519"/>
+            <a:ext cx="5486400" cy="274320"/>
+          </a:xfrm>
+          <a:prstGeom prst="rect">
+            <a:avLst/>
+          </a:prstGeom>
+          <a:noFill/>
+        </p:spPr>
+        <p:txBody>
+          <a:bodyPr wrap="square" anchor="t" lIns="0" rIns="0" tIns="0" bIns="0">
+            <a:spAutoFit/>
+          </a:bodyPr>
+          <a:lstStyle/>
+          <a:p>
+            <a:pPr algn="ctr">
+              <a:lnSpc>
+                <a:spcPct val="112000"/>
+              </a:lnSpc>
+              <a:spcBef>
+                <a:spcPts val="0"/>
+              </a:spcBef>
+              <a:spcAft>
+                <a:spcPts val="200"/>
+              </a:spcAft>
+            </a:pPr>
+            <a:r>
+              <a:rPr sz="1200" b="1">
+                <a:solidFill>
+                  <a:srgbClr val="B0934E"/>
+                </a:solidFill>
+                <a:latin typeface="游明朝"/>
+                <a:ea typeface="游明朝"/>
+              </a:rPr>
+              <a:t>→</a:t>
+            </a:r>
+          </a:p>
+        </p:txBody>
+      </p:sp>
+      <p:sp>
+        <p:nvSpPr>
+          <p:cNvPr id="16" name="TextBox 15"/>
           <p:cNvSpPr txBox="1"/>
           <p:nvPr/>
         </p:nvSpPr>
@@ -42534,14 +44124,14 @@
                 <a:latin typeface="游ゴシック"/>
                 <a:ea typeface="游ゴシック"/>
               </a:rPr>
-              <a:t>▲ 枠をクリックして、Before/After を1枚にした画像を挿入（自動で枠いっぱいに配置されます）</a:t>
-            </a:r>
-          </a:p>
-        </p:txBody>
-      </p:sp>
-      <p:sp>
-        <p:nvSpPr>
-          <p:cNvPr id="14" name="Rounded Rectangle 13"/>
+              <a:t>▲ Before・After それぞれの枠をクリックして写真を挿入（自動で枠いっぱいに配置されます）</a:t>
+            </a:r>
+          </a:p>
+        </p:txBody>
+      </p:sp>
+      <p:sp>
+        <p:nvSpPr>
+          <p:cNvPr id="17" name="Rounded Rectangle 16"/>
           <p:cNvSpPr/>
           <p:nvPr/>
         </p:nvSpPr>
@@ -42585,7 +44175,7 @@
       </p:sp>
       <p:sp>
         <p:nvSpPr>
-          <p:cNvPr id="15" name="TextBox 14"/>
+          <p:cNvPr id="18" name="TextBox 17"/>
           <p:cNvSpPr txBox="1"/>
           <p:nvPr/>
         </p:nvSpPr>
@@ -42631,7 +44221,7 @@
       </p:sp>
       <p:sp>
         <p:nvSpPr>
-          <p:cNvPr id="16" name="TextBox 15"/>
+          <p:cNvPr id="19" name="TextBox 18"/>
           <p:cNvSpPr txBox="1"/>
           <p:nvPr/>
         </p:nvSpPr>
@@ -42677,7 +44267,7 @@
       </p:sp>
       <p:graphicFrame>
         <p:nvGraphicFramePr>
-          <p:cNvPr id="17" name="Table 16"/>
+          <p:cNvPr id="20" name="Table 19"/>
           <p:cNvGraphicFramePr>
             <a:graphicFrameLocks noGrp="1"/>
           </p:cNvGraphicFramePr>
@@ -42847,7 +44437,7 @@
       </p:graphicFrame>
       <p:sp>
         <p:nvSpPr>
-          <p:cNvPr id="18" name="Rounded Rectangle 17"/>
+          <p:cNvPr id="21" name="Rounded Rectangle 20"/>
           <p:cNvSpPr/>
           <p:nvPr/>
         </p:nvSpPr>
@@ -42893,7 +44483,7 @@
       </p:sp>
       <p:sp>
         <p:nvSpPr>
-          <p:cNvPr id="19" name="Rectangle 18"/>
+          <p:cNvPr id="22" name="Rectangle 21"/>
           <p:cNvSpPr/>
           <p:nvPr/>
         </p:nvSpPr>
@@ -42937,7 +44527,7 @@
       </p:sp>
       <p:sp>
         <p:nvSpPr>
-          <p:cNvPr id="20" name="TextBox 19"/>
+          <p:cNvPr id="23" name="TextBox 22"/>
           <p:cNvSpPr txBox="1"/>
           <p:nvPr/>
         </p:nvSpPr>
@@ -42983,7 +44573,7 @@
       </p:sp>
       <p:sp>
         <p:nvSpPr>
-          <p:cNvPr id="21" name="TextBox 20"/>
+          <p:cNvPr id="24" name="TextBox 23"/>
           <p:cNvSpPr txBox="1"/>
           <p:nvPr/>
         </p:nvSpPr>
@@ -43031,7 +44621,7 @@
       </p:sp>
       <p:sp>
         <p:nvSpPr>
-          <p:cNvPr id="22" name="Rounded Rectangle 21"/>
+          <p:cNvPr id="25" name="Rounded Rectangle 24"/>
           <p:cNvSpPr/>
           <p:nvPr/>
         </p:nvSpPr>
@@ -43075,7 +44665,7 @@
       </p:sp>
       <p:sp>
         <p:nvSpPr>
-          <p:cNvPr id="23" name="TextBox 22"/>
+          <p:cNvPr id="26" name="TextBox 25"/>
           <p:cNvSpPr txBox="1"/>
           <p:nvPr/>
         </p:nvSpPr>
@@ -43121,7 +44711,7 @@
       </p:sp>
       <p:sp>
         <p:nvSpPr>
-          <p:cNvPr id="24" name="TextBox 23"/>
+          <p:cNvPr id="27" name="TextBox 26"/>
           <p:cNvSpPr txBox="1"/>
           <p:nvPr/>
         </p:nvSpPr>
@@ -43167,7 +44757,7 @@
       </p:sp>
       <p:sp>
         <p:nvSpPr>
-          <p:cNvPr id="25" name="TextBox 24"/>
+          <p:cNvPr id="28" name="TextBox 27"/>
           <p:cNvSpPr txBox="1"/>
           <p:nvPr/>
         </p:nvSpPr>
@@ -43223,7 +44813,7 @@
       </p:sp>
       <p:sp>
         <p:nvSpPr>
-          <p:cNvPr id="26" name="TextBox 25"/>
+          <p:cNvPr id="29" name="TextBox 28"/>
           <p:cNvSpPr txBox="1"/>
           <p:nvPr/>
         </p:nvSpPr>
@@ -43269,7 +44859,7 @@
       </p:sp>
       <p:sp>
         <p:nvSpPr>
-          <p:cNvPr id="27" name="Rounded Rectangle 26"/>
+          <p:cNvPr id="30" name="Rounded Rectangle 29"/>
           <p:cNvSpPr/>
           <p:nvPr/>
         </p:nvSpPr>
@@ -43315,7 +44905,7 @@
       </p:sp>
       <p:sp>
         <p:nvSpPr>
-          <p:cNvPr id="28" name="TextBox 27"/>
+          <p:cNvPr id="31" name="TextBox 30"/>
           <p:cNvSpPr txBox="1"/>
           <p:nvPr/>
         </p:nvSpPr>
@@ -43361,7 +44951,7 @@
       </p:sp>
       <p:sp>
         <p:nvSpPr>
-          <p:cNvPr id="29" name="TextBox 28"/>
+          <p:cNvPr id="32" name="TextBox 31"/>
           <p:cNvSpPr txBox="1"/>
           <p:nvPr/>
         </p:nvSpPr>
@@ -43407,7 +44997,7 @@
       </p:sp>
       <p:sp>
         <p:nvSpPr>
-          <p:cNvPr id="30" name="TextBox 29"/>
+          <p:cNvPr id="33" name="TextBox 32"/>
           <p:cNvSpPr txBox="1"/>
           <p:nvPr/>
         </p:nvSpPr>
@@ -43453,7 +45043,7 @@
       </p:sp>
       <p:sp>
         <p:nvSpPr>
-          <p:cNvPr id="31" name="TextBox 30"/>
+          <p:cNvPr id="34" name="TextBox 33"/>
           <p:cNvSpPr txBox="1"/>
           <p:nvPr/>
         </p:nvSpPr>
@@ -43525,7 +45115,7 @@
       <p:grpSpPr/>
       <p:sp>
         <p:nvSpPr>
-          <p:cNvPr id="11" name="Rounded Rectangle 10"/>
+          <p:cNvPr id="12" name="Rounded Rectangle 11"/>
           <p:cNvSpPr/>
           <p:nvPr/>
         </p:nvSpPr>
@@ -43583,7 +45173,19 @@
       </p:sp>
       <p:sp>
         <p:nvSpPr>
-          <p:cNvPr id="3" name="TextBox 2"/>
+          <p:cNvPr id="3" name="Picture Placeholder 2"/>
+          <p:cNvSpPr>
+            <a:spLocks noGrp="1"/>
+          </p:cNvSpPr>
+          <p:nvPr>
+            <p:ph type="pic" idx="11"/>
+          </p:nvPr>
+        </p:nvSpPr>
+        <p:spPr/>
+      </p:sp>
+      <p:sp>
+        <p:nvSpPr>
+          <p:cNvPr id="4" name="TextBox 3"/>
           <p:cNvSpPr txBox="1"/>
           <p:nvPr/>
         </p:nvSpPr>
@@ -43629,7 +45231,7 @@
       </p:sp>
       <p:sp>
         <p:nvSpPr>
-          <p:cNvPr id="4" name="TextBox 3"/>
+          <p:cNvPr id="5" name="TextBox 4"/>
           <p:cNvSpPr txBox="1"/>
           <p:nvPr/>
         </p:nvSpPr>
@@ -43675,7 +45277,7 @@
       </p:sp>
       <p:sp>
         <p:nvSpPr>
-          <p:cNvPr id="5" name="TextBox 4"/>
+          <p:cNvPr id="6" name="TextBox 5"/>
           <p:cNvSpPr txBox="1"/>
           <p:nvPr/>
         </p:nvSpPr>
@@ -43721,7 +45323,7 @@
       </p:sp>
       <p:sp>
         <p:nvSpPr>
-          <p:cNvPr id="6" name="Rounded Rectangle 5"/>
+          <p:cNvPr id="7" name="Rounded Rectangle 6"/>
           <p:cNvSpPr/>
           <p:nvPr/>
         </p:nvSpPr>
@@ -43765,7 +45367,7 @@
       </p:sp>
       <p:sp>
         <p:nvSpPr>
-          <p:cNvPr id="7" name="TextBox 6"/>
+          <p:cNvPr id="8" name="TextBox 7"/>
           <p:cNvSpPr txBox="1"/>
           <p:nvPr/>
         </p:nvSpPr>
@@ -43811,7 +45413,7 @@
       </p:sp>
       <p:sp>
         <p:nvSpPr>
-          <p:cNvPr id="8" name="Rounded Rectangle 7"/>
+          <p:cNvPr id="9" name="Rounded Rectangle 8"/>
           <p:cNvSpPr/>
           <p:nvPr/>
         </p:nvSpPr>
@@ -43855,7 +45457,7 @@
       </p:sp>
       <p:sp>
         <p:nvSpPr>
-          <p:cNvPr id="9" name="TextBox 8"/>
+          <p:cNvPr id="10" name="TextBox 9"/>
           <p:cNvSpPr txBox="1"/>
           <p:nvPr/>
         </p:nvSpPr>
@@ -43901,7 +45503,7 @@
       </p:sp>
       <p:sp>
         <p:nvSpPr>
-          <p:cNvPr id="10" name="TextBox 9"/>
+          <p:cNvPr id="11" name="TextBox 10"/>
           <p:cNvSpPr txBox="1"/>
           <p:nvPr/>
         </p:nvSpPr>
@@ -43947,14 +45549,14 @@
       </p:sp>
       <p:sp>
         <p:nvSpPr>
-          <p:cNvPr id="12" name="TextBox 11"/>
-          <p:cNvSpPr txBox="1"/>
-          <p:nvPr/>
-        </p:nvSpPr>
-        <p:spPr>
-          <a:xfrm>
-            <a:off x="566928" y="1847088"/>
-            <a:ext cx="6428994" cy="256032"/>
+          <p:cNvPr id="13" name="TextBox 12"/>
+          <p:cNvSpPr txBox="1"/>
+          <p:nvPr/>
+        </p:nvSpPr>
+        <p:spPr>
+          <a:xfrm>
+            <a:off x="1038225" y="1874519"/>
+            <a:ext cx="2606040" cy="274320"/>
           </a:xfrm>
           <a:prstGeom prst="rect">
             <a:avLst/>
@@ -43979,21 +45581,113 @@
               </a:spcAft>
             </a:pPr>
             <a:r>
-              <a:rPr sz="1100" b="1">
+              <a:rPr sz="1200" b="1">
                 <a:solidFill>
                   <a:srgbClr val="8C7339"/>
                 </a:solidFill>
                 <a:latin typeface="游明朝"/>
                 <a:ea typeface="游明朝"/>
               </a:rPr>
-              <a:t>Before  →  After</a:t>
-            </a:r>
-          </a:p>
-        </p:txBody>
-      </p:sp>
-      <p:sp>
-        <p:nvSpPr>
-          <p:cNvPr id="13" name="TextBox 12"/>
+              <a:t>Before</a:t>
+            </a:r>
+          </a:p>
+        </p:txBody>
+      </p:sp>
+      <p:sp>
+        <p:nvSpPr>
+          <p:cNvPr id="14" name="TextBox 13"/>
+          <p:cNvSpPr txBox="1"/>
+          <p:nvPr/>
+        </p:nvSpPr>
+        <p:spPr>
+          <a:xfrm>
+            <a:off x="3918585" y="1874519"/>
+            <a:ext cx="2606040" cy="274320"/>
+          </a:xfrm>
+          <a:prstGeom prst="rect">
+            <a:avLst/>
+          </a:prstGeom>
+          <a:noFill/>
+        </p:spPr>
+        <p:txBody>
+          <a:bodyPr wrap="square" anchor="t" lIns="0" rIns="0" tIns="0" bIns="0">
+            <a:spAutoFit/>
+          </a:bodyPr>
+          <a:lstStyle/>
+          <a:p>
+            <a:pPr algn="ctr">
+              <a:lnSpc>
+                <a:spcPct val="112000"/>
+              </a:lnSpc>
+              <a:spcBef>
+                <a:spcPts val="0"/>
+              </a:spcBef>
+              <a:spcAft>
+                <a:spcPts val="200"/>
+              </a:spcAft>
+            </a:pPr>
+            <a:r>
+              <a:rPr sz="1200" b="1">
+                <a:solidFill>
+                  <a:srgbClr val="8C7339"/>
+                </a:solidFill>
+                <a:latin typeface="游明朝"/>
+                <a:ea typeface="游明朝"/>
+              </a:rPr>
+              <a:t>After</a:t>
+            </a:r>
+          </a:p>
+        </p:txBody>
+      </p:sp>
+      <p:sp>
+        <p:nvSpPr>
+          <p:cNvPr id="15" name="TextBox 14"/>
+          <p:cNvSpPr txBox="1"/>
+          <p:nvPr/>
+        </p:nvSpPr>
+        <p:spPr>
+          <a:xfrm>
+            <a:off x="1038225" y="1874519"/>
+            <a:ext cx="5486400" cy="274320"/>
+          </a:xfrm>
+          <a:prstGeom prst="rect">
+            <a:avLst/>
+          </a:prstGeom>
+          <a:noFill/>
+        </p:spPr>
+        <p:txBody>
+          <a:bodyPr wrap="square" anchor="t" lIns="0" rIns="0" tIns="0" bIns="0">
+            <a:spAutoFit/>
+          </a:bodyPr>
+          <a:lstStyle/>
+          <a:p>
+            <a:pPr algn="ctr">
+              <a:lnSpc>
+                <a:spcPct val="112000"/>
+              </a:lnSpc>
+              <a:spcBef>
+                <a:spcPts val="0"/>
+              </a:spcBef>
+              <a:spcAft>
+                <a:spcPts val="200"/>
+              </a:spcAft>
+            </a:pPr>
+            <a:r>
+              <a:rPr sz="1200" b="1">
+                <a:solidFill>
+                  <a:srgbClr val="B0934E"/>
+                </a:solidFill>
+                <a:latin typeface="游明朝"/>
+                <a:ea typeface="游明朝"/>
+              </a:rPr>
+              <a:t>→</a:t>
+            </a:r>
+          </a:p>
+        </p:txBody>
+      </p:sp>
+      <p:sp>
+        <p:nvSpPr>
+          <p:cNvPr id="16" name="TextBox 15"/>
           <p:cNvSpPr txBox="1"/>
           <p:nvPr/>
         </p:nvSpPr>
@@ -44032,14 +45726,14 @@
                 <a:latin typeface="游ゴシック"/>
                 <a:ea typeface="游ゴシック"/>
               </a:rPr>
-              <a:t>▲ 枠をクリックして、Before/After を1枚にした画像を挿入（自動で枠いっぱいに配置されます）</a:t>
-            </a:r>
-          </a:p>
-        </p:txBody>
-      </p:sp>
-      <p:sp>
-        <p:nvSpPr>
-          <p:cNvPr id="14" name="Rounded Rectangle 13"/>
+              <a:t>▲ Before・After それぞれの枠をクリックして写真を挿入（自動で枠いっぱいに配置されます）</a:t>
+            </a:r>
+          </a:p>
+        </p:txBody>
+      </p:sp>
+      <p:sp>
+        <p:nvSpPr>
+          <p:cNvPr id="17" name="Rounded Rectangle 16"/>
           <p:cNvSpPr/>
           <p:nvPr/>
         </p:nvSpPr>
@@ -44083,7 +45777,7 @@
       </p:sp>
       <p:sp>
         <p:nvSpPr>
-          <p:cNvPr id="15" name="TextBox 14"/>
+          <p:cNvPr id="18" name="TextBox 17"/>
           <p:cNvSpPr txBox="1"/>
           <p:nvPr/>
         </p:nvSpPr>
@@ -44129,7 +45823,7 @@
       </p:sp>
       <p:sp>
         <p:nvSpPr>
-          <p:cNvPr id="16" name="TextBox 15"/>
+          <p:cNvPr id="19" name="TextBox 18"/>
           <p:cNvSpPr txBox="1"/>
           <p:nvPr/>
         </p:nvSpPr>
@@ -44175,7 +45869,7 @@
       </p:sp>
       <p:graphicFrame>
         <p:nvGraphicFramePr>
-          <p:cNvPr id="17" name="Table 16"/>
+          <p:cNvPr id="20" name="Table 19"/>
           <p:cNvGraphicFramePr>
             <a:graphicFrameLocks noGrp="1"/>
           </p:cNvGraphicFramePr>
@@ -44345,7 +46039,7 @@
       </p:graphicFrame>
       <p:sp>
         <p:nvSpPr>
-          <p:cNvPr id="18" name="Rounded Rectangle 17"/>
+          <p:cNvPr id="21" name="Rounded Rectangle 20"/>
           <p:cNvSpPr/>
           <p:nvPr/>
         </p:nvSpPr>
@@ -44391,7 +46085,7 @@
       </p:sp>
       <p:sp>
         <p:nvSpPr>
-          <p:cNvPr id="19" name="Rectangle 18"/>
+          <p:cNvPr id="22" name="Rectangle 21"/>
           <p:cNvSpPr/>
           <p:nvPr/>
         </p:nvSpPr>
@@ -44435,7 +46129,7 @@
       </p:sp>
       <p:sp>
         <p:nvSpPr>
-          <p:cNvPr id="20" name="TextBox 19"/>
+          <p:cNvPr id="23" name="TextBox 22"/>
           <p:cNvSpPr txBox="1"/>
           <p:nvPr/>
         </p:nvSpPr>
@@ -44481,7 +46175,7 @@
       </p:sp>
       <p:sp>
         <p:nvSpPr>
-          <p:cNvPr id="21" name="TextBox 20"/>
+          <p:cNvPr id="24" name="TextBox 23"/>
           <p:cNvSpPr txBox="1"/>
           <p:nvPr/>
         </p:nvSpPr>
@@ -44529,7 +46223,7 @@
       </p:sp>
       <p:sp>
         <p:nvSpPr>
-          <p:cNvPr id="22" name="Rounded Rectangle 21"/>
+          <p:cNvPr id="25" name="Rounded Rectangle 24"/>
           <p:cNvSpPr/>
           <p:nvPr/>
         </p:nvSpPr>
@@ -44573,7 +46267,7 @@
       </p:sp>
       <p:sp>
         <p:nvSpPr>
-          <p:cNvPr id="23" name="TextBox 22"/>
+          <p:cNvPr id="26" name="TextBox 25"/>
           <p:cNvSpPr txBox="1"/>
           <p:nvPr/>
         </p:nvSpPr>
@@ -44619,7 +46313,7 @@
       </p:sp>
       <p:sp>
         <p:nvSpPr>
-          <p:cNvPr id="24" name="TextBox 23"/>
+          <p:cNvPr id="27" name="TextBox 26"/>
           <p:cNvSpPr txBox="1"/>
           <p:nvPr/>
         </p:nvSpPr>
@@ -44665,7 +46359,7 @@
       </p:sp>
       <p:sp>
         <p:nvSpPr>
-          <p:cNvPr id="25" name="TextBox 24"/>
+          <p:cNvPr id="28" name="TextBox 27"/>
           <p:cNvSpPr txBox="1"/>
           <p:nvPr/>
         </p:nvSpPr>
@@ -44721,7 +46415,7 @@
       </p:sp>
       <p:sp>
         <p:nvSpPr>
-          <p:cNvPr id="26" name="TextBox 25"/>
+          <p:cNvPr id="29" name="TextBox 28"/>
           <p:cNvSpPr txBox="1"/>
           <p:nvPr/>
         </p:nvSpPr>
@@ -44767,7 +46461,7 @@
       </p:sp>
       <p:sp>
         <p:nvSpPr>
-          <p:cNvPr id="27" name="Rounded Rectangle 26"/>
+          <p:cNvPr id="30" name="Rounded Rectangle 29"/>
           <p:cNvSpPr/>
           <p:nvPr/>
         </p:nvSpPr>
@@ -44813,7 +46507,7 @@
       </p:sp>
       <p:sp>
         <p:nvSpPr>
-          <p:cNvPr id="28" name="TextBox 27"/>
+          <p:cNvPr id="31" name="TextBox 30"/>
           <p:cNvSpPr txBox="1"/>
           <p:nvPr/>
         </p:nvSpPr>
@@ -44859,7 +46553,7 @@
       </p:sp>
       <p:sp>
         <p:nvSpPr>
-          <p:cNvPr id="29" name="TextBox 28"/>
+          <p:cNvPr id="32" name="TextBox 31"/>
           <p:cNvSpPr txBox="1"/>
           <p:nvPr/>
         </p:nvSpPr>
@@ -44905,7 +46599,7 @@
       </p:sp>
       <p:sp>
         <p:nvSpPr>
-          <p:cNvPr id="30" name="TextBox 29"/>
+          <p:cNvPr id="33" name="TextBox 32"/>
           <p:cNvSpPr txBox="1"/>
           <p:nvPr/>
         </p:nvSpPr>
@@ -44951,7 +46645,7 @@
       </p:sp>
       <p:sp>
         <p:nvSpPr>
-          <p:cNvPr id="31" name="TextBox 30"/>
+          <p:cNvPr id="34" name="TextBox 33"/>
           <p:cNvSpPr txBox="1"/>
           <p:nvPr/>
         </p:nvSpPr>

--- a/鼻整形_デザインカタログ.pptx
+++ b/鼻整形_デザインカタログ.pptx
@@ -757,12 +757,12 @@
         </p:nvSpPr>
         <p:spPr>
           <a:xfrm>
-            <a:off x="1038225" y="2240280"/>
-            <a:ext cx="2606040" cy="3200400"/>
+            <a:off x="2226945" y="2240280"/>
+            <a:ext cx="1554480" cy="3108960"/>
           </a:xfrm>
           <a:prstGeom prst="roundRect">
             <a:avLst>
-              <a:gd name="adj" fmla="val 5000"/>
+              <a:gd name="adj" fmla="val 4000"/>
             </a:avLst>
           </a:prstGeom>
           <a:solidFill>
@@ -787,12 +787,12 @@
         </p:nvSpPr>
         <p:spPr>
           <a:xfrm>
-            <a:off x="3918585" y="2240280"/>
-            <a:ext cx="2606040" cy="3200400"/>
+            <a:off x="3781425" y="2240280"/>
+            <a:ext cx="1554480" cy="3108960"/>
           </a:xfrm>
           <a:prstGeom prst="roundRect">
             <a:avLst>
-              <a:gd name="adj" fmla="val 5000"/>
+              <a:gd name="adj" fmla="val 4000"/>
             </a:avLst>
           </a:prstGeom>
           <a:solidFill>
@@ -5389,8 +5389,8 @@
         </p:nvSpPr>
         <p:spPr>
           <a:xfrm>
-            <a:off x="1038225" y="1874519"/>
-            <a:ext cx="2606040" cy="274320"/>
+            <a:off x="2226945" y="1874519"/>
+            <a:ext cx="1554480" cy="274320"/>
           </a:xfrm>
           <a:prstGeom prst="rect">
             <a:avLst/>
@@ -5435,8 +5435,8 @@
         </p:nvSpPr>
         <p:spPr>
           <a:xfrm>
-            <a:off x="3918585" y="1874519"/>
-            <a:ext cx="2606040" cy="274320"/>
+            <a:off x="3781425" y="1874519"/>
+            <a:ext cx="1554480" cy="274320"/>
           </a:xfrm>
           <a:prstGeom prst="rect">
             <a:avLst/>
@@ -5481,8 +5481,8 @@
         </p:nvSpPr>
         <p:spPr>
           <a:xfrm>
-            <a:off x="1038225" y="1874519"/>
-            <a:ext cx="5486400" cy="274320"/>
+            <a:off x="2226945" y="1874519"/>
+            <a:ext cx="3108960" cy="274320"/>
           </a:xfrm>
           <a:prstGeom prst="rect">
             <a:avLst/>
@@ -6991,8 +6991,8 @@
         </p:nvSpPr>
         <p:spPr>
           <a:xfrm>
-            <a:off x="1038225" y="1874519"/>
-            <a:ext cx="2606040" cy="274320"/>
+            <a:off x="2226945" y="1874519"/>
+            <a:ext cx="1554480" cy="274320"/>
           </a:xfrm>
           <a:prstGeom prst="rect">
             <a:avLst/>
@@ -7037,8 +7037,8 @@
         </p:nvSpPr>
         <p:spPr>
           <a:xfrm>
-            <a:off x="3918585" y="1874519"/>
-            <a:ext cx="2606040" cy="274320"/>
+            <a:off x="3781425" y="1874519"/>
+            <a:ext cx="1554480" cy="274320"/>
           </a:xfrm>
           <a:prstGeom prst="rect">
             <a:avLst/>
@@ -7083,8 +7083,8 @@
         </p:nvSpPr>
         <p:spPr>
           <a:xfrm>
-            <a:off x="1038225" y="1874519"/>
-            <a:ext cx="5486400" cy="274320"/>
+            <a:off x="2226945" y="1874519"/>
+            <a:ext cx="3108960" cy="274320"/>
           </a:xfrm>
           <a:prstGeom prst="rect">
             <a:avLst/>
@@ -8593,8 +8593,8 @@
         </p:nvSpPr>
         <p:spPr>
           <a:xfrm>
-            <a:off x="1038225" y="1874519"/>
-            <a:ext cx="2606040" cy="274320"/>
+            <a:off x="2226945" y="1874519"/>
+            <a:ext cx="1554480" cy="274320"/>
           </a:xfrm>
           <a:prstGeom prst="rect">
             <a:avLst/>
@@ -8639,8 +8639,8 @@
         </p:nvSpPr>
         <p:spPr>
           <a:xfrm>
-            <a:off x="3918585" y="1874519"/>
-            <a:ext cx="2606040" cy="274320"/>
+            <a:off x="3781425" y="1874519"/>
+            <a:ext cx="1554480" cy="274320"/>
           </a:xfrm>
           <a:prstGeom prst="rect">
             <a:avLst/>
@@ -8685,8 +8685,8 @@
         </p:nvSpPr>
         <p:spPr>
           <a:xfrm>
-            <a:off x="1038225" y="1874519"/>
-            <a:ext cx="5486400" cy="274320"/>
+            <a:off x="2226945" y="1874519"/>
+            <a:ext cx="3108960" cy="274320"/>
           </a:xfrm>
           <a:prstGeom prst="rect">
             <a:avLst/>
@@ -10195,8 +10195,8 @@
         </p:nvSpPr>
         <p:spPr>
           <a:xfrm>
-            <a:off x="1038225" y="1874519"/>
-            <a:ext cx="2606040" cy="274320"/>
+            <a:off x="2226945" y="1874519"/>
+            <a:ext cx="1554480" cy="274320"/>
           </a:xfrm>
           <a:prstGeom prst="rect">
             <a:avLst/>
@@ -10241,8 +10241,8 @@
         </p:nvSpPr>
         <p:spPr>
           <a:xfrm>
-            <a:off x="3918585" y="1874519"/>
-            <a:ext cx="2606040" cy="274320"/>
+            <a:off x="3781425" y="1874519"/>
+            <a:ext cx="1554480" cy="274320"/>
           </a:xfrm>
           <a:prstGeom prst="rect">
             <a:avLst/>
@@ -10287,8 +10287,8 @@
         </p:nvSpPr>
         <p:spPr>
           <a:xfrm>
-            <a:off x="1038225" y="1874519"/>
-            <a:ext cx="5486400" cy="274320"/>
+            <a:off x="2226945" y="1874519"/>
+            <a:ext cx="3108960" cy="274320"/>
           </a:xfrm>
           <a:prstGeom prst="rect">
             <a:avLst/>
@@ -12683,8 +12683,8 @@
         </p:nvSpPr>
         <p:spPr>
           <a:xfrm>
-            <a:off x="1038225" y="1874519"/>
-            <a:ext cx="2606040" cy="274320"/>
+            <a:off x="2226945" y="1874519"/>
+            <a:ext cx="1554480" cy="274320"/>
           </a:xfrm>
           <a:prstGeom prst="rect">
             <a:avLst/>
@@ -12729,8 +12729,8 @@
         </p:nvSpPr>
         <p:spPr>
           <a:xfrm>
-            <a:off x="3918585" y="1874519"/>
-            <a:ext cx="2606040" cy="274320"/>
+            <a:off x="3781425" y="1874519"/>
+            <a:ext cx="1554480" cy="274320"/>
           </a:xfrm>
           <a:prstGeom prst="rect">
             <a:avLst/>
@@ -12775,8 +12775,8 @@
         </p:nvSpPr>
         <p:spPr>
           <a:xfrm>
-            <a:off x="1038225" y="1874519"/>
-            <a:ext cx="5486400" cy="274320"/>
+            <a:off x="2226945" y="1874519"/>
+            <a:ext cx="3108960" cy="274320"/>
           </a:xfrm>
           <a:prstGeom prst="rect">
             <a:avLst/>
@@ -14285,8 +14285,8 @@
         </p:nvSpPr>
         <p:spPr>
           <a:xfrm>
-            <a:off x="1038225" y="1874519"/>
-            <a:ext cx="2606040" cy="274320"/>
+            <a:off x="2226945" y="1874519"/>
+            <a:ext cx="1554480" cy="274320"/>
           </a:xfrm>
           <a:prstGeom prst="rect">
             <a:avLst/>
@@ -14331,8 +14331,8 @@
         </p:nvSpPr>
         <p:spPr>
           <a:xfrm>
-            <a:off x="3918585" y="1874519"/>
-            <a:ext cx="2606040" cy="274320"/>
+            <a:off x="3781425" y="1874519"/>
+            <a:ext cx="1554480" cy="274320"/>
           </a:xfrm>
           <a:prstGeom prst="rect">
             <a:avLst/>
@@ -14377,8 +14377,8 @@
         </p:nvSpPr>
         <p:spPr>
           <a:xfrm>
-            <a:off x="1038225" y="1874519"/>
-            <a:ext cx="5486400" cy="274320"/>
+            <a:off x="2226945" y="1874519"/>
+            <a:ext cx="3108960" cy="274320"/>
           </a:xfrm>
           <a:prstGeom prst="rect">
             <a:avLst/>
@@ -15887,8 +15887,8 @@
         </p:nvSpPr>
         <p:spPr>
           <a:xfrm>
-            <a:off x="1038225" y="1874519"/>
-            <a:ext cx="2606040" cy="274320"/>
+            <a:off x="2226945" y="1874519"/>
+            <a:ext cx="1554480" cy="274320"/>
           </a:xfrm>
           <a:prstGeom prst="rect">
             <a:avLst/>
@@ -15933,8 +15933,8 @@
         </p:nvSpPr>
         <p:spPr>
           <a:xfrm>
-            <a:off x="3918585" y="1874519"/>
-            <a:ext cx="2606040" cy="274320"/>
+            <a:off x="3781425" y="1874519"/>
+            <a:ext cx="1554480" cy="274320"/>
           </a:xfrm>
           <a:prstGeom prst="rect">
             <a:avLst/>
@@ -15979,8 +15979,8 @@
         </p:nvSpPr>
         <p:spPr>
           <a:xfrm>
-            <a:off x="1038225" y="1874519"/>
-            <a:ext cx="5486400" cy="274320"/>
+            <a:off x="2226945" y="1874519"/>
+            <a:ext cx="3108960" cy="274320"/>
           </a:xfrm>
           <a:prstGeom prst="rect">
             <a:avLst/>
@@ -19950,8 +19950,8 @@
         </p:nvSpPr>
         <p:spPr>
           <a:xfrm>
-            <a:off x="1038225" y="1874519"/>
-            <a:ext cx="2606040" cy="274320"/>
+            <a:off x="2226945" y="1874519"/>
+            <a:ext cx="1554480" cy="274320"/>
           </a:xfrm>
           <a:prstGeom prst="rect">
             <a:avLst/>
@@ -19996,8 +19996,8 @@
         </p:nvSpPr>
         <p:spPr>
           <a:xfrm>
-            <a:off x="3918585" y="1874519"/>
-            <a:ext cx="2606040" cy="274320"/>
+            <a:off x="3781425" y="1874519"/>
+            <a:ext cx="1554480" cy="274320"/>
           </a:xfrm>
           <a:prstGeom prst="rect">
             <a:avLst/>
@@ -20042,8 +20042,8 @@
         </p:nvSpPr>
         <p:spPr>
           <a:xfrm>
-            <a:off x="1038225" y="1874519"/>
-            <a:ext cx="5486400" cy="274320"/>
+            <a:off x="2226945" y="1874519"/>
+            <a:ext cx="3108960" cy="274320"/>
           </a:xfrm>
           <a:prstGeom prst="rect">
             <a:avLst/>
@@ -21552,8 +21552,8 @@
         </p:nvSpPr>
         <p:spPr>
           <a:xfrm>
-            <a:off x="1038225" y="1874519"/>
-            <a:ext cx="2606040" cy="274320"/>
+            <a:off x="2226945" y="1874519"/>
+            <a:ext cx="1554480" cy="274320"/>
           </a:xfrm>
           <a:prstGeom prst="rect">
             <a:avLst/>
@@ -21598,8 +21598,8 @@
         </p:nvSpPr>
         <p:spPr>
           <a:xfrm>
-            <a:off x="3918585" y="1874519"/>
-            <a:ext cx="2606040" cy="274320"/>
+            <a:off x="3781425" y="1874519"/>
+            <a:ext cx="1554480" cy="274320"/>
           </a:xfrm>
           <a:prstGeom prst="rect">
             <a:avLst/>
@@ -21644,8 +21644,8 @@
         </p:nvSpPr>
         <p:spPr>
           <a:xfrm>
-            <a:off x="1038225" y="1874519"/>
-            <a:ext cx="5486400" cy="274320"/>
+            <a:off x="2226945" y="1874519"/>
+            <a:ext cx="3108960" cy="274320"/>
           </a:xfrm>
           <a:prstGeom prst="rect">
             <a:avLst/>
@@ -23154,8 +23154,8 @@
         </p:nvSpPr>
         <p:spPr>
           <a:xfrm>
-            <a:off x="1038225" y="1874519"/>
-            <a:ext cx="2606040" cy="274320"/>
+            <a:off x="2226945" y="1874519"/>
+            <a:ext cx="1554480" cy="274320"/>
           </a:xfrm>
           <a:prstGeom prst="rect">
             <a:avLst/>
@@ -23200,8 +23200,8 @@
         </p:nvSpPr>
         <p:spPr>
           <a:xfrm>
-            <a:off x="3918585" y="1874519"/>
-            <a:ext cx="2606040" cy="274320"/>
+            <a:off x="3781425" y="1874519"/>
+            <a:ext cx="1554480" cy="274320"/>
           </a:xfrm>
           <a:prstGeom prst="rect">
             <a:avLst/>
@@ -23246,8 +23246,8 @@
         </p:nvSpPr>
         <p:spPr>
           <a:xfrm>
-            <a:off x="1038225" y="1874519"/>
-            <a:ext cx="5486400" cy="274320"/>
+            <a:off x="2226945" y="1874519"/>
+            <a:ext cx="3108960" cy="274320"/>
           </a:xfrm>
           <a:prstGeom prst="rect">
             <a:avLst/>
@@ -25504,8 +25504,8 @@
         </p:nvSpPr>
         <p:spPr>
           <a:xfrm>
-            <a:off x="1038225" y="1874519"/>
-            <a:ext cx="2606040" cy="274320"/>
+            <a:off x="2226945" y="1874519"/>
+            <a:ext cx="1554480" cy="274320"/>
           </a:xfrm>
           <a:prstGeom prst="rect">
             <a:avLst/>
@@ -25550,8 +25550,8 @@
         </p:nvSpPr>
         <p:spPr>
           <a:xfrm>
-            <a:off x="3918585" y="1874519"/>
-            <a:ext cx="2606040" cy="274320"/>
+            <a:off x="3781425" y="1874519"/>
+            <a:ext cx="1554480" cy="274320"/>
           </a:xfrm>
           <a:prstGeom prst="rect">
             <a:avLst/>
@@ -25596,8 +25596,8 @@
         </p:nvSpPr>
         <p:spPr>
           <a:xfrm>
-            <a:off x="1038225" y="1874519"/>
-            <a:ext cx="5486400" cy="274320"/>
+            <a:off x="2226945" y="1874519"/>
+            <a:ext cx="3108960" cy="274320"/>
           </a:xfrm>
           <a:prstGeom prst="rect">
             <a:avLst/>
@@ -27106,8 +27106,8 @@
         </p:nvSpPr>
         <p:spPr>
           <a:xfrm>
-            <a:off x="1038225" y="1874519"/>
-            <a:ext cx="2606040" cy="274320"/>
+            <a:off x="2226945" y="1874519"/>
+            <a:ext cx="1554480" cy="274320"/>
           </a:xfrm>
           <a:prstGeom prst="rect">
             <a:avLst/>
@@ -27152,8 +27152,8 @@
         </p:nvSpPr>
         <p:spPr>
           <a:xfrm>
-            <a:off x="3918585" y="1874519"/>
-            <a:ext cx="2606040" cy="274320"/>
+            <a:off x="3781425" y="1874519"/>
+            <a:ext cx="1554480" cy="274320"/>
           </a:xfrm>
           <a:prstGeom prst="rect">
             <a:avLst/>
@@ -27198,8 +27198,8 @@
         </p:nvSpPr>
         <p:spPr>
           <a:xfrm>
-            <a:off x="1038225" y="1874519"/>
-            <a:ext cx="5486400" cy="274320"/>
+            <a:off x="2226945" y="1874519"/>
+            <a:ext cx="3108960" cy="274320"/>
           </a:xfrm>
           <a:prstGeom prst="rect">
             <a:avLst/>
@@ -40749,8 +40749,8 @@
         </p:nvSpPr>
         <p:spPr>
           <a:xfrm>
-            <a:off x="1038225" y="1874519"/>
-            <a:ext cx="2606040" cy="274320"/>
+            <a:off x="2226945" y="1874519"/>
+            <a:ext cx="1554480" cy="274320"/>
           </a:xfrm>
           <a:prstGeom prst="rect">
             <a:avLst/>
@@ -40795,8 +40795,8 @@
         </p:nvSpPr>
         <p:spPr>
           <a:xfrm>
-            <a:off x="3918585" y="1874519"/>
-            <a:ext cx="2606040" cy="274320"/>
+            <a:off x="3781425" y="1874519"/>
+            <a:ext cx="1554480" cy="274320"/>
           </a:xfrm>
           <a:prstGeom prst="rect">
             <a:avLst/>
@@ -40841,8 +40841,8 @@
         </p:nvSpPr>
         <p:spPr>
           <a:xfrm>
-            <a:off x="1038225" y="1874519"/>
-            <a:ext cx="5486400" cy="274320"/>
+            <a:off x="2226945" y="1874519"/>
+            <a:ext cx="3108960" cy="274320"/>
           </a:xfrm>
           <a:prstGeom prst="rect">
             <a:avLst/>
@@ -42351,8 +42351,8 @@
         </p:nvSpPr>
         <p:spPr>
           <a:xfrm>
-            <a:off x="1038225" y="1874519"/>
-            <a:ext cx="2606040" cy="274320"/>
+            <a:off x="2226945" y="1874519"/>
+            <a:ext cx="1554480" cy="274320"/>
           </a:xfrm>
           <a:prstGeom prst="rect">
             <a:avLst/>
@@ -42397,8 +42397,8 @@
         </p:nvSpPr>
         <p:spPr>
           <a:xfrm>
-            <a:off x="3918585" y="1874519"/>
-            <a:ext cx="2606040" cy="274320"/>
+            <a:off x="3781425" y="1874519"/>
+            <a:ext cx="1554480" cy="274320"/>
           </a:xfrm>
           <a:prstGeom prst="rect">
             <a:avLst/>
@@ -42443,8 +42443,8 @@
         </p:nvSpPr>
         <p:spPr>
           <a:xfrm>
-            <a:off x="1038225" y="1874519"/>
-            <a:ext cx="5486400" cy="274320"/>
+            <a:off x="2226945" y="1874519"/>
+            <a:ext cx="3108960" cy="274320"/>
           </a:xfrm>
           <a:prstGeom prst="rect">
             <a:avLst/>
@@ -43953,8 +43953,8 @@
         </p:nvSpPr>
         <p:spPr>
           <a:xfrm>
-            <a:off x="1038225" y="1874519"/>
-            <a:ext cx="2606040" cy="274320"/>
+            <a:off x="2226945" y="1874519"/>
+            <a:ext cx="1554480" cy="274320"/>
           </a:xfrm>
           <a:prstGeom prst="rect">
             <a:avLst/>
@@ -43999,8 +43999,8 @@
         </p:nvSpPr>
         <p:spPr>
           <a:xfrm>
-            <a:off x="3918585" y="1874519"/>
-            <a:ext cx="2606040" cy="274320"/>
+            <a:off x="3781425" y="1874519"/>
+            <a:ext cx="1554480" cy="274320"/>
           </a:xfrm>
           <a:prstGeom prst="rect">
             <a:avLst/>
@@ -44045,8 +44045,8 @@
         </p:nvSpPr>
         <p:spPr>
           <a:xfrm>
-            <a:off x="1038225" y="1874519"/>
-            <a:ext cx="5486400" cy="274320"/>
+            <a:off x="2226945" y="1874519"/>
+            <a:ext cx="3108960" cy="274320"/>
           </a:xfrm>
           <a:prstGeom prst="rect">
             <a:avLst/>
@@ -45555,8 +45555,8 @@
         </p:nvSpPr>
         <p:spPr>
           <a:xfrm>
-            <a:off x="1038225" y="1874519"/>
-            <a:ext cx="2606040" cy="274320"/>
+            <a:off x="2226945" y="1874519"/>
+            <a:ext cx="1554480" cy="274320"/>
           </a:xfrm>
           <a:prstGeom prst="rect">
             <a:avLst/>
@@ -45601,8 +45601,8 @@
         </p:nvSpPr>
         <p:spPr>
           <a:xfrm>
-            <a:off x="3918585" y="1874519"/>
-            <a:ext cx="2606040" cy="274320"/>
+            <a:off x="3781425" y="1874519"/>
+            <a:ext cx="1554480" cy="274320"/>
           </a:xfrm>
           <a:prstGeom prst="rect">
             <a:avLst/>
@@ -45647,8 +45647,8 @@
         </p:nvSpPr>
         <p:spPr>
           <a:xfrm>
-            <a:off x="1038225" y="1874519"/>
-            <a:ext cx="5486400" cy="274320"/>
+            <a:off x="2226945" y="1874519"/>
+            <a:ext cx="3108960" cy="274320"/>
           </a:xfrm>
           <a:prstGeom prst="rect">
             <a:avLst/>

--- a/鼻整形_デザインカタログ.pptx
+++ b/鼻整形_デザインカタログ.pptx
@@ -757,7 +757,7 @@
         </p:nvSpPr>
         <p:spPr>
           <a:xfrm>
-            <a:off x="2226945" y="2240280"/>
+            <a:off x="2066925" y="2240280"/>
             <a:ext cx="1554480" cy="3108960"/>
           </a:xfrm>
           <a:prstGeom prst="roundRect">
@@ -787,7 +787,7 @@
         </p:nvSpPr>
         <p:spPr>
           <a:xfrm>
-            <a:off x="3781425" y="2240280"/>
+            <a:off x="3941445" y="2240280"/>
             <a:ext cx="1554480" cy="3108960"/>
           </a:xfrm>
           <a:prstGeom prst="roundRect">
@@ -5389,7 +5389,7 @@
         </p:nvSpPr>
         <p:spPr>
           <a:xfrm>
-            <a:off x="2226945" y="1874519"/>
+            <a:off x="2066925" y="1874519"/>
             <a:ext cx="1554480" cy="274320"/>
           </a:xfrm>
           <a:prstGeom prst="rect">
@@ -5435,7 +5435,7 @@
         </p:nvSpPr>
         <p:spPr>
           <a:xfrm>
-            <a:off x="3781425" y="1874519"/>
+            <a:off x="3941445" y="1874519"/>
             <a:ext cx="1554480" cy="274320"/>
           </a:xfrm>
           <a:prstGeom prst="rect">
@@ -5481,8 +5481,8 @@
         </p:nvSpPr>
         <p:spPr>
           <a:xfrm>
-            <a:off x="2226945" y="1874519"/>
-            <a:ext cx="3108960" cy="274320"/>
+            <a:off x="2066925" y="1874519"/>
+            <a:ext cx="3429000" cy="274320"/>
           </a:xfrm>
           <a:prstGeom prst="rect">
             <a:avLst/>
@@ -6991,7 +6991,7 @@
         </p:nvSpPr>
         <p:spPr>
           <a:xfrm>
-            <a:off x="2226945" y="1874519"/>
+            <a:off x="2066925" y="1874519"/>
             <a:ext cx="1554480" cy="274320"/>
           </a:xfrm>
           <a:prstGeom prst="rect">
@@ -7037,7 +7037,7 @@
         </p:nvSpPr>
         <p:spPr>
           <a:xfrm>
-            <a:off x="3781425" y="1874519"/>
+            <a:off x="3941445" y="1874519"/>
             <a:ext cx="1554480" cy="274320"/>
           </a:xfrm>
           <a:prstGeom prst="rect">
@@ -7083,8 +7083,8 @@
         </p:nvSpPr>
         <p:spPr>
           <a:xfrm>
-            <a:off x="2226945" y="1874519"/>
-            <a:ext cx="3108960" cy="274320"/>
+            <a:off x="2066925" y="1874519"/>
+            <a:ext cx="3429000" cy="274320"/>
           </a:xfrm>
           <a:prstGeom prst="rect">
             <a:avLst/>
@@ -8593,7 +8593,7 @@
         </p:nvSpPr>
         <p:spPr>
           <a:xfrm>
-            <a:off x="2226945" y="1874519"/>
+            <a:off x="2066925" y="1874519"/>
             <a:ext cx="1554480" cy="274320"/>
           </a:xfrm>
           <a:prstGeom prst="rect">
@@ -8639,7 +8639,7 @@
         </p:nvSpPr>
         <p:spPr>
           <a:xfrm>
-            <a:off x="3781425" y="1874519"/>
+            <a:off x="3941445" y="1874519"/>
             <a:ext cx="1554480" cy="274320"/>
           </a:xfrm>
           <a:prstGeom prst="rect">
@@ -8685,8 +8685,8 @@
         </p:nvSpPr>
         <p:spPr>
           <a:xfrm>
-            <a:off x="2226945" y="1874519"/>
-            <a:ext cx="3108960" cy="274320"/>
+            <a:off x="2066925" y="1874519"/>
+            <a:ext cx="3429000" cy="274320"/>
           </a:xfrm>
           <a:prstGeom prst="rect">
             <a:avLst/>
@@ -10195,7 +10195,7 @@
         </p:nvSpPr>
         <p:spPr>
           <a:xfrm>
-            <a:off x="2226945" y="1874519"/>
+            <a:off x="2066925" y="1874519"/>
             <a:ext cx="1554480" cy="274320"/>
           </a:xfrm>
           <a:prstGeom prst="rect">
@@ -10241,7 +10241,7 @@
         </p:nvSpPr>
         <p:spPr>
           <a:xfrm>
-            <a:off x="3781425" y="1874519"/>
+            <a:off x="3941445" y="1874519"/>
             <a:ext cx="1554480" cy="274320"/>
           </a:xfrm>
           <a:prstGeom prst="rect">
@@ -10287,8 +10287,8 @@
         </p:nvSpPr>
         <p:spPr>
           <a:xfrm>
-            <a:off x="2226945" y="1874519"/>
-            <a:ext cx="3108960" cy="274320"/>
+            <a:off x="2066925" y="1874519"/>
+            <a:ext cx="3429000" cy="274320"/>
           </a:xfrm>
           <a:prstGeom prst="rect">
             <a:avLst/>
@@ -12683,7 +12683,7 @@
         </p:nvSpPr>
         <p:spPr>
           <a:xfrm>
-            <a:off x="2226945" y="1874519"/>
+            <a:off x="2066925" y="1874519"/>
             <a:ext cx="1554480" cy="274320"/>
           </a:xfrm>
           <a:prstGeom prst="rect">
@@ -12729,7 +12729,7 @@
         </p:nvSpPr>
         <p:spPr>
           <a:xfrm>
-            <a:off x="3781425" y="1874519"/>
+            <a:off x="3941445" y="1874519"/>
             <a:ext cx="1554480" cy="274320"/>
           </a:xfrm>
           <a:prstGeom prst="rect">
@@ -12775,8 +12775,8 @@
         </p:nvSpPr>
         <p:spPr>
           <a:xfrm>
-            <a:off x="2226945" y="1874519"/>
-            <a:ext cx="3108960" cy="274320"/>
+            <a:off x="2066925" y="1874519"/>
+            <a:ext cx="3429000" cy="274320"/>
           </a:xfrm>
           <a:prstGeom prst="rect">
             <a:avLst/>
@@ -14285,7 +14285,7 @@
         </p:nvSpPr>
         <p:spPr>
           <a:xfrm>
-            <a:off x="2226945" y="1874519"/>
+            <a:off x="2066925" y="1874519"/>
             <a:ext cx="1554480" cy="274320"/>
           </a:xfrm>
           <a:prstGeom prst="rect">
@@ -14331,7 +14331,7 @@
         </p:nvSpPr>
         <p:spPr>
           <a:xfrm>
-            <a:off x="3781425" y="1874519"/>
+            <a:off x="3941445" y="1874519"/>
             <a:ext cx="1554480" cy="274320"/>
           </a:xfrm>
           <a:prstGeom prst="rect">
@@ -14377,8 +14377,8 @@
         </p:nvSpPr>
         <p:spPr>
           <a:xfrm>
-            <a:off x="2226945" y="1874519"/>
-            <a:ext cx="3108960" cy="274320"/>
+            <a:off x="2066925" y="1874519"/>
+            <a:ext cx="3429000" cy="274320"/>
           </a:xfrm>
           <a:prstGeom prst="rect">
             <a:avLst/>
@@ -15887,7 +15887,7 @@
         </p:nvSpPr>
         <p:spPr>
           <a:xfrm>
-            <a:off x="2226945" y="1874519"/>
+            <a:off x="2066925" y="1874519"/>
             <a:ext cx="1554480" cy="274320"/>
           </a:xfrm>
           <a:prstGeom prst="rect">
@@ -15933,7 +15933,7 @@
         </p:nvSpPr>
         <p:spPr>
           <a:xfrm>
-            <a:off x="3781425" y="1874519"/>
+            <a:off x="3941445" y="1874519"/>
             <a:ext cx="1554480" cy="274320"/>
           </a:xfrm>
           <a:prstGeom prst="rect">
@@ -15979,8 +15979,8 @@
         </p:nvSpPr>
         <p:spPr>
           <a:xfrm>
-            <a:off x="2226945" y="1874519"/>
-            <a:ext cx="3108960" cy="274320"/>
+            <a:off x="2066925" y="1874519"/>
+            <a:ext cx="3429000" cy="274320"/>
           </a:xfrm>
           <a:prstGeom prst="rect">
             <a:avLst/>
@@ -19950,7 +19950,7 @@
         </p:nvSpPr>
         <p:spPr>
           <a:xfrm>
-            <a:off x="2226945" y="1874519"/>
+            <a:off x="2066925" y="1874519"/>
             <a:ext cx="1554480" cy="274320"/>
           </a:xfrm>
           <a:prstGeom prst="rect">
@@ -19996,7 +19996,7 @@
         </p:nvSpPr>
         <p:spPr>
           <a:xfrm>
-            <a:off x="3781425" y="1874519"/>
+            <a:off x="3941445" y="1874519"/>
             <a:ext cx="1554480" cy="274320"/>
           </a:xfrm>
           <a:prstGeom prst="rect">
@@ -20042,8 +20042,8 @@
         </p:nvSpPr>
         <p:spPr>
           <a:xfrm>
-            <a:off x="2226945" y="1874519"/>
-            <a:ext cx="3108960" cy="274320"/>
+            <a:off x="2066925" y="1874519"/>
+            <a:ext cx="3429000" cy="274320"/>
           </a:xfrm>
           <a:prstGeom prst="rect">
             <a:avLst/>
@@ -21552,7 +21552,7 @@
         </p:nvSpPr>
         <p:spPr>
           <a:xfrm>
-            <a:off x="2226945" y="1874519"/>
+            <a:off x="2066925" y="1874519"/>
             <a:ext cx="1554480" cy="274320"/>
           </a:xfrm>
           <a:prstGeom prst="rect">
@@ -21598,7 +21598,7 @@
         </p:nvSpPr>
         <p:spPr>
           <a:xfrm>
-            <a:off x="3781425" y="1874519"/>
+            <a:off x="3941445" y="1874519"/>
             <a:ext cx="1554480" cy="274320"/>
           </a:xfrm>
           <a:prstGeom prst="rect">
@@ -21644,8 +21644,8 @@
         </p:nvSpPr>
         <p:spPr>
           <a:xfrm>
-            <a:off x="2226945" y="1874519"/>
-            <a:ext cx="3108960" cy="274320"/>
+            <a:off x="2066925" y="1874519"/>
+            <a:ext cx="3429000" cy="274320"/>
           </a:xfrm>
           <a:prstGeom prst="rect">
             <a:avLst/>
@@ -23154,7 +23154,7 @@
         </p:nvSpPr>
         <p:spPr>
           <a:xfrm>
-            <a:off x="2226945" y="1874519"/>
+            <a:off x="2066925" y="1874519"/>
             <a:ext cx="1554480" cy="274320"/>
           </a:xfrm>
           <a:prstGeom prst="rect">
@@ -23200,7 +23200,7 @@
         </p:nvSpPr>
         <p:spPr>
           <a:xfrm>
-            <a:off x="3781425" y="1874519"/>
+            <a:off x="3941445" y="1874519"/>
             <a:ext cx="1554480" cy="274320"/>
           </a:xfrm>
           <a:prstGeom prst="rect">
@@ -23246,8 +23246,8 @@
         </p:nvSpPr>
         <p:spPr>
           <a:xfrm>
-            <a:off x="2226945" y="1874519"/>
-            <a:ext cx="3108960" cy="274320"/>
+            <a:off x="2066925" y="1874519"/>
+            <a:ext cx="3429000" cy="274320"/>
           </a:xfrm>
           <a:prstGeom prst="rect">
             <a:avLst/>
@@ -25504,7 +25504,7 @@
         </p:nvSpPr>
         <p:spPr>
           <a:xfrm>
-            <a:off x="2226945" y="1874519"/>
+            <a:off x="2066925" y="1874519"/>
             <a:ext cx="1554480" cy="274320"/>
           </a:xfrm>
           <a:prstGeom prst="rect">
@@ -25550,7 +25550,7 @@
         </p:nvSpPr>
         <p:spPr>
           <a:xfrm>
-            <a:off x="3781425" y="1874519"/>
+            <a:off x="3941445" y="1874519"/>
             <a:ext cx="1554480" cy="274320"/>
           </a:xfrm>
           <a:prstGeom prst="rect">
@@ -25596,8 +25596,8 @@
         </p:nvSpPr>
         <p:spPr>
           <a:xfrm>
-            <a:off x="2226945" y="1874519"/>
-            <a:ext cx="3108960" cy="274320"/>
+            <a:off x="2066925" y="1874519"/>
+            <a:ext cx="3429000" cy="274320"/>
           </a:xfrm>
           <a:prstGeom prst="rect">
             <a:avLst/>
@@ -27106,7 +27106,7 @@
         </p:nvSpPr>
         <p:spPr>
           <a:xfrm>
-            <a:off x="2226945" y="1874519"/>
+            <a:off x="2066925" y="1874519"/>
             <a:ext cx="1554480" cy="274320"/>
           </a:xfrm>
           <a:prstGeom prst="rect">
@@ -27152,7 +27152,7 @@
         </p:nvSpPr>
         <p:spPr>
           <a:xfrm>
-            <a:off x="3781425" y="1874519"/>
+            <a:off x="3941445" y="1874519"/>
             <a:ext cx="1554480" cy="274320"/>
           </a:xfrm>
           <a:prstGeom prst="rect">
@@ -27198,8 +27198,8 @@
         </p:nvSpPr>
         <p:spPr>
           <a:xfrm>
-            <a:off x="2226945" y="1874519"/>
-            <a:ext cx="3108960" cy="274320"/>
+            <a:off x="2066925" y="1874519"/>
+            <a:ext cx="3429000" cy="274320"/>
           </a:xfrm>
           <a:prstGeom prst="rect">
             <a:avLst/>
@@ -40749,7 +40749,7 @@
         </p:nvSpPr>
         <p:spPr>
           <a:xfrm>
-            <a:off x="2226945" y="1874519"/>
+            <a:off x="2066925" y="1874519"/>
             <a:ext cx="1554480" cy="274320"/>
           </a:xfrm>
           <a:prstGeom prst="rect">
@@ -40795,7 +40795,7 @@
         </p:nvSpPr>
         <p:spPr>
           <a:xfrm>
-            <a:off x="3781425" y="1874519"/>
+            <a:off x="3941445" y="1874519"/>
             <a:ext cx="1554480" cy="274320"/>
           </a:xfrm>
           <a:prstGeom prst="rect">
@@ -40841,8 +40841,8 @@
         </p:nvSpPr>
         <p:spPr>
           <a:xfrm>
-            <a:off x="2226945" y="1874519"/>
-            <a:ext cx="3108960" cy="274320"/>
+            <a:off x="2066925" y="1874519"/>
+            <a:ext cx="3429000" cy="274320"/>
           </a:xfrm>
           <a:prstGeom prst="rect">
             <a:avLst/>
@@ -42351,7 +42351,7 @@
         </p:nvSpPr>
         <p:spPr>
           <a:xfrm>
-            <a:off x="2226945" y="1874519"/>
+            <a:off x="2066925" y="1874519"/>
             <a:ext cx="1554480" cy="274320"/>
           </a:xfrm>
           <a:prstGeom prst="rect">
@@ -42397,7 +42397,7 @@
         </p:nvSpPr>
         <p:spPr>
           <a:xfrm>
-            <a:off x="3781425" y="1874519"/>
+            <a:off x="3941445" y="1874519"/>
             <a:ext cx="1554480" cy="274320"/>
           </a:xfrm>
           <a:prstGeom prst="rect">
@@ -42443,8 +42443,8 @@
         </p:nvSpPr>
         <p:spPr>
           <a:xfrm>
-            <a:off x="2226945" y="1874519"/>
-            <a:ext cx="3108960" cy="274320"/>
+            <a:off x="2066925" y="1874519"/>
+            <a:ext cx="3429000" cy="274320"/>
           </a:xfrm>
           <a:prstGeom prst="rect">
             <a:avLst/>
@@ -43953,7 +43953,7 @@
         </p:nvSpPr>
         <p:spPr>
           <a:xfrm>
-            <a:off x="2226945" y="1874519"/>
+            <a:off x="2066925" y="1874519"/>
             <a:ext cx="1554480" cy="274320"/>
           </a:xfrm>
           <a:prstGeom prst="rect">
@@ -43999,7 +43999,7 @@
         </p:nvSpPr>
         <p:spPr>
           <a:xfrm>
-            <a:off x="3781425" y="1874519"/>
+            <a:off x="3941445" y="1874519"/>
             <a:ext cx="1554480" cy="274320"/>
           </a:xfrm>
           <a:prstGeom prst="rect">
@@ -44045,8 +44045,8 @@
         </p:nvSpPr>
         <p:spPr>
           <a:xfrm>
-            <a:off x="2226945" y="1874519"/>
-            <a:ext cx="3108960" cy="274320"/>
+            <a:off x="2066925" y="1874519"/>
+            <a:ext cx="3429000" cy="274320"/>
           </a:xfrm>
           <a:prstGeom prst="rect">
             <a:avLst/>
@@ -45555,7 +45555,7 @@
         </p:nvSpPr>
         <p:spPr>
           <a:xfrm>
-            <a:off x="2226945" y="1874519"/>
+            <a:off x="2066925" y="1874519"/>
             <a:ext cx="1554480" cy="274320"/>
           </a:xfrm>
           <a:prstGeom prst="rect">
@@ -45601,7 +45601,7 @@
         </p:nvSpPr>
         <p:spPr>
           <a:xfrm>
-            <a:off x="3781425" y="1874519"/>
+            <a:off x="3941445" y="1874519"/>
             <a:ext cx="1554480" cy="274320"/>
           </a:xfrm>
           <a:prstGeom prst="rect">
@@ -45647,8 +45647,8 @@
         </p:nvSpPr>
         <p:spPr>
           <a:xfrm>
-            <a:off x="2226945" y="1874519"/>
-            <a:ext cx="3108960" cy="274320"/>
+            <a:off x="2066925" y="1874519"/>
+            <a:ext cx="3429000" cy="274320"/>
           </a:xfrm>
           <a:prstGeom prst="rect">
             <a:avLst/>

--- a/鼻整形_デザインカタログ.pptx
+++ b/鼻整形_デザインカタログ.pptx
@@ -757,38 +757,8 @@
         </p:nvSpPr>
         <p:spPr>
           <a:xfrm>
-            <a:off x="2066925" y="2240280"/>
-            <a:ext cx="1554480" cy="3108960"/>
-          </a:xfrm>
-          <a:prstGeom prst="roundRect">
-            <a:avLst>
-              <a:gd name="adj" fmla="val 4000"/>
-            </a:avLst>
-          </a:prstGeom>
-          <a:solidFill>
-            <a:srgbClr val="ECE4D4"/>
-          </a:solidFill>
-        </p:spPr>
-        <p:txBody>
-          <a:bodyPr/>
-          <a:lstStyle/>
-          <a:p/>
-        </p:txBody>
-      </p:sp>
-      <p:sp>
-        <p:nvSpPr>
-          <p:cNvPr id="202" name="写真枠 11"/>
-          <p:cNvSpPr>
-            <a:spLocks noGrp="1"/>
-          </p:cNvSpPr>
-          <p:nvPr>
-            <p:ph type="pic" idx="11"/>
-          </p:nvPr>
-        </p:nvSpPr>
-        <p:spPr>
-          <a:xfrm>
-            <a:off x="3941445" y="2240280"/>
-            <a:ext cx="1554480" cy="3108960"/>
+            <a:off x="2041026" y="2240280"/>
+            <a:ext cx="3480797" cy="3200400"/>
           </a:xfrm>
           <a:prstGeom prst="roundRect">
             <a:avLst>
@@ -837,7 +807,7 @@
       </p:grpSpPr>
       <p:sp>
         <p:nvSpPr>
-          <p:cNvPr id="203" name="写真枠 10"/>
+          <p:cNvPr id="202" name="写真枠 10"/>
           <p:cNvSpPr>
             <a:spLocks noGrp="1"/>
           </p:cNvSpPr>
@@ -4949,7 +4919,7 @@
       <p:grpSpPr/>
       <p:sp>
         <p:nvSpPr>
-          <p:cNvPr id="12" name="Rounded Rectangle 11"/>
+          <p:cNvPr id="11" name="Rounded Rectangle 10"/>
           <p:cNvSpPr/>
           <p:nvPr/>
         </p:nvSpPr>
@@ -5007,19 +4977,7 @@
       </p:sp>
       <p:sp>
         <p:nvSpPr>
-          <p:cNvPr id="3" name="Picture Placeholder 2"/>
-          <p:cNvSpPr>
-            <a:spLocks noGrp="1"/>
-          </p:cNvSpPr>
-          <p:nvPr>
-            <p:ph type="pic" idx="11"/>
-          </p:nvPr>
-        </p:nvSpPr>
-        <p:spPr/>
-      </p:sp>
-      <p:sp>
-        <p:nvSpPr>
-          <p:cNvPr id="4" name="TextBox 3"/>
+          <p:cNvPr id="3" name="TextBox 2"/>
           <p:cNvSpPr txBox="1"/>
           <p:nvPr/>
         </p:nvSpPr>
@@ -5065,7 +5023,7 @@
       </p:sp>
       <p:sp>
         <p:nvSpPr>
-          <p:cNvPr id="5" name="TextBox 4"/>
+          <p:cNvPr id="4" name="TextBox 3"/>
           <p:cNvSpPr txBox="1"/>
           <p:nvPr/>
         </p:nvSpPr>
@@ -5111,7 +5069,7 @@
       </p:sp>
       <p:sp>
         <p:nvSpPr>
-          <p:cNvPr id="6" name="TextBox 5"/>
+          <p:cNvPr id="5" name="TextBox 4"/>
           <p:cNvSpPr txBox="1"/>
           <p:nvPr/>
         </p:nvSpPr>
@@ -5157,7 +5115,7 @@
       </p:sp>
       <p:sp>
         <p:nvSpPr>
-          <p:cNvPr id="7" name="Rounded Rectangle 6"/>
+          <p:cNvPr id="6" name="Rounded Rectangle 5"/>
           <p:cNvSpPr/>
           <p:nvPr/>
         </p:nvSpPr>
@@ -5201,7 +5159,7 @@
       </p:sp>
       <p:sp>
         <p:nvSpPr>
-          <p:cNvPr id="8" name="TextBox 7"/>
+          <p:cNvPr id="7" name="TextBox 6"/>
           <p:cNvSpPr txBox="1"/>
           <p:nvPr/>
         </p:nvSpPr>
@@ -5247,7 +5205,7 @@
       </p:sp>
       <p:sp>
         <p:nvSpPr>
-          <p:cNvPr id="9" name="Rounded Rectangle 8"/>
+          <p:cNvPr id="8" name="Rounded Rectangle 7"/>
           <p:cNvSpPr/>
           <p:nvPr/>
         </p:nvSpPr>
@@ -5291,7 +5249,7 @@
       </p:sp>
       <p:sp>
         <p:nvSpPr>
-          <p:cNvPr id="10" name="TextBox 9"/>
+          <p:cNvPr id="9" name="TextBox 8"/>
           <p:cNvSpPr txBox="1"/>
           <p:nvPr/>
         </p:nvSpPr>
@@ -5337,7 +5295,7 @@
       </p:sp>
       <p:sp>
         <p:nvSpPr>
-          <p:cNvPr id="11" name="TextBox 10"/>
+          <p:cNvPr id="10" name="TextBox 9"/>
           <p:cNvSpPr txBox="1"/>
           <p:nvPr/>
         </p:nvSpPr>
@@ -5383,14 +5341,14 @@
       </p:sp>
       <p:sp>
         <p:nvSpPr>
-          <p:cNvPr id="13" name="TextBox 12"/>
-          <p:cNvSpPr txBox="1"/>
-          <p:nvPr/>
-        </p:nvSpPr>
-        <p:spPr>
-          <a:xfrm>
-            <a:off x="2066925" y="1874519"/>
-            <a:ext cx="1554480" cy="274320"/>
+          <p:cNvPr id="12" name="TextBox 11"/>
+          <p:cNvSpPr txBox="1"/>
+          <p:nvPr/>
+        </p:nvSpPr>
+        <p:spPr>
+          <a:xfrm>
+            <a:off x="566928" y="1874519"/>
+            <a:ext cx="6428994" cy="274320"/>
           </a:xfrm>
           <a:prstGeom prst="rect">
             <a:avLst/>
@@ -5422,106 +5380,14 @@
                 <a:latin typeface="游明朝"/>
                 <a:ea typeface="游明朝"/>
               </a:rPr>
-              <a:t>Before</a:t>
-            </a:r>
-          </a:p>
-        </p:txBody>
-      </p:sp>
-      <p:sp>
-        <p:nvSpPr>
-          <p:cNvPr id="14" name="TextBox 13"/>
-          <p:cNvSpPr txBox="1"/>
-          <p:nvPr/>
-        </p:nvSpPr>
-        <p:spPr>
-          <a:xfrm>
-            <a:off x="3941445" y="1874519"/>
-            <a:ext cx="1554480" cy="274320"/>
-          </a:xfrm>
-          <a:prstGeom prst="rect">
-            <a:avLst/>
-          </a:prstGeom>
-          <a:noFill/>
-        </p:spPr>
-        <p:txBody>
-          <a:bodyPr wrap="square" anchor="t" lIns="0" rIns="0" tIns="0" bIns="0">
-            <a:spAutoFit/>
-          </a:bodyPr>
-          <a:lstStyle/>
-          <a:p>
-            <a:pPr algn="ctr">
-              <a:lnSpc>
-                <a:spcPct val="112000"/>
-              </a:lnSpc>
-              <a:spcBef>
-                <a:spcPts val="0"/>
-              </a:spcBef>
-              <a:spcAft>
-                <a:spcPts val="200"/>
-              </a:spcAft>
-            </a:pPr>
-            <a:r>
-              <a:rPr sz="1200" b="1">
-                <a:solidFill>
-                  <a:srgbClr val="8C7339"/>
-                </a:solidFill>
-                <a:latin typeface="游明朝"/>
-                <a:ea typeface="游明朝"/>
-              </a:rPr>
-              <a:t>After</a:t>
-            </a:r>
-          </a:p>
-        </p:txBody>
-      </p:sp>
-      <p:sp>
-        <p:nvSpPr>
-          <p:cNvPr id="15" name="TextBox 14"/>
-          <p:cNvSpPr txBox="1"/>
-          <p:nvPr/>
-        </p:nvSpPr>
-        <p:spPr>
-          <a:xfrm>
-            <a:off x="2066925" y="1874519"/>
-            <a:ext cx="3429000" cy="274320"/>
-          </a:xfrm>
-          <a:prstGeom prst="rect">
-            <a:avLst/>
-          </a:prstGeom>
-          <a:noFill/>
-        </p:spPr>
-        <p:txBody>
-          <a:bodyPr wrap="square" anchor="t" lIns="0" rIns="0" tIns="0" bIns="0">
-            <a:spAutoFit/>
-          </a:bodyPr>
-          <a:lstStyle/>
-          <a:p>
-            <a:pPr algn="ctr">
-              <a:lnSpc>
-                <a:spcPct val="112000"/>
-              </a:lnSpc>
-              <a:spcBef>
-                <a:spcPts val="0"/>
-              </a:spcBef>
-              <a:spcAft>
-                <a:spcPts val="200"/>
-              </a:spcAft>
-            </a:pPr>
-            <a:r>
-              <a:rPr sz="1200" b="1">
-                <a:solidFill>
-                  <a:srgbClr val="B0934E"/>
-                </a:solidFill>
-                <a:latin typeface="游明朝"/>
-                <a:ea typeface="游明朝"/>
-              </a:rPr>
-              <a:t>→</a:t>
-            </a:r>
-          </a:p>
-        </p:txBody>
-      </p:sp>
-      <p:sp>
-        <p:nvSpPr>
-          <p:cNvPr id="16" name="TextBox 15"/>
+              <a:t>Before　→　After</a:t>
+            </a:r>
+          </a:p>
+        </p:txBody>
+      </p:sp>
+      <p:sp>
+        <p:nvSpPr>
+          <p:cNvPr id="13" name="TextBox 12"/>
           <p:cNvSpPr txBox="1"/>
           <p:nvPr/>
         </p:nvSpPr>
@@ -5560,14 +5426,14 @@
                 <a:latin typeface="游ゴシック"/>
                 <a:ea typeface="游ゴシック"/>
               </a:rPr>
-              <a:t>▲ Before・After それぞれの枠をクリックして写真を挿入（自動で枠いっぱいに配置されます）</a:t>
-            </a:r>
-          </a:p>
-        </p:txBody>
-      </p:sp>
-      <p:sp>
-        <p:nvSpPr>
-          <p:cNvPr id="17" name="Rounded Rectangle 16"/>
+              <a:t>▲ 枠をクリックして Before/After を1枚にした画像を挿入（自動で枠いっぱいに配置）</a:t>
+            </a:r>
+          </a:p>
+        </p:txBody>
+      </p:sp>
+      <p:sp>
+        <p:nvSpPr>
+          <p:cNvPr id="14" name="Rounded Rectangle 13"/>
           <p:cNvSpPr/>
           <p:nvPr/>
         </p:nvSpPr>
@@ -5611,7 +5477,7 @@
       </p:sp>
       <p:sp>
         <p:nvSpPr>
-          <p:cNvPr id="18" name="TextBox 17"/>
+          <p:cNvPr id="15" name="TextBox 14"/>
           <p:cNvSpPr txBox="1"/>
           <p:nvPr/>
         </p:nvSpPr>
@@ -5657,7 +5523,7 @@
       </p:sp>
       <p:sp>
         <p:nvSpPr>
-          <p:cNvPr id="19" name="TextBox 18"/>
+          <p:cNvPr id="16" name="TextBox 15"/>
           <p:cNvSpPr txBox="1"/>
           <p:nvPr/>
         </p:nvSpPr>
@@ -5703,7 +5569,7 @@
       </p:sp>
       <p:graphicFrame>
         <p:nvGraphicFramePr>
-          <p:cNvPr id="20" name="Table 19"/>
+          <p:cNvPr id="17" name="Table 16"/>
           <p:cNvGraphicFramePr>
             <a:graphicFrameLocks noGrp="1"/>
           </p:cNvGraphicFramePr>
@@ -5873,7 +5739,7 @@
       </p:graphicFrame>
       <p:sp>
         <p:nvSpPr>
-          <p:cNvPr id="21" name="Rounded Rectangle 20"/>
+          <p:cNvPr id="18" name="Rounded Rectangle 17"/>
           <p:cNvSpPr/>
           <p:nvPr/>
         </p:nvSpPr>
@@ -5919,7 +5785,7 @@
       </p:sp>
       <p:sp>
         <p:nvSpPr>
-          <p:cNvPr id="22" name="Rectangle 21"/>
+          <p:cNvPr id="19" name="Rectangle 18"/>
           <p:cNvSpPr/>
           <p:nvPr/>
         </p:nvSpPr>
@@ -5963,7 +5829,7 @@
       </p:sp>
       <p:sp>
         <p:nvSpPr>
-          <p:cNvPr id="23" name="TextBox 22"/>
+          <p:cNvPr id="20" name="TextBox 19"/>
           <p:cNvSpPr txBox="1"/>
           <p:nvPr/>
         </p:nvSpPr>
@@ -6009,7 +5875,7 @@
       </p:sp>
       <p:sp>
         <p:nvSpPr>
-          <p:cNvPr id="24" name="TextBox 23"/>
+          <p:cNvPr id="21" name="TextBox 20"/>
           <p:cNvSpPr txBox="1"/>
           <p:nvPr/>
         </p:nvSpPr>
@@ -6057,7 +5923,7 @@
       </p:sp>
       <p:sp>
         <p:nvSpPr>
-          <p:cNvPr id="25" name="Rounded Rectangle 24"/>
+          <p:cNvPr id="22" name="Rounded Rectangle 21"/>
           <p:cNvSpPr/>
           <p:nvPr/>
         </p:nvSpPr>
@@ -6101,7 +5967,7 @@
       </p:sp>
       <p:sp>
         <p:nvSpPr>
-          <p:cNvPr id="26" name="TextBox 25"/>
+          <p:cNvPr id="23" name="TextBox 22"/>
           <p:cNvSpPr txBox="1"/>
           <p:nvPr/>
         </p:nvSpPr>
@@ -6147,7 +6013,7 @@
       </p:sp>
       <p:sp>
         <p:nvSpPr>
-          <p:cNvPr id="27" name="TextBox 26"/>
+          <p:cNvPr id="24" name="TextBox 23"/>
           <p:cNvSpPr txBox="1"/>
           <p:nvPr/>
         </p:nvSpPr>
@@ -6193,7 +6059,7 @@
       </p:sp>
       <p:sp>
         <p:nvSpPr>
-          <p:cNvPr id="28" name="TextBox 27"/>
+          <p:cNvPr id="25" name="TextBox 24"/>
           <p:cNvSpPr txBox="1"/>
           <p:nvPr/>
         </p:nvSpPr>
@@ -6249,7 +6115,7 @@
       </p:sp>
       <p:sp>
         <p:nvSpPr>
-          <p:cNvPr id="29" name="TextBox 28"/>
+          <p:cNvPr id="26" name="TextBox 25"/>
           <p:cNvSpPr txBox="1"/>
           <p:nvPr/>
         </p:nvSpPr>
@@ -6295,7 +6161,7 @@
       </p:sp>
       <p:sp>
         <p:nvSpPr>
-          <p:cNvPr id="30" name="Rounded Rectangle 29"/>
+          <p:cNvPr id="27" name="Rounded Rectangle 26"/>
           <p:cNvSpPr/>
           <p:nvPr/>
         </p:nvSpPr>
@@ -6341,7 +6207,7 @@
       </p:sp>
       <p:sp>
         <p:nvSpPr>
-          <p:cNvPr id="31" name="TextBox 30"/>
+          <p:cNvPr id="28" name="TextBox 27"/>
           <p:cNvSpPr txBox="1"/>
           <p:nvPr/>
         </p:nvSpPr>
@@ -6387,7 +6253,7 @@
       </p:sp>
       <p:sp>
         <p:nvSpPr>
-          <p:cNvPr id="32" name="TextBox 31"/>
+          <p:cNvPr id="29" name="TextBox 28"/>
           <p:cNvSpPr txBox="1"/>
           <p:nvPr/>
         </p:nvSpPr>
@@ -6433,7 +6299,7 @@
       </p:sp>
       <p:sp>
         <p:nvSpPr>
-          <p:cNvPr id="33" name="TextBox 32"/>
+          <p:cNvPr id="30" name="TextBox 29"/>
           <p:cNvSpPr txBox="1"/>
           <p:nvPr/>
         </p:nvSpPr>
@@ -6479,7 +6345,7 @@
       </p:sp>
       <p:sp>
         <p:nvSpPr>
-          <p:cNvPr id="34" name="TextBox 33"/>
+          <p:cNvPr id="31" name="TextBox 30"/>
           <p:cNvSpPr txBox="1"/>
           <p:nvPr/>
         </p:nvSpPr>
@@ -6551,7 +6417,7 @@
       <p:grpSpPr/>
       <p:sp>
         <p:nvSpPr>
-          <p:cNvPr id="12" name="Rounded Rectangle 11"/>
+          <p:cNvPr id="11" name="Rounded Rectangle 10"/>
           <p:cNvSpPr/>
           <p:nvPr/>
         </p:nvSpPr>
@@ -6609,19 +6475,7 @@
       </p:sp>
       <p:sp>
         <p:nvSpPr>
-          <p:cNvPr id="3" name="Picture Placeholder 2"/>
-          <p:cNvSpPr>
-            <a:spLocks noGrp="1"/>
-          </p:cNvSpPr>
-          <p:nvPr>
-            <p:ph type="pic" idx="11"/>
-          </p:nvPr>
-        </p:nvSpPr>
-        <p:spPr/>
-      </p:sp>
-      <p:sp>
-        <p:nvSpPr>
-          <p:cNvPr id="4" name="TextBox 3"/>
+          <p:cNvPr id="3" name="TextBox 2"/>
           <p:cNvSpPr txBox="1"/>
           <p:nvPr/>
         </p:nvSpPr>
@@ -6667,7 +6521,7 @@
       </p:sp>
       <p:sp>
         <p:nvSpPr>
-          <p:cNvPr id="5" name="TextBox 4"/>
+          <p:cNvPr id="4" name="TextBox 3"/>
           <p:cNvSpPr txBox="1"/>
           <p:nvPr/>
         </p:nvSpPr>
@@ -6713,7 +6567,7 @@
       </p:sp>
       <p:sp>
         <p:nvSpPr>
-          <p:cNvPr id="6" name="TextBox 5"/>
+          <p:cNvPr id="5" name="TextBox 4"/>
           <p:cNvSpPr txBox="1"/>
           <p:nvPr/>
         </p:nvSpPr>
@@ -6759,7 +6613,7 @@
       </p:sp>
       <p:sp>
         <p:nvSpPr>
-          <p:cNvPr id="7" name="Rounded Rectangle 6"/>
+          <p:cNvPr id="6" name="Rounded Rectangle 5"/>
           <p:cNvSpPr/>
           <p:nvPr/>
         </p:nvSpPr>
@@ -6803,7 +6657,7 @@
       </p:sp>
       <p:sp>
         <p:nvSpPr>
-          <p:cNvPr id="8" name="TextBox 7"/>
+          <p:cNvPr id="7" name="TextBox 6"/>
           <p:cNvSpPr txBox="1"/>
           <p:nvPr/>
         </p:nvSpPr>
@@ -6849,7 +6703,7 @@
       </p:sp>
       <p:sp>
         <p:nvSpPr>
-          <p:cNvPr id="9" name="Rounded Rectangle 8"/>
+          <p:cNvPr id="8" name="Rounded Rectangle 7"/>
           <p:cNvSpPr/>
           <p:nvPr/>
         </p:nvSpPr>
@@ -6893,7 +6747,7 @@
       </p:sp>
       <p:sp>
         <p:nvSpPr>
-          <p:cNvPr id="10" name="TextBox 9"/>
+          <p:cNvPr id="9" name="TextBox 8"/>
           <p:cNvSpPr txBox="1"/>
           <p:nvPr/>
         </p:nvSpPr>
@@ -6939,7 +6793,7 @@
       </p:sp>
       <p:sp>
         <p:nvSpPr>
-          <p:cNvPr id="11" name="TextBox 10"/>
+          <p:cNvPr id="10" name="TextBox 9"/>
           <p:cNvSpPr txBox="1"/>
           <p:nvPr/>
         </p:nvSpPr>
@@ -6985,14 +6839,14 @@
       </p:sp>
       <p:sp>
         <p:nvSpPr>
-          <p:cNvPr id="13" name="TextBox 12"/>
-          <p:cNvSpPr txBox="1"/>
-          <p:nvPr/>
-        </p:nvSpPr>
-        <p:spPr>
-          <a:xfrm>
-            <a:off x="2066925" y="1874519"/>
-            <a:ext cx="1554480" cy="274320"/>
+          <p:cNvPr id="12" name="TextBox 11"/>
+          <p:cNvSpPr txBox="1"/>
+          <p:nvPr/>
+        </p:nvSpPr>
+        <p:spPr>
+          <a:xfrm>
+            <a:off x="566928" y="1874519"/>
+            <a:ext cx="6428994" cy="274320"/>
           </a:xfrm>
           <a:prstGeom prst="rect">
             <a:avLst/>
@@ -7024,106 +6878,14 @@
                 <a:latin typeface="游明朝"/>
                 <a:ea typeface="游明朝"/>
               </a:rPr>
-              <a:t>Before</a:t>
-            </a:r>
-          </a:p>
-        </p:txBody>
-      </p:sp>
-      <p:sp>
-        <p:nvSpPr>
-          <p:cNvPr id="14" name="TextBox 13"/>
-          <p:cNvSpPr txBox="1"/>
-          <p:nvPr/>
-        </p:nvSpPr>
-        <p:spPr>
-          <a:xfrm>
-            <a:off x="3941445" y="1874519"/>
-            <a:ext cx="1554480" cy="274320"/>
-          </a:xfrm>
-          <a:prstGeom prst="rect">
-            <a:avLst/>
-          </a:prstGeom>
-          <a:noFill/>
-        </p:spPr>
-        <p:txBody>
-          <a:bodyPr wrap="square" anchor="t" lIns="0" rIns="0" tIns="0" bIns="0">
-            <a:spAutoFit/>
-          </a:bodyPr>
-          <a:lstStyle/>
-          <a:p>
-            <a:pPr algn="ctr">
-              <a:lnSpc>
-                <a:spcPct val="112000"/>
-              </a:lnSpc>
-              <a:spcBef>
-                <a:spcPts val="0"/>
-              </a:spcBef>
-              <a:spcAft>
-                <a:spcPts val="200"/>
-              </a:spcAft>
-            </a:pPr>
-            <a:r>
-              <a:rPr sz="1200" b="1">
-                <a:solidFill>
-                  <a:srgbClr val="8C7339"/>
-                </a:solidFill>
-                <a:latin typeface="游明朝"/>
-                <a:ea typeface="游明朝"/>
-              </a:rPr>
-              <a:t>After</a:t>
-            </a:r>
-          </a:p>
-        </p:txBody>
-      </p:sp>
-      <p:sp>
-        <p:nvSpPr>
-          <p:cNvPr id="15" name="TextBox 14"/>
-          <p:cNvSpPr txBox="1"/>
-          <p:nvPr/>
-        </p:nvSpPr>
-        <p:spPr>
-          <a:xfrm>
-            <a:off x="2066925" y="1874519"/>
-            <a:ext cx="3429000" cy="274320"/>
-          </a:xfrm>
-          <a:prstGeom prst="rect">
-            <a:avLst/>
-          </a:prstGeom>
-          <a:noFill/>
-        </p:spPr>
-        <p:txBody>
-          <a:bodyPr wrap="square" anchor="t" lIns="0" rIns="0" tIns="0" bIns="0">
-            <a:spAutoFit/>
-          </a:bodyPr>
-          <a:lstStyle/>
-          <a:p>
-            <a:pPr algn="ctr">
-              <a:lnSpc>
-                <a:spcPct val="112000"/>
-              </a:lnSpc>
-              <a:spcBef>
-                <a:spcPts val="0"/>
-              </a:spcBef>
-              <a:spcAft>
-                <a:spcPts val="200"/>
-              </a:spcAft>
-            </a:pPr>
-            <a:r>
-              <a:rPr sz="1200" b="1">
-                <a:solidFill>
-                  <a:srgbClr val="B0934E"/>
-                </a:solidFill>
-                <a:latin typeface="游明朝"/>
-                <a:ea typeface="游明朝"/>
-              </a:rPr>
-              <a:t>→</a:t>
-            </a:r>
-          </a:p>
-        </p:txBody>
-      </p:sp>
-      <p:sp>
-        <p:nvSpPr>
-          <p:cNvPr id="16" name="TextBox 15"/>
+              <a:t>Before　→　After</a:t>
+            </a:r>
+          </a:p>
+        </p:txBody>
+      </p:sp>
+      <p:sp>
+        <p:nvSpPr>
+          <p:cNvPr id="13" name="TextBox 12"/>
           <p:cNvSpPr txBox="1"/>
           <p:nvPr/>
         </p:nvSpPr>
@@ -7162,14 +6924,14 @@
                 <a:latin typeface="游ゴシック"/>
                 <a:ea typeface="游ゴシック"/>
               </a:rPr>
-              <a:t>▲ Before・After それぞれの枠をクリックして写真を挿入（自動で枠いっぱいに配置されます）</a:t>
-            </a:r>
-          </a:p>
-        </p:txBody>
-      </p:sp>
-      <p:sp>
-        <p:nvSpPr>
-          <p:cNvPr id="17" name="Rounded Rectangle 16"/>
+              <a:t>▲ 枠をクリックして Before/After を1枚にした画像を挿入（自動で枠いっぱいに配置）</a:t>
+            </a:r>
+          </a:p>
+        </p:txBody>
+      </p:sp>
+      <p:sp>
+        <p:nvSpPr>
+          <p:cNvPr id="14" name="Rounded Rectangle 13"/>
           <p:cNvSpPr/>
           <p:nvPr/>
         </p:nvSpPr>
@@ -7213,7 +6975,7 @@
       </p:sp>
       <p:sp>
         <p:nvSpPr>
-          <p:cNvPr id="18" name="TextBox 17"/>
+          <p:cNvPr id="15" name="TextBox 14"/>
           <p:cNvSpPr txBox="1"/>
           <p:nvPr/>
         </p:nvSpPr>
@@ -7259,7 +7021,7 @@
       </p:sp>
       <p:sp>
         <p:nvSpPr>
-          <p:cNvPr id="19" name="TextBox 18"/>
+          <p:cNvPr id="16" name="TextBox 15"/>
           <p:cNvSpPr txBox="1"/>
           <p:nvPr/>
         </p:nvSpPr>
@@ -7305,7 +7067,7 @@
       </p:sp>
       <p:graphicFrame>
         <p:nvGraphicFramePr>
-          <p:cNvPr id="20" name="Table 19"/>
+          <p:cNvPr id="17" name="Table 16"/>
           <p:cNvGraphicFramePr>
             <a:graphicFrameLocks noGrp="1"/>
           </p:cNvGraphicFramePr>
@@ -7475,7 +7237,7 @@
       </p:graphicFrame>
       <p:sp>
         <p:nvSpPr>
-          <p:cNvPr id="21" name="Rounded Rectangle 20"/>
+          <p:cNvPr id="18" name="Rounded Rectangle 17"/>
           <p:cNvSpPr/>
           <p:nvPr/>
         </p:nvSpPr>
@@ -7521,7 +7283,7 @@
       </p:sp>
       <p:sp>
         <p:nvSpPr>
-          <p:cNvPr id="22" name="Rectangle 21"/>
+          <p:cNvPr id="19" name="Rectangle 18"/>
           <p:cNvSpPr/>
           <p:nvPr/>
         </p:nvSpPr>
@@ -7565,7 +7327,7 @@
       </p:sp>
       <p:sp>
         <p:nvSpPr>
-          <p:cNvPr id="23" name="TextBox 22"/>
+          <p:cNvPr id="20" name="TextBox 19"/>
           <p:cNvSpPr txBox="1"/>
           <p:nvPr/>
         </p:nvSpPr>
@@ -7611,7 +7373,7 @@
       </p:sp>
       <p:sp>
         <p:nvSpPr>
-          <p:cNvPr id="24" name="TextBox 23"/>
+          <p:cNvPr id="21" name="TextBox 20"/>
           <p:cNvSpPr txBox="1"/>
           <p:nvPr/>
         </p:nvSpPr>
@@ -7659,7 +7421,7 @@
       </p:sp>
       <p:sp>
         <p:nvSpPr>
-          <p:cNvPr id="25" name="Rounded Rectangle 24"/>
+          <p:cNvPr id="22" name="Rounded Rectangle 21"/>
           <p:cNvSpPr/>
           <p:nvPr/>
         </p:nvSpPr>
@@ -7703,7 +7465,7 @@
       </p:sp>
       <p:sp>
         <p:nvSpPr>
-          <p:cNvPr id="26" name="TextBox 25"/>
+          <p:cNvPr id="23" name="TextBox 22"/>
           <p:cNvSpPr txBox="1"/>
           <p:nvPr/>
         </p:nvSpPr>
@@ -7749,7 +7511,7 @@
       </p:sp>
       <p:sp>
         <p:nvSpPr>
-          <p:cNvPr id="27" name="TextBox 26"/>
+          <p:cNvPr id="24" name="TextBox 23"/>
           <p:cNvSpPr txBox="1"/>
           <p:nvPr/>
         </p:nvSpPr>
@@ -7795,7 +7557,7 @@
       </p:sp>
       <p:sp>
         <p:nvSpPr>
-          <p:cNvPr id="28" name="TextBox 27"/>
+          <p:cNvPr id="25" name="TextBox 24"/>
           <p:cNvSpPr txBox="1"/>
           <p:nvPr/>
         </p:nvSpPr>
@@ -7851,7 +7613,7 @@
       </p:sp>
       <p:sp>
         <p:nvSpPr>
-          <p:cNvPr id="29" name="TextBox 28"/>
+          <p:cNvPr id="26" name="TextBox 25"/>
           <p:cNvSpPr txBox="1"/>
           <p:nvPr/>
         </p:nvSpPr>
@@ -7897,7 +7659,7 @@
       </p:sp>
       <p:sp>
         <p:nvSpPr>
-          <p:cNvPr id="30" name="Rounded Rectangle 29"/>
+          <p:cNvPr id="27" name="Rounded Rectangle 26"/>
           <p:cNvSpPr/>
           <p:nvPr/>
         </p:nvSpPr>
@@ -7943,7 +7705,7 @@
       </p:sp>
       <p:sp>
         <p:nvSpPr>
-          <p:cNvPr id="31" name="TextBox 30"/>
+          <p:cNvPr id="28" name="TextBox 27"/>
           <p:cNvSpPr txBox="1"/>
           <p:nvPr/>
         </p:nvSpPr>
@@ -7989,7 +7751,7 @@
       </p:sp>
       <p:sp>
         <p:nvSpPr>
-          <p:cNvPr id="32" name="TextBox 31"/>
+          <p:cNvPr id="29" name="TextBox 28"/>
           <p:cNvSpPr txBox="1"/>
           <p:nvPr/>
         </p:nvSpPr>
@@ -8035,7 +7797,7 @@
       </p:sp>
       <p:sp>
         <p:nvSpPr>
-          <p:cNvPr id="33" name="TextBox 32"/>
+          <p:cNvPr id="30" name="TextBox 29"/>
           <p:cNvSpPr txBox="1"/>
           <p:nvPr/>
         </p:nvSpPr>
@@ -8081,7 +7843,7 @@
       </p:sp>
       <p:sp>
         <p:nvSpPr>
-          <p:cNvPr id="34" name="TextBox 33"/>
+          <p:cNvPr id="31" name="TextBox 30"/>
           <p:cNvSpPr txBox="1"/>
           <p:nvPr/>
         </p:nvSpPr>
@@ -8153,7 +7915,7 @@
       <p:grpSpPr/>
       <p:sp>
         <p:nvSpPr>
-          <p:cNvPr id="12" name="Rounded Rectangle 11"/>
+          <p:cNvPr id="11" name="Rounded Rectangle 10"/>
           <p:cNvSpPr/>
           <p:nvPr/>
         </p:nvSpPr>
@@ -8211,19 +7973,7 @@
       </p:sp>
       <p:sp>
         <p:nvSpPr>
-          <p:cNvPr id="3" name="Picture Placeholder 2"/>
-          <p:cNvSpPr>
-            <a:spLocks noGrp="1"/>
-          </p:cNvSpPr>
-          <p:nvPr>
-            <p:ph type="pic" idx="11"/>
-          </p:nvPr>
-        </p:nvSpPr>
-        <p:spPr/>
-      </p:sp>
-      <p:sp>
-        <p:nvSpPr>
-          <p:cNvPr id="4" name="TextBox 3"/>
+          <p:cNvPr id="3" name="TextBox 2"/>
           <p:cNvSpPr txBox="1"/>
           <p:nvPr/>
         </p:nvSpPr>
@@ -8269,7 +8019,7 @@
       </p:sp>
       <p:sp>
         <p:nvSpPr>
-          <p:cNvPr id="5" name="TextBox 4"/>
+          <p:cNvPr id="4" name="TextBox 3"/>
           <p:cNvSpPr txBox="1"/>
           <p:nvPr/>
         </p:nvSpPr>
@@ -8315,7 +8065,7 @@
       </p:sp>
       <p:sp>
         <p:nvSpPr>
-          <p:cNvPr id="6" name="TextBox 5"/>
+          <p:cNvPr id="5" name="TextBox 4"/>
           <p:cNvSpPr txBox="1"/>
           <p:nvPr/>
         </p:nvSpPr>
@@ -8361,7 +8111,7 @@
       </p:sp>
       <p:sp>
         <p:nvSpPr>
-          <p:cNvPr id="7" name="Rounded Rectangle 6"/>
+          <p:cNvPr id="6" name="Rounded Rectangle 5"/>
           <p:cNvSpPr/>
           <p:nvPr/>
         </p:nvSpPr>
@@ -8405,7 +8155,7 @@
       </p:sp>
       <p:sp>
         <p:nvSpPr>
-          <p:cNvPr id="8" name="TextBox 7"/>
+          <p:cNvPr id="7" name="TextBox 6"/>
           <p:cNvSpPr txBox="1"/>
           <p:nvPr/>
         </p:nvSpPr>
@@ -8451,7 +8201,7 @@
       </p:sp>
       <p:sp>
         <p:nvSpPr>
-          <p:cNvPr id="9" name="Rounded Rectangle 8"/>
+          <p:cNvPr id="8" name="Rounded Rectangle 7"/>
           <p:cNvSpPr/>
           <p:nvPr/>
         </p:nvSpPr>
@@ -8495,7 +8245,7 @@
       </p:sp>
       <p:sp>
         <p:nvSpPr>
-          <p:cNvPr id="10" name="TextBox 9"/>
+          <p:cNvPr id="9" name="TextBox 8"/>
           <p:cNvSpPr txBox="1"/>
           <p:nvPr/>
         </p:nvSpPr>
@@ -8541,7 +8291,7 @@
       </p:sp>
       <p:sp>
         <p:nvSpPr>
-          <p:cNvPr id="11" name="TextBox 10"/>
+          <p:cNvPr id="10" name="TextBox 9"/>
           <p:cNvSpPr txBox="1"/>
           <p:nvPr/>
         </p:nvSpPr>
@@ -8587,14 +8337,14 @@
       </p:sp>
       <p:sp>
         <p:nvSpPr>
-          <p:cNvPr id="13" name="TextBox 12"/>
-          <p:cNvSpPr txBox="1"/>
-          <p:nvPr/>
-        </p:nvSpPr>
-        <p:spPr>
-          <a:xfrm>
-            <a:off x="2066925" y="1874519"/>
-            <a:ext cx="1554480" cy="274320"/>
+          <p:cNvPr id="12" name="TextBox 11"/>
+          <p:cNvSpPr txBox="1"/>
+          <p:nvPr/>
+        </p:nvSpPr>
+        <p:spPr>
+          <a:xfrm>
+            <a:off x="566928" y="1874519"/>
+            <a:ext cx="6428994" cy="274320"/>
           </a:xfrm>
           <a:prstGeom prst="rect">
             <a:avLst/>
@@ -8626,106 +8376,14 @@
                 <a:latin typeface="游明朝"/>
                 <a:ea typeface="游明朝"/>
               </a:rPr>
-              <a:t>Before</a:t>
-            </a:r>
-          </a:p>
-        </p:txBody>
-      </p:sp>
-      <p:sp>
-        <p:nvSpPr>
-          <p:cNvPr id="14" name="TextBox 13"/>
-          <p:cNvSpPr txBox="1"/>
-          <p:nvPr/>
-        </p:nvSpPr>
-        <p:spPr>
-          <a:xfrm>
-            <a:off x="3941445" y="1874519"/>
-            <a:ext cx="1554480" cy="274320"/>
-          </a:xfrm>
-          <a:prstGeom prst="rect">
-            <a:avLst/>
-          </a:prstGeom>
-          <a:noFill/>
-        </p:spPr>
-        <p:txBody>
-          <a:bodyPr wrap="square" anchor="t" lIns="0" rIns="0" tIns="0" bIns="0">
-            <a:spAutoFit/>
-          </a:bodyPr>
-          <a:lstStyle/>
-          <a:p>
-            <a:pPr algn="ctr">
-              <a:lnSpc>
-                <a:spcPct val="112000"/>
-              </a:lnSpc>
-              <a:spcBef>
-                <a:spcPts val="0"/>
-              </a:spcBef>
-              <a:spcAft>
-                <a:spcPts val="200"/>
-              </a:spcAft>
-            </a:pPr>
-            <a:r>
-              <a:rPr sz="1200" b="1">
-                <a:solidFill>
-                  <a:srgbClr val="8C7339"/>
-                </a:solidFill>
-                <a:latin typeface="游明朝"/>
-                <a:ea typeface="游明朝"/>
-              </a:rPr>
-              <a:t>After</a:t>
-            </a:r>
-          </a:p>
-        </p:txBody>
-      </p:sp>
-      <p:sp>
-        <p:nvSpPr>
-          <p:cNvPr id="15" name="TextBox 14"/>
-          <p:cNvSpPr txBox="1"/>
-          <p:nvPr/>
-        </p:nvSpPr>
-        <p:spPr>
-          <a:xfrm>
-            <a:off x="2066925" y="1874519"/>
-            <a:ext cx="3429000" cy="274320"/>
-          </a:xfrm>
-          <a:prstGeom prst="rect">
-            <a:avLst/>
-          </a:prstGeom>
-          <a:noFill/>
-        </p:spPr>
-        <p:txBody>
-          <a:bodyPr wrap="square" anchor="t" lIns="0" rIns="0" tIns="0" bIns="0">
-            <a:spAutoFit/>
-          </a:bodyPr>
-          <a:lstStyle/>
-          <a:p>
-            <a:pPr algn="ctr">
-              <a:lnSpc>
-                <a:spcPct val="112000"/>
-              </a:lnSpc>
-              <a:spcBef>
-                <a:spcPts val="0"/>
-              </a:spcBef>
-              <a:spcAft>
-                <a:spcPts val="200"/>
-              </a:spcAft>
-            </a:pPr>
-            <a:r>
-              <a:rPr sz="1200" b="1">
-                <a:solidFill>
-                  <a:srgbClr val="B0934E"/>
-                </a:solidFill>
-                <a:latin typeface="游明朝"/>
-                <a:ea typeface="游明朝"/>
-              </a:rPr>
-              <a:t>→</a:t>
-            </a:r>
-          </a:p>
-        </p:txBody>
-      </p:sp>
-      <p:sp>
-        <p:nvSpPr>
-          <p:cNvPr id="16" name="TextBox 15"/>
+              <a:t>Before　→　After</a:t>
+            </a:r>
+          </a:p>
+        </p:txBody>
+      </p:sp>
+      <p:sp>
+        <p:nvSpPr>
+          <p:cNvPr id="13" name="TextBox 12"/>
           <p:cNvSpPr txBox="1"/>
           <p:nvPr/>
         </p:nvSpPr>
@@ -8764,14 +8422,14 @@
                 <a:latin typeface="游ゴシック"/>
                 <a:ea typeface="游ゴシック"/>
               </a:rPr>
-              <a:t>▲ Before・After それぞれの枠をクリックして写真を挿入（自動で枠いっぱいに配置されます）</a:t>
-            </a:r>
-          </a:p>
-        </p:txBody>
-      </p:sp>
-      <p:sp>
-        <p:nvSpPr>
-          <p:cNvPr id="17" name="Rounded Rectangle 16"/>
+              <a:t>▲ 枠をクリックして Before/After を1枚にした画像を挿入（自動で枠いっぱいに配置）</a:t>
+            </a:r>
+          </a:p>
+        </p:txBody>
+      </p:sp>
+      <p:sp>
+        <p:nvSpPr>
+          <p:cNvPr id="14" name="Rounded Rectangle 13"/>
           <p:cNvSpPr/>
           <p:nvPr/>
         </p:nvSpPr>
@@ -8815,7 +8473,7 @@
       </p:sp>
       <p:sp>
         <p:nvSpPr>
-          <p:cNvPr id="18" name="TextBox 17"/>
+          <p:cNvPr id="15" name="TextBox 14"/>
           <p:cNvSpPr txBox="1"/>
           <p:nvPr/>
         </p:nvSpPr>
@@ -8861,7 +8519,7 @@
       </p:sp>
       <p:sp>
         <p:nvSpPr>
-          <p:cNvPr id="19" name="TextBox 18"/>
+          <p:cNvPr id="16" name="TextBox 15"/>
           <p:cNvSpPr txBox="1"/>
           <p:nvPr/>
         </p:nvSpPr>
@@ -8907,7 +8565,7 @@
       </p:sp>
       <p:graphicFrame>
         <p:nvGraphicFramePr>
-          <p:cNvPr id="20" name="Table 19"/>
+          <p:cNvPr id="17" name="Table 16"/>
           <p:cNvGraphicFramePr>
             <a:graphicFrameLocks noGrp="1"/>
           </p:cNvGraphicFramePr>
@@ -9077,7 +8735,7 @@
       </p:graphicFrame>
       <p:sp>
         <p:nvSpPr>
-          <p:cNvPr id="21" name="Rounded Rectangle 20"/>
+          <p:cNvPr id="18" name="Rounded Rectangle 17"/>
           <p:cNvSpPr/>
           <p:nvPr/>
         </p:nvSpPr>
@@ -9123,7 +8781,7 @@
       </p:sp>
       <p:sp>
         <p:nvSpPr>
-          <p:cNvPr id="22" name="Rectangle 21"/>
+          <p:cNvPr id="19" name="Rectangle 18"/>
           <p:cNvSpPr/>
           <p:nvPr/>
         </p:nvSpPr>
@@ -9167,7 +8825,7 @@
       </p:sp>
       <p:sp>
         <p:nvSpPr>
-          <p:cNvPr id="23" name="TextBox 22"/>
+          <p:cNvPr id="20" name="TextBox 19"/>
           <p:cNvSpPr txBox="1"/>
           <p:nvPr/>
         </p:nvSpPr>
@@ -9213,7 +8871,7 @@
       </p:sp>
       <p:sp>
         <p:nvSpPr>
-          <p:cNvPr id="24" name="TextBox 23"/>
+          <p:cNvPr id="21" name="TextBox 20"/>
           <p:cNvSpPr txBox="1"/>
           <p:nvPr/>
         </p:nvSpPr>
@@ -9261,7 +8919,7 @@
       </p:sp>
       <p:sp>
         <p:nvSpPr>
-          <p:cNvPr id="25" name="Rounded Rectangle 24"/>
+          <p:cNvPr id="22" name="Rounded Rectangle 21"/>
           <p:cNvSpPr/>
           <p:nvPr/>
         </p:nvSpPr>
@@ -9305,7 +8963,7 @@
       </p:sp>
       <p:sp>
         <p:nvSpPr>
-          <p:cNvPr id="26" name="TextBox 25"/>
+          <p:cNvPr id="23" name="TextBox 22"/>
           <p:cNvSpPr txBox="1"/>
           <p:nvPr/>
         </p:nvSpPr>
@@ -9351,7 +9009,7 @@
       </p:sp>
       <p:sp>
         <p:nvSpPr>
-          <p:cNvPr id="27" name="TextBox 26"/>
+          <p:cNvPr id="24" name="TextBox 23"/>
           <p:cNvSpPr txBox="1"/>
           <p:nvPr/>
         </p:nvSpPr>
@@ -9397,7 +9055,7 @@
       </p:sp>
       <p:sp>
         <p:nvSpPr>
-          <p:cNvPr id="28" name="TextBox 27"/>
+          <p:cNvPr id="25" name="TextBox 24"/>
           <p:cNvSpPr txBox="1"/>
           <p:nvPr/>
         </p:nvSpPr>
@@ -9453,7 +9111,7 @@
       </p:sp>
       <p:sp>
         <p:nvSpPr>
-          <p:cNvPr id="29" name="TextBox 28"/>
+          <p:cNvPr id="26" name="TextBox 25"/>
           <p:cNvSpPr txBox="1"/>
           <p:nvPr/>
         </p:nvSpPr>
@@ -9499,7 +9157,7 @@
       </p:sp>
       <p:sp>
         <p:nvSpPr>
-          <p:cNvPr id="30" name="Rounded Rectangle 29"/>
+          <p:cNvPr id="27" name="Rounded Rectangle 26"/>
           <p:cNvSpPr/>
           <p:nvPr/>
         </p:nvSpPr>
@@ -9545,7 +9203,7 @@
       </p:sp>
       <p:sp>
         <p:nvSpPr>
-          <p:cNvPr id="31" name="TextBox 30"/>
+          <p:cNvPr id="28" name="TextBox 27"/>
           <p:cNvSpPr txBox="1"/>
           <p:nvPr/>
         </p:nvSpPr>
@@ -9591,7 +9249,7 @@
       </p:sp>
       <p:sp>
         <p:nvSpPr>
-          <p:cNvPr id="32" name="TextBox 31"/>
+          <p:cNvPr id="29" name="TextBox 28"/>
           <p:cNvSpPr txBox="1"/>
           <p:nvPr/>
         </p:nvSpPr>
@@ -9637,7 +9295,7 @@
       </p:sp>
       <p:sp>
         <p:nvSpPr>
-          <p:cNvPr id="33" name="TextBox 32"/>
+          <p:cNvPr id="30" name="TextBox 29"/>
           <p:cNvSpPr txBox="1"/>
           <p:nvPr/>
         </p:nvSpPr>
@@ -9683,7 +9341,7 @@
       </p:sp>
       <p:sp>
         <p:nvSpPr>
-          <p:cNvPr id="34" name="TextBox 33"/>
+          <p:cNvPr id="31" name="TextBox 30"/>
           <p:cNvSpPr txBox="1"/>
           <p:nvPr/>
         </p:nvSpPr>
@@ -9755,7 +9413,7 @@
       <p:grpSpPr/>
       <p:sp>
         <p:nvSpPr>
-          <p:cNvPr id="12" name="Rounded Rectangle 11"/>
+          <p:cNvPr id="11" name="Rounded Rectangle 10"/>
           <p:cNvSpPr/>
           <p:nvPr/>
         </p:nvSpPr>
@@ -9813,19 +9471,7 @@
       </p:sp>
       <p:sp>
         <p:nvSpPr>
-          <p:cNvPr id="3" name="Picture Placeholder 2"/>
-          <p:cNvSpPr>
-            <a:spLocks noGrp="1"/>
-          </p:cNvSpPr>
-          <p:nvPr>
-            <p:ph type="pic" idx="11"/>
-          </p:nvPr>
-        </p:nvSpPr>
-        <p:spPr/>
-      </p:sp>
-      <p:sp>
-        <p:nvSpPr>
-          <p:cNvPr id="4" name="TextBox 3"/>
+          <p:cNvPr id="3" name="TextBox 2"/>
           <p:cNvSpPr txBox="1"/>
           <p:nvPr/>
         </p:nvSpPr>
@@ -9871,7 +9517,7 @@
       </p:sp>
       <p:sp>
         <p:nvSpPr>
-          <p:cNvPr id="5" name="TextBox 4"/>
+          <p:cNvPr id="4" name="TextBox 3"/>
           <p:cNvSpPr txBox="1"/>
           <p:nvPr/>
         </p:nvSpPr>
@@ -9917,7 +9563,7 @@
       </p:sp>
       <p:sp>
         <p:nvSpPr>
-          <p:cNvPr id="6" name="TextBox 5"/>
+          <p:cNvPr id="5" name="TextBox 4"/>
           <p:cNvSpPr txBox="1"/>
           <p:nvPr/>
         </p:nvSpPr>
@@ -9963,7 +9609,7 @@
       </p:sp>
       <p:sp>
         <p:nvSpPr>
-          <p:cNvPr id="7" name="Rounded Rectangle 6"/>
+          <p:cNvPr id="6" name="Rounded Rectangle 5"/>
           <p:cNvSpPr/>
           <p:nvPr/>
         </p:nvSpPr>
@@ -10007,7 +9653,7 @@
       </p:sp>
       <p:sp>
         <p:nvSpPr>
-          <p:cNvPr id="8" name="TextBox 7"/>
+          <p:cNvPr id="7" name="TextBox 6"/>
           <p:cNvSpPr txBox="1"/>
           <p:nvPr/>
         </p:nvSpPr>
@@ -10053,7 +9699,7 @@
       </p:sp>
       <p:sp>
         <p:nvSpPr>
-          <p:cNvPr id="9" name="Rounded Rectangle 8"/>
+          <p:cNvPr id="8" name="Rounded Rectangle 7"/>
           <p:cNvSpPr/>
           <p:nvPr/>
         </p:nvSpPr>
@@ -10097,7 +9743,7 @@
       </p:sp>
       <p:sp>
         <p:nvSpPr>
-          <p:cNvPr id="10" name="TextBox 9"/>
+          <p:cNvPr id="9" name="TextBox 8"/>
           <p:cNvSpPr txBox="1"/>
           <p:nvPr/>
         </p:nvSpPr>
@@ -10143,7 +9789,7 @@
       </p:sp>
       <p:sp>
         <p:nvSpPr>
-          <p:cNvPr id="11" name="TextBox 10"/>
+          <p:cNvPr id="10" name="TextBox 9"/>
           <p:cNvSpPr txBox="1"/>
           <p:nvPr/>
         </p:nvSpPr>
@@ -10189,14 +9835,14 @@
       </p:sp>
       <p:sp>
         <p:nvSpPr>
-          <p:cNvPr id="13" name="TextBox 12"/>
-          <p:cNvSpPr txBox="1"/>
-          <p:nvPr/>
-        </p:nvSpPr>
-        <p:spPr>
-          <a:xfrm>
-            <a:off x="2066925" y="1874519"/>
-            <a:ext cx="1554480" cy="274320"/>
+          <p:cNvPr id="12" name="TextBox 11"/>
+          <p:cNvSpPr txBox="1"/>
+          <p:nvPr/>
+        </p:nvSpPr>
+        <p:spPr>
+          <a:xfrm>
+            <a:off x="566928" y="1874519"/>
+            <a:ext cx="6428994" cy="274320"/>
           </a:xfrm>
           <a:prstGeom prst="rect">
             <a:avLst/>
@@ -10228,106 +9874,14 @@
                 <a:latin typeface="游明朝"/>
                 <a:ea typeface="游明朝"/>
               </a:rPr>
-              <a:t>Before</a:t>
-            </a:r>
-          </a:p>
-        </p:txBody>
-      </p:sp>
-      <p:sp>
-        <p:nvSpPr>
-          <p:cNvPr id="14" name="TextBox 13"/>
-          <p:cNvSpPr txBox="1"/>
-          <p:nvPr/>
-        </p:nvSpPr>
-        <p:spPr>
-          <a:xfrm>
-            <a:off x="3941445" y="1874519"/>
-            <a:ext cx="1554480" cy="274320"/>
-          </a:xfrm>
-          <a:prstGeom prst="rect">
-            <a:avLst/>
-          </a:prstGeom>
-          <a:noFill/>
-        </p:spPr>
-        <p:txBody>
-          <a:bodyPr wrap="square" anchor="t" lIns="0" rIns="0" tIns="0" bIns="0">
-            <a:spAutoFit/>
-          </a:bodyPr>
-          <a:lstStyle/>
-          <a:p>
-            <a:pPr algn="ctr">
-              <a:lnSpc>
-                <a:spcPct val="112000"/>
-              </a:lnSpc>
-              <a:spcBef>
-                <a:spcPts val="0"/>
-              </a:spcBef>
-              <a:spcAft>
-                <a:spcPts val="200"/>
-              </a:spcAft>
-            </a:pPr>
-            <a:r>
-              <a:rPr sz="1200" b="1">
-                <a:solidFill>
-                  <a:srgbClr val="8C7339"/>
-                </a:solidFill>
-                <a:latin typeface="游明朝"/>
-                <a:ea typeface="游明朝"/>
-              </a:rPr>
-              <a:t>After</a:t>
-            </a:r>
-          </a:p>
-        </p:txBody>
-      </p:sp>
-      <p:sp>
-        <p:nvSpPr>
-          <p:cNvPr id="15" name="TextBox 14"/>
-          <p:cNvSpPr txBox="1"/>
-          <p:nvPr/>
-        </p:nvSpPr>
-        <p:spPr>
-          <a:xfrm>
-            <a:off x="2066925" y="1874519"/>
-            <a:ext cx="3429000" cy="274320"/>
-          </a:xfrm>
-          <a:prstGeom prst="rect">
-            <a:avLst/>
-          </a:prstGeom>
-          <a:noFill/>
-        </p:spPr>
-        <p:txBody>
-          <a:bodyPr wrap="square" anchor="t" lIns="0" rIns="0" tIns="0" bIns="0">
-            <a:spAutoFit/>
-          </a:bodyPr>
-          <a:lstStyle/>
-          <a:p>
-            <a:pPr algn="ctr">
-              <a:lnSpc>
-                <a:spcPct val="112000"/>
-              </a:lnSpc>
-              <a:spcBef>
-                <a:spcPts val="0"/>
-              </a:spcBef>
-              <a:spcAft>
-                <a:spcPts val="200"/>
-              </a:spcAft>
-            </a:pPr>
-            <a:r>
-              <a:rPr sz="1200" b="1">
-                <a:solidFill>
-                  <a:srgbClr val="B0934E"/>
-                </a:solidFill>
-                <a:latin typeface="游明朝"/>
-                <a:ea typeface="游明朝"/>
-              </a:rPr>
-              <a:t>→</a:t>
-            </a:r>
-          </a:p>
-        </p:txBody>
-      </p:sp>
-      <p:sp>
-        <p:nvSpPr>
-          <p:cNvPr id="16" name="TextBox 15"/>
+              <a:t>Before　→　After</a:t>
+            </a:r>
+          </a:p>
+        </p:txBody>
+      </p:sp>
+      <p:sp>
+        <p:nvSpPr>
+          <p:cNvPr id="13" name="TextBox 12"/>
           <p:cNvSpPr txBox="1"/>
           <p:nvPr/>
         </p:nvSpPr>
@@ -10366,14 +9920,14 @@
                 <a:latin typeface="游ゴシック"/>
                 <a:ea typeface="游ゴシック"/>
               </a:rPr>
-              <a:t>▲ Before・After それぞれの枠をクリックして写真を挿入（自動で枠いっぱいに配置されます）</a:t>
-            </a:r>
-          </a:p>
-        </p:txBody>
-      </p:sp>
-      <p:sp>
-        <p:nvSpPr>
-          <p:cNvPr id="17" name="Rounded Rectangle 16"/>
+              <a:t>▲ 枠をクリックして Before/After を1枚にした画像を挿入（自動で枠いっぱいに配置）</a:t>
+            </a:r>
+          </a:p>
+        </p:txBody>
+      </p:sp>
+      <p:sp>
+        <p:nvSpPr>
+          <p:cNvPr id="14" name="Rounded Rectangle 13"/>
           <p:cNvSpPr/>
           <p:nvPr/>
         </p:nvSpPr>
@@ -10417,7 +9971,7 @@
       </p:sp>
       <p:sp>
         <p:nvSpPr>
-          <p:cNvPr id="18" name="TextBox 17"/>
+          <p:cNvPr id="15" name="TextBox 14"/>
           <p:cNvSpPr txBox="1"/>
           <p:nvPr/>
         </p:nvSpPr>
@@ -10463,7 +10017,7 @@
       </p:sp>
       <p:sp>
         <p:nvSpPr>
-          <p:cNvPr id="19" name="TextBox 18"/>
+          <p:cNvPr id="16" name="TextBox 15"/>
           <p:cNvSpPr txBox="1"/>
           <p:nvPr/>
         </p:nvSpPr>
@@ -10509,7 +10063,7 @@
       </p:sp>
       <p:graphicFrame>
         <p:nvGraphicFramePr>
-          <p:cNvPr id="20" name="Table 19"/>
+          <p:cNvPr id="17" name="Table 16"/>
           <p:cNvGraphicFramePr>
             <a:graphicFrameLocks noGrp="1"/>
           </p:cNvGraphicFramePr>
@@ -10679,7 +10233,7 @@
       </p:graphicFrame>
       <p:sp>
         <p:nvSpPr>
-          <p:cNvPr id="21" name="Rounded Rectangle 20"/>
+          <p:cNvPr id="18" name="Rounded Rectangle 17"/>
           <p:cNvSpPr/>
           <p:nvPr/>
         </p:nvSpPr>
@@ -10725,7 +10279,7 @@
       </p:sp>
       <p:sp>
         <p:nvSpPr>
-          <p:cNvPr id="22" name="Rectangle 21"/>
+          <p:cNvPr id="19" name="Rectangle 18"/>
           <p:cNvSpPr/>
           <p:nvPr/>
         </p:nvSpPr>
@@ -10769,7 +10323,7 @@
       </p:sp>
       <p:sp>
         <p:nvSpPr>
-          <p:cNvPr id="23" name="TextBox 22"/>
+          <p:cNvPr id="20" name="TextBox 19"/>
           <p:cNvSpPr txBox="1"/>
           <p:nvPr/>
         </p:nvSpPr>
@@ -10815,7 +10369,7 @@
       </p:sp>
       <p:sp>
         <p:nvSpPr>
-          <p:cNvPr id="24" name="TextBox 23"/>
+          <p:cNvPr id="21" name="TextBox 20"/>
           <p:cNvSpPr txBox="1"/>
           <p:nvPr/>
         </p:nvSpPr>
@@ -10863,7 +10417,7 @@
       </p:sp>
       <p:sp>
         <p:nvSpPr>
-          <p:cNvPr id="25" name="Rounded Rectangle 24"/>
+          <p:cNvPr id="22" name="Rounded Rectangle 21"/>
           <p:cNvSpPr/>
           <p:nvPr/>
         </p:nvSpPr>
@@ -10907,7 +10461,7 @@
       </p:sp>
       <p:sp>
         <p:nvSpPr>
-          <p:cNvPr id="26" name="TextBox 25"/>
+          <p:cNvPr id="23" name="TextBox 22"/>
           <p:cNvSpPr txBox="1"/>
           <p:nvPr/>
         </p:nvSpPr>
@@ -10953,7 +10507,7 @@
       </p:sp>
       <p:sp>
         <p:nvSpPr>
-          <p:cNvPr id="27" name="TextBox 26"/>
+          <p:cNvPr id="24" name="TextBox 23"/>
           <p:cNvSpPr txBox="1"/>
           <p:nvPr/>
         </p:nvSpPr>
@@ -10999,7 +10553,7 @@
       </p:sp>
       <p:sp>
         <p:nvSpPr>
-          <p:cNvPr id="28" name="TextBox 27"/>
+          <p:cNvPr id="25" name="TextBox 24"/>
           <p:cNvSpPr txBox="1"/>
           <p:nvPr/>
         </p:nvSpPr>
@@ -11055,7 +10609,7 @@
       </p:sp>
       <p:sp>
         <p:nvSpPr>
-          <p:cNvPr id="29" name="TextBox 28"/>
+          <p:cNvPr id="26" name="TextBox 25"/>
           <p:cNvSpPr txBox="1"/>
           <p:nvPr/>
         </p:nvSpPr>
@@ -11101,7 +10655,7 @@
       </p:sp>
       <p:sp>
         <p:nvSpPr>
-          <p:cNvPr id="30" name="Rounded Rectangle 29"/>
+          <p:cNvPr id="27" name="Rounded Rectangle 26"/>
           <p:cNvSpPr/>
           <p:nvPr/>
         </p:nvSpPr>
@@ -11147,7 +10701,7 @@
       </p:sp>
       <p:sp>
         <p:nvSpPr>
-          <p:cNvPr id="31" name="TextBox 30"/>
+          <p:cNvPr id="28" name="TextBox 27"/>
           <p:cNvSpPr txBox="1"/>
           <p:nvPr/>
         </p:nvSpPr>
@@ -11193,7 +10747,7 @@
       </p:sp>
       <p:sp>
         <p:nvSpPr>
-          <p:cNvPr id="32" name="TextBox 31"/>
+          <p:cNvPr id="29" name="TextBox 28"/>
           <p:cNvSpPr txBox="1"/>
           <p:nvPr/>
         </p:nvSpPr>
@@ -11239,7 +10793,7 @@
       </p:sp>
       <p:sp>
         <p:nvSpPr>
-          <p:cNvPr id="33" name="TextBox 32"/>
+          <p:cNvPr id="30" name="TextBox 29"/>
           <p:cNvSpPr txBox="1"/>
           <p:nvPr/>
         </p:nvSpPr>
@@ -11285,7 +10839,7 @@
       </p:sp>
       <p:sp>
         <p:nvSpPr>
-          <p:cNvPr id="34" name="TextBox 33"/>
+          <p:cNvPr id="31" name="TextBox 30"/>
           <p:cNvSpPr txBox="1"/>
           <p:nvPr/>
         </p:nvSpPr>
@@ -12243,7 +11797,7 @@
       <p:grpSpPr/>
       <p:sp>
         <p:nvSpPr>
-          <p:cNvPr id="12" name="Rounded Rectangle 11"/>
+          <p:cNvPr id="11" name="Rounded Rectangle 10"/>
           <p:cNvSpPr/>
           <p:nvPr/>
         </p:nvSpPr>
@@ -12301,19 +11855,7 @@
       </p:sp>
       <p:sp>
         <p:nvSpPr>
-          <p:cNvPr id="3" name="Picture Placeholder 2"/>
-          <p:cNvSpPr>
-            <a:spLocks noGrp="1"/>
-          </p:cNvSpPr>
-          <p:nvPr>
-            <p:ph type="pic" idx="11"/>
-          </p:nvPr>
-        </p:nvSpPr>
-        <p:spPr/>
-      </p:sp>
-      <p:sp>
-        <p:nvSpPr>
-          <p:cNvPr id="4" name="TextBox 3"/>
+          <p:cNvPr id="3" name="TextBox 2"/>
           <p:cNvSpPr txBox="1"/>
           <p:nvPr/>
         </p:nvSpPr>
@@ -12359,7 +11901,7 @@
       </p:sp>
       <p:sp>
         <p:nvSpPr>
-          <p:cNvPr id="5" name="TextBox 4"/>
+          <p:cNvPr id="4" name="TextBox 3"/>
           <p:cNvSpPr txBox="1"/>
           <p:nvPr/>
         </p:nvSpPr>
@@ -12405,7 +11947,7 @@
       </p:sp>
       <p:sp>
         <p:nvSpPr>
-          <p:cNvPr id="6" name="TextBox 5"/>
+          <p:cNvPr id="5" name="TextBox 4"/>
           <p:cNvSpPr txBox="1"/>
           <p:nvPr/>
         </p:nvSpPr>
@@ -12451,7 +11993,7 @@
       </p:sp>
       <p:sp>
         <p:nvSpPr>
-          <p:cNvPr id="7" name="Rounded Rectangle 6"/>
+          <p:cNvPr id="6" name="Rounded Rectangle 5"/>
           <p:cNvSpPr/>
           <p:nvPr/>
         </p:nvSpPr>
@@ -12495,7 +12037,7 @@
       </p:sp>
       <p:sp>
         <p:nvSpPr>
-          <p:cNvPr id="8" name="TextBox 7"/>
+          <p:cNvPr id="7" name="TextBox 6"/>
           <p:cNvSpPr txBox="1"/>
           <p:nvPr/>
         </p:nvSpPr>
@@ -12541,7 +12083,7 @@
       </p:sp>
       <p:sp>
         <p:nvSpPr>
-          <p:cNvPr id="9" name="Rounded Rectangle 8"/>
+          <p:cNvPr id="8" name="Rounded Rectangle 7"/>
           <p:cNvSpPr/>
           <p:nvPr/>
         </p:nvSpPr>
@@ -12585,7 +12127,7 @@
       </p:sp>
       <p:sp>
         <p:nvSpPr>
-          <p:cNvPr id="10" name="TextBox 9"/>
+          <p:cNvPr id="9" name="TextBox 8"/>
           <p:cNvSpPr txBox="1"/>
           <p:nvPr/>
         </p:nvSpPr>
@@ -12631,7 +12173,7 @@
       </p:sp>
       <p:sp>
         <p:nvSpPr>
-          <p:cNvPr id="11" name="TextBox 10"/>
+          <p:cNvPr id="10" name="TextBox 9"/>
           <p:cNvSpPr txBox="1"/>
           <p:nvPr/>
         </p:nvSpPr>
@@ -12677,14 +12219,14 @@
       </p:sp>
       <p:sp>
         <p:nvSpPr>
-          <p:cNvPr id="13" name="TextBox 12"/>
-          <p:cNvSpPr txBox="1"/>
-          <p:nvPr/>
-        </p:nvSpPr>
-        <p:spPr>
-          <a:xfrm>
-            <a:off x="2066925" y="1874519"/>
-            <a:ext cx="1554480" cy="274320"/>
+          <p:cNvPr id="12" name="TextBox 11"/>
+          <p:cNvSpPr txBox="1"/>
+          <p:nvPr/>
+        </p:nvSpPr>
+        <p:spPr>
+          <a:xfrm>
+            <a:off x="566928" y="1874519"/>
+            <a:ext cx="6428994" cy="274320"/>
           </a:xfrm>
           <a:prstGeom prst="rect">
             <a:avLst/>
@@ -12716,106 +12258,14 @@
                 <a:latin typeface="游明朝"/>
                 <a:ea typeface="游明朝"/>
               </a:rPr>
-              <a:t>Before</a:t>
-            </a:r>
-          </a:p>
-        </p:txBody>
-      </p:sp>
-      <p:sp>
-        <p:nvSpPr>
-          <p:cNvPr id="14" name="TextBox 13"/>
-          <p:cNvSpPr txBox="1"/>
-          <p:nvPr/>
-        </p:nvSpPr>
-        <p:spPr>
-          <a:xfrm>
-            <a:off x="3941445" y="1874519"/>
-            <a:ext cx="1554480" cy="274320"/>
-          </a:xfrm>
-          <a:prstGeom prst="rect">
-            <a:avLst/>
-          </a:prstGeom>
-          <a:noFill/>
-        </p:spPr>
-        <p:txBody>
-          <a:bodyPr wrap="square" anchor="t" lIns="0" rIns="0" tIns="0" bIns="0">
-            <a:spAutoFit/>
-          </a:bodyPr>
-          <a:lstStyle/>
-          <a:p>
-            <a:pPr algn="ctr">
-              <a:lnSpc>
-                <a:spcPct val="112000"/>
-              </a:lnSpc>
-              <a:spcBef>
-                <a:spcPts val="0"/>
-              </a:spcBef>
-              <a:spcAft>
-                <a:spcPts val="200"/>
-              </a:spcAft>
-            </a:pPr>
-            <a:r>
-              <a:rPr sz="1200" b="1">
-                <a:solidFill>
-                  <a:srgbClr val="8C7339"/>
-                </a:solidFill>
-                <a:latin typeface="游明朝"/>
-                <a:ea typeface="游明朝"/>
-              </a:rPr>
-              <a:t>After</a:t>
-            </a:r>
-          </a:p>
-        </p:txBody>
-      </p:sp>
-      <p:sp>
-        <p:nvSpPr>
-          <p:cNvPr id="15" name="TextBox 14"/>
-          <p:cNvSpPr txBox="1"/>
-          <p:nvPr/>
-        </p:nvSpPr>
-        <p:spPr>
-          <a:xfrm>
-            <a:off x="2066925" y="1874519"/>
-            <a:ext cx="3429000" cy="274320"/>
-          </a:xfrm>
-          <a:prstGeom prst="rect">
-            <a:avLst/>
-          </a:prstGeom>
-          <a:noFill/>
-        </p:spPr>
-        <p:txBody>
-          <a:bodyPr wrap="square" anchor="t" lIns="0" rIns="0" tIns="0" bIns="0">
-            <a:spAutoFit/>
-          </a:bodyPr>
-          <a:lstStyle/>
-          <a:p>
-            <a:pPr algn="ctr">
-              <a:lnSpc>
-                <a:spcPct val="112000"/>
-              </a:lnSpc>
-              <a:spcBef>
-                <a:spcPts val="0"/>
-              </a:spcBef>
-              <a:spcAft>
-                <a:spcPts val="200"/>
-              </a:spcAft>
-            </a:pPr>
-            <a:r>
-              <a:rPr sz="1200" b="1">
-                <a:solidFill>
-                  <a:srgbClr val="B0934E"/>
-                </a:solidFill>
-                <a:latin typeface="游明朝"/>
-                <a:ea typeface="游明朝"/>
-              </a:rPr>
-              <a:t>→</a:t>
-            </a:r>
-          </a:p>
-        </p:txBody>
-      </p:sp>
-      <p:sp>
-        <p:nvSpPr>
-          <p:cNvPr id="16" name="TextBox 15"/>
+              <a:t>Before　→　After</a:t>
+            </a:r>
+          </a:p>
+        </p:txBody>
+      </p:sp>
+      <p:sp>
+        <p:nvSpPr>
+          <p:cNvPr id="13" name="TextBox 12"/>
           <p:cNvSpPr txBox="1"/>
           <p:nvPr/>
         </p:nvSpPr>
@@ -12854,14 +12304,14 @@
                 <a:latin typeface="游ゴシック"/>
                 <a:ea typeface="游ゴシック"/>
               </a:rPr>
-              <a:t>▲ Before・After それぞれの枠をクリックして写真を挿入（自動で枠いっぱいに配置されます）</a:t>
-            </a:r>
-          </a:p>
-        </p:txBody>
-      </p:sp>
-      <p:sp>
-        <p:nvSpPr>
-          <p:cNvPr id="17" name="Rounded Rectangle 16"/>
+              <a:t>▲ 枠をクリックして Before/After を1枚にした画像を挿入（自動で枠いっぱいに配置）</a:t>
+            </a:r>
+          </a:p>
+        </p:txBody>
+      </p:sp>
+      <p:sp>
+        <p:nvSpPr>
+          <p:cNvPr id="14" name="Rounded Rectangle 13"/>
           <p:cNvSpPr/>
           <p:nvPr/>
         </p:nvSpPr>
@@ -12905,7 +12355,7 @@
       </p:sp>
       <p:sp>
         <p:nvSpPr>
-          <p:cNvPr id="18" name="TextBox 17"/>
+          <p:cNvPr id="15" name="TextBox 14"/>
           <p:cNvSpPr txBox="1"/>
           <p:nvPr/>
         </p:nvSpPr>
@@ -12951,7 +12401,7 @@
       </p:sp>
       <p:sp>
         <p:nvSpPr>
-          <p:cNvPr id="19" name="TextBox 18"/>
+          <p:cNvPr id="16" name="TextBox 15"/>
           <p:cNvSpPr txBox="1"/>
           <p:nvPr/>
         </p:nvSpPr>
@@ -12997,7 +12447,7 @@
       </p:sp>
       <p:graphicFrame>
         <p:nvGraphicFramePr>
-          <p:cNvPr id="20" name="Table 19"/>
+          <p:cNvPr id="17" name="Table 16"/>
           <p:cNvGraphicFramePr>
             <a:graphicFrameLocks noGrp="1"/>
           </p:cNvGraphicFramePr>
@@ -13167,7 +12617,7 @@
       </p:graphicFrame>
       <p:sp>
         <p:nvSpPr>
-          <p:cNvPr id="21" name="Rounded Rectangle 20"/>
+          <p:cNvPr id="18" name="Rounded Rectangle 17"/>
           <p:cNvSpPr/>
           <p:nvPr/>
         </p:nvSpPr>
@@ -13213,7 +12663,7 @@
       </p:sp>
       <p:sp>
         <p:nvSpPr>
-          <p:cNvPr id="22" name="Rectangle 21"/>
+          <p:cNvPr id="19" name="Rectangle 18"/>
           <p:cNvSpPr/>
           <p:nvPr/>
         </p:nvSpPr>
@@ -13257,7 +12707,7 @@
       </p:sp>
       <p:sp>
         <p:nvSpPr>
-          <p:cNvPr id="23" name="TextBox 22"/>
+          <p:cNvPr id="20" name="TextBox 19"/>
           <p:cNvSpPr txBox="1"/>
           <p:nvPr/>
         </p:nvSpPr>
@@ -13303,7 +12753,7 @@
       </p:sp>
       <p:sp>
         <p:nvSpPr>
-          <p:cNvPr id="24" name="TextBox 23"/>
+          <p:cNvPr id="21" name="TextBox 20"/>
           <p:cNvSpPr txBox="1"/>
           <p:nvPr/>
         </p:nvSpPr>
@@ -13351,7 +12801,7 @@
       </p:sp>
       <p:sp>
         <p:nvSpPr>
-          <p:cNvPr id="25" name="Rounded Rectangle 24"/>
+          <p:cNvPr id="22" name="Rounded Rectangle 21"/>
           <p:cNvSpPr/>
           <p:nvPr/>
         </p:nvSpPr>
@@ -13395,7 +12845,7 @@
       </p:sp>
       <p:sp>
         <p:nvSpPr>
-          <p:cNvPr id="26" name="TextBox 25"/>
+          <p:cNvPr id="23" name="TextBox 22"/>
           <p:cNvSpPr txBox="1"/>
           <p:nvPr/>
         </p:nvSpPr>
@@ -13441,7 +12891,7 @@
       </p:sp>
       <p:sp>
         <p:nvSpPr>
-          <p:cNvPr id="27" name="TextBox 26"/>
+          <p:cNvPr id="24" name="TextBox 23"/>
           <p:cNvSpPr txBox="1"/>
           <p:nvPr/>
         </p:nvSpPr>
@@ -13487,7 +12937,7 @@
       </p:sp>
       <p:sp>
         <p:nvSpPr>
-          <p:cNvPr id="28" name="TextBox 27"/>
+          <p:cNvPr id="25" name="TextBox 24"/>
           <p:cNvSpPr txBox="1"/>
           <p:nvPr/>
         </p:nvSpPr>
@@ -13543,7 +12993,7 @@
       </p:sp>
       <p:sp>
         <p:nvSpPr>
-          <p:cNvPr id="29" name="TextBox 28"/>
+          <p:cNvPr id="26" name="TextBox 25"/>
           <p:cNvSpPr txBox="1"/>
           <p:nvPr/>
         </p:nvSpPr>
@@ -13589,7 +13039,7 @@
       </p:sp>
       <p:sp>
         <p:nvSpPr>
-          <p:cNvPr id="30" name="Rounded Rectangle 29"/>
+          <p:cNvPr id="27" name="Rounded Rectangle 26"/>
           <p:cNvSpPr/>
           <p:nvPr/>
         </p:nvSpPr>
@@ -13635,7 +13085,7 @@
       </p:sp>
       <p:sp>
         <p:nvSpPr>
-          <p:cNvPr id="31" name="TextBox 30"/>
+          <p:cNvPr id="28" name="TextBox 27"/>
           <p:cNvSpPr txBox="1"/>
           <p:nvPr/>
         </p:nvSpPr>
@@ -13681,7 +13131,7 @@
       </p:sp>
       <p:sp>
         <p:nvSpPr>
-          <p:cNvPr id="32" name="TextBox 31"/>
+          <p:cNvPr id="29" name="TextBox 28"/>
           <p:cNvSpPr txBox="1"/>
           <p:nvPr/>
         </p:nvSpPr>
@@ -13727,7 +13177,7 @@
       </p:sp>
       <p:sp>
         <p:nvSpPr>
-          <p:cNvPr id="33" name="TextBox 32"/>
+          <p:cNvPr id="30" name="TextBox 29"/>
           <p:cNvSpPr txBox="1"/>
           <p:nvPr/>
         </p:nvSpPr>
@@ -13773,7 +13223,7 @@
       </p:sp>
       <p:sp>
         <p:nvSpPr>
-          <p:cNvPr id="34" name="TextBox 33"/>
+          <p:cNvPr id="31" name="TextBox 30"/>
           <p:cNvSpPr txBox="1"/>
           <p:nvPr/>
         </p:nvSpPr>
@@ -13845,7 +13295,7 @@
       <p:grpSpPr/>
       <p:sp>
         <p:nvSpPr>
-          <p:cNvPr id="12" name="Rounded Rectangle 11"/>
+          <p:cNvPr id="11" name="Rounded Rectangle 10"/>
           <p:cNvSpPr/>
           <p:nvPr/>
         </p:nvSpPr>
@@ -13903,19 +13353,7 @@
       </p:sp>
       <p:sp>
         <p:nvSpPr>
-          <p:cNvPr id="3" name="Picture Placeholder 2"/>
-          <p:cNvSpPr>
-            <a:spLocks noGrp="1"/>
-          </p:cNvSpPr>
-          <p:nvPr>
-            <p:ph type="pic" idx="11"/>
-          </p:nvPr>
-        </p:nvSpPr>
-        <p:spPr/>
-      </p:sp>
-      <p:sp>
-        <p:nvSpPr>
-          <p:cNvPr id="4" name="TextBox 3"/>
+          <p:cNvPr id="3" name="TextBox 2"/>
           <p:cNvSpPr txBox="1"/>
           <p:nvPr/>
         </p:nvSpPr>
@@ -13961,7 +13399,7 @@
       </p:sp>
       <p:sp>
         <p:nvSpPr>
-          <p:cNvPr id="5" name="TextBox 4"/>
+          <p:cNvPr id="4" name="TextBox 3"/>
           <p:cNvSpPr txBox="1"/>
           <p:nvPr/>
         </p:nvSpPr>
@@ -14007,7 +13445,7 @@
       </p:sp>
       <p:sp>
         <p:nvSpPr>
-          <p:cNvPr id="6" name="TextBox 5"/>
+          <p:cNvPr id="5" name="TextBox 4"/>
           <p:cNvSpPr txBox="1"/>
           <p:nvPr/>
         </p:nvSpPr>
@@ -14053,7 +13491,7 @@
       </p:sp>
       <p:sp>
         <p:nvSpPr>
-          <p:cNvPr id="7" name="Rounded Rectangle 6"/>
+          <p:cNvPr id="6" name="Rounded Rectangle 5"/>
           <p:cNvSpPr/>
           <p:nvPr/>
         </p:nvSpPr>
@@ -14097,7 +13535,7 @@
       </p:sp>
       <p:sp>
         <p:nvSpPr>
-          <p:cNvPr id="8" name="TextBox 7"/>
+          <p:cNvPr id="7" name="TextBox 6"/>
           <p:cNvSpPr txBox="1"/>
           <p:nvPr/>
         </p:nvSpPr>
@@ -14143,7 +13581,7 @@
       </p:sp>
       <p:sp>
         <p:nvSpPr>
-          <p:cNvPr id="9" name="Rounded Rectangle 8"/>
+          <p:cNvPr id="8" name="Rounded Rectangle 7"/>
           <p:cNvSpPr/>
           <p:nvPr/>
         </p:nvSpPr>
@@ -14187,7 +13625,7 @@
       </p:sp>
       <p:sp>
         <p:nvSpPr>
-          <p:cNvPr id="10" name="TextBox 9"/>
+          <p:cNvPr id="9" name="TextBox 8"/>
           <p:cNvSpPr txBox="1"/>
           <p:nvPr/>
         </p:nvSpPr>
@@ -14233,7 +13671,7 @@
       </p:sp>
       <p:sp>
         <p:nvSpPr>
-          <p:cNvPr id="11" name="TextBox 10"/>
+          <p:cNvPr id="10" name="TextBox 9"/>
           <p:cNvSpPr txBox="1"/>
           <p:nvPr/>
         </p:nvSpPr>
@@ -14279,14 +13717,14 @@
       </p:sp>
       <p:sp>
         <p:nvSpPr>
-          <p:cNvPr id="13" name="TextBox 12"/>
-          <p:cNvSpPr txBox="1"/>
-          <p:nvPr/>
-        </p:nvSpPr>
-        <p:spPr>
-          <a:xfrm>
-            <a:off x="2066925" y="1874519"/>
-            <a:ext cx="1554480" cy="274320"/>
+          <p:cNvPr id="12" name="TextBox 11"/>
+          <p:cNvSpPr txBox="1"/>
+          <p:nvPr/>
+        </p:nvSpPr>
+        <p:spPr>
+          <a:xfrm>
+            <a:off x="566928" y="1874519"/>
+            <a:ext cx="6428994" cy="274320"/>
           </a:xfrm>
           <a:prstGeom prst="rect">
             <a:avLst/>
@@ -14318,106 +13756,14 @@
                 <a:latin typeface="游明朝"/>
                 <a:ea typeface="游明朝"/>
               </a:rPr>
-              <a:t>Before</a:t>
-            </a:r>
-          </a:p>
-        </p:txBody>
-      </p:sp>
-      <p:sp>
-        <p:nvSpPr>
-          <p:cNvPr id="14" name="TextBox 13"/>
-          <p:cNvSpPr txBox="1"/>
-          <p:nvPr/>
-        </p:nvSpPr>
-        <p:spPr>
-          <a:xfrm>
-            <a:off x="3941445" y="1874519"/>
-            <a:ext cx="1554480" cy="274320"/>
-          </a:xfrm>
-          <a:prstGeom prst="rect">
-            <a:avLst/>
-          </a:prstGeom>
-          <a:noFill/>
-        </p:spPr>
-        <p:txBody>
-          <a:bodyPr wrap="square" anchor="t" lIns="0" rIns="0" tIns="0" bIns="0">
-            <a:spAutoFit/>
-          </a:bodyPr>
-          <a:lstStyle/>
-          <a:p>
-            <a:pPr algn="ctr">
-              <a:lnSpc>
-                <a:spcPct val="112000"/>
-              </a:lnSpc>
-              <a:spcBef>
-                <a:spcPts val="0"/>
-              </a:spcBef>
-              <a:spcAft>
-                <a:spcPts val="200"/>
-              </a:spcAft>
-            </a:pPr>
-            <a:r>
-              <a:rPr sz="1200" b="1">
-                <a:solidFill>
-                  <a:srgbClr val="8C7339"/>
-                </a:solidFill>
-                <a:latin typeface="游明朝"/>
-                <a:ea typeface="游明朝"/>
-              </a:rPr>
-              <a:t>After</a:t>
-            </a:r>
-          </a:p>
-        </p:txBody>
-      </p:sp>
-      <p:sp>
-        <p:nvSpPr>
-          <p:cNvPr id="15" name="TextBox 14"/>
-          <p:cNvSpPr txBox="1"/>
-          <p:nvPr/>
-        </p:nvSpPr>
-        <p:spPr>
-          <a:xfrm>
-            <a:off x="2066925" y="1874519"/>
-            <a:ext cx="3429000" cy="274320"/>
-          </a:xfrm>
-          <a:prstGeom prst="rect">
-            <a:avLst/>
-          </a:prstGeom>
-          <a:noFill/>
-        </p:spPr>
-        <p:txBody>
-          <a:bodyPr wrap="square" anchor="t" lIns="0" rIns="0" tIns="0" bIns="0">
-            <a:spAutoFit/>
-          </a:bodyPr>
-          <a:lstStyle/>
-          <a:p>
-            <a:pPr algn="ctr">
-              <a:lnSpc>
-                <a:spcPct val="112000"/>
-              </a:lnSpc>
-              <a:spcBef>
-                <a:spcPts val="0"/>
-              </a:spcBef>
-              <a:spcAft>
-                <a:spcPts val="200"/>
-              </a:spcAft>
-            </a:pPr>
-            <a:r>
-              <a:rPr sz="1200" b="1">
-                <a:solidFill>
-                  <a:srgbClr val="B0934E"/>
-                </a:solidFill>
-                <a:latin typeface="游明朝"/>
-                <a:ea typeface="游明朝"/>
-              </a:rPr>
-              <a:t>→</a:t>
-            </a:r>
-          </a:p>
-        </p:txBody>
-      </p:sp>
-      <p:sp>
-        <p:nvSpPr>
-          <p:cNvPr id="16" name="TextBox 15"/>
+              <a:t>Before　→　After</a:t>
+            </a:r>
+          </a:p>
+        </p:txBody>
+      </p:sp>
+      <p:sp>
+        <p:nvSpPr>
+          <p:cNvPr id="13" name="TextBox 12"/>
           <p:cNvSpPr txBox="1"/>
           <p:nvPr/>
         </p:nvSpPr>
@@ -14456,14 +13802,14 @@
                 <a:latin typeface="游ゴシック"/>
                 <a:ea typeface="游ゴシック"/>
               </a:rPr>
-              <a:t>▲ Before・After それぞれの枠をクリックして写真を挿入（自動で枠いっぱいに配置されます）</a:t>
-            </a:r>
-          </a:p>
-        </p:txBody>
-      </p:sp>
-      <p:sp>
-        <p:nvSpPr>
-          <p:cNvPr id="17" name="Rounded Rectangle 16"/>
+              <a:t>▲ 枠をクリックして Before/After を1枚にした画像を挿入（自動で枠いっぱいに配置）</a:t>
+            </a:r>
+          </a:p>
+        </p:txBody>
+      </p:sp>
+      <p:sp>
+        <p:nvSpPr>
+          <p:cNvPr id="14" name="Rounded Rectangle 13"/>
           <p:cNvSpPr/>
           <p:nvPr/>
         </p:nvSpPr>
@@ -14507,7 +13853,7 @@
       </p:sp>
       <p:sp>
         <p:nvSpPr>
-          <p:cNvPr id="18" name="TextBox 17"/>
+          <p:cNvPr id="15" name="TextBox 14"/>
           <p:cNvSpPr txBox="1"/>
           <p:nvPr/>
         </p:nvSpPr>
@@ -14553,7 +13899,7 @@
       </p:sp>
       <p:sp>
         <p:nvSpPr>
-          <p:cNvPr id="19" name="TextBox 18"/>
+          <p:cNvPr id="16" name="TextBox 15"/>
           <p:cNvSpPr txBox="1"/>
           <p:nvPr/>
         </p:nvSpPr>
@@ -14599,7 +13945,7 @@
       </p:sp>
       <p:graphicFrame>
         <p:nvGraphicFramePr>
-          <p:cNvPr id="20" name="Table 19"/>
+          <p:cNvPr id="17" name="Table 16"/>
           <p:cNvGraphicFramePr>
             <a:graphicFrameLocks noGrp="1"/>
           </p:cNvGraphicFramePr>
@@ -14769,7 +14115,7 @@
       </p:graphicFrame>
       <p:sp>
         <p:nvSpPr>
-          <p:cNvPr id="21" name="Rounded Rectangle 20"/>
+          <p:cNvPr id="18" name="Rounded Rectangle 17"/>
           <p:cNvSpPr/>
           <p:nvPr/>
         </p:nvSpPr>
@@ -14815,7 +14161,7 @@
       </p:sp>
       <p:sp>
         <p:nvSpPr>
-          <p:cNvPr id="22" name="Rectangle 21"/>
+          <p:cNvPr id="19" name="Rectangle 18"/>
           <p:cNvSpPr/>
           <p:nvPr/>
         </p:nvSpPr>
@@ -14859,7 +14205,7 @@
       </p:sp>
       <p:sp>
         <p:nvSpPr>
-          <p:cNvPr id="23" name="TextBox 22"/>
+          <p:cNvPr id="20" name="TextBox 19"/>
           <p:cNvSpPr txBox="1"/>
           <p:nvPr/>
         </p:nvSpPr>
@@ -14905,7 +14251,7 @@
       </p:sp>
       <p:sp>
         <p:nvSpPr>
-          <p:cNvPr id="24" name="TextBox 23"/>
+          <p:cNvPr id="21" name="TextBox 20"/>
           <p:cNvSpPr txBox="1"/>
           <p:nvPr/>
         </p:nvSpPr>
@@ -14953,7 +14299,7 @@
       </p:sp>
       <p:sp>
         <p:nvSpPr>
-          <p:cNvPr id="25" name="Rounded Rectangle 24"/>
+          <p:cNvPr id="22" name="Rounded Rectangle 21"/>
           <p:cNvSpPr/>
           <p:nvPr/>
         </p:nvSpPr>
@@ -14997,7 +14343,7 @@
       </p:sp>
       <p:sp>
         <p:nvSpPr>
-          <p:cNvPr id="26" name="TextBox 25"/>
+          <p:cNvPr id="23" name="TextBox 22"/>
           <p:cNvSpPr txBox="1"/>
           <p:nvPr/>
         </p:nvSpPr>
@@ -15043,7 +14389,7 @@
       </p:sp>
       <p:sp>
         <p:nvSpPr>
-          <p:cNvPr id="27" name="TextBox 26"/>
+          <p:cNvPr id="24" name="TextBox 23"/>
           <p:cNvSpPr txBox="1"/>
           <p:nvPr/>
         </p:nvSpPr>
@@ -15089,7 +14435,7 @@
       </p:sp>
       <p:sp>
         <p:nvSpPr>
-          <p:cNvPr id="28" name="TextBox 27"/>
+          <p:cNvPr id="25" name="TextBox 24"/>
           <p:cNvSpPr txBox="1"/>
           <p:nvPr/>
         </p:nvSpPr>
@@ -15145,7 +14491,7 @@
       </p:sp>
       <p:sp>
         <p:nvSpPr>
-          <p:cNvPr id="29" name="TextBox 28"/>
+          <p:cNvPr id="26" name="TextBox 25"/>
           <p:cNvSpPr txBox="1"/>
           <p:nvPr/>
         </p:nvSpPr>
@@ -15191,7 +14537,7 @@
       </p:sp>
       <p:sp>
         <p:nvSpPr>
-          <p:cNvPr id="30" name="Rounded Rectangle 29"/>
+          <p:cNvPr id="27" name="Rounded Rectangle 26"/>
           <p:cNvSpPr/>
           <p:nvPr/>
         </p:nvSpPr>
@@ -15237,7 +14583,7 @@
       </p:sp>
       <p:sp>
         <p:nvSpPr>
-          <p:cNvPr id="31" name="TextBox 30"/>
+          <p:cNvPr id="28" name="TextBox 27"/>
           <p:cNvSpPr txBox="1"/>
           <p:nvPr/>
         </p:nvSpPr>
@@ -15283,7 +14629,7 @@
       </p:sp>
       <p:sp>
         <p:nvSpPr>
-          <p:cNvPr id="32" name="TextBox 31"/>
+          <p:cNvPr id="29" name="TextBox 28"/>
           <p:cNvSpPr txBox="1"/>
           <p:nvPr/>
         </p:nvSpPr>
@@ -15329,7 +14675,7 @@
       </p:sp>
       <p:sp>
         <p:nvSpPr>
-          <p:cNvPr id="33" name="TextBox 32"/>
+          <p:cNvPr id="30" name="TextBox 29"/>
           <p:cNvSpPr txBox="1"/>
           <p:nvPr/>
         </p:nvSpPr>
@@ -15375,7 +14721,7 @@
       </p:sp>
       <p:sp>
         <p:nvSpPr>
-          <p:cNvPr id="34" name="TextBox 33"/>
+          <p:cNvPr id="31" name="TextBox 30"/>
           <p:cNvSpPr txBox="1"/>
           <p:nvPr/>
         </p:nvSpPr>
@@ -15447,7 +14793,7 @@
       <p:grpSpPr/>
       <p:sp>
         <p:nvSpPr>
-          <p:cNvPr id="12" name="Rounded Rectangle 11"/>
+          <p:cNvPr id="11" name="Rounded Rectangle 10"/>
           <p:cNvSpPr/>
           <p:nvPr/>
         </p:nvSpPr>
@@ -15505,19 +14851,7 @@
       </p:sp>
       <p:sp>
         <p:nvSpPr>
-          <p:cNvPr id="3" name="Picture Placeholder 2"/>
-          <p:cNvSpPr>
-            <a:spLocks noGrp="1"/>
-          </p:cNvSpPr>
-          <p:nvPr>
-            <p:ph type="pic" idx="11"/>
-          </p:nvPr>
-        </p:nvSpPr>
-        <p:spPr/>
-      </p:sp>
-      <p:sp>
-        <p:nvSpPr>
-          <p:cNvPr id="4" name="TextBox 3"/>
+          <p:cNvPr id="3" name="TextBox 2"/>
           <p:cNvSpPr txBox="1"/>
           <p:nvPr/>
         </p:nvSpPr>
@@ -15563,7 +14897,7 @@
       </p:sp>
       <p:sp>
         <p:nvSpPr>
-          <p:cNvPr id="5" name="TextBox 4"/>
+          <p:cNvPr id="4" name="TextBox 3"/>
           <p:cNvSpPr txBox="1"/>
           <p:nvPr/>
         </p:nvSpPr>
@@ -15609,7 +14943,7 @@
       </p:sp>
       <p:sp>
         <p:nvSpPr>
-          <p:cNvPr id="6" name="TextBox 5"/>
+          <p:cNvPr id="5" name="TextBox 4"/>
           <p:cNvSpPr txBox="1"/>
           <p:nvPr/>
         </p:nvSpPr>
@@ -15655,7 +14989,7 @@
       </p:sp>
       <p:sp>
         <p:nvSpPr>
-          <p:cNvPr id="7" name="Rounded Rectangle 6"/>
+          <p:cNvPr id="6" name="Rounded Rectangle 5"/>
           <p:cNvSpPr/>
           <p:nvPr/>
         </p:nvSpPr>
@@ -15699,7 +15033,7 @@
       </p:sp>
       <p:sp>
         <p:nvSpPr>
-          <p:cNvPr id="8" name="TextBox 7"/>
+          <p:cNvPr id="7" name="TextBox 6"/>
           <p:cNvSpPr txBox="1"/>
           <p:nvPr/>
         </p:nvSpPr>
@@ -15745,7 +15079,7 @@
       </p:sp>
       <p:sp>
         <p:nvSpPr>
-          <p:cNvPr id="9" name="Rounded Rectangle 8"/>
+          <p:cNvPr id="8" name="Rounded Rectangle 7"/>
           <p:cNvSpPr/>
           <p:nvPr/>
         </p:nvSpPr>
@@ -15789,7 +15123,7 @@
       </p:sp>
       <p:sp>
         <p:nvSpPr>
-          <p:cNvPr id="10" name="TextBox 9"/>
+          <p:cNvPr id="9" name="TextBox 8"/>
           <p:cNvSpPr txBox="1"/>
           <p:nvPr/>
         </p:nvSpPr>
@@ -15835,7 +15169,7 @@
       </p:sp>
       <p:sp>
         <p:nvSpPr>
-          <p:cNvPr id="11" name="TextBox 10"/>
+          <p:cNvPr id="10" name="TextBox 9"/>
           <p:cNvSpPr txBox="1"/>
           <p:nvPr/>
         </p:nvSpPr>
@@ -15881,14 +15215,14 @@
       </p:sp>
       <p:sp>
         <p:nvSpPr>
-          <p:cNvPr id="13" name="TextBox 12"/>
-          <p:cNvSpPr txBox="1"/>
-          <p:nvPr/>
-        </p:nvSpPr>
-        <p:spPr>
-          <a:xfrm>
-            <a:off x="2066925" y="1874519"/>
-            <a:ext cx="1554480" cy="274320"/>
+          <p:cNvPr id="12" name="TextBox 11"/>
+          <p:cNvSpPr txBox="1"/>
+          <p:nvPr/>
+        </p:nvSpPr>
+        <p:spPr>
+          <a:xfrm>
+            <a:off x="566928" y="1874519"/>
+            <a:ext cx="6428994" cy="274320"/>
           </a:xfrm>
           <a:prstGeom prst="rect">
             <a:avLst/>
@@ -15920,106 +15254,14 @@
                 <a:latin typeface="游明朝"/>
                 <a:ea typeface="游明朝"/>
               </a:rPr>
-              <a:t>Before</a:t>
-            </a:r>
-          </a:p>
-        </p:txBody>
-      </p:sp>
-      <p:sp>
-        <p:nvSpPr>
-          <p:cNvPr id="14" name="TextBox 13"/>
-          <p:cNvSpPr txBox="1"/>
-          <p:nvPr/>
-        </p:nvSpPr>
-        <p:spPr>
-          <a:xfrm>
-            <a:off x="3941445" y="1874519"/>
-            <a:ext cx="1554480" cy="274320"/>
-          </a:xfrm>
-          <a:prstGeom prst="rect">
-            <a:avLst/>
-          </a:prstGeom>
-          <a:noFill/>
-        </p:spPr>
-        <p:txBody>
-          <a:bodyPr wrap="square" anchor="t" lIns="0" rIns="0" tIns="0" bIns="0">
-            <a:spAutoFit/>
-          </a:bodyPr>
-          <a:lstStyle/>
-          <a:p>
-            <a:pPr algn="ctr">
-              <a:lnSpc>
-                <a:spcPct val="112000"/>
-              </a:lnSpc>
-              <a:spcBef>
-                <a:spcPts val="0"/>
-              </a:spcBef>
-              <a:spcAft>
-                <a:spcPts val="200"/>
-              </a:spcAft>
-            </a:pPr>
-            <a:r>
-              <a:rPr sz="1200" b="1">
-                <a:solidFill>
-                  <a:srgbClr val="8C7339"/>
-                </a:solidFill>
-                <a:latin typeface="游明朝"/>
-                <a:ea typeface="游明朝"/>
-              </a:rPr>
-              <a:t>After</a:t>
-            </a:r>
-          </a:p>
-        </p:txBody>
-      </p:sp>
-      <p:sp>
-        <p:nvSpPr>
-          <p:cNvPr id="15" name="TextBox 14"/>
-          <p:cNvSpPr txBox="1"/>
-          <p:nvPr/>
-        </p:nvSpPr>
-        <p:spPr>
-          <a:xfrm>
-            <a:off x="2066925" y="1874519"/>
-            <a:ext cx="3429000" cy="274320"/>
-          </a:xfrm>
-          <a:prstGeom prst="rect">
-            <a:avLst/>
-          </a:prstGeom>
-          <a:noFill/>
-        </p:spPr>
-        <p:txBody>
-          <a:bodyPr wrap="square" anchor="t" lIns="0" rIns="0" tIns="0" bIns="0">
-            <a:spAutoFit/>
-          </a:bodyPr>
-          <a:lstStyle/>
-          <a:p>
-            <a:pPr algn="ctr">
-              <a:lnSpc>
-                <a:spcPct val="112000"/>
-              </a:lnSpc>
-              <a:spcBef>
-                <a:spcPts val="0"/>
-              </a:spcBef>
-              <a:spcAft>
-                <a:spcPts val="200"/>
-              </a:spcAft>
-            </a:pPr>
-            <a:r>
-              <a:rPr sz="1200" b="1">
-                <a:solidFill>
-                  <a:srgbClr val="B0934E"/>
-                </a:solidFill>
-                <a:latin typeface="游明朝"/>
-                <a:ea typeface="游明朝"/>
-              </a:rPr>
-              <a:t>→</a:t>
-            </a:r>
-          </a:p>
-        </p:txBody>
-      </p:sp>
-      <p:sp>
-        <p:nvSpPr>
-          <p:cNvPr id="16" name="TextBox 15"/>
+              <a:t>Before　→　After</a:t>
+            </a:r>
+          </a:p>
+        </p:txBody>
+      </p:sp>
+      <p:sp>
+        <p:nvSpPr>
+          <p:cNvPr id="13" name="TextBox 12"/>
           <p:cNvSpPr txBox="1"/>
           <p:nvPr/>
         </p:nvSpPr>
@@ -16058,14 +15300,14 @@
                 <a:latin typeface="游ゴシック"/>
                 <a:ea typeface="游ゴシック"/>
               </a:rPr>
-              <a:t>▲ Before・After それぞれの枠をクリックして写真を挿入（自動で枠いっぱいに配置されます）</a:t>
-            </a:r>
-          </a:p>
-        </p:txBody>
-      </p:sp>
-      <p:sp>
-        <p:nvSpPr>
-          <p:cNvPr id="17" name="Rounded Rectangle 16"/>
+              <a:t>▲ 枠をクリックして Before/After を1枚にした画像を挿入（自動で枠いっぱいに配置）</a:t>
+            </a:r>
+          </a:p>
+        </p:txBody>
+      </p:sp>
+      <p:sp>
+        <p:nvSpPr>
+          <p:cNvPr id="14" name="Rounded Rectangle 13"/>
           <p:cNvSpPr/>
           <p:nvPr/>
         </p:nvSpPr>
@@ -16109,7 +15351,7 @@
       </p:sp>
       <p:sp>
         <p:nvSpPr>
-          <p:cNvPr id="18" name="TextBox 17"/>
+          <p:cNvPr id="15" name="TextBox 14"/>
           <p:cNvSpPr txBox="1"/>
           <p:nvPr/>
         </p:nvSpPr>
@@ -16155,7 +15397,7 @@
       </p:sp>
       <p:sp>
         <p:nvSpPr>
-          <p:cNvPr id="19" name="TextBox 18"/>
+          <p:cNvPr id="16" name="TextBox 15"/>
           <p:cNvSpPr txBox="1"/>
           <p:nvPr/>
         </p:nvSpPr>
@@ -16201,7 +15443,7 @@
       </p:sp>
       <p:graphicFrame>
         <p:nvGraphicFramePr>
-          <p:cNvPr id="20" name="Table 19"/>
+          <p:cNvPr id="17" name="Table 16"/>
           <p:cNvGraphicFramePr>
             <a:graphicFrameLocks noGrp="1"/>
           </p:cNvGraphicFramePr>
@@ -16371,7 +15613,7 @@
       </p:graphicFrame>
       <p:sp>
         <p:nvSpPr>
-          <p:cNvPr id="21" name="Rounded Rectangle 20"/>
+          <p:cNvPr id="18" name="Rounded Rectangle 17"/>
           <p:cNvSpPr/>
           <p:nvPr/>
         </p:nvSpPr>
@@ -16417,7 +15659,7 @@
       </p:sp>
       <p:sp>
         <p:nvSpPr>
-          <p:cNvPr id="22" name="Rectangle 21"/>
+          <p:cNvPr id="19" name="Rectangle 18"/>
           <p:cNvSpPr/>
           <p:nvPr/>
         </p:nvSpPr>
@@ -16461,7 +15703,7 @@
       </p:sp>
       <p:sp>
         <p:nvSpPr>
-          <p:cNvPr id="23" name="TextBox 22"/>
+          <p:cNvPr id="20" name="TextBox 19"/>
           <p:cNvSpPr txBox="1"/>
           <p:nvPr/>
         </p:nvSpPr>
@@ -16507,7 +15749,7 @@
       </p:sp>
       <p:sp>
         <p:nvSpPr>
-          <p:cNvPr id="24" name="TextBox 23"/>
+          <p:cNvPr id="21" name="TextBox 20"/>
           <p:cNvSpPr txBox="1"/>
           <p:nvPr/>
         </p:nvSpPr>
@@ -16555,7 +15797,7 @@
       </p:sp>
       <p:sp>
         <p:nvSpPr>
-          <p:cNvPr id="25" name="Rounded Rectangle 24"/>
+          <p:cNvPr id="22" name="Rounded Rectangle 21"/>
           <p:cNvSpPr/>
           <p:nvPr/>
         </p:nvSpPr>
@@ -16599,7 +15841,7 @@
       </p:sp>
       <p:sp>
         <p:nvSpPr>
-          <p:cNvPr id="26" name="TextBox 25"/>
+          <p:cNvPr id="23" name="TextBox 22"/>
           <p:cNvSpPr txBox="1"/>
           <p:nvPr/>
         </p:nvSpPr>
@@ -16645,7 +15887,7 @@
       </p:sp>
       <p:sp>
         <p:nvSpPr>
-          <p:cNvPr id="27" name="TextBox 26"/>
+          <p:cNvPr id="24" name="TextBox 23"/>
           <p:cNvSpPr txBox="1"/>
           <p:nvPr/>
         </p:nvSpPr>
@@ -16691,7 +15933,7 @@
       </p:sp>
       <p:sp>
         <p:nvSpPr>
-          <p:cNvPr id="28" name="TextBox 27"/>
+          <p:cNvPr id="25" name="TextBox 24"/>
           <p:cNvSpPr txBox="1"/>
           <p:nvPr/>
         </p:nvSpPr>
@@ -16747,7 +15989,7 @@
       </p:sp>
       <p:sp>
         <p:nvSpPr>
-          <p:cNvPr id="29" name="TextBox 28"/>
+          <p:cNvPr id="26" name="TextBox 25"/>
           <p:cNvSpPr txBox="1"/>
           <p:nvPr/>
         </p:nvSpPr>
@@ -16793,7 +16035,7 @@
       </p:sp>
       <p:sp>
         <p:nvSpPr>
-          <p:cNvPr id="30" name="Rounded Rectangle 29"/>
+          <p:cNvPr id="27" name="Rounded Rectangle 26"/>
           <p:cNvSpPr/>
           <p:nvPr/>
         </p:nvSpPr>
@@ -16839,7 +16081,7 @@
       </p:sp>
       <p:sp>
         <p:nvSpPr>
-          <p:cNvPr id="31" name="TextBox 30"/>
+          <p:cNvPr id="28" name="TextBox 27"/>
           <p:cNvSpPr txBox="1"/>
           <p:nvPr/>
         </p:nvSpPr>
@@ -16885,7 +16127,7 @@
       </p:sp>
       <p:sp>
         <p:nvSpPr>
-          <p:cNvPr id="32" name="TextBox 31"/>
+          <p:cNvPr id="29" name="TextBox 28"/>
           <p:cNvSpPr txBox="1"/>
           <p:nvPr/>
         </p:nvSpPr>
@@ -16931,7 +16173,7 @@
       </p:sp>
       <p:sp>
         <p:nvSpPr>
-          <p:cNvPr id="33" name="TextBox 32"/>
+          <p:cNvPr id="30" name="TextBox 29"/>
           <p:cNvSpPr txBox="1"/>
           <p:nvPr/>
         </p:nvSpPr>
@@ -16977,7 +16219,7 @@
       </p:sp>
       <p:sp>
         <p:nvSpPr>
-          <p:cNvPr id="34" name="TextBox 33"/>
+          <p:cNvPr id="31" name="TextBox 30"/>
           <p:cNvSpPr txBox="1"/>
           <p:nvPr/>
         </p:nvSpPr>
@@ -19510,7 +18752,7 @@
       <p:grpSpPr/>
       <p:sp>
         <p:nvSpPr>
-          <p:cNvPr id="12" name="Rounded Rectangle 11"/>
+          <p:cNvPr id="11" name="Rounded Rectangle 10"/>
           <p:cNvSpPr/>
           <p:nvPr/>
         </p:nvSpPr>
@@ -19568,19 +18810,7 @@
       </p:sp>
       <p:sp>
         <p:nvSpPr>
-          <p:cNvPr id="3" name="Picture Placeholder 2"/>
-          <p:cNvSpPr>
-            <a:spLocks noGrp="1"/>
-          </p:cNvSpPr>
-          <p:nvPr>
-            <p:ph type="pic" idx="11"/>
-          </p:nvPr>
-        </p:nvSpPr>
-        <p:spPr/>
-      </p:sp>
-      <p:sp>
-        <p:nvSpPr>
-          <p:cNvPr id="4" name="TextBox 3"/>
+          <p:cNvPr id="3" name="TextBox 2"/>
           <p:cNvSpPr txBox="1"/>
           <p:nvPr/>
         </p:nvSpPr>
@@ -19626,7 +18856,7 @@
       </p:sp>
       <p:sp>
         <p:nvSpPr>
-          <p:cNvPr id="5" name="TextBox 4"/>
+          <p:cNvPr id="4" name="TextBox 3"/>
           <p:cNvSpPr txBox="1"/>
           <p:nvPr/>
         </p:nvSpPr>
@@ -19672,7 +18902,7 @@
       </p:sp>
       <p:sp>
         <p:nvSpPr>
-          <p:cNvPr id="6" name="TextBox 5"/>
+          <p:cNvPr id="5" name="TextBox 4"/>
           <p:cNvSpPr txBox="1"/>
           <p:nvPr/>
         </p:nvSpPr>
@@ -19718,7 +18948,7 @@
       </p:sp>
       <p:sp>
         <p:nvSpPr>
-          <p:cNvPr id="7" name="Rounded Rectangle 6"/>
+          <p:cNvPr id="6" name="Rounded Rectangle 5"/>
           <p:cNvSpPr/>
           <p:nvPr/>
         </p:nvSpPr>
@@ -19762,7 +18992,7 @@
       </p:sp>
       <p:sp>
         <p:nvSpPr>
-          <p:cNvPr id="8" name="TextBox 7"/>
+          <p:cNvPr id="7" name="TextBox 6"/>
           <p:cNvSpPr txBox="1"/>
           <p:nvPr/>
         </p:nvSpPr>
@@ -19808,7 +19038,7 @@
       </p:sp>
       <p:sp>
         <p:nvSpPr>
-          <p:cNvPr id="9" name="Rounded Rectangle 8"/>
+          <p:cNvPr id="8" name="Rounded Rectangle 7"/>
           <p:cNvSpPr/>
           <p:nvPr/>
         </p:nvSpPr>
@@ -19852,7 +19082,7 @@
       </p:sp>
       <p:sp>
         <p:nvSpPr>
-          <p:cNvPr id="10" name="TextBox 9"/>
+          <p:cNvPr id="9" name="TextBox 8"/>
           <p:cNvSpPr txBox="1"/>
           <p:nvPr/>
         </p:nvSpPr>
@@ -19898,7 +19128,7 @@
       </p:sp>
       <p:sp>
         <p:nvSpPr>
-          <p:cNvPr id="11" name="TextBox 10"/>
+          <p:cNvPr id="10" name="TextBox 9"/>
           <p:cNvSpPr txBox="1"/>
           <p:nvPr/>
         </p:nvSpPr>
@@ -19944,14 +19174,14 @@
       </p:sp>
       <p:sp>
         <p:nvSpPr>
-          <p:cNvPr id="13" name="TextBox 12"/>
-          <p:cNvSpPr txBox="1"/>
-          <p:nvPr/>
-        </p:nvSpPr>
-        <p:spPr>
-          <a:xfrm>
-            <a:off x="2066925" y="1874519"/>
-            <a:ext cx="1554480" cy="274320"/>
+          <p:cNvPr id="12" name="TextBox 11"/>
+          <p:cNvSpPr txBox="1"/>
+          <p:nvPr/>
+        </p:nvSpPr>
+        <p:spPr>
+          <a:xfrm>
+            <a:off x="566928" y="1874519"/>
+            <a:ext cx="6428994" cy="274320"/>
           </a:xfrm>
           <a:prstGeom prst="rect">
             <a:avLst/>
@@ -19983,106 +19213,14 @@
                 <a:latin typeface="游明朝"/>
                 <a:ea typeface="游明朝"/>
               </a:rPr>
-              <a:t>Before</a:t>
-            </a:r>
-          </a:p>
-        </p:txBody>
-      </p:sp>
-      <p:sp>
-        <p:nvSpPr>
-          <p:cNvPr id="14" name="TextBox 13"/>
-          <p:cNvSpPr txBox="1"/>
-          <p:nvPr/>
-        </p:nvSpPr>
-        <p:spPr>
-          <a:xfrm>
-            <a:off x="3941445" y="1874519"/>
-            <a:ext cx="1554480" cy="274320"/>
-          </a:xfrm>
-          <a:prstGeom prst="rect">
-            <a:avLst/>
-          </a:prstGeom>
-          <a:noFill/>
-        </p:spPr>
-        <p:txBody>
-          <a:bodyPr wrap="square" anchor="t" lIns="0" rIns="0" tIns="0" bIns="0">
-            <a:spAutoFit/>
-          </a:bodyPr>
-          <a:lstStyle/>
-          <a:p>
-            <a:pPr algn="ctr">
-              <a:lnSpc>
-                <a:spcPct val="112000"/>
-              </a:lnSpc>
-              <a:spcBef>
-                <a:spcPts val="0"/>
-              </a:spcBef>
-              <a:spcAft>
-                <a:spcPts val="200"/>
-              </a:spcAft>
-            </a:pPr>
-            <a:r>
-              <a:rPr sz="1200" b="1">
-                <a:solidFill>
-                  <a:srgbClr val="8C7339"/>
-                </a:solidFill>
-                <a:latin typeface="游明朝"/>
-                <a:ea typeface="游明朝"/>
-              </a:rPr>
-              <a:t>After</a:t>
-            </a:r>
-          </a:p>
-        </p:txBody>
-      </p:sp>
-      <p:sp>
-        <p:nvSpPr>
-          <p:cNvPr id="15" name="TextBox 14"/>
-          <p:cNvSpPr txBox="1"/>
-          <p:nvPr/>
-        </p:nvSpPr>
-        <p:spPr>
-          <a:xfrm>
-            <a:off x="2066925" y="1874519"/>
-            <a:ext cx="3429000" cy="274320"/>
-          </a:xfrm>
-          <a:prstGeom prst="rect">
-            <a:avLst/>
-          </a:prstGeom>
-          <a:noFill/>
-        </p:spPr>
-        <p:txBody>
-          <a:bodyPr wrap="square" anchor="t" lIns="0" rIns="0" tIns="0" bIns="0">
-            <a:spAutoFit/>
-          </a:bodyPr>
-          <a:lstStyle/>
-          <a:p>
-            <a:pPr algn="ctr">
-              <a:lnSpc>
-                <a:spcPct val="112000"/>
-              </a:lnSpc>
-              <a:spcBef>
-                <a:spcPts val="0"/>
-              </a:spcBef>
-              <a:spcAft>
-                <a:spcPts val="200"/>
-              </a:spcAft>
-            </a:pPr>
-            <a:r>
-              <a:rPr sz="1200" b="1">
-                <a:solidFill>
-                  <a:srgbClr val="B0934E"/>
-                </a:solidFill>
-                <a:latin typeface="游明朝"/>
-                <a:ea typeface="游明朝"/>
-              </a:rPr>
-              <a:t>→</a:t>
-            </a:r>
-          </a:p>
-        </p:txBody>
-      </p:sp>
-      <p:sp>
-        <p:nvSpPr>
-          <p:cNvPr id="16" name="TextBox 15"/>
+              <a:t>Before　→　After</a:t>
+            </a:r>
+          </a:p>
+        </p:txBody>
+      </p:sp>
+      <p:sp>
+        <p:nvSpPr>
+          <p:cNvPr id="13" name="TextBox 12"/>
           <p:cNvSpPr txBox="1"/>
           <p:nvPr/>
         </p:nvSpPr>
@@ -20121,14 +19259,14 @@
                 <a:latin typeface="游ゴシック"/>
                 <a:ea typeface="游ゴシック"/>
               </a:rPr>
-              <a:t>▲ Before・After それぞれの枠をクリックして写真を挿入（自動で枠いっぱいに配置されます）</a:t>
-            </a:r>
-          </a:p>
-        </p:txBody>
-      </p:sp>
-      <p:sp>
-        <p:nvSpPr>
-          <p:cNvPr id="17" name="Rounded Rectangle 16"/>
+              <a:t>▲ 枠をクリックして Before/After を1枚にした画像を挿入（自動で枠いっぱいに配置）</a:t>
+            </a:r>
+          </a:p>
+        </p:txBody>
+      </p:sp>
+      <p:sp>
+        <p:nvSpPr>
+          <p:cNvPr id="14" name="Rounded Rectangle 13"/>
           <p:cNvSpPr/>
           <p:nvPr/>
         </p:nvSpPr>
@@ -20172,7 +19310,7 @@
       </p:sp>
       <p:sp>
         <p:nvSpPr>
-          <p:cNvPr id="18" name="TextBox 17"/>
+          <p:cNvPr id="15" name="TextBox 14"/>
           <p:cNvSpPr txBox="1"/>
           <p:nvPr/>
         </p:nvSpPr>
@@ -20218,7 +19356,7 @@
       </p:sp>
       <p:sp>
         <p:nvSpPr>
-          <p:cNvPr id="19" name="TextBox 18"/>
+          <p:cNvPr id="16" name="TextBox 15"/>
           <p:cNvSpPr txBox="1"/>
           <p:nvPr/>
         </p:nvSpPr>
@@ -20264,7 +19402,7 @@
       </p:sp>
       <p:graphicFrame>
         <p:nvGraphicFramePr>
-          <p:cNvPr id="20" name="Table 19"/>
+          <p:cNvPr id="17" name="Table 16"/>
           <p:cNvGraphicFramePr>
             <a:graphicFrameLocks noGrp="1"/>
           </p:cNvGraphicFramePr>
@@ -20434,7 +19572,7 @@
       </p:graphicFrame>
       <p:sp>
         <p:nvSpPr>
-          <p:cNvPr id="21" name="Rounded Rectangle 20"/>
+          <p:cNvPr id="18" name="Rounded Rectangle 17"/>
           <p:cNvSpPr/>
           <p:nvPr/>
         </p:nvSpPr>
@@ -20480,7 +19618,7 @@
       </p:sp>
       <p:sp>
         <p:nvSpPr>
-          <p:cNvPr id="22" name="Rectangle 21"/>
+          <p:cNvPr id="19" name="Rectangle 18"/>
           <p:cNvSpPr/>
           <p:nvPr/>
         </p:nvSpPr>
@@ -20524,7 +19662,7 @@
       </p:sp>
       <p:sp>
         <p:nvSpPr>
-          <p:cNvPr id="23" name="TextBox 22"/>
+          <p:cNvPr id="20" name="TextBox 19"/>
           <p:cNvSpPr txBox="1"/>
           <p:nvPr/>
         </p:nvSpPr>
@@ -20570,7 +19708,7 @@
       </p:sp>
       <p:sp>
         <p:nvSpPr>
-          <p:cNvPr id="24" name="TextBox 23"/>
+          <p:cNvPr id="21" name="TextBox 20"/>
           <p:cNvSpPr txBox="1"/>
           <p:nvPr/>
         </p:nvSpPr>
@@ -20618,7 +19756,7 @@
       </p:sp>
       <p:sp>
         <p:nvSpPr>
-          <p:cNvPr id="25" name="Rounded Rectangle 24"/>
+          <p:cNvPr id="22" name="Rounded Rectangle 21"/>
           <p:cNvSpPr/>
           <p:nvPr/>
         </p:nvSpPr>
@@ -20662,7 +19800,7 @@
       </p:sp>
       <p:sp>
         <p:nvSpPr>
-          <p:cNvPr id="26" name="TextBox 25"/>
+          <p:cNvPr id="23" name="TextBox 22"/>
           <p:cNvSpPr txBox="1"/>
           <p:nvPr/>
         </p:nvSpPr>
@@ -20708,7 +19846,7 @@
       </p:sp>
       <p:sp>
         <p:nvSpPr>
-          <p:cNvPr id="27" name="TextBox 26"/>
+          <p:cNvPr id="24" name="TextBox 23"/>
           <p:cNvSpPr txBox="1"/>
           <p:nvPr/>
         </p:nvSpPr>
@@ -20754,7 +19892,7 @@
       </p:sp>
       <p:sp>
         <p:nvSpPr>
-          <p:cNvPr id="28" name="TextBox 27"/>
+          <p:cNvPr id="25" name="TextBox 24"/>
           <p:cNvSpPr txBox="1"/>
           <p:nvPr/>
         </p:nvSpPr>
@@ -20810,7 +19948,7 @@
       </p:sp>
       <p:sp>
         <p:nvSpPr>
-          <p:cNvPr id="29" name="TextBox 28"/>
+          <p:cNvPr id="26" name="TextBox 25"/>
           <p:cNvSpPr txBox="1"/>
           <p:nvPr/>
         </p:nvSpPr>
@@ -20856,7 +19994,7 @@
       </p:sp>
       <p:sp>
         <p:nvSpPr>
-          <p:cNvPr id="30" name="Rounded Rectangle 29"/>
+          <p:cNvPr id="27" name="Rounded Rectangle 26"/>
           <p:cNvSpPr/>
           <p:nvPr/>
         </p:nvSpPr>
@@ -20902,7 +20040,7 @@
       </p:sp>
       <p:sp>
         <p:nvSpPr>
-          <p:cNvPr id="31" name="TextBox 30"/>
+          <p:cNvPr id="28" name="TextBox 27"/>
           <p:cNvSpPr txBox="1"/>
           <p:nvPr/>
         </p:nvSpPr>
@@ -20948,7 +20086,7 @@
       </p:sp>
       <p:sp>
         <p:nvSpPr>
-          <p:cNvPr id="32" name="TextBox 31"/>
+          <p:cNvPr id="29" name="TextBox 28"/>
           <p:cNvSpPr txBox="1"/>
           <p:nvPr/>
         </p:nvSpPr>
@@ -20994,7 +20132,7 @@
       </p:sp>
       <p:sp>
         <p:nvSpPr>
-          <p:cNvPr id="33" name="TextBox 32"/>
+          <p:cNvPr id="30" name="TextBox 29"/>
           <p:cNvSpPr txBox="1"/>
           <p:nvPr/>
         </p:nvSpPr>
@@ -21040,7 +20178,7 @@
       </p:sp>
       <p:sp>
         <p:nvSpPr>
-          <p:cNvPr id="34" name="TextBox 33"/>
+          <p:cNvPr id="31" name="TextBox 30"/>
           <p:cNvSpPr txBox="1"/>
           <p:nvPr/>
         </p:nvSpPr>
@@ -21112,7 +20250,7 @@
       <p:grpSpPr/>
       <p:sp>
         <p:nvSpPr>
-          <p:cNvPr id="12" name="Rounded Rectangle 11"/>
+          <p:cNvPr id="11" name="Rounded Rectangle 10"/>
           <p:cNvSpPr/>
           <p:nvPr/>
         </p:nvSpPr>
@@ -21170,19 +20308,7 @@
       </p:sp>
       <p:sp>
         <p:nvSpPr>
-          <p:cNvPr id="3" name="Picture Placeholder 2"/>
-          <p:cNvSpPr>
-            <a:spLocks noGrp="1"/>
-          </p:cNvSpPr>
-          <p:nvPr>
-            <p:ph type="pic" idx="11"/>
-          </p:nvPr>
-        </p:nvSpPr>
-        <p:spPr/>
-      </p:sp>
-      <p:sp>
-        <p:nvSpPr>
-          <p:cNvPr id="4" name="TextBox 3"/>
+          <p:cNvPr id="3" name="TextBox 2"/>
           <p:cNvSpPr txBox="1"/>
           <p:nvPr/>
         </p:nvSpPr>
@@ -21228,7 +20354,7 @@
       </p:sp>
       <p:sp>
         <p:nvSpPr>
-          <p:cNvPr id="5" name="TextBox 4"/>
+          <p:cNvPr id="4" name="TextBox 3"/>
           <p:cNvSpPr txBox="1"/>
           <p:nvPr/>
         </p:nvSpPr>
@@ -21274,7 +20400,7 @@
       </p:sp>
       <p:sp>
         <p:nvSpPr>
-          <p:cNvPr id="6" name="TextBox 5"/>
+          <p:cNvPr id="5" name="TextBox 4"/>
           <p:cNvSpPr txBox="1"/>
           <p:nvPr/>
         </p:nvSpPr>
@@ -21320,7 +20446,7 @@
       </p:sp>
       <p:sp>
         <p:nvSpPr>
-          <p:cNvPr id="7" name="Rounded Rectangle 6"/>
+          <p:cNvPr id="6" name="Rounded Rectangle 5"/>
           <p:cNvSpPr/>
           <p:nvPr/>
         </p:nvSpPr>
@@ -21364,7 +20490,7 @@
       </p:sp>
       <p:sp>
         <p:nvSpPr>
-          <p:cNvPr id="8" name="TextBox 7"/>
+          <p:cNvPr id="7" name="TextBox 6"/>
           <p:cNvSpPr txBox="1"/>
           <p:nvPr/>
         </p:nvSpPr>
@@ -21410,7 +20536,7 @@
       </p:sp>
       <p:sp>
         <p:nvSpPr>
-          <p:cNvPr id="9" name="Rounded Rectangle 8"/>
+          <p:cNvPr id="8" name="Rounded Rectangle 7"/>
           <p:cNvSpPr/>
           <p:nvPr/>
         </p:nvSpPr>
@@ -21454,7 +20580,7 @@
       </p:sp>
       <p:sp>
         <p:nvSpPr>
-          <p:cNvPr id="10" name="TextBox 9"/>
+          <p:cNvPr id="9" name="TextBox 8"/>
           <p:cNvSpPr txBox="1"/>
           <p:nvPr/>
         </p:nvSpPr>
@@ -21500,7 +20626,7 @@
       </p:sp>
       <p:sp>
         <p:nvSpPr>
-          <p:cNvPr id="11" name="TextBox 10"/>
+          <p:cNvPr id="10" name="TextBox 9"/>
           <p:cNvSpPr txBox="1"/>
           <p:nvPr/>
         </p:nvSpPr>
@@ -21546,14 +20672,14 @@
       </p:sp>
       <p:sp>
         <p:nvSpPr>
-          <p:cNvPr id="13" name="TextBox 12"/>
-          <p:cNvSpPr txBox="1"/>
-          <p:nvPr/>
-        </p:nvSpPr>
-        <p:spPr>
-          <a:xfrm>
-            <a:off x="2066925" y="1874519"/>
-            <a:ext cx="1554480" cy="274320"/>
+          <p:cNvPr id="12" name="TextBox 11"/>
+          <p:cNvSpPr txBox="1"/>
+          <p:nvPr/>
+        </p:nvSpPr>
+        <p:spPr>
+          <a:xfrm>
+            <a:off x="566928" y="1874519"/>
+            <a:ext cx="6428994" cy="274320"/>
           </a:xfrm>
           <a:prstGeom prst="rect">
             <a:avLst/>
@@ -21585,106 +20711,14 @@
                 <a:latin typeface="游明朝"/>
                 <a:ea typeface="游明朝"/>
               </a:rPr>
-              <a:t>Before</a:t>
-            </a:r>
-          </a:p>
-        </p:txBody>
-      </p:sp>
-      <p:sp>
-        <p:nvSpPr>
-          <p:cNvPr id="14" name="TextBox 13"/>
-          <p:cNvSpPr txBox="1"/>
-          <p:nvPr/>
-        </p:nvSpPr>
-        <p:spPr>
-          <a:xfrm>
-            <a:off x="3941445" y="1874519"/>
-            <a:ext cx="1554480" cy="274320"/>
-          </a:xfrm>
-          <a:prstGeom prst="rect">
-            <a:avLst/>
-          </a:prstGeom>
-          <a:noFill/>
-        </p:spPr>
-        <p:txBody>
-          <a:bodyPr wrap="square" anchor="t" lIns="0" rIns="0" tIns="0" bIns="0">
-            <a:spAutoFit/>
-          </a:bodyPr>
-          <a:lstStyle/>
-          <a:p>
-            <a:pPr algn="ctr">
-              <a:lnSpc>
-                <a:spcPct val="112000"/>
-              </a:lnSpc>
-              <a:spcBef>
-                <a:spcPts val="0"/>
-              </a:spcBef>
-              <a:spcAft>
-                <a:spcPts val="200"/>
-              </a:spcAft>
-            </a:pPr>
-            <a:r>
-              <a:rPr sz="1200" b="1">
-                <a:solidFill>
-                  <a:srgbClr val="8C7339"/>
-                </a:solidFill>
-                <a:latin typeface="游明朝"/>
-                <a:ea typeface="游明朝"/>
-              </a:rPr>
-              <a:t>After</a:t>
-            </a:r>
-          </a:p>
-        </p:txBody>
-      </p:sp>
-      <p:sp>
-        <p:nvSpPr>
-          <p:cNvPr id="15" name="TextBox 14"/>
-          <p:cNvSpPr txBox="1"/>
-          <p:nvPr/>
-        </p:nvSpPr>
-        <p:spPr>
-          <a:xfrm>
-            <a:off x="2066925" y="1874519"/>
-            <a:ext cx="3429000" cy="274320"/>
-          </a:xfrm>
-          <a:prstGeom prst="rect">
-            <a:avLst/>
-          </a:prstGeom>
-          <a:noFill/>
-        </p:spPr>
-        <p:txBody>
-          <a:bodyPr wrap="square" anchor="t" lIns="0" rIns="0" tIns="0" bIns="0">
-            <a:spAutoFit/>
-          </a:bodyPr>
-          <a:lstStyle/>
-          <a:p>
-            <a:pPr algn="ctr">
-              <a:lnSpc>
-                <a:spcPct val="112000"/>
-              </a:lnSpc>
-              <a:spcBef>
-                <a:spcPts val="0"/>
-              </a:spcBef>
-              <a:spcAft>
-                <a:spcPts val="200"/>
-              </a:spcAft>
-            </a:pPr>
-            <a:r>
-              <a:rPr sz="1200" b="1">
-                <a:solidFill>
-                  <a:srgbClr val="B0934E"/>
-                </a:solidFill>
-                <a:latin typeface="游明朝"/>
-                <a:ea typeface="游明朝"/>
-              </a:rPr>
-              <a:t>→</a:t>
-            </a:r>
-          </a:p>
-        </p:txBody>
-      </p:sp>
-      <p:sp>
-        <p:nvSpPr>
-          <p:cNvPr id="16" name="TextBox 15"/>
+              <a:t>Before　→　After</a:t>
+            </a:r>
+          </a:p>
+        </p:txBody>
+      </p:sp>
+      <p:sp>
+        <p:nvSpPr>
+          <p:cNvPr id="13" name="TextBox 12"/>
           <p:cNvSpPr txBox="1"/>
           <p:nvPr/>
         </p:nvSpPr>
@@ -21723,14 +20757,14 @@
                 <a:latin typeface="游ゴシック"/>
                 <a:ea typeface="游ゴシック"/>
               </a:rPr>
-              <a:t>▲ Before・After それぞれの枠をクリックして写真を挿入（自動で枠いっぱいに配置されます）</a:t>
-            </a:r>
-          </a:p>
-        </p:txBody>
-      </p:sp>
-      <p:sp>
-        <p:nvSpPr>
-          <p:cNvPr id="17" name="Rounded Rectangle 16"/>
+              <a:t>▲ 枠をクリックして Before/After を1枚にした画像を挿入（自動で枠いっぱいに配置）</a:t>
+            </a:r>
+          </a:p>
+        </p:txBody>
+      </p:sp>
+      <p:sp>
+        <p:nvSpPr>
+          <p:cNvPr id="14" name="Rounded Rectangle 13"/>
           <p:cNvSpPr/>
           <p:nvPr/>
         </p:nvSpPr>
@@ -21774,7 +20808,7 @@
       </p:sp>
       <p:sp>
         <p:nvSpPr>
-          <p:cNvPr id="18" name="TextBox 17"/>
+          <p:cNvPr id="15" name="TextBox 14"/>
           <p:cNvSpPr txBox="1"/>
           <p:nvPr/>
         </p:nvSpPr>
@@ -21820,7 +20854,7 @@
       </p:sp>
       <p:sp>
         <p:nvSpPr>
-          <p:cNvPr id="19" name="TextBox 18"/>
+          <p:cNvPr id="16" name="TextBox 15"/>
           <p:cNvSpPr txBox="1"/>
           <p:nvPr/>
         </p:nvSpPr>
@@ -21866,7 +20900,7 @@
       </p:sp>
       <p:graphicFrame>
         <p:nvGraphicFramePr>
-          <p:cNvPr id="20" name="Table 19"/>
+          <p:cNvPr id="17" name="Table 16"/>
           <p:cNvGraphicFramePr>
             <a:graphicFrameLocks noGrp="1"/>
           </p:cNvGraphicFramePr>
@@ -22036,7 +21070,7 @@
       </p:graphicFrame>
       <p:sp>
         <p:nvSpPr>
-          <p:cNvPr id="21" name="Rounded Rectangle 20"/>
+          <p:cNvPr id="18" name="Rounded Rectangle 17"/>
           <p:cNvSpPr/>
           <p:nvPr/>
         </p:nvSpPr>
@@ -22082,7 +21116,7 @@
       </p:sp>
       <p:sp>
         <p:nvSpPr>
-          <p:cNvPr id="22" name="Rectangle 21"/>
+          <p:cNvPr id="19" name="Rectangle 18"/>
           <p:cNvSpPr/>
           <p:nvPr/>
         </p:nvSpPr>
@@ -22126,7 +21160,7 @@
       </p:sp>
       <p:sp>
         <p:nvSpPr>
-          <p:cNvPr id="23" name="TextBox 22"/>
+          <p:cNvPr id="20" name="TextBox 19"/>
           <p:cNvSpPr txBox="1"/>
           <p:nvPr/>
         </p:nvSpPr>
@@ -22172,7 +21206,7 @@
       </p:sp>
       <p:sp>
         <p:nvSpPr>
-          <p:cNvPr id="24" name="TextBox 23"/>
+          <p:cNvPr id="21" name="TextBox 20"/>
           <p:cNvSpPr txBox="1"/>
           <p:nvPr/>
         </p:nvSpPr>
@@ -22220,7 +21254,7 @@
       </p:sp>
       <p:sp>
         <p:nvSpPr>
-          <p:cNvPr id="25" name="Rounded Rectangle 24"/>
+          <p:cNvPr id="22" name="Rounded Rectangle 21"/>
           <p:cNvSpPr/>
           <p:nvPr/>
         </p:nvSpPr>
@@ -22264,7 +21298,7 @@
       </p:sp>
       <p:sp>
         <p:nvSpPr>
-          <p:cNvPr id="26" name="TextBox 25"/>
+          <p:cNvPr id="23" name="TextBox 22"/>
           <p:cNvSpPr txBox="1"/>
           <p:nvPr/>
         </p:nvSpPr>
@@ -22310,7 +21344,7 @@
       </p:sp>
       <p:sp>
         <p:nvSpPr>
-          <p:cNvPr id="27" name="TextBox 26"/>
+          <p:cNvPr id="24" name="TextBox 23"/>
           <p:cNvSpPr txBox="1"/>
           <p:nvPr/>
         </p:nvSpPr>
@@ -22356,7 +21390,7 @@
       </p:sp>
       <p:sp>
         <p:nvSpPr>
-          <p:cNvPr id="28" name="TextBox 27"/>
+          <p:cNvPr id="25" name="TextBox 24"/>
           <p:cNvSpPr txBox="1"/>
           <p:nvPr/>
         </p:nvSpPr>
@@ -22412,7 +21446,7 @@
       </p:sp>
       <p:sp>
         <p:nvSpPr>
-          <p:cNvPr id="29" name="TextBox 28"/>
+          <p:cNvPr id="26" name="TextBox 25"/>
           <p:cNvSpPr txBox="1"/>
           <p:nvPr/>
         </p:nvSpPr>
@@ -22458,7 +21492,7 @@
       </p:sp>
       <p:sp>
         <p:nvSpPr>
-          <p:cNvPr id="30" name="Rounded Rectangle 29"/>
+          <p:cNvPr id="27" name="Rounded Rectangle 26"/>
           <p:cNvSpPr/>
           <p:nvPr/>
         </p:nvSpPr>
@@ -22504,7 +21538,7 @@
       </p:sp>
       <p:sp>
         <p:nvSpPr>
-          <p:cNvPr id="31" name="TextBox 30"/>
+          <p:cNvPr id="28" name="TextBox 27"/>
           <p:cNvSpPr txBox="1"/>
           <p:nvPr/>
         </p:nvSpPr>
@@ -22550,7 +21584,7 @@
       </p:sp>
       <p:sp>
         <p:nvSpPr>
-          <p:cNvPr id="32" name="TextBox 31"/>
+          <p:cNvPr id="29" name="TextBox 28"/>
           <p:cNvSpPr txBox="1"/>
           <p:nvPr/>
         </p:nvSpPr>
@@ -22596,7 +21630,7 @@
       </p:sp>
       <p:sp>
         <p:nvSpPr>
-          <p:cNvPr id="33" name="TextBox 32"/>
+          <p:cNvPr id="30" name="TextBox 29"/>
           <p:cNvSpPr txBox="1"/>
           <p:nvPr/>
         </p:nvSpPr>
@@ -22642,7 +21676,7 @@
       </p:sp>
       <p:sp>
         <p:nvSpPr>
-          <p:cNvPr id="34" name="TextBox 33"/>
+          <p:cNvPr id="31" name="TextBox 30"/>
           <p:cNvSpPr txBox="1"/>
           <p:nvPr/>
         </p:nvSpPr>
@@ -22714,7 +21748,7 @@
       <p:grpSpPr/>
       <p:sp>
         <p:nvSpPr>
-          <p:cNvPr id="12" name="Rounded Rectangle 11"/>
+          <p:cNvPr id="11" name="Rounded Rectangle 10"/>
           <p:cNvSpPr/>
           <p:nvPr/>
         </p:nvSpPr>
@@ -22772,19 +21806,7 @@
       </p:sp>
       <p:sp>
         <p:nvSpPr>
-          <p:cNvPr id="3" name="Picture Placeholder 2"/>
-          <p:cNvSpPr>
-            <a:spLocks noGrp="1"/>
-          </p:cNvSpPr>
-          <p:nvPr>
-            <p:ph type="pic" idx="11"/>
-          </p:nvPr>
-        </p:nvSpPr>
-        <p:spPr/>
-      </p:sp>
-      <p:sp>
-        <p:nvSpPr>
-          <p:cNvPr id="4" name="TextBox 3"/>
+          <p:cNvPr id="3" name="TextBox 2"/>
           <p:cNvSpPr txBox="1"/>
           <p:nvPr/>
         </p:nvSpPr>
@@ -22830,7 +21852,7 @@
       </p:sp>
       <p:sp>
         <p:nvSpPr>
-          <p:cNvPr id="5" name="TextBox 4"/>
+          <p:cNvPr id="4" name="TextBox 3"/>
           <p:cNvSpPr txBox="1"/>
           <p:nvPr/>
         </p:nvSpPr>
@@ -22876,7 +21898,7 @@
       </p:sp>
       <p:sp>
         <p:nvSpPr>
-          <p:cNvPr id="6" name="TextBox 5"/>
+          <p:cNvPr id="5" name="TextBox 4"/>
           <p:cNvSpPr txBox="1"/>
           <p:nvPr/>
         </p:nvSpPr>
@@ -22922,7 +21944,7 @@
       </p:sp>
       <p:sp>
         <p:nvSpPr>
-          <p:cNvPr id="7" name="Rounded Rectangle 6"/>
+          <p:cNvPr id="6" name="Rounded Rectangle 5"/>
           <p:cNvSpPr/>
           <p:nvPr/>
         </p:nvSpPr>
@@ -22966,7 +21988,7 @@
       </p:sp>
       <p:sp>
         <p:nvSpPr>
-          <p:cNvPr id="8" name="TextBox 7"/>
+          <p:cNvPr id="7" name="TextBox 6"/>
           <p:cNvSpPr txBox="1"/>
           <p:nvPr/>
         </p:nvSpPr>
@@ -23012,7 +22034,7 @@
       </p:sp>
       <p:sp>
         <p:nvSpPr>
-          <p:cNvPr id="9" name="Rounded Rectangle 8"/>
+          <p:cNvPr id="8" name="Rounded Rectangle 7"/>
           <p:cNvSpPr/>
           <p:nvPr/>
         </p:nvSpPr>
@@ -23056,7 +22078,7 @@
       </p:sp>
       <p:sp>
         <p:nvSpPr>
-          <p:cNvPr id="10" name="TextBox 9"/>
+          <p:cNvPr id="9" name="TextBox 8"/>
           <p:cNvSpPr txBox="1"/>
           <p:nvPr/>
         </p:nvSpPr>
@@ -23102,7 +22124,7 @@
       </p:sp>
       <p:sp>
         <p:nvSpPr>
-          <p:cNvPr id="11" name="TextBox 10"/>
+          <p:cNvPr id="10" name="TextBox 9"/>
           <p:cNvSpPr txBox="1"/>
           <p:nvPr/>
         </p:nvSpPr>
@@ -23148,14 +22170,14 @@
       </p:sp>
       <p:sp>
         <p:nvSpPr>
-          <p:cNvPr id="13" name="TextBox 12"/>
-          <p:cNvSpPr txBox="1"/>
-          <p:nvPr/>
-        </p:nvSpPr>
-        <p:spPr>
-          <a:xfrm>
-            <a:off x="2066925" y="1874519"/>
-            <a:ext cx="1554480" cy="274320"/>
+          <p:cNvPr id="12" name="TextBox 11"/>
+          <p:cNvSpPr txBox="1"/>
+          <p:nvPr/>
+        </p:nvSpPr>
+        <p:spPr>
+          <a:xfrm>
+            <a:off x="566928" y="1874519"/>
+            <a:ext cx="6428994" cy="274320"/>
           </a:xfrm>
           <a:prstGeom prst="rect">
             <a:avLst/>
@@ -23187,106 +22209,14 @@
                 <a:latin typeface="游明朝"/>
                 <a:ea typeface="游明朝"/>
               </a:rPr>
-              <a:t>Before</a:t>
-            </a:r>
-          </a:p>
-        </p:txBody>
-      </p:sp>
-      <p:sp>
-        <p:nvSpPr>
-          <p:cNvPr id="14" name="TextBox 13"/>
-          <p:cNvSpPr txBox="1"/>
-          <p:nvPr/>
-        </p:nvSpPr>
-        <p:spPr>
-          <a:xfrm>
-            <a:off x="3941445" y="1874519"/>
-            <a:ext cx="1554480" cy="274320"/>
-          </a:xfrm>
-          <a:prstGeom prst="rect">
-            <a:avLst/>
-          </a:prstGeom>
-          <a:noFill/>
-        </p:spPr>
-        <p:txBody>
-          <a:bodyPr wrap="square" anchor="t" lIns="0" rIns="0" tIns="0" bIns="0">
-            <a:spAutoFit/>
-          </a:bodyPr>
-          <a:lstStyle/>
-          <a:p>
-            <a:pPr algn="ctr">
-              <a:lnSpc>
-                <a:spcPct val="112000"/>
-              </a:lnSpc>
-              <a:spcBef>
-                <a:spcPts val="0"/>
-              </a:spcBef>
-              <a:spcAft>
-                <a:spcPts val="200"/>
-              </a:spcAft>
-            </a:pPr>
-            <a:r>
-              <a:rPr sz="1200" b="1">
-                <a:solidFill>
-                  <a:srgbClr val="8C7339"/>
-                </a:solidFill>
-                <a:latin typeface="游明朝"/>
-                <a:ea typeface="游明朝"/>
-              </a:rPr>
-              <a:t>After</a:t>
-            </a:r>
-          </a:p>
-        </p:txBody>
-      </p:sp>
-      <p:sp>
-        <p:nvSpPr>
-          <p:cNvPr id="15" name="TextBox 14"/>
-          <p:cNvSpPr txBox="1"/>
-          <p:nvPr/>
-        </p:nvSpPr>
-        <p:spPr>
-          <a:xfrm>
-            <a:off x="2066925" y="1874519"/>
-            <a:ext cx="3429000" cy="274320"/>
-          </a:xfrm>
-          <a:prstGeom prst="rect">
-            <a:avLst/>
-          </a:prstGeom>
-          <a:noFill/>
-        </p:spPr>
-        <p:txBody>
-          <a:bodyPr wrap="square" anchor="t" lIns="0" rIns="0" tIns="0" bIns="0">
-            <a:spAutoFit/>
-          </a:bodyPr>
-          <a:lstStyle/>
-          <a:p>
-            <a:pPr algn="ctr">
-              <a:lnSpc>
-                <a:spcPct val="112000"/>
-              </a:lnSpc>
-              <a:spcBef>
-                <a:spcPts val="0"/>
-              </a:spcBef>
-              <a:spcAft>
-                <a:spcPts val="200"/>
-              </a:spcAft>
-            </a:pPr>
-            <a:r>
-              <a:rPr sz="1200" b="1">
-                <a:solidFill>
-                  <a:srgbClr val="B0934E"/>
-                </a:solidFill>
-                <a:latin typeface="游明朝"/>
-                <a:ea typeface="游明朝"/>
-              </a:rPr>
-              <a:t>→</a:t>
-            </a:r>
-          </a:p>
-        </p:txBody>
-      </p:sp>
-      <p:sp>
-        <p:nvSpPr>
-          <p:cNvPr id="16" name="TextBox 15"/>
+              <a:t>Before　→　After</a:t>
+            </a:r>
+          </a:p>
+        </p:txBody>
+      </p:sp>
+      <p:sp>
+        <p:nvSpPr>
+          <p:cNvPr id="13" name="TextBox 12"/>
           <p:cNvSpPr txBox="1"/>
           <p:nvPr/>
         </p:nvSpPr>
@@ -23325,14 +22255,14 @@
                 <a:latin typeface="游ゴシック"/>
                 <a:ea typeface="游ゴシック"/>
               </a:rPr>
-              <a:t>▲ Before・After それぞれの枠をクリックして写真を挿入（自動で枠いっぱいに配置されます）</a:t>
-            </a:r>
-          </a:p>
-        </p:txBody>
-      </p:sp>
-      <p:sp>
-        <p:nvSpPr>
-          <p:cNvPr id="17" name="Rounded Rectangle 16"/>
+              <a:t>▲ 枠をクリックして Before/After を1枚にした画像を挿入（自動で枠いっぱいに配置）</a:t>
+            </a:r>
+          </a:p>
+        </p:txBody>
+      </p:sp>
+      <p:sp>
+        <p:nvSpPr>
+          <p:cNvPr id="14" name="Rounded Rectangle 13"/>
           <p:cNvSpPr/>
           <p:nvPr/>
         </p:nvSpPr>
@@ -23376,7 +22306,7 @@
       </p:sp>
       <p:sp>
         <p:nvSpPr>
-          <p:cNvPr id="18" name="TextBox 17"/>
+          <p:cNvPr id="15" name="TextBox 14"/>
           <p:cNvSpPr txBox="1"/>
           <p:nvPr/>
         </p:nvSpPr>
@@ -23422,7 +22352,7 @@
       </p:sp>
       <p:sp>
         <p:nvSpPr>
-          <p:cNvPr id="19" name="TextBox 18"/>
+          <p:cNvPr id="16" name="TextBox 15"/>
           <p:cNvSpPr txBox="1"/>
           <p:nvPr/>
         </p:nvSpPr>
@@ -23468,7 +22398,7 @@
       </p:sp>
       <p:graphicFrame>
         <p:nvGraphicFramePr>
-          <p:cNvPr id="20" name="Table 19"/>
+          <p:cNvPr id="17" name="Table 16"/>
           <p:cNvGraphicFramePr>
             <a:graphicFrameLocks noGrp="1"/>
           </p:cNvGraphicFramePr>
@@ -23638,7 +22568,7 @@
       </p:graphicFrame>
       <p:sp>
         <p:nvSpPr>
-          <p:cNvPr id="21" name="Rounded Rectangle 20"/>
+          <p:cNvPr id="18" name="Rounded Rectangle 17"/>
           <p:cNvSpPr/>
           <p:nvPr/>
         </p:nvSpPr>
@@ -23684,7 +22614,7 @@
       </p:sp>
       <p:sp>
         <p:nvSpPr>
-          <p:cNvPr id="22" name="Rectangle 21"/>
+          <p:cNvPr id="19" name="Rectangle 18"/>
           <p:cNvSpPr/>
           <p:nvPr/>
         </p:nvSpPr>
@@ -23728,7 +22658,7 @@
       </p:sp>
       <p:sp>
         <p:nvSpPr>
-          <p:cNvPr id="23" name="TextBox 22"/>
+          <p:cNvPr id="20" name="TextBox 19"/>
           <p:cNvSpPr txBox="1"/>
           <p:nvPr/>
         </p:nvSpPr>
@@ -23774,7 +22704,7 @@
       </p:sp>
       <p:sp>
         <p:nvSpPr>
-          <p:cNvPr id="24" name="TextBox 23"/>
+          <p:cNvPr id="21" name="TextBox 20"/>
           <p:cNvSpPr txBox="1"/>
           <p:nvPr/>
         </p:nvSpPr>
@@ -23822,7 +22752,7 @@
       </p:sp>
       <p:sp>
         <p:nvSpPr>
-          <p:cNvPr id="25" name="Rounded Rectangle 24"/>
+          <p:cNvPr id="22" name="Rounded Rectangle 21"/>
           <p:cNvSpPr/>
           <p:nvPr/>
         </p:nvSpPr>
@@ -23866,7 +22796,7 @@
       </p:sp>
       <p:sp>
         <p:nvSpPr>
-          <p:cNvPr id="26" name="TextBox 25"/>
+          <p:cNvPr id="23" name="TextBox 22"/>
           <p:cNvSpPr txBox="1"/>
           <p:nvPr/>
         </p:nvSpPr>
@@ -23912,7 +22842,7 @@
       </p:sp>
       <p:sp>
         <p:nvSpPr>
-          <p:cNvPr id="27" name="TextBox 26"/>
+          <p:cNvPr id="24" name="TextBox 23"/>
           <p:cNvSpPr txBox="1"/>
           <p:nvPr/>
         </p:nvSpPr>
@@ -23958,7 +22888,7 @@
       </p:sp>
       <p:sp>
         <p:nvSpPr>
-          <p:cNvPr id="28" name="TextBox 27"/>
+          <p:cNvPr id="25" name="TextBox 24"/>
           <p:cNvSpPr txBox="1"/>
           <p:nvPr/>
         </p:nvSpPr>
@@ -24014,7 +22944,7 @@
       </p:sp>
       <p:sp>
         <p:nvSpPr>
-          <p:cNvPr id="29" name="TextBox 28"/>
+          <p:cNvPr id="26" name="TextBox 25"/>
           <p:cNvSpPr txBox="1"/>
           <p:nvPr/>
         </p:nvSpPr>
@@ -24060,7 +22990,7 @@
       </p:sp>
       <p:sp>
         <p:nvSpPr>
-          <p:cNvPr id="30" name="Rounded Rectangle 29"/>
+          <p:cNvPr id="27" name="Rounded Rectangle 26"/>
           <p:cNvSpPr/>
           <p:nvPr/>
         </p:nvSpPr>
@@ -24106,7 +23036,7 @@
       </p:sp>
       <p:sp>
         <p:nvSpPr>
-          <p:cNvPr id="31" name="TextBox 30"/>
+          <p:cNvPr id="28" name="TextBox 27"/>
           <p:cNvSpPr txBox="1"/>
           <p:nvPr/>
         </p:nvSpPr>
@@ -24152,7 +23082,7 @@
       </p:sp>
       <p:sp>
         <p:nvSpPr>
-          <p:cNvPr id="32" name="TextBox 31"/>
+          <p:cNvPr id="29" name="TextBox 28"/>
           <p:cNvSpPr txBox="1"/>
           <p:nvPr/>
         </p:nvSpPr>
@@ -24198,7 +23128,7 @@
       </p:sp>
       <p:sp>
         <p:nvSpPr>
-          <p:cNvPr id="33" name="TextBox 32"/>
+          <p:cNvPr id="30" name="TextBox 29"/>
           <p:cNvSpPr txBox="1"/>
           <p:nvPr/>
         </p:nvSpPr>
@@ -24244,7 +23174,7 @@
       </p:sp>
       <p:sp>
         <p:nvSpPr>
-          <p:cNvPr id="34" name="TextBox 33"/>
+          <p:cNvPr id="31" name="TextBox 30"/>
           <p:cNvSpPr txBox="1"/>
           <p:nvPr/>
         </p:nvSpPr>
@@ -25064,7 +23994,7 @@
       <p:grpSpPr/>
       <p:sp>
         <p:nvSpPr>
-          <p:cNvPr id="12" name="Rounded Rectangle 11"/>
+          <p:cNvPr id="11" name="Rounded Rectangle 10"/>
           <p:cNvSpPr/>
           <p:nvPr/>
         </p:nvSpPr>
@@ -25122,19 +24052,7 @@
       </p:sp>
       <p:sp>
         <p:nvSpPr>
-          <p:cNvPr id="3" name="Picture Placeholder 2"/>
-          <p:cNvSpPr>
-            <a:spLocks noGrp="1"/>
-          </p:cNvSpPr>
-          <p:nvPr>
-            <p:ph type="pic" idx="11"/>
-          </p:nvPr>
-        </p:nvSpPr>
-        <p:spPr/>
-      </p:sp>
-      <p:sp>
-        <p:nvSpPr>
-          <p:cNvPr id="4" name="TextBox 3"/>
+          <p:cNvPr id="3" name="TextBox 2"/>
           <p:cNvSpPr txBox="1"/>
           <p:nvPr/>
         </p:nvSpPr>
@@ -25180,7 +24098,7 @@
       </p:sp>
       <p:sp>
         <p:nvSpPr>
-          <p:cNvPr id="5" name="TextBox 4"/>
+          <p:cNvPr id="4" name="TextBox 3"/>
           <p:cNvSpPr txBox="1"/>
           <p:nvPr/>
         </p:nvSpPr>
@@ -25226,7 +24144,7 @@
       </p:sp>
       <p:sp>
         <p:nvSpPr>
-          <p:cNvPr id="6" name="TextBox 5"/>
+          <p:cNvPr id="5" name="TextBox 4"/>
           <p:cNvSpPr txBox="1"/>
           <p:nvPr/>
         </p:nvSpPr>
@@ -25272,7 +24190,7 @@
       </p:sp>
       <p:sp>
         <p:nvSpPr>
-          <p:cNvPr id="7" name="Rounded Rectangle 6"/>
+          <p:cNvPr id="6" name="Rounded Rectangle 5"/>
           <p:cNvSpPr/>
           <p:nvPr/>
         </p:nvSpPr>
@@ -25316,7 +24234,7 @@
       </p:sp>
       <p:sp>
         <p:nvSpPr>
-          <p:cNvPr id="8" name="TextBox 7"/>
+          <p:cNvPr id="7" name="TextBox 6"/>
           <p:cNvSpPr txBox="1"/>
           <p:nvPr/>
         </p:nvSpPr>
@@ -25362,7 +24280,7 @@
       </p:sp>
       <p:sp>
         <p:nvSpPr>
-          <p:cNvPr id="9" name="Rounded Rectangle 8"/>
+          <p:cNvPr id="8" name="Rounded Rectangle 7"/>
           <p:cNvSpPr/>
           <p:nvPr/>
         </p:nvSpPr>
@@ -25406,7 +24324,7 @@
       </p:sp>
       <p:sp>
         <p:nvSpPr>
-          <p:cNvPr id="10" name="TextBox 9"/>
+          <p:cNvPr id="9" name="TextBox 8"/>
           <p:cNvSpPr txBox="1"/>
           <p:nvPr/>
         </p:nvSpPr>
@@ -25452,7 +24370,7 @@
       </p:sp>
       <p:sp>
         <p:nvSpPr>
-          <p:cNvPr id="11" name="TextBox 10"/>
+          <p:cNvPr id="10" name="TextBox 9"/>
           <p:cNvSpPr txBox="1"/>
           <p:nvPr/>
         </p:nvSpPr>
@@ -25498,14 +24416,14 @@
       </p:sp>
       <p:sp>
         <p:nvSpPr>
-          <p:cNvPr id="13" name="TextBox 12"/>
-          <p:cNvSpPr txBox="1"/>
-          <p:nvPr/>
-        </p:nvSpPr>
-        <p:spPr>
-          <a:xfrm>
-            <a:off x="2066925" y="1874519"/>
-            <a:ext cx="1554480" cy="274320"/>
+          <p:cNvPr id="12" name="TextBox 11"/>
+          <p:cNvSpPr txBox="1"/>
+          <p:nvPr/>
+        </p:nvSpPr>
+        <p:spPr>
+          <a:xfrm>
+            <a:off x="566928" y="1874519"/>
+            <a:ext cx="6428994" cy="274320"/>
           </a:xfrm>
           <a:prstGeom prst="rect">
             <a:avLst/>
@@ -25537,106 +24455,14 @@
                 <a:latin typeface="游明朝"/>
                 <a:ea typeface="游明朝"/>
               </a:rPr>
-              <a:t>Before</a:t>
-            </a:r>
-          </a:p>
-        </p:txBody>
-      </p:sp>
-      <p:sp>
-        <p:nvSpPr>
-          <p:cNvPr id="14" name="TextBox 13"/>
-          <p:cNvSpPr txBox="1"/>
-          <p:nvPr/>
-        </p:nvSpPr>
-        <p:spPr>
-          <a:xfrm>
-            <a:off x="3941445" y="1874519"/>
-            <a:ext cx="1554480" cy="274320"/>
-          </a:xfrm>
-          <a:prstGeom prst="rect">
-            <a:avLst/>
-          </a:prstGeom>
-          <a:noFill/>
-        </p:spPr>
-        <p:txBody>
-          <a:bodyPr wrap="square" anchor="t" lIns="0" rIns="0" tIns="0" bIns="0">
-            <a:spAutoFit/>
-          </a:bodyPr>
-          <a:lstStyle/>
-          <a:p>
-            <a:pPr algn="ctr">
-              <a:lnSpc>
-                <a:spcPct val="112000"/>
-              </a:lnSpc>
-              <a:spcBef>
-                <a:spcPts val="0"/>
-              </a:spcBef>
-              <a:spcAft>
-                <a:spcPts val="200"/>
-              </a:spcAft>
-            </a:pPr>
-            <a:r>
-              <a:rPr sz="1200" b="1">
-                <a:solidFill>
-                  <a:srgbClr val="8C7339"/>
-                </a:solidFill>
-                <a:latin typeface="游明朝"/>
-                <a:ea typeface="游明朝"/>
-              </a:rPr>
-              <a:t>After</a:t>
-            </a:r>
-          </a:p>
-        </p:txBody>
-      </p:sp>
-      <p:sp>
-        <p:nvSpPr>
-          <p:cNvPr id="15" name="TextBox 14"/>
-          <p:cNvSpPr txBox="1"/>
-          <p:nvPr/>
-        </p:nvSpPr>
-        <p:spPr>
-          <a:xfrm>
-            <a:off x="2066925" y="1874519"/>
-            <a:ext cx="3429000" cy="274320"/>
-          </a:xfrm>
-          <a:prstGeom prst="rect">
-            <a:avLst/>
-          </a:prstGeom>
-          <a:noFill/>
-        </p:spPr>
-        <p:txBody>
-          <a:bodyPr wrap="square" anchor="t" lIns="0" rIns="0" tIns="0" bIns="0">
-            <a:spAutoFit/>
-          </a:bodyPr>
-          <a:lstStyle/>
-          <a:p>
-            <a:pPr algn="ctr">
-              <a:lnSpc>
-                <a:spcPct val="112000"/>
-              </a:lnSpc>
-              <a:spcBef>
-                <a:spcPts val="0"/>
-              </a:spcBef>
-              <a:spcAft>
-                <a:spcPts val="200"/>
-              </a:spcAft>
-            </a:pPr>
-            <a:r>
-              <a:rPr sz="1200" b="1">
-                <a:solidFill>
-                  <a:srgbClr val="B0934E"/>
-                </a:solidFill>
-                <a:latin typeface="游明朝"/>
-                <a:ea typeface="游明朝"/>
-              </a:rPr>
-              <a:t>→</a:t>
-            </a:r>
-          </a:p>
-        </p:txBody>
-      </p:sp>
-      <p:sp>
-        <p:nvSpPr>
-          <p:cNvPr id="16" name="TextBox 15"/>
+              <a:t>Before　→　After</a:t>
+            </a:r>
+          </a:p>
+        </p:txBody>
+      </p:sp>
+      <p:sp>
+        <p:nvSpPr>
+          <p:cNvPr id="13" name="TextBox 12"/>
           <p:cNvSpPr txBox="1"/>
           <p:nvPr/>
         </p:nvSpPr>
@@ -25675,14 +24501,14 @@
                 <a:latin typeface="游ゴシック"/>
                 <a:ea typeface="游ゴシック"/>
               </a:rPr>
-              <a:t>▲ Before・After それぞれの枠をクリックして写真を挿入（自動で枠いっぱいに配置されます）</a:t>
-            </a:r>
-          </a:p>
-        </p:txBody>
-      </p:sp>
-      <p:sp>
-        <p:nvSpPr>
-          <p:cNvPr id="17" name="Rounded Rectangle 16"/>
+              <a:t>▲ 枠をクリックして Before/After を1枚にした画像を挿入（自動で枠いっぱいに配置）</a:t>
+            </a:r>
+          </a:p>
+        </p:txBody>
+      </p:sp>
+      <p:sp>
+        <p:nvSpPr>
+          <p:cNvPr id="14" name="Rounded Rectangle 13"/>
           <p:cNvSpPr/>
           <p:nvPr/>
         </p:nvSpPr>
@@ -25726,7 +24552,7 @@
       </p:sp>
       <p:sp>
         <p:nvSpPr>
-          <p:cNvPr id="18" name="TextBox 17"/>
+          <p:cNvPr id="15" name="TextBox 14"/>
           <p:cNvSpPr txBox="1"/>
           <p:nvPr/>
         </p:nvSpPr>
@@ -25772,7 +24598,7 @@
       </p:sp>
       <p:sp>
         <p:nvSpPr>
-          <p:cNvPr id="19" name="TextBox 18"/>
+          <p:cNvPr id="16" name="TextBox 15"/>
           <p:cNvSpPr txBox="1"/>
           <p:nvPr/>
         </p:nvSpPr>
@@ -25818,7 +24644,7 @@
       </p:sp>
       <p:graphicFrame>
         <p:nvGraphicFramePr>
-          <p:cNvPr id="20" name="Table 19"/>
+          <p:cNvPr id="17" name="Table 16"/>
           <p:cNvGraphicFramePr>
             <a:graphicFrameLocks noGrp="1"/>
           </p:cNvGraphicFramePr>
@@ -25988,7 +24814,7 @@
       </p:graphicFrame>
       <p:sp>
         <p:nvSpPr>
-          <p:cNvPr id="21" name="Rounded Rectangle 20"/>
+          <p:cNvPr id="18" name="Rounded Rectangle 17"/>
           <p:cNvSpPr/>
           <p:nvPr/>
         </p:nvSpPr>
@@ -26034,7 +24860,7 @@
       </p:sp>
       <p:sp>
         <p:nvSpPr>
-          <p:cNvPr id="22" name="Rectangle 21"/>
+          <p:cNvPr id="19" name="Rectangle 18"/>
           <p:cNvSpPr/>
           <p:nvPr/>
         </p:nvSpPr>
@@ -26078,7 +24904,7 @@
       </p:sp>
       <p:sp>
         <p:nvSpPr>
-          <p:cNvPr id="23" name="TextBox 22"/>
+          <p:cNvPr id="20" name="TextBox 19"/>
           <p:cNvSpPr txBox="1"/>
           <p:nvPr/>
         </p:nvSpPr>
@@ -26124,7 +24950,7 @@
       </p:sp>
       <p:sp>
         <p:nvSpPr>
-          <p:cNvPr id="24" name="TextBox 23"/>
+          <p:cNvPr id="21" name="TextBox 20"/>
           <p:cNvSpPr txBox="1"/>
           <p:nvPr/>
         </p:nvSpPr>
@@ -26172,7 +24998,7 @@
       </p:sp>
       <p:sp>
         <p:nvSpPr>
-          <p:cNvPr id="25" name="Rounded Rectangle 24"/>
+          <p:cNvPr id="22" name="Rounded Rectangle 21"/>
           <p:cNvSpPr/>
           <p:nvPr/>
         </p:nvSpPr>
@@ -26216,7 +25042,7 @@
       </p:sp>
       <p:sp>
         <p:nvSpPr>
-          <p:cNvPr id="26" name="TextBox 25"/>
+          <p:cNvPr id="23" name="TextBox 22"/>
           <p:cNvSpPr txBox="1"/>
           <p:nvPr/>
         </p:nvSpPr>
@@ -26262,7 +25088,7 @@
       </p:sp>
       <p:sp>
         <p:nvSpPr>
-          <p:cNvPr id="27" name="TextBox 26"/>
+          <p:cNvPr id="24" name="TextBox 23"/>
           <p:cNvSpPr txBox="1"/>
           <p:nvPr/>
         </p:nvSpPr>
@@ -26308,7 +25134,7 @@
       </p:sp>
       <p:sp>
         <p:nvSpPr>
-          <p:cNvPr id="28" name="TextBox 27"/>
+          <p:cNvPr id="25" name="TextBox 24"/>
           <p:cNvSpPr txBox="1"/>
           <p:nvPr/>
         </p:nvSpPr>
@@ -26364,7 +25190,7 @@
       </p:sp>
       <p:sp>
         <p:nvSpPr>
-          <p:cNvPr id="29" name="TextBox 28"/>
+          <p:cNvPr id="26" name="TextBox 25"/>
           <p:cNvSpPr txBox="1"/>
           <p:nvPr/>
         </p:nvSpPr>
@@ -26410,7 +25236,7 @@
       </p:sp>
       <p:sp>
         <p:nvSpPr>
-          <p:cNvPr id="30" name="Rounded Rectangle 29"/>
+          <p:cNvPr id="27" name="Rounded Rectangle 26"/>
           <p:cNvSpPr/>
           <p:nvPr/>
         </p:nvSpPr>
@@ -26456,7 +25282,7 @@
       </p:sp>
       <p:sp>
         <p:nvSpPr>
-          <p:cNvPr id="31" name="TextBox 30"/>
+          <p:cNvPr id="28" name="TextBox 27"/>
           <p:cNvSpPr txBox="1"/>
           <p:nvPr/>
         </p:nvSpPr>
@@ -26502,7 +25328,7 @@
       </p:sp>
       <p:sp>
         <p:nvSpPr>
-          <p:cNvPr id="32" name="TextBox 31"/>
+          <p:cNvPr id="29" name="TextBox 28"/>
           <p:cNvSpPr txBox="1"/>
           <p:nvPr/>
         </p:nvSpPr>
@@ -26548,7 +25374,7 @@
       </p:sp>
       <p:sp>
         <p:nvSpPr>
-          <p:cNvPr id="33" name="TextBox 32"/>
+          <p:cNvPr id="30" name="TextBox 29"/>
           <p:cNvSpPr txBox="1"/>
           <p:nvPr/>
         </p:nvSpPr>
@@ -26594,7 +25420,7 @@
       </p:sp>
       <p:sp>
         <p:nvSpPr>
-          <p:cNvPr id="34" name="TextBox 33"/>
+          <p:cNvPr id="31" name="TextBox 30"/>
           <p:cNvSpPr txBox="1"/>
           <p:nvPr/>
         </p:nvSpPr>
@@ -26666,7 +25492,7 @@
       <p:grpSpPr/>
       <p:sp>
         <p:nvSpPr>
-          <p:cNvPr id="12" name="Rounded Rectangle 11"/>
+          <p:cNvPr id="11" name="Rounded Rectangle 10"/>
           <p:cNvSpPr/>
           <p:nvPr/>
         </p:nvSpPr>
@@ -26724,19 +25550,7 @@
       </p:sp>
       <p:sp>
         <p:nvSpPr>
-          <p:cNvPr id="3" name="Picture Placeholder 2"/>
-          <p:cNvSpPr>
-            <a:spLocks noGrp="1"/>
-          </p:cNvSpPr>
-          <p:nvPr>
-            <p:ph type="pic" idx="11"/>
-          </p:nvPr>
-        </p:nvSpPr>
-        <p:spPr/>
-      </p:sp>
-      <p:sp>
-        <p:nvSpPr>
-          <p:cNvPr id="4" name="TextBox 3"/>
+          <p:cNvPr id="3" name="TextBox 2"/>
           <p:cNvSpPr txBox="1"/>
           <p:nvPr/>
         </p:nvSpPr>
@@ -26782,7 +25596,7 @@
       </p:sp>
       <p:sp>
         <p:nvSpPr>
-          <p:cNvPr id="5" name="TextBox 4"/>
+          <p:cNvPr id="4" name="TextBox 3"/>
           <p:cNvSpPr txBox="1"/>
           <p:nvPr/>
         </p:nvSpPr>
@@ -26828,7 +25642,7 @@
       </p:sp>
       <p:sp>
         <p:nvSpPr>
-          <p:cNvPr id="6" name="TextBox 5"/>
+          <p:cNvPr id="5" name="TextBox 4"/>
           <p:cNvSpPr txBox="1"/>
           <p:nvPr/>
         </p:nvSpPr>
@@ -26874,7 +25688,7 @@
       </p:sp>
       <p:sp>
         <p:nvSpPr>
-          <p:cNvPr id="7" name="Rounded Rectangle 6"/>
+          <p:cNvPr id="6" name="Rounded Rectangle 5"/>
           <p:cNvSpPr/>
           <p:nvPr/>
         </p:nvSpPr>
@@ -26918,7 +25732,7 @@
       </p:sp>
       <p:sp>
         <p:nvSpPr>
-          <p:cNvPr id="8" name="TextBox 7"/>
+          <p:cNvPr id="7" name="TextBox 6"/>
           <p:cNvSpPr txBox="1"/>
           <p:nvPr/>
         </p:nvSpPr>
@@ -26964,7 +25778,7 @@
       </p:sp>
       <p:sp>
         <p:nvSpPr>
-          <p:cNvPr id="9" name="Rounded Rectangle 8"/>
+          <p:cNvPr id="8" name="Rounded Rectangle 7"/>
           <p:cNvSpPr/>
           <p:nvPr/>
         </p:nvSpPr>
@@ -27008,7 +25822,7 @@
       </p:sp>
       <p:sp>
         <p:nvSpPr>
-          <p:cNvPr id="10" name="TextBox 9"/>
+          <p:cNvPr id="9" name="TextBox 8"/>
           <p:cNvSpPr txBox="1"/>
           <p:nvPr/>
         </p:nvSpPr>
@@ -27054,7 +25868,7 @@
       </p:sp>
       <p:sp>
         <p:nvSpPr>
-          <p:cNvPr id="11" name="TextBox 10"/>
+          <p:cNvPr id="10" name="TextBox 9"/>
           <p:cNvSpPr txBox="1"/>
           <p:nvPr/>
         </p:nvSpPr>
@@ -27100,14 +25914,14 @@
       </p:sp>
       <p:sp>
         <p:nvSpPr>
-          <p:cNvPr id="13" name="TextBox 12"/>
-          <p:cNvSpPr txBox="1"/>
-          <p:nvPr/>
-        </p:nvSpPr>
-        <p:spPr>
-          <a:xfrm>
-            <a:off x="2066925" y="1874519"/>
-            <a:ext cx="1554480" cy="274320"/>
+          <p:cNvPr id="12" name="TextBox 11"/>
+          <p:cNvSpPr txBox="1"/>
+          <p:nvPr/>
+        </p:nvSpPr>
+        <p:spPr>
+          <a:xfrm>
+            <a:off x="566928" y="1874519"/>
+            <a:ext cx="6428994" cy="274320"/>
           </a:xfrm>
           <a:prstGeom prst="rect">
             <a:avLst/>
@@ -27139,106 +25953,14 @@
                 <a:latin typeface="游明朝"/>
                 <a:ea typeface="游明朝"/>
               </a:rPr>
-              <a:t>Before</a:t>
-            </a:r>
-          </a:p>
-        </p:txBody>
-      </p:sp>
-      <p:sp>
-        <p:nvSpPr>
-          <p:cNvPr id="14" name="TextBox 13"/>
-          <p:cNvSpPr txBox="1"/>
-          <p:nvPr/>
-        </p:nvSpPr>
-        <p:spPr>
-          <a:xfrm>
-            <a:off x="3941445" y="1874519"/>
-            <a:ext cx="1554480" cy="274320"/>
-          </a:xfrm>
-          <a:prstGeom prst="rect">
-            <a:avLst/>
-          </a:prstGeom>
-          <a:noFill/>
-        </p:spPr>
-        <p:txBody>
-          <a:bodyPr wrap="square" anchor="t" lIns="0" rIns="0" tIns="0" bIns="0">
-            <a:spAutoFit/>
-          </a:bodyPr>
-          <a:lstStyle/>
-          <a:p>
-            <a:pPr algn="ctr">
-              <a:lnSpc>
-                <a:spcPct val="112000"/>
-              </a:lnSpc>
-              <a:spcBef>
-                <a:spcPts val="0"/>
-              </a:spcBef>
-              <a:spcAft>
-                <a:spcPts val="200"/>
-              </a:spcAft>
-            </a:pPr>
-            <a:r>
-              <a:rPr sz="1200" b="1">
-                <a:solidFill>
-                  <a:srgbClr val="8C7339"/>
-                </a:solidFill>
-                <a:latin typeface="游明朝"/>
-                <a:ea typeface="游明朝"/>
-              </a:rPr>
-              <a:t>After</a:t>
-            </a:r>
-          </a:p>
-        </p:txBody>
-      </p:sp>
-      <p:sp>
-        <p:nvSpPr>
-          <p:cNvPr id="15" name="TextBox 14"/>
-          <p:cNvSpPr txBox="1"/>
-          <p:nvPr/>
-        </p:nvSpPr>
-        <p:spPr>
-          <a:xfrm>
-            <a:off x="2066925" y="1874519"/>
-            <a:ext cx="3429000" cy="274320"/>
-          </a:xfrm>
-          <a:prstGeom prst="rect">
-            <a:avLst/>
-          </a:prstGeom>
-          <a:noFill/>
-        </p:spPr>
-        <p:txBody>
-          <a:bodyPr wrap="square" anchor="t" lIns="0" rIns="0" tIns="0" bIns="0">
-            <a:spAutoFit/>
-          </a:bodyPr>
-          <a:lstStyle/>
-          <a:p>
-            <a:pPr algn="ctr">
-              <a:lnSpc>
-                <a:spcPct val="112000"/>
-              </a:lnSpc>
-              <a:spcBef>
-                <a:spcPts val="0"/>
-              </a:spcBef>
-              <a:spcAft>
-                <a:spcPts val="200"/>
-              </a:spcAft>
-            </a:pPr>
-            <a:r>
-              <a:rPr sz="1200" b="1">
-                <a:solidFill>
-                  <a:srgbClr val="B0934E"/>
-                </a:solidFill>
-                <a:latin typeface="游明朝"/>
-                <a:ea typeface="游明朝"/>
-              </a:rPr>
-              <a:t>→</a:t>
-            </a:r>
-          </a:p>
-        </p:txBody>
-      </p:sp>
-      <p:sp>
-        <p:nvSpPr>
-          <p:cNvPr id="16" name="TextBox 15"/>
+              <a:t>Before　→　After</a:t>
+            </a:r>
+          </a:p>
+        </p:txBody>
+      </p:sp>
+      <p:sp>
+        <p:nvSpPr>
+          <p:cNvPr id="13" name="TextBox 12"/>
           <p:cNvSpPr txBox="1"/>
           <p:nvPr/>
         </p:nvSpPr>
@@ -27277,14 +25999,14 @@
                 <a:latin typeface="游ゴシック"/>
                 <a:ea typeface="游ゴシック"/>
               </a:rPr>
-              <a:t>▲ Before・After それぞれの枠をクリックして写真を挿入（自動で枠いっぱいに配置されます）</a:t>
-            </a:r>
-          </a:p>
-        </p:txBody>
-      </p:sp>
-      <p:sp>
-        <p:nvSpPr>
-          <p:cNvPr id="17" name="Rounded Rectangle 16"/>
+              <a:t>▲ 枠をクリックして Before/After を1枚にした画像を挿入（自動で枠いっぱいに配置）</a:t>
+            </a:r>
+          </a:p>
+        </p:txBody>
+      </p:sp>
+      <p:sp>
+        <p:nvSpPr>
+          <p:cNvPr id="14" name="Rounded Rectangle 13"/>
           <p:cNvSpPr/>
           <p:nvPr/>
         </p:nvSpPr>
@@ -27328,7 +26050,7 @@
       </p:sp>
       <p:sp>
         <p:nvSpPr>
-          <p:cNvPr id="18" name="TextBox 17"/>
+          <p:cNvPr id="15" name="TextBox 14"/>
           <p:cNvSpPr txBox="1"/>
           <p:nvPr/>
         </p:nvSpPr>
@@ -27374,7 +26096,7 @@
       </p:sp>
       <p:sp>
         <p:nvSpPr>
-          <p:cNvPr id="19" name="TextBox 18"/>
+          <p:cNvPr id="16" name="TextBox 15"/>
           <p:cNvSpPr txBox="1"/>
           <p:nvPr/>
         </p:nvSpPr>
@@ -27420,7 +26142,7 @@
       </p:sp>
       <p:graphicFrame>
         <p:nvGraphicFramePr>
-          <p:cNvPr id="20" name="Table 19"/>
+          <p:cNvPr id="17" name="Table 16"/>
           <p:cNvGraphicFramePr>
             <a:graphicFrameLocks noGrp="1"/>
           </p:cNvGraphicFramePr>
@@ -27590,7 +26312,7 @@
       </p:graphicFrame>
       <p:sp>
         <p:nvSpPr>
-          <p:cNvPr id="21" name="Rounded Rectangle 20"/>
+          <p:cNvPr id="18" name="Rounded Rectangle 17"/>
           <p:cNvSpPr/>
           <p:nvPr/>
         </p:nvSpPr>
@@ -27636,7 +26358,7 @@
       </p:sp>
       <p:sp>
         <p:nvSpPr>
-          <p:cNvPr id="22" name="Rectangle 21"/>
+          <p:cNvPr id="19" name="Rectangle 18"/>
           <p:cNvSpPr/>
           <p:nvPr/>
         </p:nvSpPr>
@@ -27680,7 +26402,7 @@
       </p:sp>
       <p:sp>
         <p:nvSpPr>
-          <p:cNvPr id="23" name="TextBox 22"/>
+          <p:cNvPr id="20" name="TextBox 19"/>
           <p:cNvSpPr txBox="1"/>
           <p:nvPr/>
         </p:nvSpPr>
@@ -27726,7 +26448,7 @@
       </p:sp>
       <p:sp>
         <p:nvSpPr>
-          <p:cNvPr id="24" name="TextBox 23"/>
+          <p:cNvPr id="21" name="TextBox 20"/>
           <p:cNvSpPr txBox="1"/>
           <p:nvPr/>
         </p:nvSpPr>
@@ -27774,7 +26496,7 @@
       </p:sp>
       <p:sp>
         <p:nvSpPr>
-          <p:cNvPr id="25" name="Rounded Rectangle 24"/>
+          <p:cNvPr id="22" name="Rounded Rectangle 21"/>
           <p:cNvSpPr/>
           <p:nvPr/>
         </p:nvSpPr>
@@ -27818,7 +26540,7 @@
       </p:sp>
       <p:sp>
         <p:nvSpPr>
-          <p:cNvPr id="26" name="TextBox 25"/>
+          <p:cNvPr id="23" name="TextBox 22"/>
           <p:cNvSpPr txBox="1"/>
           <p:nvPr/>
         </p:nvSpPr>
@@ -27864,7 +26586,7 @@
       </p:sp>
       <p:sp>
         <p:nvSpPr>
-          <p:cNvPr id="27" name="TextBox 26"/>
+          <p:cNvPr id="24" name="TextBox 23"/>
           <p:cNvSpPr txBox="1"/>
           <p:nvPr/>
         </p:nvSpPr>
@@ -27910,7 +26632,7 @@
       </p:sp>
       <p:sp>
         <p:nvSpPr>
-          <p:cNvPr id="28" name="TextBox 27"/>
+          <p:cNvPr id="25" name="TextBox 24"/>
           <p:cNvSpPr txBox="1"/>
           <p:nvPr/>
         </p:nvSpPr>
@@ -27956,7 +26678,7 @@
       </p:sp>
       <p:sp>
         <p:nvSpPr>
-          <p:cNvPr id="29" name="Rounded Rectangle 28"/>
+          <p:cNvPr id="26" name="Rounded Rectangle 25"/>
           <p:cNvSpPr/>
           <p:nvPr/>
         </p:nvSpPr>
@@ -28002,7 +26724,7 @@
       </p:sp>
       <p:sp>
         <p:nvSpPr>
-          <p:cNvPr id="30" name="TextBox 29"/>
+          <p:cNvPr id="27" name="TextBox 26"/>
           <p:cNvSpPr txBox="1"/>
           <p:nvPr/>
         </p:nvSpPr>
@@ -28048,7 +26770,7 @@
       </p:sp>
       <p:sp>
         <p:nvSpPr>
-          <p:cNvPr id="31" name="TextBox 30"/>
+          <p:cNvPr id="28" name="TextBox 27"/>
           <p:cNvSpPr txBox="1"/>
           <p:nvPr/>
         </p:nvSpPr>
@@ -28094,7 +26816,7 @@
       </p:sp>
       <p:sp>
         <p:nvSpPr>
-          <p:cNvPr id="32" name="TextBox 31"/>
+          <p:cNvPr id="29" name="TextBox 28"/>
           <p:cNvSpPr txBox="1"/>
           <p:nvPr/>
         </p:nvSpPr>
@@ -28140,7 +26862,7 @@
       </p:sp>
       <p:sp>
         <p:nvSpPr>
-          <p:cNvPr id="33" name="TextBox 32"/>
+          <p:cNvPr id="30" name="TextBox 29"/>
           <p:cNvSpPr txBox="1"/>
           <p:nvPr/>
         </p:nvSpPr>
@@ -40309,7 +39031,7 @@
       <p:grpSpPr/>
       <p:sp>
         <p:nvSpPr>
-          <p:cNvPr id="12" name="Rounded Rectangle 11"/>
+          <p:cNvPr id="11" name="Rounded Rectangle 10"/>
           <p:cNvSpPr/>
           <p:nvPr/>
         </p:nvSpPr>
@@ -40367,19 +39089,7 @@
       </p:sp>
       <p:sp>
         <p:nvSpPr>
-          <p:cNvPr id="3" name="Picture Placeholder 2"/>
-          <p:cNvSpPr>
-            <a:spLocks noGrp="1"/>
-          </p:cNvSpPr>
-          <p:nvPr>
-            <p:ph type="pic" idx="11"/>
-          </p:nvPr>
-        </p:nvSpPr>
-        <p:spPr/>
-      </p:sp>
-      <p:sp>
-        <p:nvSpPr>
-          <p:cNvPr id="4" name="TextBox 3"/>
+          <p:cNvPr id="3" name="TextBox 2"/>
           <p:cNvSpPr txBox="1"/>
           <p:nvPr/>
         </p:nvSpPr>
@@ -40425,7 +39135,7 @@
       </p:sp>
       <p:sp>
         <p:nvSpPr>
-          <p:cNvPr id="5" name="TextBox 4"/>
+          <p:cNvPr id="4" name="TextBox 3"/>
           <p:cNvSpPr txBox="1"/>
           <p:nvPr/>
         </p:nvSpPr>
@@ -40471,7 +39181,7 @@
       </p:sp>
       <p:sp>
         <p:nvSpPr>
-          <p:cNvPr id="6" name="TextBox 5"/>
+          <p:cNvPr id="5" name="TextBox 4"/>
           <p:cNvSpPr txBox="1"/>
           <p:nvPr/>
         </p:nvSpPr>
@@ -40517,7 +39227,7 @@
       </p:sp>
       <p:sp>
         <p:nvSpPr>
-          <p:cNvPr id="7" name="Rounded Rectangle 6"/>
+          <p:cNvPr id="6" name="Rounded Rectangle 5"/>
           <p:cNvSpPr/>
           <p:nvPr/>
         </p:nvSpPr>
@@ -40561,7 +39271,7 @@
       </p:sp>
       <p:sp>
         <p:nvSpPr>
-          <p:cNvPr id="8" name="TextBox 7"/>
+          <p:cNvPr id="7" name="TextBox 6"/>
           <p:cNvSpPr txBox="1"/>
           <p:nvPr/>
         </p:nvSpPr>
@@ -40607,7 +39317,7 @@
       </p:sp>
       <p:sp>
         <p:nvSpPr>
-          <p:cNvPr id="9" name="Rounded Rectangle 8"/>
+          <p:cNvPr id="8" name="Rounded Rectangle 7"/>
           <p:cNvSpPr/>
           <p:nvPr/>
         </p:nvSpPr>
@@ -40651,7 +39361,7 @@
       </p:sp>
       <p:sp>
         <p:nvSpPr>
-          <p:cNvPr id="10" name="TextBox 9"/>
+          <p:cNvPr id="9" name="TextBox 8"/>
           <p:cNvSpPr txBox="1"/>
           <p:nvPr/>
         </p:nvSpPr>
@@ -40697,7 +39407,7 @@
       </p:sp>
       <p:sp>
         <p:nvSpPr>
-          <p:cNvPr id="11" name="TextBox 10"/>
+          <p:cNvPr id="10" name="TextBox 9"/>
           <p:cNvSpPr txBox="1"/>
           <p:nvPr/>
         </p:nvSpPr>
@@ -40743,14 +39453,14 @@
       </p:sp>
       <p:sp>
         <p:nvSpPr>
-          <p:cNvPr id="13" name="TextBox 12"/>
-          <p:cNvSpPr txBox="1"/>
-          <p:nvPr/>
-        </p:nvSpPr>
-        <p:spPr>
-          <a:xfrm>
-            <a:off x="2066925" y="1874519"/>
-            <a:ext cx="1554480" cy="274320"/>
+          <p:cNvPr id="12" name="TextBox 11"/>
+          <p:cNvSpPr txBox="1"/>
+          <p:nvPr/>
+        </p:nvSpPr>
+        <p:spPr>
+          <a:xfrm>
+            <a:off x="566928" y="1874519"/>
+            <a:ext cx="6428994" cy="274320"/>
           </a:xfrm>
           <a:prstGeom prst="rect">
             <a:avLst/>
@@ -40782,106 +39492,14 @@
                 <a:latin typeface="游明朝"/>
                 <a:ea typeface="游明朝"/>
               </a:rPr>
-              <a:t>Before</a:t>
-            </a:r>
-          </a:p>
-        </p:txBody>
-      </p:sp>
-      <p:sp>
-        <p:nvSpPr>
-          <p:cNvPr id="14" name="TextBox 13"/>
-          <p:cNvSpPr txBox="1"/>
-          <p:nvPr/>
-        </p:nvSpPr>
-        <p:spPr>
-          <a:xfrm>
-            <a:off x="3941445" y="1874519"/>
-            <a:ext cx="1554480" cy="274320"/>
-          </a:xfrm>
-          <a:prstGeom prst="rect">
-            <a:avLst/>
-          </a:prstGeom>
-          <a:noFill/>
-        </p:spPr>
-        <p:txBody>
-          <a:bodyPr wrap="square" anchor="t" lIns="0" rIns="0" tIns="0" bIns="0">
-            <a:spAutoFit/>
-          </a:bodyPr>
-          <a:lstStyle/>
-          <a:p>
-            <a:pPr algn="ctr">
-              <a:lnSpc>
-                <a:spcPct val="112000"/>
-              </a:lnSpc>
-              <a:spcBef>
-                <a:spcPts val="0"/>
-              </a:spcBef>
-              <a:spcAft>
-                <a:spcPts val="200"/>
-              </a:spcAft>
-            </a:pPr>
-            <a:r>
-              <a:rPr sz="1200" b="1">
-                <a:solidFill>
-                  <a:srgbClr val="8C7339"/>
-                </a:solidFill>
-                <a:latin typeface="游明朝"/>
-                <a:ea typeface="游明朝"/>
-              </a:rPr>
-              <a:t>After</a:t>
-            </a:r>
-          </a:p>
-        </p:txBody>
-      </p:sp>
-      <p:sp>
-        <p:nvSpPr>
-          <p:cNvPr id="15" name="TextBox 14"/>
-          <p:cNvSpPr txBox="1"/>
-          <p:nvPr/>
-        </p:nvSpPr>
-        <p:spPr>
-          <a:xfrm>
-            <a:off x="2066925" y="1874519"/>
-            <a:ext cx="3429000" cy="274320"/>
-          </a:xfrm>
-          <a:prstGeom prst="rect">
-            <a:avLst/>
-          </a:prstGeom>
-          <a:noFill/>
-        </p:spPr>
-        <p:txBody>
-          <a:bodyPr wrap="square" anchor="t" lIns="0" rIns="0" tIns="0" bIns="0">
-            <a:spAutoFit/>
-          </a:bodyPr>
-          <a:lstStyle/>
-          <a:p>
-            <a:pPr algn="ctr">
-              <a:lnSpc>
-                <a:spcPct val="112000"/>
-              </a:lnSpc>
-              <a:spcBef>
-                <a:spcPts val="0"/>
-              </a:spcBef>
-              <a:spcAft>
-                <a:spcPts val="200"/>
-              </a:spcAft>
-            </a:pPr>
-            <a:r>
-              <a:rPr sz="1200" b="1">
-                <a:solidFill>
-                  <a:srgbClr val="B0934E"/>
-                </a:solidFill>
-                <a:latin typeface="游明朝"/>
-                <a:ea typeface="游明朝"/>
-              </a:rPr>
-              <a:t>→</a:t>
-            </a:r>
-          </a:p>
-        </p:txBody>
-      </p:sp>
-      <p:sp>
-        <p:nvSpPr>
-          <p:cNvPr id="16" name="TextBox 15"/>
+              <a:t>Before　→　After</a:t>
+            </a:r>
+          </a:p>
+        </p:txBody>
+      </p:sp>
+      <p:sp>
+        <p:nvSpPr>
+          <p:cNvPr id="13" name="TextBox 12"/>
           <p:cNvSpPr txBox="1"/>
           <p:nvPr/>
         </p:nvSpPr>
@@ -40920,14 +39538,14 @@
                 <a:latin typeface="游ゴシック"/>
                 <a:ea typeface="游ゴシック"/>
               </a:rPr>
-              <a:t>▲ Before・After それぞれの枠をクリックして写真を挿入（自動で枠いっぱいに配置されます）</a:t>
-            </a:r>
-          </a:p>
-        </p:txBody>
-      </p:sp>
-      <p:sp>
-        <p:nvSpPr>
-          <p:cNvPr id="17" name="Rounded Rectangle 16"/>
+              <a:t>▲ 枠をクリックして Before/After を1枚にした画像を挿入（自動で枠いっぱいに配置）</a:t>
+            </a:r>
+          </a:p>
+        </p:txBody>
+      </p:sp>
+      <p:sp>
+        <p:nvSpPr>
+          <p:cNvPr id="14" name="Rounded Rectangle 13"/>
           <p:cNvSpPr/>
           <p:nvPr/>
         </p:nvSpPr>
@@ -40971,7 +39589,7 @@
       </p:sp>
       <p:sp>
         <p:nvSpPr>
-          <p:cNvPr id="18" name="TextBox 17"/>
+          <p:cNvPr id="15" name="TextBox 14"/>
           <p:cNvSpPr txBox="1"/>
           <p:nvPr/>
         </p:nvSpPr>
@@ -41017,7 +39635,7 @@
       </p:sp>
       <p:sp>
         <p:nvSpPr>
-          <p:cNvPr id="19" name="TextBox 18"/>
+          <p:cNvPr id="16" name="TextBox 15"/>
           <p:cNvSpPr txBox="1"/>
           <p:nvPr/>
         </p:nvSpPr>
@@ -41063,7 +39681,7 @@
       </p:sp>
       <p:graphicFrame>
         <p:nvGraphicFramePr>
-          <p:cNvPr id="20" name="Table 19"/>
+          <p:cNvPr id="17" name="Table 16"/>
           <p:cNvGraphicFramePr>
             <a:graphicFrameLocks noGrp="1"/>
           </p:cNvGraphicFramePr>
@@ -41233,7 +39851,7 @@
       </p:graphicFrame>
       <p:sp>
         <p:nvSpPr>
-          <p:cNvPr id="21" name="Rounded Rectangle 20"/>
+          <p:cNvPr id="18" name="Rounded Rectangle 17"/>
           <p:cNvSpPr/>
           <p:nvPr/>
         </p:nvSpPr>
@@ -41279,7 +39897,7 @@
       </p:sp>
       <p:sp>
         <p:nvSpPr>
-          <p:cNvPr id="22" name="Rectangle 21"/>
+          <p:cNvPr id="19" name="Rectangle 18"/>
           <p:cNvSpPr/>
           <p:nvPr/>
         </p:nvSpPr>
@@ -41323,7 +39941,7 @@
       </p:sp>
       <p:sp>
         <p:nvSpPr>
-          <p:cNvPr id="23" name="TextBox 22"/>
+          <p:cNvPr id="20" name="TextBox 19"/>
           <p:cNvSpPr txBox="1"/>
           <p:nvPr/>
         </p:nvSpPr>
@@ -41369,7 +39987,7 @@
       </p:sp>
       <p:sp>
         <p:nvSpPr>
-          <p:cNvPr id="24" name="TextBox 23"/>
+          <p:cNvPr id="21" name="TextBox 20"/>
           <p:cNvSpPr txBox="1"/>
           <p:nvPr/>
         </p:nvSpPr>
@@ -41417,7 +40035,7 @@
       </p:sp>
       <p:sp>
         <p:nvSpPr>
-          <p:cNvPr id="25" name="Rounded Rectangle 24"/>
+          <p:cNvPr id="22" name="Rounded Rectangle 21"/>
           <p:cNvSpPr/>
           <p:nvPr/>
         </p:nvSpPr>
@@ -41461,7 +40079,7 @@
       </p:sp>
       <p:sp>
         <p:nvSpPr>
-          <p:cNvPr id="26" name="TextBox 25"/>
+          <p:cNvPr id="23" name="TextBox 22"/>
           <p:cNvSpPr txBox="1"/>
           <p:nvPr/>
         </p:nvSpPr>
@@ -41507,7 +40125,7 @@
       </p:sp>
       <p:sp>
         <p:nvSpPr>
-          <p:cNvPr id="27" name="TextBox 26"/>
+          <p:cNvPr id="24" name="TextBox 23"/>
           <p:cNvSpPr txBox="1"/>
           <p:nvPr/>
         </p:nvSpPr>
@@ -41553,7 +40171,7 @@
       </p:sp>
       <p:sp>
         <p:nvSpPr>
-          <p:cNvPr id="28" name="TextBox 27"/>
+          <p:cNvPr id="25" name="TextBox 24"/>
           <p:cNvSpPr txBox="1"/>
           <p:nvPr/>
         </p:nvSpPr>
@@ -41609,7 +40227,7 @@
       </p:sp>
       <p:sp>
         <p:nvSpPr>
-          <p:cNvPr id="29" name="TextBox 28"/>
+          <p:cNvPr id="26" name="TextBox 25"/>
           <p:cNvSpPr txBox="1"/>
           <p:nvPr/>
         </p:nvSpPr>
@@ -41655,7 +40273,7 @@
       </p:sp>
       <p:sp>
         <p:nvSpPr>
-          <p:cNvPr id="30" name="Rounded Rectangle 29"/>
+          <p:cNvPr id="27" name="Rounded Rectangle 26"/>
           <p:cNvSpPr/>
           <p:nvPr/>
         </p:nvSpPr>
@@ -41701,7 +40319,7 @@
       </p:sp>
       <p:sp>
         <p:nvSpPr>
-          <p:cNvPr id="31" name="TextBox 30"/>
+          <p:cNvPr id="28" name="TextBox 27"/>
           <p:cNvSpPr txBox="1"/>
           <p:nvPr/>
         </p:nvSpPr>
@@ -41747,7 +40365,7 @@
       </p:sp>
       <p:sp>
         <p:nvSpPr>
-          <p:cNvPr id="32" name="TextBox 31"/>
+          <p:cNvPr id="29" name="TextBox 28"/>
           <p:cNvSpPr txBox="1"/>
           <p:nvPr/>
         </p:nvSpPr>
@@ -41793,7 +40411,7 @@
       </p:sp>
       <p:sp>
         <p:nvSpPr>
-          <p:cNvPr id="33" name="TextBox 32"/>
+          <p:cNvPr id="30" name="TextBox 29"/>
           <p:cNvSpPr txBox="1"/>
           <p:nvPr/>
         </p:nvSpPr>
@@ -41839,7 +40457,7 @@
       </p:sp>
       <p:sp>
         <p:nvSpPr>
-          <p:cNvPr id="34" name="TextBox 33"/>
+          <p:cNvPr id="31" name="TextBox 30"/>
           <p:cNvSpPr txBox="1"/>
           <p:nvPr/>
         </p:nvSpPr>
@@ -41911,7 +40529,7 @@
       <p:grpSpPr/>
       <p:sp>
         <p:nvSpPr>
-          <p:cNvPr id="12" name="Rounded Rectangle 11"/>
+          <p:cNvPr id="11" name="Rounded Rectangle 10"/>
           <p:cNvSpPr/>
           <p:nvPr/>
         </p:nvSpPr>
@@ -41969,19 +40587,7 @@
       </p:sp>
       <p:sp>
         <p:nvSpPr>
-          <p:cNvPr id="3" name="Picture Placeholder 2"/>
-          <p:cNvSpPr>
-            <a:spLocks noGrp="1"/>
-          </p:cNvSpPr>
-          <p:nvPr>
-            <p:ph type="pic" idx="11"/>
-          </p:nvPr>
-        </p:nvSpPr>
-        <p:spPr/>
-      </p:sp>
-      <p:sp>
-        <p:nvSpPr>
-          <p:cNvPr id="4" name="TextBox 3"/>
+          <p:cNvPr id="3" name="TextBox 2"/>
           <p:cNvSpPr txBox="1"/>
           <p:nvPr/>
         </p:nvSpPr>
@@ -42027,7 +40633,7 @@
       </p:sp>
       <p:sp>
         <p:nvSpPr>
-          <p:cNvPr id="5" name="TextBox 4"/>
+          <p:cNvPr id="4" name="TextBox 3"/>
           <p:cNvSpPr txBox="1"/>
           <p:nvPr/>
         </p:nvSpPr>
@@ -42073,7 +40679,7 @@
       </p:sp>
       <p:sp>
         <p:nvSpPr>
-          <p:cNvPr id="6" name="TextBox 5"/>
+          <p:cNvPr id="5" name="TextBox 4"/>
           <p:cNvSpPr txBox="1"/>
           <p:nvPr/>
         </p:nvSpPr>
@@ -42119,7 +40725,7 @@
       </p:sp>
       <p:sp>
         <p:nvSpPr>
-          <p:cNvPr id="7" name="Rounded Rectangle 6"/>
+          <p:cNvPr id="6" name="Rounded Rectangle 5"/>
           <p:cNvSpPr/>
           <p:nvPr/>
         </p:nvSpPr>
@@ -42163,7 +40769,7 @@
       </p:sp>
       <p:sp>
         <p:nvSpPr>
-          <p:cNvPr id="8" name="TextBox 7"/>
+          <p:cNvPr id="7" name="TextBox 6"/>
           <p:cNvSpPr txBox="1"/>
           <p:nvPr/>
         </p:nvSpPr>
@@ -42209,7 +40815,7 @@
       </p:sp>
       <p:sp>
         <p:nvSpPr>
-          <p:cNvPr id="9" name="Rounded Rectangle 8"/>
+          <p:cNvPr id="8" name="Rounded Rectangle 7"/>
           <p:cNvSpPr/>
           <p:nvPr/>
         </p:nvSpPr>
@@ -42253,7 +40859,7 @@
       </p:sp>
       <p:sp>
         <p:nvSpPr>
-          <p:cNvPr id="10" name="TextBox 9"/>
+          <p:cNvPr id="9" name="TextBox 8"/>
           <p:cNvSpPr txBox="1"/>
           <p:nvPr/>
         </p:nvSpPr>
@@ -42299,7 +40905,7 @@
       </p:sp>
       <p:sp>
         <p:nvSpPr>
-          <p:cNvPr id="11" name="TextBox 10"/>
+          <p:cNvPr id="10" name="TextBox 9"/>
           <p:cNvSpPr txBox="1"/>
           <p:nvPr/>
         </p:nvSpPr>
@@ -42345,14 +40951,14 @@
       </p:sp>
       <p:sp>
         <p:nvSpPr>
-          <p:cNvPr id="13" name="TextBox 12"/>
-          <p:cNvSpPr txBox="1"/>
-          <p:nvPr/>
-        </p:nvSpPr>
-        <p:spPr>
-          <a:xfrm>
-            <a:off x="2066925" y="1874519"/>
-            <a:ext cx="1554480" cy="274320"/>
+          <p:cNvPr id="12" name="TextBox 11"/>
+          <p:cNvSpPr txBox="1"/>
+          <p:nvPr/>
+        </p:nvSpPr>
+        <p:spPr>
+          <a:xfrm>
+            <a:off x="566928" y="1874519"/>
+            <a:ext cx="6428994" cy="274320"/>
           </a:xfrm>
           <a:prstGeom prst="rect">
             <a:avLst/>
@@ -42384,106 +40990,14 @@
                 <a:latin typeface="游明朝"/>
                 <a:ea typeface="游明朝"/>
               </a:rPr>
-              <a:t>Before</a:t>
-            </a:r>
-          </a:p>
-        </p:txBody>
-      </p:sp>
-      <p:sp>
-        <p:nvSpPr>
-          <p:cNvPr id="14" name="TextBox 13"/>
-          <p:cNvSpPr txBox="1"/>
-          <p:nvPr/>
-        </p:nvSpPr>
-        <p:spPr>
-          <a:xfrm>
-            <a:off x="3941445" y="1874519"/>
-            <a:ext cx="1554480" cy="274320"/>
-          </a:xfrm>
-          <a:prstGeom prst="rect">
-            <a:avLst/>
-          </a:prstGeom>
-          <a:noFill/>
-        </p:spPr>
-        <p:txBody>
-          <a:bodyPr wrap="square" anchor="t" lIns="0" rIns="0" tIns="0" bIns="0">
-            <a:spAutoFit/>
-          </a:bodyPr>
-          <a:lstStyle/>
-          <a:p>
-            <a:pPr algn="ctr">
-              <a:lnSpc>
-                <a:spcPct val="112000"/>
-              </a:lnSpc>
-              <a:spcBef>
-                <a:spcPts val="0"/>
-              </a:spcBef>
-              <a:spcAft>
-                <a:spcPts val="200"/>
-              </a:spcAft>
-            </a:pPr>
-            <a:r>
-              <a:rPr sz="1200" b="1">
-                <a:solidFill>
-                  <a:srgbClr val="8C7339"/>
-                </a:solidFill>
-                <a:latin typeface="游明朝"/>
-                <a:ea typeface="游明朝"/>
-              </a:rPr>
-              <a:t>After</a:t>
-            </a:r>
-          </a:p>
-        </p:txBody>
-      </p:sp>
-      <p:sp>
-        <p:nvSpPr>
-          <p:cNvPr id="15" name="TextBox 14"/>
-          <p:cNvSpPr txBox="1"/>
-          <p:nvPr/>
-        </p:nvSpPr>
-        <p:spPr>
-          <a:xfrm>
-            <a:off x="2066925" y="1874519"/>
-            <a:ext cx="3429000" cy="274320"/>
-          </a:xfrm>
-          <a:prstGeom prst="rect">
-            <a:avLst/>
-          </a:prstGeom>
-          <a:noFill/>
-        </p:spPr>
-        <p:txBody>
-          <a:bodyPr wrap="square" anchor="t" lIns="0" rIns="0" tIns="0" bIns="0">
-            <a:spAutoFit/>
-          </a:bodyPr>
-          <a:lstStyle/>
-          <a:p>
-            <a:pPr algn="ctr">
-              <a:lnSpc>
-                <a:spcPct val="112000"/>
-              </a:lnSpc>
-              <a:spcBef>
-                <a:spcPts val="0"/>
-              </a:spcBef>
-              <a:spcAft>
-                <a:spcPts val="200"/>
-              </a:spcAft>
-            </a:pPr>
-            <a:r>
-              <a:rPr sz="1200" b="1">
-                <a:solidFill>
-                  <a:srgbClr val="B0934E"/>
-                </a:solidFill>
-                <a:latin typeface="游明朝"/>
-                <a:ea typeface="游明朝"/>
-              </a:rPr>
-              <a:t>→</a:t>
-            </a:r>
-          </a:p>
-        </p:txBody>
-      </p:sp>
-      <p:sp>
-        <p:nvSpPr>
-          <p:cNvPr id="16" name="TextBox 15"/>
+              <a:t>Before　→　After</a:t>
+            </a:r>
+          </a:p>
+        </p:txBody>
+      </p:sp>
+      <p:sp>
+        <p:nvSpPr>
+          <p:cNvPr id="13" name="TextBox 12"/>
           <p:cNvSpPr txBox="1"/>
           <p:nvPr/>
         </p:nvSpPr>
@@ -42522,14 +41036,14 @@
                 <a:latin typeface="游ゴシック"/>
                 <a:ea typeface="游ゴシック"/>
               </a:rPr>
-              <a:t>▲ Before・After それぞれの枠をクリックして写真を挿入（自動で枠いっぱいに配置されます）</a:t>
-            </a:r>
-          </a:p>
-        </p:txBody>
-      </p:sp>
-      <p:sp>
-        <p:nvSpPr>
-          <p:cNvPr id="17" name="Rounded Rectangle 16"/>
+              <a:t>▲ 枠をクリックして Before/After を1枚にした画像を挿入（自動で枠いっぱいに配置）</a:t>
+            </a:r>
+          </a:p>
+        </p:txBody>
+      </p:sp>
+      <p:sp>
+        <p:nvSpPr>
+          <p:cNvPr id="14" name="Rounded Rectangle 13"/>
           <p:cNvSpPr/>
           <p:nvPr/>
         </p:nvSpPr>
@@ -42573,7 +41087,7 @@
       </p:sp>
       <p:sp>
         <p:nvSpPr>
-          <p:cNvPr id="18" name="TextBox 17"/>
+          <p:cNvPr id="15" name="TextBox 14"/>
           <p:cNvSpPr txBox="1"/>
           <p:nvPr/>
         </p:nvSpPr>
@@ -42619,7 +41133,7 @@
       </p:sp>
       <p:sp>
         <p:nvSpPr>
-          <p:cNvPr id="19" name="TextBox 18"/>
+          <p:cNvPr id="16" name="TextBox 15"/>
           <p:cNvSpPr txBox="1"/>
           <p:nvPr/>
         </p:nvSpPr>
@@ -42665,7 +41179,7 @@
       </p:sp>
       <p:graphicFrame>
         <p:nvGraphicFramePr>
-          <p:cNvPr id="20" name="Table 19"/>
+          <p:cNvPr id="17" name="Table 16"/>
           <p:cNvGraphicFramePr>
             <a:graphicFrameLocks noGrp="1"/>
           </p:cNvGraphicFramePr>
@@ -42835,7 +41349,7 @@
       </p:graphicFrame>
       <p:sp>
         <p:nvSpPr>
-          <p:cNvPr id="21" name="Rounded Rectangle 20"/>
+          <p:cNvPr id="18" name="Rounded Rectangle 17"/>
           <p:cNvSpPr/>
           <p:nvPr/>
         </p:nvSpPr>
@@ -42881,7 +41395,7 @@
       </p:sp>
       <p:sp>
         <p:nvSpPr>
-          <p:cNvPr id="22" name="Rectangle 21"/>
+          <p:cNvPr id="19" name="Rectangle 18"/>
           <p:cNvSpPr/>
           <p:nvPr/>
         </p:nvSpPr>
@@ -42925,7 +41439,7 @@
       </p:sp>
       <p:sp>
         <p:nvSpPr>
-          <p:cNvPr id="23" name="TextBox 22"/>
+          <p:cNvPr id="20" name="TextBox 19"/>
           <p:cNvSpPr txBox="1"/>
           <p:nvPr/>
         </p:nvSpPr>
@@ -42971,7 +41485,7 @@
       </p:sp>
       <p:sp>
         <p:nvSpPr>
-          <p:cNvPr id="24" name="TextBox 23"/>
+          <p:cNvPr id="21" name="TextBox 20"/>
           <p:cNvSpPr txBox="1"/>
           <p:nvPr/>
         </p:nvSpPr>
@@ -43019,7 +41533,7 @@
       </p:sp>
       <p:sp>
         <p:nvSpPr>
-          <p:cNvPr id="25" name="Rounded Rectangle 24"/>
+          <p:cNvPr id="22" name="Rounded Rectangle 21"/>
           <p:cNvSpPr/>
           <p:nvPr/>
         </p:nvSpPr>
@@ -43063,7 +41577,7 @@
       </p:sp>
       <p:sp>
         <p:nvSpPr>
-          <p:cNvPr id="26" name="TextBox 25"/>
+          <p:cNvPr id="23" name="TextBox 22"/>
           <p:cNvSpPr txBox="1"/>
           <p:nvPr/>
         </p:nvSpPr>
@@ -43109,7 +41623,7 @@
       </p:sp>
       <p:sp>
         <p:nvSpPr>
-          <p:cNvPr id="27" name="TextBox 26"/>
+          <p:cNvPr id="24" name="TextBox 23"/>
           <p:cNvSpPr txBox="1"/>
           <p:nvPr/>
         </p:nvSpPr>
@@ -43155,7 +41669,7 @@
       </p:sp>
       <p:sp>
         <p:nvSpPr>
-          <p:cNvPr id="28" name="TextBox 27"/>
+          <p:cNvPr id="25" name="TextBox 24"/>
           <p:cNvSpPr txBox="1"/>
           <p:nvPr/>
         </p:nvSpPr>
@@ -43211,7 +41725,7 @@
       </p:sp>
       <p:sp>
         <p:nvSpPr>
-          <p:cNvPr id="29" name="TextBox 28"/>
+          <p:cNvPr id="26" name="TextBox 25"/>
           <p:cNvSpPr txBox="1"/>
           <p:nvPr/>
         </p:nvSpPr>
@@ -43257,7 +41771,7 @@
       </p:sp>
       <p:sp>
         <p:nvSpPr>
-          <p:cNvPr id="30" name="Rounded Rectangle 29"/>
+          <p:cNvPr id="27" name="Rounded Rectangle 26"/>
           <p:cNvSpPr/>
           <p:nvPr/>
         </p:nvSpPr>
@@ -43303,7 +41817,7 @@
       </p:sp>
       <p:sp>
         <p:nvSpPr>
-          <p:cNvPr id="31" name="TextBox 30"/>
+          <p:cNvPr id="28" name="TextBox 27"/>
           <p:cNvSpPr txBox="1"/>
           <p:nvPr/>
         </p:nvSpPr>
@@ -43349,7 +41863,7 @@
       </p:sp>
       <p:sp>
         <p:nvSpPr>
-          <p:cNvPr id="32" name="TextBox 31"/>
+          <p:cNvPr id="29" name="TextBox 28"/>
           <p:cNvSpPr txBox="1"/>
           <p:nvPr/>
         </p:nvSpPr>
@@ -43395,7 +41909,7 @@
       </p:sp>
       <p:sp>
         <p:nvSpPr>
-          <p:cNvPr id="33" name="TextBox 32"/>
+          <p:cNvPr id="30" name="TextBox 29"/>
           <p:cNvSpPr txBox="1"/>
           <p:nvPr/>
         </p:nvSpPr>
@@ -43441,7 +41955,7 @@
       </p:sp>
       <p:sp>
         <p:nvSpPr>
-          <p:cNvPr id="34" name="TextBox 33"/>
+          <p:cNvPr id="31" name="TextBox 30"/>
           <p:cNvSpPr txBox="1"/>
           <p:nvPr/>
         </p:nvSpPr>
@@ -43513,7 +42027,7 @@
       <p:grpSpPr/>
       <p:sp>
         <p:nvSpPr>
-          <p:cNvPr id="12" name="Rounded Rectangle 11"/>
+          <p:cNvPr id="11" name="Rounded Rectangle 10"/>
           <p:cNvSpPr/>
           <p:nvPr/>
         </p:nvSpPr>
@@ -43571,19 +42085,7 @@
       </p:sp>
       <p:sp>
         <p:nvSpPr>
-          <p:cNvPr id="3" name="Picture Placeholder 2"/>
-          <p:cNvSpPr>
-            <a:spLocks noGrp="1"/>
-          </p:cNvSpPr>
-          <p:nvPr>
-            <p:ph type="pic" idx="11"/>
-          </p:nvPr>
-        </p:nvSpPr>
-        <p:spPr/>
-      </p:sp>
-      <p:sp>
-        <p:nvSpPr>
-          <p:cNvPr id="4" name="TextBox 3"/>
+          <p:cNvPr id="3" name="TextBox 2"/>
           <p:cNvSpPr txBox="1"/>
           <p:nvPr/>
         </p:nvSpPr>
@@ -43629,7 +42131,7 @@
       </p:sp>
       <p:sp>
         <p:nvSpPr>
-          <p:cNvPr id="5" name="TextBox 4"/>
+          <p:cNvPr id="4" name="TextBox 3"/>
           <p:cNvSpPr txBox="1"/>
           <p:nvPr/>
         </p:nvSpPr>
@@ -43675,7 +42177,7 @@
       </p:sp>
       <p:sp>
         <p:nvSpPr>
-          <p:cNvPr id="6" name="TextBox 5"/>
+          <p:cNvPr id="5" name="TextBox 4"/>
           <p:cNvSpPr txBox="1"/>
           <p:nvPr/>
         </p:nvSpPr>
@@ -43721,7 +42223,7 @@
       </p:sp>
       <p:sp>
         <p:nvSpPr>
-          <p:cNvPr id="7" name="Rounded Rectangle 6"/>
+          <p:cNvPr id="6" name="Rounded Rectangle 5"/>
           <p:cNvSpPr/>
           <p:nvPr/>
         </p:nvSpPr>
@@ -43765,7 +42267,7 @@
       </p:sp>
       <p:sp>
         <p:nvSpPr>
-          <p:cNvPr id="8" name="TextBox 7"/>
+          <p:cNvPr id="7" name="TextBox 6"/>
           <p:cNvSpPr txBox="1"/>
           <p:nvPr/>
         </p:nvSpPr>
@@ -43811,7 +42313,7 @@
       </p:sp>
       <p:sp>
         <p:nvSpPr>
-          <p:cNvPr id="9" name="Rounded Rectangle 8"/>
+          <p:cNvPr id="8" name="Rounded Rectangle 7"/>
           <p:cNvSpPr/>
           <p:nvPr/>
         </p:nvSpPr>
@@ -43855,7 +42357,7 @@
       </p:sp>
       <p:sp>
         <p:nvSpPr>
-          <p:cNvPr id="10" name="TextBox 9"/>
+          <p:cNvPr id="9" name="TextBox 8"/>
           <p:cNvSpPr txBox="1"/>
           <p:nvPr/>
         </p:nvSpPr>
@@ -43901,7 +42403,7 @@
       </p:sp>
       <p:sp>
         <p:nvSpPr>
-          <p:cNvPr id="11" name="TextBox 10"/>
+          <p:cNvPr id="10" name="TextBox 9"/>
           <p:cNvSpPr txBox="1"/>
           <p:nvPr/>
         </p:nvSpPr>
@@ -43947,14 +42449,14 @@
       </p:sp>
       <p:sp>
         <p:nvSpPr>
-          <p:cNvPr id="13" name="TextBox 12"/>
-          <p:cNvSpPr txBox="1"/>
-          <p:nvPr/>
-        </p:nvSpPr>
-        <p:spPr>
-          <a:xfrm>
-            <a:off x="2066925" y="1874519"/>
-            <a:ext cx="1554480" cy="274320"/>
+          <p:cNvPr id="12" name="TextBox 11"/>
+          <p:cNvSpPr txBox="1"/>
+          <p:nvPr/>
+        </p:nvSpPr>
+        <p:spPr>
+          <a:xfrm>
+            <a:off x="566928" y="1874519"/>
+            <a:ext cx="6428994" cy="274320"/>
           </a:xfrm>
           <a:prstGeom prst="rect">
             <a:avLst/>
@@ -43986,106 +42488,14 @@
                 <a:latin typeface="游明朝"/>
                 <a:ea typeface="游明朝"/>
               </a:rPr>
-              <a:t>Before</a:t>
-            </a:r>
-          </a:p>
-        </p:txBody>
-      </p:sp>
-      <p:sp>
-        <p:nvSpPr>
-          <p:cNvPr id="14" name="TextBox 13"/>
-          <p:cNvSpPr txBox="1"/>
-          <p:nvPr/>
-        </p:nvSpPr>
-        <p:spPr>
-          <a:xfrm>
-            <a:off x="3941445" y="1874519"/>
-            <a:ext cx="1554480" cy="274320"/>
-          </a:xfrm>
-          <a:prstGeom prst="rect">
-            <a:avLst/>
-          </a:prstGeom>
-          <a:noFill/>
-        </p:spPr>
-        <p:txBody>
-          <a:bodyPr wrap="square" anchor="t" lIns="0" rIns="0" tIns="0" bIns="0">
-            <a:spAutoFit/>
-          </a:bodyPr>
-          <a:lstStyle/>
-          <a:p>
-            <a:pPr algn="ctr">
-              <a:lnSpc>
-                <a:spcPct val="112000"/>
-              </a:lnSpc>
-              <a:spcBef>
-                <a:spcPts val="0"/>
-              </a:spcBef>
-              <a:spcAft>
-                <a:spcPts val="200"/>
-              </a:spcAft>
-            </a:pPr>
-            <a:r>
-              <a:rPr sz="1200" b="1">
-                <a:solidFill>
-                  <a:srgbClr val="8C7339"/>
-                </a:solidFill>
-                <a:latin typeface="游明朝"/>
-                <a:ea typeface="游明朝"/>
-              </a:rPr>
-              <a:t>After</a:t>
-            </a:r>
-          </a:p>
-        </p:txBody>
-      </p:sp>
-      <p:sp>
-        <p:nvSpPr>
-          <p:cNvPr id="15" name="TextBox 14"/>
-          <p:cNvSpPr txBox="1"/>
-          <p:nvPr/>
-        </p:nvSpPr>
-        <p:spPr>
-          <a:xfrm>
-            <a:off x="2066925" y="1874519"/>
-            <a:ext cx="3429000" cy="274320"/>
-          </a:xfrm>
-          <a:prstGeom prst="rect">
-            <a:avLst/>
-          </a:prstGeom>
-          <a:noFill/>
-        </p:spPr>
-        <p:txBody>
-          <a:bodyPr wrap="square" anchor="t" lIns="0" rIns="0" tIns="0" bIns="0">
-            <a:spAutoFit/>
-          </a:bodyPr>
-          <a:lstStyle/>
-          <a:p>
-            <a:pPr algn="ctr">
-              <a:lnSpc>
-                <a:spcPct val="112000"/>
-              </a:lnSpc>
-              <a:spcBef>
-                <a:spcPts val="0"/>
-              </a:spcBef>
-              <a:spcAft>
-                <a:spcPts val="200"/>
-              </a:spcAft>
-            </a:pPr>
-            <a:r>
-              <a:rPr sz="1200" b="1">
-                <a:solidFill>
-                  <a:srgbClr val="B0934E"/>
-                </a:solidFill>
-                <a:latin typeface="游明朝"/>
-                <a:ea typeface="游明朝"/>
-              </a:rPr>
-              <a:t>→</a:t>
-            </a:r>
-          </a:p>
-        </p:txBody>
-      </p:sp>
-      <p:sp>
-        <p:nvSpPr>
-          <p:cNvPr id="16" name="TextBox 15"/>
+              <a:t>Before　→　After</a:t>
+            </a:r>
+          </a:p>
+        </p:txBody>
+      </p:sp>
+      <p:sp>
+        <p:nvSpPr>
+          <p:cNvPr id="13" name="TextBox 12"/>
           <p:cNvSpPr txBox="1"/>
           <p:nvPr/>
         </p:nvSpPr>
@@ -44124,14 +42534,14 @@
                 <a:latin typeface="游ゴシック"/>
                 <a:ea typeface="游ゴシック"/>
               </a:rPr>
-              <a:t>▲ Before・After それぞれの枠をクリックして写真を挿入（自動で枠いっぱいに配置されます）</a:t>
-            </a:r>
-          </a:p>
-        </p:txBody>
-      </p:sp>
-      <p:sp>
-        <p:nvSpPr>
-          <p:cNvPr id="17" name="Rounded Rectangle 16"/>
+              <a:t>▲ 枠をクリックして Before/After を1枚にした画像を挿入（自動で枠いっぱいに配置）</a:t>
+            </a:r>
+          </a:p>
+        </p:txBody>
+      </p:sp>
+      <p:sp>
+        <p:nvSpPr>
+          <p:cNvPr id="14" name="Rounded Rectangle 13"/>
           <p:cNvSpPr/>
           <p:nvPr/>
         </p:nvSpPr>
@@ -44175,7 +42585,7 @@
       </p:sp>
       <p:sp>
         <p:nvSpPr>
-          <p:cNvPr id="18" name="TextBox 17"/>
+          <p:cNvPr id="15" name="TextBox 14"/>
           <p:cNvSpPr txBox="1"/>
           <p:nvPr/>
         </p:nvSpPr>
@@ -44221,7 +42631,7 @@
       </p:sp>
       <p:sp>
         <p:nvSpPr>
-          <p:cNvPr id="19" name="TextBox 18"/>
+          <p:cNvPr id="16" name="TextBox 15"/>
           <p:cNvSpPr txBox="1"/>
           <p:nvPr/>
         </p:nvSpPr>
@@ -44267,7 +42677,7 @@
       </p:sp>
       <p:graphicFrame>
         <p:nvGraphicFramePr>
-          <p:cNvPr id="20" name="Table 19"/>
+          <p:cNvPr id="17" name="Table 16"/>
           <p:cNvGraphicFramePr>
             <a:graphicFrameLocks noGrp="1"/>
           </p:cNvGraphicFramePr>
@@ -44437,7 +42847,7 @@
       </p:graphicFrame>
       <p:sp>
         <p:nvSpPr>
-          <p:cNvPr id="21" name="Rounded Rectangle 20"/>
+          <p:cNvPr id="18" name="Rounded Rectangle 17"/>
           <p:cNvSpPr/>
           <p:nvPr/>
         </p:nvSpPr>
@@ -44483,7 +42893,7 @@
       </p:sp>
       <p:sp>
         <p:nvSpPr>
-          <p:cNvPr id="22" name="Rectangle 21"/>
+          <p:cNvPr id="19" name="Rectangle 18"/>
           <p:cNvSpPr/>
           <p:nvPr/>
         </p:nvSpPr>
@@ -44527,7 +42937,7 @@
       </p:sp>
       <p:sp>
         <p:nvSpPr>
-          <p:cNvPr id="23" name="TextBox 22"/>
+          <p:cNvPr id="20" name="TextBox 19"/>
           <p:cNvSpPr txBox="1"/>
           <p:nvPr/>
         </p:nvSpPr>
@@ -44573,7 +42983,7 @@
       </p:sp>
       <p:sp>
         <p:nvSpPr>
-          <p:cNvPr id="24" name="TextBox 23"/>
+          <p:cNvPr id="21" name="TextBox 20"/>
           <p:cNvSpPr txBox="1"/>
           <p:nvPr/>
         </p:nvSpPr>
@@ -44621,7 +43031,7 @@
       </p:sp>
       <p:sp>
         <p:nvSpPr>
-          <p:cNvPr id="25" name="Rounded Rectangle 24"/>
+          <p:cNvPr id="22" name="Rounded Rectangle 21"/>
           <p:cNvSpPr/>
           <p:nvPr/>
         </p:nvSpPr>
@@ -44665,7 +43075,7 @@
       </p:sp>
       <p:sp>
         <p:nvSpPr>
-          <p:cNvPr id="26" name="TextBox 25"/>
+          <p:cNvPr id="23" name="TextBox 22"/>
           <p:cNvSpPr txBox="1"/>
           <p:nvPr/>
         </p:nvSpPr>
@@ -44711,7 +43121,7 @@
       </p:sp>
       <p:sp>
         <p:nvSpPr>
-          <p:cNvPr id="27" name="TextBox 26"/>
+          <p:cNvPr id="24" name="TextBox 23"/>
           <p:cNvSpPr txBox="1"/>
           <p:nvPr/>
         </p:nvSpPr>
@@ -44757,7 +43167,7 @@
       </p:sp>
       <p:sp>
         <p:nvSpPr>
-          <p:cNvPr id="28" name="TextBox 27"/>
+          <p:cNvPr id="25" name="TextBox 24"/>
           <p:cNvSpPr txBox="1"/>
           <p:nvPr/>
         </p:nvSpPr>
@@ -44813,7 +43223,7 @@
       </p:sp>
       <p:sp>
         <p:nvSpPr>
-          <p:cNvPr id="29" name="TextBox 28"/>
+          <p:cNvPr id="26" name="TextBox 25"/>
           <p:cNvSpPr txBox="1"/>
           <p:nvPr/>
         </p:nvSpPr>
@@ -44859,7 +43269,7 @@
       </p:sp>
       <p:sp>
         <p:nvSpPr>
-          <p:cNvPr id="30" name="Rounded Rectangle 29"/>
+          <p:cNvPr id="27" name="Rounded Rectangle 26"/>
           <p:cNvSpPr/>
           <p:nvPr/>
         </p:nvSpPr>
@@ -44905,7 +43315,7 @@
       </p:sp>
       <p:sp>
         <p:nvSpPr>
-          <p:cNvPr id="31" name="TextBox 30"/>
+          <p:cNvPr id="28" name="TextBox 27"/>
           <p:cNvSpPr txBox="1"/>
           <p:nvPr/>
         </p:nvSpPr>
@@ -44951,7 +43361,7 @@
       </p:sp>
       <p:sp>
         <p:nvSpPr>
-          <p:cNvPr id="32" name="TextBox 31"/>
+          <p:cNvPr id="29" name="TextBox 28"/>
           <p:cNvSpPr txBox="1"/>
           <p:nvPr/>
         </p:nvSpPr>
@@ -44997,7 +43407,7 @@
       </p:sp>
       <p:sp>
         <p:nvSpPr>
-          <p:cNvPr id="33" name="TextBox 32"/>
+          <p:cNvPr id="30" name="TextBox 29"/>
           <p:cNvSpPr txBox="1"/>
           <p:nvPr/>
         </p:nvSpPr>
@@ -45043,7 +43453,7 @@
       </p:sp>
       <p:sp>
         <p:nvSpPr>
-          <p:cNvPr id="34" name="TextBox 33"/>
+          <p:cNvPr id="31" name="TextBox 30"/>
           <p:cNvSpPr txBox="1"/>
           <p:nvPr/>
         </p:nvSpPr>
@@ -45115,7 +43525,7 @@
       <p:grpSpPr/>
       <p:sp>
         <p:nvSpPr>
-          <p:cNvPr id="12" name="Rounded Rectangle 11"/>
+          <p:cNvPr id="11" name="Rounded Rectangle 10"/>
           <p:cNvSpPr/>
           <p:nvPr/>
         </p:nvSpPr>
@@ -45173,19 +43583,7 @@
       </p:sp>
       <p:sp>
         <p:nvSpPr>
-          <p:cNvPr id="3" name="Picture Placeholder 2"/>
-          <p:cNvSpPr>
-            <a:spLocks noGrp="1"/>
-          </p:cNvSpPr>
-          <p:nvPr>
-            <p:ph type="pic" idx="11"/>
-          </p:nvPr>
-        </p:nvSpPr>
-        <p:spPr/>
-      </p:sp>
-      <p:sp>
-        <p:nvSpPr>
-          <p:cNvPr id="4" name="TextBox 3"/>
+          <p:cNvPr id="3" name="TextBox 2"/>
           <p:cNvSpPr txBox="1"/>
           <p:nvPr/>
         </p:nvSpPr>
@@ -45231,7 +43629,7 @@
       </p:sp>
       <p:sp>
         <p:nvSpPr>
-          <p:cNvPr id="5" name="TextBox 4"/>
+          <p:cNvPr id="4" name="TextBox 3"/>
           <p:cNvSpPr txBox="1"/>
           <p:nvPr/>
         </p:nvSpPr>
@@ -45277,7 +43675,7 @@
       </p:sp>
       <p:sp>
         <p:nvSpPr>
-          <p:cNvPr id="6" name="TextBox 5"/>
+          <p:cNvPr id="5" name="TextBox 4"/>
           <p:cNvSpPr txBox="1"/>
           <p:nvPr/>
         </p:nvSpPr>
@@ -45323,7 +43721,7 @@
       </p:sp>
       <p:sp>
         <p:nvSpPr>
-          <p:cNvPr id="7" name="Rounded Rectangle 6"/>
+          <p:cNvPr id="6" name="Rounded Rectangle 5"/>
           <p:cNvSpPr/>
           <p:nvPr/>
         </p:nvSpPr>
@@ -45367,7 +43765,7 @@
       </p:sp>
       <p:sp>
         <p:nvSpPr>
-          <p:cNvPr id="8" name="TextBox 7"/>
+          <p:cNvPr id="7" name="TextBox 6"/>
           <p:cNvSpPr txBox="1"/>
           <p:nvPr/>
         </p:nvSpPr>
@@ -45413,7 +43811,7 @@
       </p:sp>
       <p:sp>
         <p:nvSpPr>
-          <p:cNvPr id="9" name="Rounded Rectangle 8"/>
+          <p:cNvPr id="8" name="Rounded Rectangle 7"/>
           <p:cNvSpPr/>
           <p:nvPr/>
         </p:nvSpPr>
@@ -45457,7 +43855,7 @@
       </p:sp>
       <p:sp>
         <p:nvSpPr>
-          <p:cNvPr id="10" name="TextBox 9"/>
+          <p:cNvPr id="9" name="TextBox 8"/>
           <p:cNvSpPr txBox="1"/>
           <p:nvPr/>
         </p:nvSpPr>
@@ -45503,7 +43901,7 @@
       </p:sp>
       <p:sp>
         <p:nvSpPr>
-          <p:cNvPr id="11" name="TextBox 10"/>
+          <p:cNvPr id="10" name="TextBox 9"/>
           <p:cNvSpPr txBox="1"/>
           <p:nvPr/>
         </p:nvSpPr>
@@ -45549,14 +43947,14 @@
       </p:sp>
       <p:sp>
         <p:nvSpPr>
-          <p:cNvPr id="13" name="TextBox 12"/>
-          <p:cNvSpPr txBox="1"/>
-          <p:nvPr/>
-        </p:nvSpPr>
-        <p:spPr>
-          <a:xfrm>
-            <a:off x="2066925" y="1874519"/>
-            <a:ext cx="1554480" cy="274320"/>
+          <p:cNvPr id="12" name="TextBox 11"/>
+          <p:cNvSpPr txBox="1"/>
+          <p:nvPr/>
+        </p:nvSpPr>
+        <p:spPr>
+          <a:xfrm>
+            <a:off x="566928" y="1874519"/>
+            <a:ext cx="6428994" cy="274320"/>
           </a:xfrm>
           <a:prstGeom prst="rect">
             <a:avLst/>
@@ -45588,106 +43986,14 @@
                 <a:latin typeface="游明朝"/>
                 <a:ea typeface="游明朝"/>
               </a:rPr>
-              <a:t>Before</a:t>
-            </a:r>
-          </a:p>
-        </p:txBody>
-      </p:sp>
-      <p:sp>
-        <p:nvSpPr>
-          <p:cNvPr id="14" name="TextBox 13"/>
-          <p:cNvSpPr txBox="1"/>
-          <p:nvPr/>
-        </p:nvSpPr>
-        <p:spPr>
-          <a:xfrm>
-            <a:off x="3941445" y="1874519"/>
-            <a:ext cx="1554480" cy="274320"/>
-          </a:xfrm>
-          <a:prstGeom prst="rect">
-            <a:avLst/>
-          </a:prstGeom>
-          <a:noFill/>
-        </p:spPr>
-        <p:txBody>
-          <a:bodyPr wrap="square" anchor="t" lIns="0" rIns="0" tIns="0" bIns="0">
-            <a:spAutoFit/>
-          </a:bodyPr>
-          <a:lstStyle/>
-          <a:p>
-            <a:pPr algn="ctr">
-              <a:lnSpc>
-                <a:spcPct val="112000"/>
-              </a:lnSpc>
-              <a:spcBef>
-                <a:spcPts val="0"/>
-              </a:spcBef>
-              <a:spcAft>
-                <a:spcPts val="200"/>
-              </a:spcAft>
-            </a:pPr>
-            <a:r>
-              <a:rPr sz="1200" b="1">
-                <a:solidFill>
-                  <a:srgbClr val="8C7339"/>
-                </a:solidFill>
-                <a:latin typeface="游明朝"/>
-                <a:ea typeface="游明朝"/>
-              </a:rPr>
-              <a:t>After</a:t>
-            </a:r>
-          </a:p>
-        </p:txBody>
-      </p:sp>
-      <p:sp>
-        <p:nvSpPr>
-          <p:cNvPr id="15" name="TextBox 14"/>
-          <p:cNvSpPr txBox="1"/>
-          <p:nvPr/>
-        </p:nvSpPr>
-        <p:spPr>
-          <a:xfrm>
-            <a:off x="2066925" y="1874519"/>
-            <a:ext cx="3429000" cy="274320"/>
-          </a:xfrm>
-          <a:prstGeom prst="rect">
-            <a:avLst/>
-          </a:prstGeom>
-          <a:noFill/>
-        </p:spPr>
-        <p:txBody>
-          <a:bodyPr wrap="square" anchor="t" lIns="0" rIns="0" tIns="0" bIns="0">
-            <a:spAutoFit/>
-          </a:bodyPr>
-          <a:lstStyle/>
-          <a:p>
-            <a:pPr algn="ctr">
-              <a:lnSpc>
-                <a:spcPct val="112000"/>
-              </a:lnSpc>
-              <a:spcBef>
-                <a:spcPts val="0"/>
-              </a:spcBef>
-              <a:spcAft>
-                <a:spcPts val="200"/>
-              </a:spcAft>
-            </a:pPr>
-            <a:r>
-              <a:rPr sz="1200" b="1">
-                <a:solidFill>
-                  <a:srgbClr val="B0934E"/>
-                </a:solidFill>
-                <a:latin typeface="游明朝"/>
-                <a:ea typeface="游明朝"/>
-              </a:rPr>
-              <a:t>→</a:t>
-            </a:r>
-          </a:p>
-        </p:txBody>
-      </p:sp>
-      <p:sp>
-        <p:nvSpPr>
-          <p:cNvPr id="16" name="TextBox 15"/>
+              <a:t>Before　→　After</a:t>
+            </a:r>
+          </a:p>
+        </p:txBody>
+      </p:sp>
+      <p:sp>
+        <p:nvSpPr>
+          <p:cNvPr id="13" name="TextBox 12"/>
           <p:cNvSpPr txBox="1"/>
           <p:nvPr/>
         </p:nvSpPr>
@@ -45726,14 +44032,14 @@
                 <a:latin typeface="游ゴシック"/>
                 <a:ea typeface="游ゴシック"/>
               </a:rPr>
-              <a:t>▲ Before・After それぞれの枠をクリックして写真を挿入（自動で枠いっぱいに配置されます）</a:t>
-            </a:r>
-          </a:p>
-        </p:txBody>
-      </p:sp>
-      <p:sp>
-        <p:nvSpPr>
-          <p:cNvPr id="17" name="Rounded Rectangle 16"/>
+              <a:t>▲ 枠をクリックして Before/After を1枚にした画像を挿入（自動で枠いっぱいに配置）</a:t>
+            </a:r>
+          </a:p>
+        </p:txBody>
+      </p:sp>
+      <p:sp>
+        <p:nvSpPr>
+          <p:cNvPr id="14" name="Rounded Rectangle 13"/>
           <p:cNvSpPr/>
           <p:nvPr/>
         </p:nvSpPr>
@@ -45777,7 +44083,7 @@
       </p:sp>
       <p:sp>
         <p:nvSpPr>
-          <p:cNvPr id="18" name="TextBox 17"/>
+          <p:cNvPr id="15" name="TextBox 14"/>
           <p:cNvSpPr txBox="1"/>
           <p:nvPr/>
         </p:nvSpPr>
@@ -45823,7 +44129,7 @@
       </p:sp>
       <p:sp>
         <p:nvSpPr>
-          <p:cNvPr id="19" name="TextBox 18"/>
+          <p:cNvPr id="16" name="TextBox 15"/>
           <p:cNvSpPr txBox="1"/>
           <p:nvPr/>
         </p:nvSpPr>
@@ -45869,7 +44175,7 @@
       </p:sp>
       <p:graphicFrame>
         <p:nvGraphicFramePr>
-          <p:cNvPr id="20" name="Table 19"/>
+          <p:cNvPr id="17" name="Table 16"/>
           <p:cNvGraphicFramePr>
             <a:graphicFrameLocks noGrp="1"/>
           </p:cNvGraphicFramePr>
@@ -46039,7 +44345,7 @@
       </p:graphicFrame>
       <p:sp>
         <p:nvSpPr>
-          <p:cNvPr id="21" name="Rounded Rectangle 20"/>
+          <p:cNvPr id="18" name="Rounded Rectangle 17"/>
           <p:cNvSpPr/>
           <p:nvPr/>
         </p:nvSpPr>
@@ -46085,7 +44391,7 @@
       </p:sp>
       <p:sp>
         <p:nvSpPr>
-          <p:cNvPr id="22" name="Rectangle 21"/>
+          <p:cNvPr id="19" name="Rectangle 18"/>
           <p:cNvSpPr/>
           <p:nvPr/>
         </p:nvSpPr>
@@ -46129,7 +44435,7 @@
       </p:sp>
       <p:sp>
         <p:nvSpPr>
-          <p:cNvPr id="23" name="TextBox 22"/>
+          <p:cNvPr id="20" name="TextBox 19"/>
           <p:cNvSpPr txBox="1"/>
           <p:nvPr/>
         </p:nvSpPr>
@@ -46175,7 +44481,7 @@
       </p:sp>
       <p:sp>
         <p:nvSpPr>
-          <p:cNvPr id="24" name="TextBox 23"/>
+          <p:cNvPr id="21" name="TextBox 20"/>
           <p:cNvSpPr txBox="1"/>
           <p:nvPr/>
         </p:nvSpPr>
@@ -46223,7 +44529,7 @@
       </p:sp>
       <p:sp>
         <p:nvSpPr>
-          <p:cNvPr id="25" name="Rounded Rectangle 24"/>
+          <p:cNvPr id="22" name="Rounded Rectangle 21"/>
           <p:cNvSpPr/>
           <p:nvPr/>
         </p:nvSpPr>
@@ -46267,7 +44573,7 @@
       </p:sp>
       <p:sp>
         <p:nvSpPr>
-          <p:cNvPr id="26" name="TextBox 25"/>
+          <p:cNvPr id="23" name="TextBox 22"/>
           <p:cNvSpPr txBox="1"/>
           <p:nvPr/>
         </p:nvSpPr>
@@ -46313,7 +44619,7 @@
       </p:sp>
       <p:sp>
         <p:nvSpPr>
-          <p:cNvPr id="27" name="TextBox 26"/>
+          <p:cNvPr id="24" name="TextBox 23"/>
           <p:cNvSpPr txBox="1"/>
           <p:nvPr/>
         </p:nvSpPr>
@@ -46359,7 +44665,7 @@
       </p:sp>
       <p:sp>
         <p:nvSpPr>
-          <p:cNvPr id="28" name="TextBox 27"/>
+          <p:cNvPr id="25" name="TextBox 24"/>
           <p:cNvSpPr txBox="1"/>
           <p:nvPr/>
         </p:nvSpPr>
@@ -46415,7 +44721,7 @@
       </p:sp>
       <p:sp>
         <p:nvSpPr>
-          <p:cNvPr id="29" name="TextBox 28"/>
+          <p:cNvPr id="26" name="TextBox 25"/>
           <p:cNvSpPr txBox="1"/>
           <p:nvPr/>
         </p:nvSpPr>
@@ -46461,7 +44767,7 @@
       </p:sp>
       <p:sp>
         <p:nvSpPr>
-          <p:cNvPr id="30" name="Rounded Rectangle 29"/>
+          <p:cNvPr id="27" name="Rounded Rectangle 26"/>
           <p:cNvSpPr/>
           <p:nvPr/>
         </p:nvSpPr>
@@ -46507,7 +44813,7 @@
       </p:sp>
       <p:sp>
         <p:nvSpPr>
-          <p:cNvPr id="31" name="TextBox 30"/>
+          <p:cNvPr id="28" name="TextBox 27"/>
           <p:cNvSpPr txBox="1"/>
           <p:nvPr/>
         </p:nvSpPr>
@@ -46553,7 +44859,7 @@
       </p:sp>
       <p:sp>
         <p:nvSpPr>
-          <p:cNvPr id="32" name="TextBox 31"/>
+          <p:cNvPr id="29" name="TextBox 28"/>
           <p:cNvSpPr txBox="1"/>
           <p:nvPr/>
         </p:nvSpPr>
@@ -46599,7 +44905,7 @@
       </p:sp>
       <p:sp>
         <p:nvSpPr>
-          <p:cNvPr id="33" name="TextBox 32"/>
+          <p:cNvPr id="30" name="TextBox 29"/>
           <p:cNvSpPr txBox="1"/>
           <p:nvPr/>
         </p:nvSpPr>
@@ -46645,7 +44951,7 @@
       </p:sp>
       <p:sp>
         <p:nvSpPr>
-          <p:cNvPr id="34" name="TextBox 33"/>
+          <p:cNvPr id="31" name="TextBox 30"/>
           <p:cNvSpPr txBox="1"/>
           <p:nvPr/>
         </p:nvSpPr>
